--- a/slides/FYDP-I_Defect-to-Delivery.pptx
+++ b/slides/FYDP-I_Defect-to-Delivery.pptx
@@ -5171,7 +5171,7 @@
         <p:spPr>
           <a:xfrm>
             <a:off x="548640" y="1463040"/>
-            <a:ext cx="2651760" cy="2834640"/>
+            <a:ext cx="2651760" cy="2286000"/>
           </a:xfrm>
           <a:prstGeom prst="roundRect">
             <a:avLst>
@@ -5313,7 +5313,7 @@
         <p:spPr>
           <a:xfrm>
             <a:off x="1417319" y="1719072"/>
-            <a:ext cx="1600200" cy="2423160"/>
+            <a:ext cx="1600200" cy="1874519"/>
           </a:xfrm>
           <a:prstGeom prst="rect">
             <a:avLst/>
@@ -5322,7 +5322,7 @@
         </p:spPr>
         <p:txBody>
           <a:bodyPr wrap="square">
-            <a:spAutoFit/>
+            <a:normAutofit/>
           </a:bodyPr>
           <a:lstStyle/>
           <a:p>
@@ -5371,7 +5371,7 @@
         <p:spPr>
           <a:xfrm>
             <a:off x="3328416" y="1463040"/>
-            <a:ext cx="2651760" cy="2834640"/>
+            <a:ext cx="2651760" cy="2286000"/>
           </a:xfrm>
           <a:prstGeom prst="roundRect">
             <a:avLst>
@@ -5513,7 +5513,7 @@
         <p:spPr>
           <a:xfrm>
             <a:off x="4197096" y="1719072"/>
-            <a:ext cx="1600200" cy="2423160"/>
+            <a:ext cx="1600200" cy="1874519"/>
           </a:xfrm>
           <a:prstGeom prst="rect">
             <a:avLst/>
@@ -5522,7 +5522,7 @@
         </p:spPr>
         <p:txBody>
           <a:bodyPr wrap="square">
-            <a:spAutoFit/>
+            <a:normAutofit/>
           </a:bodyPr>
           <a:lstStyle/>
           <a:p>
@@ -5571,7 +5571,7 @@
         <p:spPr>
           <a:xfrm>
             <a:off x="6108192" y="1463040"/>
-            <a:ext cx="2651760" cy="2834640"/>
+            <a:ext cx="2651760" cy="2286000"/>
           </a:xfrm>
           <a:prstGeom prst="roundRect">
             <a:avLst>
@@ -5713,7 +5713,7 @@
         <p:spPr>
           <a:xfrm>
             <a:off x="6976872" y="1719072"/>
-            <a:ext cx="1600200" cy="2423160"/>
+            <a:ext cx="1600200" cy="1874519"/>
           </a:xfrm>
           <a:prstGeom prst="rect">
             <a:avLst/>
@@ -5722,7 +5722,7 @@
         </p:spPr>
         <p:txBody>
           <a:bodyPr wrap="square">
-            <a:spAutoFit/>
+            <a:normAutofit/>
           </a:bodyPr>
           <a:lstStyle/>
           <a:p>
@@ -5771,7 +5771,7 @@
         <p:spPr>
           <a:xfrm>
             <a:off x="8887968" y="1463040"/>
-            <a:ext cx="2651760" cy="2834640"/>
+            <a:ext cx="2651760" cy="2286000"/>
           </a:xfrm>
           <a:prstGeom prst="roundRect">
             <a:avLst>
@@ -5913,7 +5913,7 @@
         <p:spPr>
           <a:xfrm>
             <a:off x="9756648" y="1719072"/>
-            <a:ext cx="1600200" cy="2423160"/>
+            <a:ext cx="1600200" cy="1874519"/>
           </a:xfrm>
           <a:prstGeom prst="rect">
             <a:avLst/>
@@ -5922,7 +5922,7 @@
         </p:spPr>
         <p:txBody>
           <a:bodyPr wrap="square">
-            <a:spAutoFit/>
+            <a:normAutofit/>
           </a:bodyPr>
           <a:lstStyle/>
           <a:p>
@@ -6230,8 +6230,8 @@
         </p:blipFill>
         <p:spPr>
           <a:xfrm>
-            <a:off x="320040" y="1508760"/>
-            <a:ext cx="5623560" cy="3172968"/>
+            <a:off x="320040" y="1463040"/>
+            <a:ext cx="5623560" cy="3566160"/>
           </a:xfrm>
           <a:prstGeom prst="rect">
             <a:avLst/>
@@ -6254,8 +6254,8 @@
         </p:blipFill>
         <p:spPr>
           <a:xfrm>
-            <a:off x="6245352" y="1508760"/>
-            <a:ext cx="5623560" cy="3172968"/>
+            <a:off x="6245352" y="1463040"/>
+            <a:ext cx="5623560" cy="3566160"/>
           </a:xfrm>
           <a:prstGeom prst="rect">
             <a:avLst/>
@@ -6270,8 +6270,8 @@
         </p:nvSpPr>
         <p:spPr>
           <a:xfrm>
-            <a:off x="320040" y="4754880"/>
-            <a:ext cx="5623560" cy="457200"/>
+            <a:off x="320040" y="5074920"/>
+            <a:ext cx="5623560" cy="411480"/>
           </a:xfrm>
           <a:prstGeom prst="rect">
             <a:avLst/>
@@ -6305,8 +6305,8 @@
         </p:nvSpPr>
         <p:spPr>
           <a:xfrm>
-            <a:off x="6245352" y="4754880"/>
-            <a:ext cx="5623560" cy="457200"/>
+            <a:off x="6245352" y="5074920"/>
+            <a:ext cx="5623560" cy="411480"/>
           </a:xfrm>
           <a:prstGeom prst="rect">
             <a:avLst/>
@@ -6340,8 +6340,8 @@
         </p:nvSpPr>
         <p:spPr>
           <a:xfrm>
-            <a:off x="548640" y="5257800"/>
-            <a:ext cx="11064240" cy="914400"/>
+            <a:off x="548640" y="5532120"/>
+            <a:ext cx="11064240" cy="731520"/>
           </a:xfrm>
           <a:prstGeom prst="rect">
             <a:avLst/>
@@ -6363,13 +6363,13 @@
               </a:spcAft>
             </a:pPr>
             <a:r>
-              <a:rPr sz="1350" b="0" i="0">
+              <a:rPr sz="1300" b="0" i="0">
                 <a:solidFill>
                   <a:srgbClr val="1F2937"/>
                 </a:solidFill>
                 <a:latin typeface="Calibri"/>
               </a:rPr>
-              <a:t>▪  Seven Pipeline Functions From Image Input To Dashboard Display; Six Quality Attributes With Measurable Targets (≥15 FPS, mAP Tracking, Zero-Overlap Splits).</a:t>
+              <a:t>▪  Six Pipeline Function Groups From Image Input To Dashboard Display, Plus Six Quality Attributes With Measurable Targets (≥15 FPS, mAP Tracking, Zero-Overlap Splits).</a:t>
             </a:r>
           </a:p>
         </p:txBody>
@@ -7584,7 +7584,7 @@
         <p:spPr>
           <a:xfrm>
             <a:off x="548640" y="1463040"/>
-            <a:ext cx="5394960" cy="4206240"/>
+            <a:ext cx="5394960" cy="3291840"/>
           </a:xfrm>
           <a:prstGeom prst="roundRect">
             <a:avLst>
@@ -7726,7 +7726,7 @@
         <p:spPr>
           <a:xfrm>
             <a:off x="1417319" y="1719072"/>
-            <a:ext cx="4343400" cy="3794759"/>
+            <a:ext cx="4343400" cy="2880360"/>
           </a:xfrm>
           <a:prstGeom prst="rect">
             <a:avLst/>
@@ -7735,7 +7735,7 @@
         </p:spPr>
         <p:txBody>
           <a:bodyPr wrap="square">
-            <a:spAutoFit/>
+            <a:normAutofit/>
           </a:bodyPr>
           <a:lstStyle/>
           <a:p>
@@ -7822,7 +7822,7 @@
         <p:spPr>
           <a:xfrm>
             <a:off x="6245352" y="1463040"/>
-            <a:ext cx="5394960" cy="4206240"/>
+            <a:ext cx="5394960" cy="3291840"/>
           </a:xfrm>
           <a:prstGeom prst="roundRect">
             <a:avLst>
@@ -7964,7 +7964,7 @@
         <p:spPr>
           <a:xfrm>
             <a:off x="7114032" y="1719072"/>
-            <a:ext cx="4343400" cy="3794759"/>
+            <a:ext cx="4343400" cy="2880360"/>
           </a:xfrm>
           <a:prstGeom prst="rect">
             <a:avLst/>
@@ -7973,7 +7973,7 @@
         </p:spPr>
         <p:txBody>
           <a:bodyPr wrap="square">
-            <a:spAutoFit/>
+            <a:normAutofit/>
           </a:bodyPr>
           <a:lstStyle/>
           <a:p>
@@ -8346,7 +8346,9 @@
           </a:fontRef>
         </p:style>
         <p:txBody>
-          <a:bodyPr rtlCol="0" anchor="ctr" wrap="square"/>
+          <a:bodyPr rtlCol="0" anchor="ctr" wrap="square">
+            <a:normAutofit/>
+          </a:bodyPr>
           <a:lstStyle/>
           <a:p>
             <a:pPr algn="ctr"/>
@@ -8403,7 +8405,9 @@
           </a:fontRef>
         </p:style>
         <p:txBody>
-          <a:bodyPr rtlCol="0" anchor="ctr" wrap="square"/>
+          <a:bodyPr rtlCol="0" anchor="ctr" wrap="square">
+            <a:normAutofit/>
+          </a:bodyPr>
           <a:lstStyle/>
           <a:p>
             <a:pPr algn="ctr"/>
@@ -8498,7 +8502,9 @@
           </a:fontRef>
         </p:style>
         <p:txBody>
-          <a:bodyPr rtlCol="0" anchor="ctr" wrap="square"/>
+          <a:bodyPr rtlCol="0" anchor="ctr" wrap="square">
+            <a:normAutofit/>
+          </a:bodyPr>
           <a:lstStyle/>
           <a:p>
             <a:pPr algn="ctr"/>
@@ -8593,7 +8599,9 @@
           </a:fontRef>
         </p:style>
         <p:txBody>
-          <a:bodyPr rtlCol="0" anchor="ctr" wrap="square"/>
+          <a:bodyPr rtlCol="0" anchor="ctr" wrap="square">
+            <a:normAutofit/>
+          </a:bodyPr>
           <a:lstStyle/>
           <a:p>
             <a:pPr algn="ctr"/>
@@ -8688,7 +8696,9 @@
           </a:fontRef>
         </p:style>
         <p:txBody>
-          <a:bodyPr rtlCol="0" anchor="ctr" wrap="square"/>
+          <a:bodyPr rtlCol="0" anchor="ctr" wrap="square">
+            <a:normAutofit/>
+          </a:bodyPr>
           <a:lstStyle/>
           <a:p>
             <a:pPr algn="ctr"/>
@@ -8782,7 +8792,9 @@
           </a:fontRef>
         </p:style>
         <p:txBody>
-          <a:bodyPr rtlCol="0" anchor="ctr" wrap="square"/>
+          <a:bodyPr rtlCol="0" anchor="ctr" wrap="square">
+            <a:normAutofit/>
+          </a:bodyPr>
           <a:lstStyle/>
           <a:p>
             <a:pPr algn="ctr"/>
@@ -8843,8 +8855,8 @@
         </p:nvCxnSpPr>
         <p:spPr>
           <a:xfrm>
-            <a:off x="10241280" y="4114800"/>
-            <a:ext cx="0" cy="1005840"/>
+            <a:off x="10241280" y="4133087"/>
+            <a:ext cx="0" cy="713233"/>
           </a:xfrm>
           <a:prstGeom prst="line">
             <a:avLst/>
@@ -8879,8 +8891,8 @@
         </p:nvCxnSpPr>
         <p:spPr>
           <a:xfrm flipH="1">
-            <a:off x="1371600" y="5138928"/>
-            <a:ext cx="8823960" cy="0"/>
+            <a:off x="1371600" y="4864608"/>
+            <a:ext cx="8851392" cy="0"/>
           </a:xfrm>
           <a:prstGeom prst="line">
             <a:avLst/>
@@ -8915,8 +8927,8 @@
         </p:nvCxnSpPr>
         <p:spPr>
           <a:xfrm flipV="1">
-            <a:off x="1353312" y="4160520"/>
-            <a:ext cx="0" cy="960120"/>
+            <a:off x="1353312" y="4133087"/>
+            <a:ext cx="0" cy="713233"/>
           </a:xfrm>
           <a:prstGeom prst="line">
             <a:avLst/>
@@ -8951,8 +8963,8 @@
         </p:nvSpPr>
         <p:spPr>
           <a:xfrm>
-            <a:off x="3291840" y="4892040"/>
-            <a:ext cx="5577840" cy="411480"/>
+            <a:off x="3291840" y="4224528"/>
+            <a:ext cx="5577840" cy="457200"/>
           </a:xfrm>
           <a:prstGeom prst="rect">
             <a:avLst/>
@@ -9270,7 +9282,9 @@
           </a:fontRef>
         </p:style>
         <p:txBody>
-          <a:bodyPr rtlCol="0" anchor="ctr" wrap="square"/>
+          <a:bodyPr rtlCol="0" anchor="ctr" wrap="square">
+            <a:normAutofit/>
+          </a:bodyPr>
           <a:lstStyle/>
           <a:p>
             <a:pPr algn="ctr"/>
@@ -9326,7 +9340,9 @@
           </a:fontRef>
         </p:style>
         <p:txBody>
-          <a:bodyPr rtlCol="0" anchor="ctr" wrap="square"/>
+          <a:bodyPr rtlCol="0" anchor="ctr" wrap="square">
+            <a:normAutofit/>
+          </a:bodyPr>
           <a:lstStyle/>
           <a:p>
             <a:pPr algn="ctr"/>
@@ -9382,7 +9398,9 @@
           </a:fontRef>
         </p:style>
         <p:txBody>
-          <a:bodyPr rtlCol="0" anchor="ctr" wrap="square"/>
+          <a:bodyPr rtlCol="0" anchor="ctr" wrap="square">
+            <a:normAutofit/>
+          </a:bodyPr>
           <a:lstStyle/>
           <a:p>
             <a:pPr algn="ctr"/>
@@ -9439,7 +9457,9 @@
           </a:fontRef>
         </p:style>
         <p:txBody>
-          <a:bodyPr rtlCol="0" anchor="ctr" wrap="square"/>
+          <a:bodyPr rtlCol="0" anchor="ctr" wrap="square">
+            <a:normAutofit/>
+          </a:bodyPr>
           <a:lstStyle/>
           <a:p>
             <a:pPr algn="ctr"/>
@@ -9494,7 +9514,9 @@
           </a:fontRef>
         </p:style>
         <p:txBody>
-          <a:bodyPr rtlCol="0" anchor="ctr" wrap="square"/>
+          <a:bodyPr rtlCol="0" anchor="ctr" wrap="square">
+            <a:normAutofit/>
+          </a:bodyPr>
           <a:lstStyle/>
           <a:p>
             <a:pPr algn="ctr"/>
@@ -9550,7 +9572,9 @@
           </a:fontRef>
         </p:style>
         <p:txBody>
-          <a:bodyPr rtlCol="0" anchor="ctr" wrap="square"/>
+          <a:bodyPr rtlCol="0" anchor="ctr" wrap="square">
+            <a:normAutofit/>
+          </a:bodyPr>
           <a:lstStyle/>
           <a:p>
             <a:pPr algn="ctr"/>
@@ -9607,7 +9631,9 @@
           </a:fontRef>
         </p:style>
         <p:txBody>
-          <a:bodyPr rtlCol="0" anchor="ctr" wrap="square"/>
+          <a:bodyPr rtlCol="0" anchor="ctr" wrap="square">
+            <a:normAutofit/>
+          </a:bodyPr>
           <a:lstStyle/>
           <a:p>
             <a:pPr algn="ctr"/>
@@ -9631,8 +9657,8 @@
         </p:nvCxnSpPr>
         <p:spPr>
           <a:xfrm>
-            <a:off x="1828800" y="1664208"/>
-            <a:ext cx="0" cy="438912"/>
+            <a:off x="1828800" y="1938528"/>
+            <a:ext cx="0" cy="146303"/>
           </a:xfrm>
           <a:prstGeom prst="line">
             <a:avLst/>
@@ -9667,8 +9693,8 @@
         </p:nvCxnSpPr>
         <p:spPr>
           <a:xfrm>
-            <a:off x="1828800" y="1664208"/>
-            <a:ext cx="0" cy="1261872"/>
+            <a:off x="1828800" y="2761488"/>
+            <a:ext cx="0" cy="146304"/>
           </a:xfrm>
           <a:prstGeom prst="line">
             <a:avLst/>
@@ -9703,8 +9729,8 @@
         </p:nvCxnSpPr>
         <p:spPr>
           <a:xfrm>
-            <a:off x="1828800" y="1664208"/>
-            <a:ext cx="0" cy="2176272"/>
+            <a:off x="1828800" y="3675887"/>
+            <a:ext cx="0" cy="146304"/>
           </a:xfrm>
           <a:prstGeom prst="line">
             <a:avLst/>
@@ -9739,8 +9765,8 @@
         </p:nvCxnSpPr>
         <p:spPr>
           <a:xfrm>
-            <a:off x="1828800" y="1664208"/>
-            <a:ext cx="0" cy="3090672"/>
+            <a:off x="1828800" y="4590288"/>
+            <a:ext cx="0" cy="146304"/>
           </a:xfrm>
           <a:prstGeom prst="line">
             <a:avLst/>
@@ -9775,8 +9801,8 @@
         </p:nvCxnSpPr>
         <p:spPr>
           <a:xfrm>
-            <a:off x="2834640" y="5166360"/>
-            <a:ext cx="530352" cy="0"/>
+            <a:off x="1828800" y="5596128"/>
+            <a:ext cx="0" cy="146304"/>
           </a:xfrm>
           <a:prstGeom prst="line">
             <a:avLst/>
@@ -9811,8 +9837,8 @@
         </p:nvCxnSpPr>
         <p:spPr>
           <a:xfrm>
-            <a:off x="1828800" y="5577840"/>
-            <a:ext cx="0" cy="164592"/>
+            <a:off x="2852928" y="5166360"/>
+            <a:ext cx="512064" cy="0"/>
           </a:xfrm>
           <a:prstGeom prst="line">
             <a:avLst/>
@@ -10228,7 +10254,9 @@
           </a:fontRef>
         </p:style>
         <p:txBody>
-          <a:bodyPr rtlCol="0" anchor="ctr" wrap="square"/>
+          <a:bodyPr rtlCol="0" anchor="ctr" wrap="square">
+            <a:normAutofit/>
+          </a:bodyPr>
           <a:lstStyle/>
           <a:p>
             <a:pPr algn="ctr"/>
@@ -10282,7 +10310,9 @@
           </a:fontRef>
         </p:style>
         <p:txBody>
-          <a:bodyPr rtlCol="0" anchor="ctr" wrap="square"/>
+          <a:bodyPr rtlCol="0" anchor="ctr" wrap="square">
+            <a:normAutofit/>
+          </a:bodyPr>
           <a:lstStyle/>
           <a:p>
             <a:pPr algn="ctr"/>
@@ -10336,7 +10366,9 @@
           </a:fontRef>
         </p:style>
         <p:txBody>
-          <a:bodyPr rtlCol="0" anchor="ctr" wrap="square"/>
+          <a:bodyPr rtlCol="0" anchor="ctr" wrap="square">
+            <a:normAutofit/>
+          </a:bodyPr>
           <a:lstStyle/>
           <a:p>
             <a:pPr algn="ctr"/>
@@ -10390,7 +10422,9 @@
           </a:fontRef>
         </p:style>
         <p:txBody>
-          <a:bodyPr rtlCol="0" anchor="ctr" wrap="square"/>
+          <a:bodyPr rtlCol="0" anchor="ctr" wrap="square">
+            <a:normAutofit/>
+          </a:bodyPr>
           <a:lstStyle/>
           <a:p>
             <a:pPr algn="ctr"/>
@@ -10444,7 +10478,9 @@
           </a:fontRef>
         </p:style>
         <p:txBody>
-          <a:bodyPr rtlCol="0" anchor="ctr" wrap="square"/>
+          <a:bodyPr rtlCol="0" anchor="ctr" wrap="square">
+            <a:normAutofit/>
+          </a:bodyPr>
           <a:lstStyle/>
           <a:p>
             <a:pPr algn="ctr"/>
@@ -10648,7 +10684,7 @@
         <p:spPr>
           <a:xfrm>
             <a:off x="640080" y="4434840"/>
-            <a:ext cx="1325880" cy="1051560"/>
+            <a:ext cx="1554480" cy="914400"/>
           </a:xfrm>
           <a:prstGeom prst="roundRect">
             <a:avLst>
@@ -10679,12 +10715,14 @@
           </a:fontRef>
         </p:style>
         <p:txBody>
-          <a:bodyPr rtlCol="0" anchor="ctr" wrap="square"/>
+          <a:bodyPr rtlCol="0" anchor="ctr" wrap="square">
+            <a:normAutofit/>
+          </a:bodyPr>
           <a:lstStyle/>
           <a:p>
             <a:pPr algn="ctr"/>
             <a:r>
-              <a:rPr sz="1050" b="0" i="0">
+              <a:rPr sz="1100" b="0" i="0">
                 <a:solidFill>
                   <a:srgbClr val="1F2937"/>
                 </a:solidFill>
@@ -10704,8 +10742,8 @@
         </p:nvSpPr>
         <p:spPr>
           <a:xfrm>
-            <a:off x="2148840" y="4434840"/>
-            <a:ext cx="1325880" cy="1051560"/>
+            <a:off x="2404872" y="4434840"/>
+            <a:ext cx="1554480" cy="914400"/>
           </a:xfrm>
           <a:prstGeom prst="roundRect">
             <a:avLst>
@@ -10736,12 +10774,14 @@
           </a:fontRef>
         </p:style>
         <p:txBody>
-          <a:bodyPr rtlCol="0" anchor="ctr" wrap="square"/>
+          <a:bodyPr rtlCol="0" anchor="ctr" wrap="square">
+            <a:normAutofit/>
+          </a:bodyPr>
           <a:lstStyle/>
           <a:p>
             <a:pPr algn="ctr"/>
             <a:r>
-              <a:rPr sz="1050" b="0" i="0">
+              <a:rPr sz="1100" b="0" i="0">
                 <a:solidFill>
                   <a:srgbClr val="1F2937"/>
                 </a:solidFill>
@@ -10761,8 +10801,8 @@
         </p:nvCxnSpPr>
         <p:spPr>
           <a:xfrm>
-            <a:off x="1892808" y="4956048"/>
-            <a:ext cx="274320" cy="0"/>
+            <a:off x="2212848" y="4892040"/>
+            <a:ext cx="201167" cy="0"/>
           </a:xfrm>
           <a:prstGeom prst="line">
             <a:avLst/>
@@ -10797,8 +10837,8 @@
         </p:nvSpPr>
         <p:spPr>
           <a:xfrm>
-            <a:off x="3520440" y="4434840"/>
-            <a:ext cx="1325880" cy="1051560"/>
+            <a:off x="4169663" y="4434840"/>
+            <a:ext cx="1554480" cy="914400"/>
           </a:xfrm>
           <a:prstGeom prst="roundRect">
             <a:avLst>
@@ -10829,12 +10869,14 @@
           </a:fontRef>
         </p:style>
         <p:txBody>
-          <a:bodyPr rtlCol="0" anchor="ctr" wrap="square"/>
+          <a:bodyPr rtlCol="0" anchor="ctr" wrap="square">
+            <a:normAutofit/>
+          </a:bodyPr>
           <a:lstStyle/>
           <a:p>
             <a:pPr algn="ctr"/>
             <a:r>
-              <a:rPr sz="1050" b="0" i="0">
+              <a:rPr sz="1100" b="0" i="0">
                 <a:solidFill>
                   <a:srgbClr val="1F2937"/>
                 </a:solidFill>
@@ -10854,8 +10896,8 @@
         </p:nvCxnSpPr>
         <p:spPr>
           <a:xfrm>
-            <a:off x="3264408" y="4956048"/>
-            <a:ext cx="274320" cy="0"/>
+            <a:off x="3977639" y="4892040"/>
+            <a:ext cx="201168" cy="0"/>
           </a:xfrm>
           <a:prstGeom prst="line">
             <a:avLst/>
@@ -10890,8 +10932,8 @@
         </p:nvSpPr>
         <p:spPr>
           <a:xfrm>
-            <a:off x="4892040" y="4434840"/>
-            <a:ext cx="1325880" cy="1051560"/>
+            <a:off x="5934456" y="4434840"/>
+            <a:ext cx="1554480" cy="914400"/>
           </a:xfrm>
           <a:prstGeom prst="roundRect">
             <a:avLst>
@@ -10922,19 +10964,21 @@
           </a:fontRef>
         </p:style>
         <p:txBody>
-          <a:bodyPr rtlCol="0" anchor="ctr" wrap="square"/>
+          <a:bodyPr rtlCol="0" anchor="ctr" wrap="square">
+            <a:normAutofit/>
+          </a:bodyPr>
           <a:lstStyle/>
           <a:p>
             <a:pPr algn="ctr"/>
             <a:r>
-              <a:rPr sz="1050" b="0" i="0">
+              <a:rPr sz="1100" b="0" i="0">
                 <a:solidFill>
                   <a:srgbClr val="1F2937"/>
                 </a:solidFill>
                 <a:latin typeface="Calibri"/>
               </a:rPr>
-              <a:t>Frame Area
-H × W</a:t>
+              <a:t>Ds =
+Defect / Frame</a:t>
             </a:r>
           </a:p>
         </p:txBody>
@@ -10947,8 +10991,8 @@
         </p:nvCxnSpPr>
         <p:spPr>
           <a:xfrm>
-            <a:off x="4636007" y="4956048"/>
-            <a:ext cx="274320" cy="0"/>
+            <a:off x="5742432" y="4892040"/>
+            <a:ext cx="201168" cy="0"/>
           </a:xfrm>
           <a:prstGeom prst="line">
             <a:avLst/>
@@ -10983,8 +11027,8 @@
         </p:nvSpPr>
         <p:spPr>
           <a:xfrm>
-            <a:off x="6355080" y="4434840"/>
-            <a:ext cx="1325880" cy="1051560"/>
+            <a:off x="7699248" y="4434840"/>
+            <a:ext cx="1554480" cy="914400"/>
           </a:xfrm>
           <a:prstGeom prst="roundRect">
             <a:avLst>
@@ -11015,33 +11059,71 @@
           </a:fontRef>
         </p:style>
         <p:txBody>
-          <a:bodyPr rtlCol="0" anchor="ctr" wrap="square"/>
+          <a:bodyPr rtlCol="0" anchor="ctr" wrap="square">
+            <a:normAutofit/>
+          </a:bodyPr>
           <a:lstStyle/>
           <a:p>
             <a:pPr algn="ctr"/>
             <a:r>
-              <a:rPr sz="1050" b="0" i="0">
+              <a:rPr sz="1100" b="0" i="0">
                 <a:solidFill>
                   <a:srgbClr val="1F2937"/>
                 </a:solidFill>
                 <a:latin typeface="Calibri"/>
               </a:rPr>
-              <a:t>Ds =
-Defect / Frame</a:t>
-            </a:r>
-          </a:p>
-        </p:txBody>
-      </p:sp>
-      <p:sp>
-        <p:nvSpPr>
-          <p:cNvPr id="26" name="Rounded Rectangle 25"/>
+              <a:t>Rolling Avg.
+Last 10 Frames</a:t>
+            </a:r>
+          </a:p>
+        </p:txBody>
+      </p:sp>
+      <p:cxnSp>
+        <p:nvCxnSpPr>
+          <p:cNvPr id="26" name="Connector 25"/>
+          <p:cNvCxnSpPr/>
+          <p:nvPr/>
+        </p:nvCxnSpPr>
+        <p:spPr>
+          <a:xfrm>
+            <a:off x="7507223" y="4892040"/>
+            <a:ext cx="201169" cy="0"/>
+          </a:xfrm>
+          <a:prstGeom prst="line">
+            <a:avLst/>
+          </a:prstGeom>
+          <a:ln w="19050">
+            <a:solidFill>
+              <a:srgbClr val="1F2937"/>
+            </a:solidFill>
+            <a:tailEnd type="triangle" w="med" len="med"/>
+          </a:ln>
+        </p:spPr>
+        <p:style>
+          <a:lnRef idx="2">
+            <a:schemeClr val="accent1"/>
+          </a:lnRef>
+          <a:fillRef idx="0">
+            <a:schemeClr val="accent1"/>
+          </a:fillRef>
+          <a:effectRef idx="1">
+            <a:schemeClr val="accent1"/>
+          </a:effectRef>
+          <a:fontRef idx="minor">
+            <a:schemeClr val="tx1"/>
+          </a:fontRef>
+        </p:style>
+      </p:cxnSp>
+      <p:sp>
+        <p:nvSpPr>
+          <p:cNvPr id="27" name="Rounded Rectangle 26"/>
           <p:cNvSpPr/>
           <p:nvPr/>
         </p:nvSpPr>
         <p:spPr>
           <a:xfrm>
-            <a:off x="7818120" y="4434840"/>
-            <a:ext cx="1325880" cy="1051560"/>
+            <a:off x="9464040" y="4434840"/>
+            <a:ext cx="1554480" cy="914400"/>
           </a:xfrm>
           <a:prstGeom prst="roundRect">
             <a:avLst>
@@ -11072,33 +11154,35 @@
           </a:fontRef>
         </p:style>
         <p:txBody>
-          <a:bodyPr rtlCol="0" anchor="ctr" wrap="square"/>
+          <a:bodyPr rtlCol="0" anchor="ctr" wrap="square">
+            <a:normAutofit/>
+          </a:bodyPr>
           <a:lstStyle/>
           <a:p>
             <a:pPr algn="ctr"/>
             <a:r>
-              <a:rPr sz="1050" b="0" i="0">
+              <a:rPr sz="1100" b="0" i="0">
                 <a:solidFill>
                   <a:srgbClr val="1F2937"/>
                 </a:solidFill>
                 <a:latin typeface="Calibri"/>
               </a:rPr>
-              <a:t>Rolling Avg.
-Last 10 Frames</a:t>
+              <a:t>Predictor
+Input</a:t>
             </a:r>
           </a:p>
         </p:txBody>
       </p:sp>
       <p:cxnSp>
         <p:nvCxnSpPr>
-          <p:cNvPr id="27" name="Connector 26"/>
+          <p:cNvPr id="28" name="Connector 27"/>
           <p:cNvCxnSpPr/>
           <p:nvPr/>
         </p:nvCxnSpPr>
         <p:spPr>
           <a:xfrm>
-            <a:off x="7562088" y="4956048"/>
-            <a:ext cx="274320" cy="0"/>
+            <a:off x="9272015" y="4892040"/>
+            <a:ext cx="201169" cy="0"/>
           </a:xfrm>
           <a:prstGeom prst="line">
             <a:avLst/>
@@ -11127,14 +11211,14 @@
       </p:cxnSp>
       <p:sp>
         <p:nvSpPr>
-          <p:cNvPr id="28" name="Rounded Rectangle 27"/>
+          <p:cNvPr id="29" name="Rounded Rectangle 28"/>
           <p:cNvSpPr/>
           <p:nvPr/>
         </p:nvSpPr>
         <p:spPr>
           <a:xfrm>
-            <a:off x="9464040" y="4434840"/>
-            <a:ext cx="1325880" cy="1051560"/>
+            <a:off x="5934456" y="5486400"/>
+            <a:ext cx="1554480" cy="658368"/>
           </a:xfrm>
           <a:prstGeom prst="roundRect">
             <a:avLst>
@@ -11165,59 +11249,25 @@
           </a:fontRef>
         </p:style>
         <p:txBody>
-          <a:bodyPr rtlCol="0" anchor="ctr" wrap="square"/>
+          <a:bodyPr rtlCol="0" anchor="ctr" wrap="square">
+            <a:normAutofit/>
+          </a:bodyPr>
           <a:lstStyle/>
           <a:p>
             <a:pPr algn="ctr"/>
             <a:r>
-              <a:rPr sz="1050" b="0" i="0">
+              <a:rPr sz="1100" b="0" i="0">
                 <a:solidFill>
                   <a:srgbClr val="1F2937"/>
                 </a:solidFill>
                 <a:latin typeface="Calibri"/>
               </a:rPr>
-              <a:t>Predictor
-Input</a:t>
-            </a:r>
-          </a:p>
-        </p:txBody>
-      </p:sp>
-      <p:cxnSp>
-        <p:nvCxnSpPr>
-          <p:cNvPr id="29" name="Connector 28"/>
-          <p:cNvCxnSpPr/>
-          <p:nvPr/>
-        </p:nvCxnSpPr>
-        <p:spPr>
-          <a:xfrm>
-            <a:off x="9208008" y="4956048"/>
-            <a:ext cx="274320" cy="0"/>
-          </a:xfrm>
-          <a:prstGeom prst="line">
-            <a:avLst/>
-          </a:prstGeom>
-          <a:ln w="19050">
-            <a:solidFill>
-              <a:srgbClr val="1F2937"/>
-            </a:solidFill>
-            <a:tailEnd type="triangle" w="med" len="med"/>
-          </a:ln>
-        </p:spPr>
-        <p:style>
-          <a:lnRef idx="2">
-            <a:schemeClr val="accent1"/>
-          </a:lnRef>
-          <a:fillRef idx="0">
-            <a:schemeClr val="accent1"/>
-          </a:fillRef>
-          <a:effectRef idx="1">
-            <a:schemeClr val="accent1"/>
-          </a:effectRef>
-          <a:fontRef idx="minor">
-            <a:schemeClr val="tx1"/>
-          </a:fontRef>
-        </p:style>
-      </p:cxnSp>
+              <a:t>Frame Area
+H × W</a:t>
+            </a:r>
+          </a:p>
+        </p:txBody>
+      </p:sp>
       <p:cxnSp>
         <p:nvCxnSpPr>
           <p:cNvPr id="30" name="Connector 29"/>
@@ -11225,45 +11275,9 @@
           <p:nvPr/>
         </p:nvCxnSpPr>
         <p:spPr>
-          <a:xfrm>
-            <a:off x="4846320" y="4754880"/>
-            <a:ext cx="1280160" cy="0"/>
-          </a:xfrm>
-          <a:prstGeom prst="line">
-            <a:avLst/>
-          </a:prstGeom>
-          <a:ln w="19050">
-            <a:solidFill>
-              <a:srgbClr val="1F2937"/>
-            </a:solidFill>
-            <a:tailEnd type="triangle" w="med" len="med"/>
-          </a:ln>
-        </p:spPr>
-        <p:style>
-          <a:lnRef idx="2">
-            <a:schemeClr val="accent1"/>
-          </a:lnRef>
-          <a:fillRef idx="0">
-            <a:schemeClr val="accent1"/>
-          </a:fillRef>
-          <a:effectRef idx="1">
-            <a:schemeClr val="accent1"/>
-          </a:effectRef>
-          <a:fontRef idx="minor">
-            <a:schemeClr val="tx1"/>
-          </a:fontRef>
-        </p:style>
-      </p:cxnSp>
-      <p:cxnSp>
-        <p:nvCxnSpPr>
-          <p:cNvPr id="31" name="Connector 30"/>
-          <p:cNvCxnSpPr/>
-          <p:nvPr/>
-        </p:nvCxnSpPr>
-        <p:spPr>
           <a:xfrm flipV="1">
-            <a:off x="5532120" y="5166360"/>
-            <a:ext cx="594360" cy="182880"/>
+            <a:off x="6711696" y="5367528"/>
+            <a:ext cx="0" cy="100584"/>
           </a:xfrm>
           <a:prstGeom prst="line">
             <a:avLst/>
@@ -11547,7 +11561,9 @@
           </a:fontRef>
         </p:style>
         <p:txBody>
-          <a:bodyPr rtlCol="0" anchor="ctr" wrap="square"/>
+          <a:bodyPr rtlCol="0" anchor="ctr" wrap="square">
+            <a:normAutofit/>
+          </a:bodyPr>
           <a:lstStyle/>
           <a:p>
             <a:pPr algn="ctr"/>
@@ -11604,7 +11620,9 @@
           </a:fontRef>
         </p:style>
         <p:txBody>
-          <a:bodyPr rtlCol="0" anchor="ctr" wrap="square"/>
+          <a:bodyPr rtlCol="0" anchor="ctr" wrap="square">
+            <a:normAutofit/>
+          </a:bodyPr>
           <a:lstStyle/>
           <a:p>
             <a:pPr algn="ctr"/>
@@ -11661,7 +11679,9 @@
           </a:fontRef>
         </p:style>
         <p:txBody>
-          <a:bodyPr rtlCol="0" anchor="ctr" wrap="square"/>
+          <a:bodyPr rtlCol="0" anchor="ctr" wrap="square">
+            <a:normAutofit/>
+          </a:bodyPr>
           <a:lstStyle/>
           <a:p>
             <a:pPr algn="ctr"/>
@@ -11718,7 +11738,9 @@
           </a:fontRef>
         </p:style>
         <p:txBody>
-          <a:bodyPr rtlCol="0" anchor="ctr" wrap="square"/>
+          <a:bodyPr rtlCol="0" anchor="ctr" wrap="square">
+            <a:normAutofit/>
+          </a:bodyPr>
           <a:lstStyle/>
           <a:p>
             <a:pPr algn="ctr"/>
@@ -11775,7 +11797,9 @@
           </a:fontRef>
         </p:style>
         <p:txBody>
-          <a:bodyPr rtlCol="0" anchor="ctr" wrap="square"/>
+          <a:bodyPr rtlCol="0" anchor="ctr" wrap="square">
+            <a:normAutofit/>
+          </a:bodyPr>
           <a:lstStyle/>
           <a:p>
             <a:pPr algn="ctr"/>
@@ -11832,7 +11856,9 @@
           </a:fontRef>
         </p:style>
         <p:txBody>
-          <a:bodyPr rtlCol="0" anchor="ctr" wrap="square"/>
+          <a:bodyPr rtlCol="0" anchor="ctr" wrap="square">
+            <a:normAutofit/>
+          </a:bodyPr>
           <a:lstStyle/>
           <a:p>
             <a:pPr algn="ctr"/>
@@ -12341,8 +12367,8 @@
         </p:nvSpPr>
         <p:spPr>
           <a:xfrm>
-            <a:off x="914400" y="1463040"/>
-            <a:ext cx="2194560" cy="685800"/>
+            <a:off x="4480560" y="1463040"/>
+            <a:ext cx="3200400" cy="640080"/>
           </a:xfrm>
           <a:prstGeom prst="roundRect">
             <a:avLst>
@@ -12373,33 +12399,70 @@
           </a:fontRef>
         </p:style>
         <p:txBody>
-          <a:bodyPr rtlCol="0" anchor="ctr" wrap="square"/>
+          <a:bodyPr rtlCol="0" anchor="ctr" wrap="square">
+            <a:normAutofit/>
+          </a:bodyPr>
           <a:lstStyle/>
           <a:p>
             <a:pPr algn="ctr"/>
             <a:r>
-              <a:rPr sz="1150" b="0" i="0">
+              <a:rPr sz="1200" b="0" i="0">
                 <a:solidFill>
                   <a:srgbClr val="1F2937"/>
                 </a:solidFill>
                 <a:latin typeface="Calibri"/>
               </a:rPr>
-              <a:t>Calibrate Pixels
-To Inches (Fixed Geometry)</a:t>
-            </a:r>
-          </a:p>
-        </p:txBody>
-      </p:sp>
-      <p:sp>
-        <p:nvSpPr>
-          <p:cNvPr id="8" name="Rounded Rectangle 7"/>
+              <a:t>Calibrate Pixels To Inches (Fixed Geometry)</a:t>
+            </a:r>
+          </a:p>
+        </p:txBody>
+      </p:sp>
+      <p:cxnSp>
+        <p:nvCxnSpPr>
+          <p:cNvPr id="8" name="Connector 7"/>
+          <p:cNvCxnSpPr/>
+          <p:nvPr/>
+        </p:nvCxnSpPr>
+        <p:spPr>
+          <a:xfrm>
+            <a:off x="6080760" y="2121408"/>
+            <a:ext cx="0" cy="146304"/>
+          </a:xfrm>
+          <a:prstGeom prst="line">
+            <a:avLst/>
+          </a:prstGeom>
+          <a:ln w="19050">
+            <a:solidFill>
+              <a:srgbClr val="1F2937"/>
+            </a:solidFill>
+            <a:tailEnd type="triangle" w="med" len="med"/>
+          </a:ln>
+        </p:spPr>
+        <p:style>
+          <a:lnRef idx="2">
+            <a:schemeClr val="accent1"/>
+          </a:lnRef>
+          <a:fillRef idx="0">
+            <a:schemeClr val="accent1"/>
+          </a:fillRef>
+          <a:effectRef idx="1">
+            <a:schemeClr val="accent1"/>
+          </a:effectRef>
+          <a:fontRef idx="minor">
+            <a:schemeClr val="tx1"/>
+          </a:fontRef>
+        </p:style>
+      </p:cxnSp>
+      <p:sp>
+        <p:nvSpPr>
+          <p:cNvPr id="9" name="Rounded Rectangle 8"/>
           <p:cNvSpPr/>
           <p:nvPr/>
         </p:nvSpPr>
         <p:spPr>
           <a:xfrm>
-            <a:off x="914400" y="2331720"/>
-            <a:ext cx="2194560" cy="640080"/>
+            <a:off x="4480560" y="2286000"/>
+            <a:ext cx="3200400" cy="640080"/>
           </a:xfrm>
           <a:prstGeom prst="roundRect">
             <a:avLst>
@@ -12430,33 +12493,70 @@
           </a:fontRef>
         </p:style>
         <p:txBody>
-          <a:bodyPr rtlCol="0" anchor="ctr" wrap="square"/>
+          <a:bodyPr rtlCol="0" anchor="ctr" wrap="square">
+            <a:normAutofit/>
+          </a:bodyPr>
           <a:lstStyle/>
           <a:p>
             <a:pPr algn="ctr"/>
             <a:r>
-              <a:rPr sz="1150" b="0" i="0">
+              <a:rPr sz="1200" b="0" i="0">
                 <a:solidFill>
                   <a:srgbClr val="1F2937"/>
                 </a:solidFill>
                 <a:latin typeface="Calibri"/>
               </a:rPr>
-              <a:t>Measure Fault
-Length</a:t>
-            </a:r>
-          </a:p>
-        </p:txBody>
-      </p:sp>
-      <p:sp>
-        <p:nvSpPr>
-          <p:cNvPr id="9" name="Diamond 8"/>
+              <a:t>Measure Fault Length</a:t>
+            </a:r>
+          </a:p>
+        </p:txBody>
+      </p:sp>
+      <p:cxnSp>
+        <p:nvCxnSpPr>
+          <p:cNvPr id="10" name="Connector 9"/>
+          <p:cNvCxnSpPr/>
+          <p:nvPr/>
+        </p:nvCxnSpPr>
+        <p:spPr>
+          <a:xfrm>
+            <a:off x="6080760" y="2944368"/>
+            <a:ext cx="0" cy="146304"/>
+          </a:xfrm>
+          <a:prstGeom prst="line">
+            <a:avLst/>
+          </a:prstGeom>
+          <a:ln w="19050">
+            <a:solidFill>
+              <a:srgbClr val="1F2937"/>
+            </a:solidFill>
+            <a:tailEnd type="triangle" w="med" len="med"/>
+          </a:ln>
+        </p:spPr>
+        <p:style>
+          <a:lnRef idx="2">
+            <a:schemeClr val="accent1"/>
+          </a:lnRef>
+          <a:fillRef idx="0">
+            <a:schemeClr val="accent1"/>
+          </a:fillRef>
+          <a:effectRef idx="1">
+            <a:schemeClr val="accent1"/>
+          </a:effectRef>
+          <a:fontRef idx="minor">
+            <a:schemeClr val="tx1"/>
+          </a:fontRef>
+        </p:style>
+      </p:cxnSp>
+      <p:sp>
+        <p:nvSpPr>
+          <p:cNvPr id="11" name="Diamond 10"/>
           <p:cNvSpPr/>
           <p:nvPr/>
         </p:nvSpPr>
         <p:spPr>
           <a:xfrm>
-            <a:off x="914400" y="3154680"/>
-            <a:ext cx="2194560" cy="822960"/>
+            <a:off x="5349240" y="3108960"/>
+            <a:ext cx="1463040" cy="914400"/>
           </a:xfrm>
           <a:prstGeom prst="diamond">
             <a:avLst/>
@@ -12485,7 +12585,9 @@
           </a:fontRef>
         </p:style>
         <p:txBody>
-          <a:bodyPr rtlCol="0" anchor="ctr" wrap="square"/>
+          <a:bodyPr rtlCol="0" anchor="ctr" wrap="square">
+            <a:normAutofit/>
+          </a:bodyPr>
           <a:lstStyle/>
           <a:p>
             <a:pPr algn="ctr"/>
@@ -12503,14 +12605,14 @@
       </p:sp>
       <p:sp>
         <p:nvSpPr>
-          <p:cNvPr id="10" name="Rounded Rectangle 9"/>
+          <p:cNvPr id="12" name="Rounded Rectangle 11"/>
           <p:cNvSpPr/>
           <p:nvPr/>
         </p:nvSpPr>
         <p:spPr>
           <a:xfrm>
-            <a:off x="3657600" y="3154680"/>
-            <a:ext cx="1828800" cy="822960"/>
+            <a:off x="640080" y="4480560"/>
+            <a:ext cx="2560320" cy="777240"/>
           </a:xfrm>
           <a:prstGeom prst="roundRect">
             <a:avLst>
@@ -12541,12 +12643,14 @@
           </a:fontRef>
         </p:style>
         <p:txBody>
-          <a:bodyPr rtlCol="0" anchor="ctr" wrap="square"/>
+          <a:bodyPr rtlCol="0" anchor="ctr" wrap="square">
+            <a:normAutofit/>
+          </a:bodyPr>
           <a:lstStyle/>
           <a:p>
             <a:pPr algn="ctr"/>
             <a:r>
-              <a:rPr sz="1100" b="0" i="0">
+              <a:rPr sz="1150" b="0" i="0">
                 <a:solidFill>
                   <a:srgbClr val="1F2937"/>
                 </a:solidFill>
@@ -12560,14 +12664,14 @@
       </p:sp>
       <p:cxnSp>
         <p:nvCxnSpPr>
-          <p:cNvPr id="11" name="Connector 10"/>
+          <p:cNvPr id="13" name="Connector 12"/>
           <p:cNvCxnSpPr/>
           <p:nvPr/>
         </p:nvCxnSpPr>
         <p:spPr>
-          <a:xfrm flipV="1">
-            <a:off x="2011680" y="3136392"/>
-            <a:ext cx="2468880" cy="612647"/>
+          <a:xfrm flipH="1">
+            <a:off x="1920239" y="4041648"/>
+            <a:ext cx="3840481" cy="420624"/>
           </a:xfrm>
           <a:prstGeom prst="line">
             <a:avLst/>
@@ -12596,14 +12700,14 @@
       </p:cxnSp>
       <p:sp>
         <p:nvSpPr>
-          <p:cNvPr id="12" name="Rounded Rectangle 11"/>
+          <p:cNvPr id="14" name="Rounded Rectangle 13"/>
           <p:cNvSpPr/>
           <p:nvPr/>
         </p:nvSpPr>
         <p:spPr>
           <a:xfrm>
-            <a:off x="5715000" y="3154680"/>
-            <a:ext cx="1828800" cy="822960"/>
+            <a:off x="3410712" y="4480560"/>
+            <a:ext cx="2560320" cy="777240"/>
           </a:xfrm>
           <a:prstGeom prst="roundRect">
             <a:avLst>
@@ -12634,12 +12738,14 @@
           </a:fontRef>
         </p:style>
         <p:txBody>
-          <a:bodyPr rtlCol="0" anchor="ctr" wrap="square"/>
+          <a:bodyPr rtlCol="0" anchor="ctr" wrap="square">
+            <a:normAutofit/>
+          </a:bodyPr>
           <a:lstStyle/>
           <a:p>
             <a:pPr algn="ctr"/>
             <a:r>
-              <a:rPr sz="1100" b="0" i="0">
+              <a:rPr sz="1150" b="0" i="0">
                 <a:solidFill>
                   <a:srgbClr val="1F2937"/>
                 </a:solidFill>
@@ -12653,14 +12759,14 @@
       </p:sp>
       <p:cxnSp>
         <p:nvCxnSpPr>
-          <p:cNvPr id="13" name="Connector 12"/>
+          <p:cNvPr id="15" name="Connector 14"/>
           <p:cNvCxnSpPr/>
           <p:nvPr/>
         </p:nvCxnSpPr>
         <p:spPr>
-          <a:xfrm flipV="1">
-            <a:off x="2011680" y="3136392"/>
-            <a:ext cx="4526280" cy="612647"/>
+          <a:xfrm flipH="1">
+            <a:off x="4690872" y="4041648"/>
+            <a:ext cx="1298448" cy="420624"/>
           </a:xfrm>
           <a:prstGeom prst="line">
             <a:avLst/>
@@ -12689,14 +12795,14 @@
       </p:cxnSp>
       <p:sp>
         <p:nvSpPr>
-          <p:cNvPr id="14" name="Rounded Rectangle 13"/>
+          <p:cNvPr id="16" name="Rounded Rectangle 15"/>
           <p:cNvSpPr/>
           <p:nvPr/>
         </p:nvSpPr>
         <p:spPr>
           <a:xfrm>
-            <a:off x="7772400" y="3154680"/>
-            <a:ext cx="1828800" cy="822960"/>
+            <a:off x="6181344" y="4480560"/>
+            <a:ext cx="2560320" cy="777240"/>
           </a:xfrm>
           <a:prstGeom prst="roundRect">
             <a:avLst>
@@ -12727,12 +12833,14 @@
           </a:fontRef>
         </p:style>
         <p:txBody>
-          <a:bodyPr rtlCol="0" anchor="ctr" wrap="square"/>
+          <a:bodyPr rtlCol="0" anchor="ctr" wrap="square">
+            <a:normAutofit/>
+          </a:bodyPr>
           <a:lstStyle/>
           <a:p>
             <a:pPr algn="ctr"/>
             <a:r>
-              <a:rPr sz="1100" b="0" i="0">
+              <a:rPr sz="1150" b="0" i="0">
                 <a:solidFill>
                   <a:srgbClr val="1F2937"/>
                 </a:solidFill>
@@ -12746,14 +12854,14 @@
       </p:sp>
       <p:cxnSp>
         <p:nvCxnSpPr>
-          <p:cNvPr id="15" name="Connector 14"/>
+          <p:cNvPr id="17" name="Connector 16"/>
           <p:cNvCxnSpPr/>
           <p:nvPr/>
         </p:nvCxnSpPr>
         <p:spPr>
-          <a:xfrm flipV="1">
-            <a:off x="2011680" y="3136392"/>
-            <a:ext cx="6583680" cy="612647"/>
+          <a:xfrm>
+            <a:off x="6217920" y="4041648"/>
+            <a:ext cx="1243584" cy="420624"/>
           </a:xfrm>
           <a:prstGeom prst="line">
             <a:avLst/>
@@ -12782,14 +12890,14 @@
       </p:cxnSp>
       <p:sp>
         <p:nvSpPr>
-          <p:cNvPr id="16" name="Rounded Rectangle 15"/>
+          <p:cNvPr id="18" name="Rounded Rectangle 17"/>
           <p:cNvSpPr/>
           <p:nvPr/>
         </p:nvSpPr>
         <p:spPr>
           <a:xfrm>
-            <a:off x="9829800" y="3154680"/>
-            <a:ext cx="1828800" cy="822960"/>
+            <a:off x="8951976" y="4480560"/>
+            <a:ext cx="2560320" cy="777240"/>
           </a:xfrm>
           <a:prstGeom prst="roundRect">
             <a:avLst>
@@ -12820,12 +12928,14 @@
           </a:fontRef>
         </p:style>
         <p:txBody>
-          <a:bodyPr rtlCol="0" anchor="ctr" wrap="square"/>
+          <a:bodyPr rtlCol="0" anchor="ctr" wrap="square">
+            <a:normAutofit/>
+          </a:bodyPr>
           <a:lstStyle/>
           <a:p>
             <a:pPr algn="ctr"/>
             <a:r>
-              <a:rPr sz="1100" b="0" i="0">
+              <a:rPr sz="1150" b="0" i="0">
                 <a:solidFill>
                   <a:srgbClr val="1F2937"/>
                 </a:solidFill>
@@ -12840,14 +12950,14 @@
       </p:sp>
       <p:cxnSp>
         <p:nvCxnSpPr>
-          <p:cNvPr id="17" name="Connector 16"/>
+          <p:cNvPr id="19" name="Connector 18"/>
           <p:cNvCxnSpPr/>
           <p:nvPr/>
         </p:nvCxnSpPr>
         <p:spPr>
-          <a:xfrm flipV="1">
-            <a:off x="2011680" y="3136392"/>
-            <a:ext cx="8641080" cy="612647"/>
+          <a:xfrm>
+            <a:off x="6446520" y="4041648"/>
+            <a:ext cx="3785616" cy="420624"/>
           </a:xfrm>
           <a:prstGeom prst="line">
             <a:avLst/>
@@ -12876,14 +12986,14 @@
       </p:cxnSp>
       <p:sp>
         <p:nvSpPr>
-          <p:cNvPr id="18" name="Rounded Rectangle 17"/>
+          <p:cNvPr id="20" name="Rounded Rectangle 19"/>
           <p:cNvSpPr/>
           <p:nvPr/>
         </p:nvSpPr>
         <p:spPr>
           <a:xfrm>
-            <a:off x="1463040" y="4297680"/>
-            <a:ext cx="2926080" cy="731520"/>
+            <a:off x="4800600" y="5440680"/>
+            <a:ext cx="2560320" cy="731520"/>
           </a:xfrm>
           <a:prstGeom prst="roundRect">
             <a:avLst>
@@ -12914,7 +13024,9 @@
           </a:fontRef>
         </p:style>
         <p:txBody>
-          <a:bodyPr rtlCol="0" anchor="ctr" wrap="square"/>
+          <a:bodyPr rtlCol="0" anchor="ctr" wrap="square">
+            <a:normAutofit/>
+          </a:bodyPr>
           <a:lstStyle/>
           <a:p>
             <a:pPr algn="ctr"/>
@@ -12930,78 +13042,6 @@
           </a:p>
         </p:txBody>
       </p:sp>
-      <p:cxnSp>
-        <p:nvCxnSpPr>
-          <p:cNvPr id="19" name="Connector 18"/>
-          <p:cNvCxnSpPr/>
-          <p:nvPr/>
-        </p:nvCxnSpPr>
-        <p:spPr>
-          <a:xfrm>
-            <a:off x="4572000" y="3977639"/>
-            <a:ext cx="0" cy="301753"/>
-          </a:xfrm>
-          <a:prstGeom prst="line">
-            <a:avLst/>
-          </a:prstGeom>
-          <a:ln w="19050">
-            <a:solidFill>
-              <a:srgbClr val="1F2937"/>
-            </a:solidFill>
-            <a:tailEnd type="triangle" w="med" len="med"/>
-          </a:ln>
-        </p:spPr>
-        <p:style>
-          <a:lnRef idx="2">
-            <a:schemeClr val="accent1"/>
-          </a:lnRef>
-          <a:fillRef idx="0">
-            <a:schemeClr val="accent1"/>
-          </a:fillRef>
-          <a:effectRef idx="1">
-            <a:schemeClr val="accent1"/>
-          </a:effectRef>
-          <a:fontRef idx="minor">
-            <a:schemeClr val="tx1"/>
-          </a:fontRef>
-        </p:style>
-      </p:cxnSp>
-      <p:cxnSp>
-        <p:nvCxnSpPr>
-          <p:cNvPr id="20" name="Connector 19"/>
-          <p:cNvCxnSpPr/>
-          <p:nvPr/>
-        </p:nvCxnSpPr>
-        <p:spPr>
-          <a:xfrm flipH="1">
-            <a:off x="2926080" y="4279392"/>
-            <a:ext cx="1645920" cy="292608"/>
-          </a:xfrm>
-          <a:prstGeom prst="line">
-            <a:avLst/>
-          </a:prstGeom>
-          <a:ln w="19050">
-            <a:solidFill>
-              <a:srgbClr val="1F2937"/>
-            </a:solidFill>
-            <a:tailEnd type="triangle" w="med" len="med"/>
-          </a:ln>
-        </p:spPr>
-        <p:style>
-          <a:lnRef idx="2">
-            <a:schemeClr val="accent1"/>
-          </a:lnRef>
-          <a:fillRef idx="0">
-            <a:schemeClr val="accent1"/>
-          </a:fillRef>
-          <a:effectRef idx="1">
-            <a:schemeClr val="accent1"/>
-          </a:effectRef>
-          <a:fontRef idx="minor">
-            <a:schemeClr val="tx1"/>
-          </a:fontRef>
-        </p:style>
-      </p:cxnSp>
       <p:cxnSp>
         <p:nvCxnSpPr>
           <p:cNvPr id="21" name="Connector 20"/>
@@ -13010,8 +13050,8 @@
         </p:nvCxnSpPr>
         <p:spPr>
           <a:xfrm>
-            <a:off x="6629400" y="3977639"/>
-            <a:ext cx="0" cy="301753"/>
+            <a:off x="1920239" y="5276088"/>
+            <a:ext cx="0" cy="118872"/>
           </a:xfrm>
           <a:prstGeom prst="line">
             <a:avLst/>
@@ -13045,9 +13085,9 @@
           <p:nvPr/>
         </p:nvCxnSpPr>
         <p:spPr>
-          <a:xfrm flipH="1">
-            <a:off x="2926080" y="4279392"/>
-            <a:ext cx="3703320" cy="292608"/>
+          <a:xfrm>
+            <a:off x="4690872" y="5276088"/>
+            <a:ext cx="0" cy="118872"/>
           </a:xfrm>
           <a:prstGeom prst="line">
             <a:avLst/>
@@ -13082,8 +13122,8 @@
         </p:nvCxnSpPr>
         <p:spPr>
           <a:xfrm>
-            <a:off x="8686800" y="3977639"/>
-            <a:ext cx="0" cy="301753"/>
+            <a:off x="7461504" y="5276088"/>
+            <a:ext cx="0" cy="118872"/>
           </a:xfrm>
           <a:prstGeom prst="line">
             <a:avLst/>
@@ -13117,9 +13157,9 @@
           <p:nvPr/>
         </p:nvCxnSpPr>
         <p:spPr>
-          <a:xfrm flipH="1">
-            <a:off x="2926080" y="4279392"/>
-            <a:ext cx="5760720" cy="292608"/>
+          <a:xfrm>
+            <a:off x="10232136" y="5276088"/>
+            <a:ext cx="0" cy="118872"/>
           </a:xfrm>
           <a:prstGeom prst="line">
             <a:avLst/>
@@ -13154,8 +13194,8 @@
         </p:nvCxnSpPr>
         <p:spPr>
           <a:xfrm>
-            <a:off x="10744200" y="3977639"/>
-            <a:ext cx="0" cy="301753"/>
+            <a:off x="1920240" y="5394960"/>
+            <a:ext cx="8311896" cy="0"/>
           </a:xfrm>
           <a:prstGeom prst="line">
             <a:avLst/>
@@ -13189,9 +13229,9 @@
           <p:nvPr/>
         </p:nvCxnSpPr>
         <p:spPr>
-          <a:xfrm flipH="1">
-            <a:off x="2926080" y="4279392"/>
-            <a:ext cx="7818120" cy="292608"/>
+          <a:xfrm>
+            <a:off x="6080760" y="5394960"/>
+            <a:ext cx="0" cy="27432"/>
           </a:xfrm>
           <a:prstGeom prst="line">
             <a:avLst/>
@@ -13218,48 +13258,6 @@
           </a:fontRef>
         </p:style>
       </p:cxnSp>
-      <p:sp>
-        <p:nvSpPr>
-          <p:cNvPr id="27" name="TextBox 26"/>
-          <p:cNvSpPr txBox="1"/>
-          <p:nvPr/>
-        </p:nvSpPr>
-        <p:spPr>
-          <a:xfrm>
-            <a:off x="914400" y="5257800"/>
-            <a:ext cx="10332720" cy="914400"/>
-          </a:xfrm>
-          <a:prstGeom prst="rect">
-            <a:avLst/>
-          </a:prstGeom>
-          <a:noFill/>
-        </p:spPr>
-        <p:txBody>
-          <a:bodyPr wrap="square">
-            <a:spAutoFit/>
-          </a:bodyPr>
-          <a:lstStyle/>
-          <a:p>
-            <a:pPr algn="l">
-              <a:spcBef>
-                <a:spcPts val="0"/>
-              </a:spcBef>
-              <a:spcAft>
-                <a:spcPts val="800"/>
-              </a:spcAft>
-            </a:pPr>
-            <a:r>
-              <a:rPr sz="1300" b="0" i="0">
-                <a:solidFill>
-                  <a:srgbClr val="1F2937"/>
-                </a:solidFill>
-                <a:latin typeface="Calibri"/>
-              </a:rPr>
-              <a:t>▪  Calibrate Pixels To Inches Under Fixed Geometry; Total Points Across The Roll Set The Final Roll Grade.</a:t>
-            </a:r>
-          </a:p>
-        </p:txBody>
-      </p:sp>
     </p:spTree>
   </p:cSld>
   <p:clrMapOvr>
@@ -13486,7 +13484,7 @@
         <p:spPr>
           <a:xfrm>
             <a:off x="548640" y="1417320"/>
-            <a:ext cx="2834640" cy="1417320"/>
+            <a:ext cx="2834640" cy="1554480"/>
           </a:xfrm>
           <a:prstGeom prst="roundRect">
             <a:avLst>
@@ -13628,7 +13626,7 @@
         <p:spPr>
           <a:xfrm>
             <a:off x="1417319" y="1673352"/>
-            <a:ext cx="1783080" cy="1005840"/>
+            <a:ext cx="1783080" cy="1143000"/>
           </a:xfrm>
           <a:prstGeom prst="rect">
             <a:avLst/>
@@ -13637,7 +13635,7 @@
         </p:spPr>
         <p:txBody>
           <a:bodyPr wrap="square">
-            <a:spAutoFit/>
+            <a:normAutofit/>
           </a:bodyPr>
           <a:lstStyle/>
           <a:p>
@@ -13647,7 +13645,7 @@
               </a:spcAft>
             </a:pPr>
             <a:r>
-              <a:rPr sz="1600" b="1" i="0">
+              <a:rPr sz="1400" b="1" i="0">
                 <a:solidFill>
                   <a:srgbClr val="144E4C"/>
                 </a:solidFill>
@@ -13666,7 +13664,7 @@
               </a:spcAft>
             </a:pPr>
             <a:r>
-              <a:rPr sz="1350" b="0" i="0">
+              <a:rPr sz="1150" b="0" i="0">
                 <a:solidFill>
                   <a:srgbClr val="5B6570"/>
                 </a:solidFill>
@@ -13685,7 +13683,7 @@
               </a:spcAft>
             </a:pPr>
             <a:r>
-              <a:rPr sz="1350" b="0" i="0">
+              <a:rPr sz="1150" b="0" i="0">
                 <a:solidFill>
                   <a:srgbClr val="5B6570"/>
                 </a:solidFill>
@@ -13705,7 +13703,7 @@
         <p:spPr>
           <a:xfrm>
             <a:off x="3657600" y="1417320"/>
-            <a:ext cx="2834640" cy="1417320"/>
+            <a:ext cx="2834640" cy="1554480"/>
           </a:xfrm>
           <a:prstGeom prst="roundRect">
             <a:avLst>
@@ -13847,7 +13845,7 @@
         <p:spPr>
           <a:xfrm>
             <a:off x="4526280" y="1673352"/>
-            <a:ext cx="1783080" cy="1005840"/>
+            <a:ext cx="1783080" cy="1143000"/>
           </a:xfrm>
           <a:prstGeom prst="rect">
             <a:avLst/>
@@ -13856,7 +13854,7 @@
         </p:spPr>
         <p:txBody>
           <a:bodyPr wrap="square">
-            <a:spAutoFit/>
+            <a:normAutofit/>
           </a:bodyPr>
           <a:lstStyle/>
           <a:p>
@@ -13866,7 +13864,7 @@
               </a:spcAft>
             </a:pPr>
             <a:r>
-              <a:rPr sz="1600" b="1" i="0">
+              <a:rPr sz="1400" b="1" i="0">
                 <a:solidFill>
                   <a:srgbClr val="144E4C"/>
                 </a:solidFill>
@@ -13885,7 +13883,7 @@
               </a:spcAft>
             </a:pPr>
             <a:r>
-              <a:rPr sz="1350" b="0" i="0">
+              <a:rPr sz="1150" b="0" i="0">
                 <a:solidFill>
                   <a:srgbClr val="5B6570"/>
                 </a:solidFill>
@@ -13904,7 +13902,7 @@
               </a:spcAft>
             </a:pPr>
             <a:r>
-              <a:rPr sz="1350" b="0" i="0">
+              <a:rPr sz="1150" b="0" i="0">
                 <a:solidFill>
                   <a:srgbClr val="5B6570"/>
                 </a:solidFill>
@@ -13923,7 +13921,7 @@
         </p:nvSpPr>
         <p:spPr>
           <a:xfrm>
-            <a:off x="548640" y="3063240"/>
+            <a:off x="548640" y="3108960"/>
             <a:ext cx="3520440" cy="1417320"/>
           </a:xfrm>
           <a:prstGeom prst="roundRect">
@@ -13970,7 +13968,7 @@
         </p:nvSpPr>
         <p:spPr>
           <a:xfrm>
-            <a:off x="548640" y="3063240"/>
+            <a:off x="548640" y="3108960"/>
             <a:ext cx="3520440" cy="82296"/>
           </a:xfrm>
           <a:prstGeom prst="roundRect">
@@ -14013,7 +14011,7 @@
         </p:nvSpPr>
         <p:spPr>
           <a:xfrm>
-            <a:off x="804672" y="3355848"/>
+            <a:off x="804672" y="3401568"/>
             <a:ext cx="475488" cy="475488"/>
           </a:xfrm>
           <a:prstGeom prst="ellipse">
@@ -14065,7 +14063,7 @@
         </p:nvSpPr>
         <p:spPr>
           <a:xfrm>
-            <a:off x="1417319" y="3319272"/>
+            <a:off x="1417319" y="3364991"/>
             <a:ext cx="2468880" cy="1005840"/>
           </a:xfrm>
           <a:prstGeom prst="rect">
@@ -14075,7 +14073,7 @@
         </p:spPr>
         <p:txBody>
           <a:bodyPr wrap="square">
-            <a:spAutoFit/>
+            <a:normAutofit/>
           </a:bodyPr>
           <a:lstStyle/>
           <a:p>
@@ -14085,7 +14083,7 @@
               </a:spcAft>
             </a:pPr>
             <a:r>
-              <a:rPr sz="1600" b="1" i="0">
+              <a:rPr sz="1350" b="1" i="0">
                 <a:solidFill>
                   <a:srgbClr val="144E4C"/>
                 </a:solidFill>
@@ -14104,7 +14102,7 @@
               </a:spcAft>
             </a:pPr>
             <a:r>
-              <a:rPr sz="1350" b="0" i="0">
+              <a:rPr sz="1100" b="0" i="0">
                 <a:solidFill>
                   <a:srgbClr val="5B6570"/>
                 </a:solidFill>
@@ -14123,7 +14121,7 @@
               </a:spcAft>
             </a:pPr>
             <a:r>
-              <a:rPr sz="1350" b="0" i="0">
+              <a:rPr sz="1100" b="0" i="0">
                 <a:solidFill>
                   <a:srgbClr val="5B6570"/>
                 </a:solidFill>
@@ -14142,7 +14140,7 @@
         </p:nvSpPr>
         <p:spPr>
           <a:xfrm>
-            <a:off x="4251959" y="3063240"/>
+            <a:off x="4251959" y="3108960"/>
             <a:ext cx="3520440" cy="1417320"/>
           </a:xfrm>
           <a:prstGeom prst="roundRect">
@@ -14189,7 +14187,7 @@
         </p:nvSpPr>
         <p:spPr>
           <a:xfrm>
-            <a:off x="4251959" y="3063240"/>
+            <a:off x="4251959" y="3108960"/>
             <a:ext cx="3520440" cy="82296"/>
           </a:xfrm>
           <a:prstGeom prst="roundRect">
@@ -14232,7 +14230,7 @@
         </p:nvSpPr>
         <p:spPr>
           <a:xfrm>
-            <a:off x="4507992" y="3355848"/>
+            <a:off x="4507992" y="3401568"/>
             <a:ext cx="475488" cy="475488"/>
           </a:xfrm>
           <a:prstGeom prst="ellipse">
@@ -14284,7 +14282,7 @@
         </p:nvSpPr>
         <p:spPr>
           <a:xfrm>
-            <a:off x="5120640" y="3319272"/>
+            <a:off x="5120640" y="3364991"/>
             <a:ext cx="2468880" cy="1005840"/>
           </a:xfrm>
           <a:prstGeom prst="rect">
@@ -14294,7 +14292,7 @@
         </p:spPr>
         <p:txBody>
           <a:bodyPr wrap="square">
-            <a:spAutoFit/>
+            <a:normAutofit/>
           </a:bodyPr>
           <a:lstStyle/>
           <a:p>
@@ -14304,7 +14302,7 @@
               </a:spcAft>
             </a:pPr>
             <a:r>
-              <a:rPr sz="1600" b="1" i="0">
+              <a:rPr sz="1350" b="1" i="0">
                 <a:solidFill>
                   <a:srgbClr val="144E4C"/>
                 </a:solidFill>
@@ -14323,7 +14321,7 @@
               </a:spcAft>
             </a:pPr>
             <a:r>
-              <a:rPr sz="1350" b="0" i="0">
+              <a:rPr sz="1100" b="0" i="0">
                 <a:solidFill>
                   <a:srgbClr val="5B6570"/>
                 </a:solidFill>
@@ -14342,7 +14340,7 @@
               </a:spcAft>
             </a:pPr>
             <a:r>
-              <a:rPr sz="1350" b="0" i="0">
+              <a:rPr sz="1100" b="0" i="0">
                 <a:solidFill>
                   <a:srgbClr val="5B6570"/>
                 </a:solidFill>
@@ -14361,7 +14359,7 @@
         </p:nvSpPr>
         <p:spPr>
           <a:xfrm>
-            <a:off x="7955279" y="3063240"/>
+            <a:off x="7955279" y="3108960"/>
             <a:ext cx="3520440" cy="1417320"/>
           </a:xfrm>
           <a:prstGeom prst="roundRect">
@@ -14408,7 +14406,7 @@
         </p:nvSpPr>
         <p:spPr>
           <a:xfrm>
-            <a:off x="7955279" y="3063240"/>
+            <a:off x="7955279" y="3108960"/>
             <a:ext cx="3520440" cy="82296"/>
           </a:xfrm>
           <a:prstGeom prst="roundRect">
@@ -14451,7 +14449,7 @@
         </p:nvSpPr>
         <p:spPr>
           <a:xfrm>
-            <a:off x="8211311" y="3355848"/>
+            <a:off x="8211311" y="3401568"/>
             <a:ext cx="475488" cy="475488"/>
           </a:xfrm>
           <a:prstGeom prst="ellipse">
@@ -14503,7 +14501,7 @@
         </p:nvSpPr>
         <p:spPr>
           <a:xfrm>
-            <a:off x="8823959" y="3319272"/>
+            <a:off x="8823959" y="3364991"/>
             <a:ext cx="2468880" cy="1005840"/>
           </a:xfrm>
           <a:prstGeom prst="rect">
@@ -14513,7 +14511,7 @@
         </p:spPr>
         <p:txBody>
           <a:bodyPr wrap="square">
-            <a:spAutoFit/>
+            <a:normAutofit/>
           </a:bodyPr>
           <a:lstStyle/>
           <a:p>
@@ -14523,7 +14521,7 @@
               </a:spcAft>
             </a:pPr>
             <a:r>
-              <a:rPr sz="1600" b="1" i="0">
+              <a:rPr sz="1350" b="1" i="0">
                 <a:solidFill>
                   <a:srgbClr val="144E4C"/>
                 </a:solidFill>
@@ -14542,7 +14540,7 @@
               </a:spcAft>
             </a:pPr>
             <a:r>
-              <a:rPr sz="1350" b="0" i="0">
+              <a:rPr sz="1100" b="0" i="0">
                 <a:solidFill>
                   <a:srgbClr val="5B6570"/>
                 </a:solidFill>
@@ -14561,7 +14559,7 @@
               </a:spcAft>
             </a:pPr>
             <a:r>
-              <a:rPr sz="1350" b="0" i="0">
+              <a:rPr sz="1100" b="0" i="0">
                 <a:solidFill>
                   <a:srgbClr val="5B6570"/>
                 </a:solidFill>
@@ -14580,7 +14578,7 @@
         </p:nvSpPr>
         <p:spPr>
           <a:xfrm>
-            <a:off x="548640" y="4617720"/>
+            <a:off x="548640" y="4590288"/>
             <a:ext cx="3520440" cy="1417320"/>
           </a:xfrm>
           <a:prstGeom prst="roundRect">
@@ -14627,7 +14625,7 @@
         </p:nvSpPr>
         <p:spPr>
           <a:xfrm>
-            <a:off x="548640" y="4617720"/>
+            <a:off x="548640" y="4590288"/>
             <a:ext cx="3520440" cy="82296"/>
           </a:xfrm>
           <a:prstGeom prst="roundRect">
@@ -14670,7 +14668,7 @@
         </p:nvSpPr>
         <p:spPr>
           <a:xfrm>
-            <a:off x="804672" y="4910328"/>
+            <a:off x="804672" y="4882896"/>
             <a:ext cx="475488" cy="475488"/>
           </a:xfrm>
           <a:prstGeom prst="ellipse">
@@ -14722,7 +14720,7 @@
         </p:nvSpPr>
         <p:spPr>
           <a:xfrm>
-            <a:off x="1417319" y="4873752"/>
+            <a:off x="1417319" y="4846320"/>
             <a:ext cx="2468880" cy="1005840"/>
           </a:xfrm>
           <a:prstGeom prst="rect">
@@ -14732,7 +14730,7 @@
         </p:spPr>
         <p:txBody>
           <a:bodyPr wrap="square">
-            <a:spAutoFit/>
+            <a:normAutofit/>
           </a:bodyPr>
           <a:lstStyle/>
           <a:p>
@@ -14742,7 +14740,7 @@
               </a:spcAft>
             </a:pPr>
             <a:r>
-              <a:rPr sz="1600" b="1" i="0">
+              <a:rPr sz="1350" b="1" i="0">
                 <a:solidFill>
                   <a:srgbClr val="144E4C"/>
                 </a:solidFill>
@@ -14761,7 +14759,7 @@
               </a:spcAft>
             </a:pPr>
             <a:r>
-              <a:rPr sz="1350" b="0" i="0">
+              <a:rPr sz="1100" b="0" i="0">
                 <a:solidFill>
                   <a:srgbClr val="5B6570"/>
                 </a:solidFill>
@@ -14780,7 +14778,7 @@
               </a:spcAft>
             </a:pPr>
             <a:r>
-              <a:rPr sz="1350" b="0" i="0">
+              <a:rPr sz="1100" b="0" i="0">
                 <a:solidFill>
                   <a:srgbClr val="5B6570"/>
                 </a:solidFill>
@@ -14799,7 +14797,7 @@
         </p:nvSpPr>
         <p:spPr>
           <a:xfrm>
-            <a:off x="4251959" y="4617720"/>
+            <a:off x="4251959" y="4590288"/>
             <a:ext cx="3520440" cy="1417320"/>
           </a:xfrm>
           <a:prstGeom prst="roundRect">
@@ -14846,7 +14844,7 @@
         </p:nvSpPr>
         <p:spPr>
           <a:xfrm>
-            <a:off x="4251959" y="4617720"/>
+            <a:off x="4251959" y="4590288"/>
             <a:ext cx="3520440" cy="82296"/>
           </a:xfrm>
           <a:prstGeom prst="roundRect">
@@ -14889,7 +14887,7 @@
         </p:nvSpPr>
         <p:spPr>
           <a:xfrm>
-            <a:off x="4507992" y="4910328"/>
+            <a:off x="4507992" y="4882896"/>
             <a:ext cx="475488" cy="475488"/>
           </a:xfrm>
           <a:prstGeom prst="ellipse">
@@ -14941,7 +14939,7 @@
         </p:nvSpPr>
         <p:spPr>
           <a:xfrm>
-            <a:off x="5120640" y="4873752"/>
+            <a:off x="5120640" y="4846320"/>
             <a:ext cx="2468880" cy="1005840"/>
           </a:xfrm>
           <a:prstGeom prst="rect">
@@ -14951,7 +14949,7 @@
         </p:spPr>
         <p:txBody>
           <a:bodyPr wrap="square">
-            <a:spAutoFit/>
+            <a:normAutofit/>
           </a:bodyPr>
           <a:lstStyle/>
           <a:p>
@@ -14961,7 +14959,7 @@
               </a:spcAft>
             </a:pPr>
             <a:r>
-              <a:rPr sz="1600" b="1" i="0">
+              <a:rPr sz="1350" b="1" i="0">
                 <a:solidFill>
                   <a:srgbClr val="144E4C"/>
                 </a:solidFill>
@@ -14980,7 +14978,7 @@
               </a:spcAft>
             </a:pPr>
             <a:r>
-              <a:rPr sz="1350" b="0" i="0">
+              <a:rPr sz="1100" b="0" i="0">
                 <a:solidFill>
                   <a:srgbClr val="5B6570"/>
                 </a:solidFill>
@@ -14999,7 +14997,7 @@
               </a:spcAft>
             </a:pPr>
             <a:r>
-              <a:rPr sz="1350" b="0" i="0">
+              <a:rPr sz="1100" b="0" i="0">
                 <a:solidFill>
                   <a:srgbClr val="5B6570"/>
                 </a:solidFill>
@@ -15018,7 +15016,7 @@
         </p:nvSpPr>
         <p:spPr>
           <a:xfrm>
-            <a:off x="7955279" y="4617720"/>
+            <a:off x="7955279" y="4590288"/>
             <a:ext cx="3520440" cy="1417320"/>
           </a:xfrm>
           <a:prstGeom prst="roundRect">
@@ -15065,7 +15063,7 @@
         </p:nvSpPr>
         <p:spPr>
           <a:xfrm>
-            <a:off x="7955279" y="4617720"/>
+            <a:off x="7955279" y="4590288"/>
             <a:ext cx="3520440" cy="82296"/>
           </a:xfrm>
           <a:prstGeom prst="roundRect">
@@ -15108,7 +15106,7 @@
         </p:nvSpPr>
         <p:spPr>
           <a:xfrm>
-            <a:off x="8211311" y="4910328"/>
+            <a:off x="8211311" y="4882896"/>
             <a:ext cx="475488" cy="475488"/>
           </a:xfrm>
           <a:prstGeom prst="ellipse">
@@ -15160,7 +15158,7 @@
         </p:nvSpPr>
         <p:spPr>
           <a:xfrm>
-            <a:off x="8823959" y="4873752"/>
+            <a:off x="8823959" y="4846320"/>
             <a:ext cx="2468880" cy="1005840"/>
           </a:xfrm>
           <a:prstGeom prst="rect">
@@ -15170,7 +15168,7 @@
         </p:spPr>
         <p:txBody>
           <a:bodyPr wrap="square">
-            <a:spAutoFit/>
+            <a:normAutofit/>
           </a:bodyPr>
           <a:lstStyle/>
           <a:p>
@@ -15180,7 +15178,7 @@
               </a:spcAft>
             </a:pPr>
             <a:r>
-              <a:rPr sz="1600" b="1" i="0">
+              <a:rPr sz="1350" b="1" i="0">
                 <a:solidFill>
                   <a:srgbClr val="144E4C"/>
                 </a:solidFill>
@@ -15199,7 +15197,7 @@
               </a:spcAft>
             </a:pPr>
             <a:r>
-              <a:rPr sz="1350" b="0" i="0">
+              <a:rPr sz="1100" b="0" i="0">
                 <a:solidFill>
                   <a:srgbClr val="5B6570"/>
                 </a:solidFill>
@@ -15218,7 +15216,7 @@
               </a:spcAft>
             </a:pPr>
             <a:r>
-              <a:rPr sz="1350" b="0" i="0">
+              <a:rPr sz="1100" b="0" i="0">
                 <a:solidFill>
                   <a:srgbClr val="5B6570"/>
                 </a:solidFill>
@@ -15455,7 +15453,7 @@
         <p:spPr>
           <a:xfrm>
             <a:off x="548640" y="1554480"/>
-            <a:ext cx="3520440" cy="4023360"/>
+            <a:ext cx="3520440" cy="2651760"/>
           </a:xfrm>
           <a:prstGeom prst="roundRect">
             <a:avLst>
@@ -15597,7 +15595,7 @@
         <p:spPr>
           <a:xfrm>
             <a:off x="1417319" y="1810512"/>
-            <a:ext cx="2468880" cy="3611880"/>
+            <a:ext cx="2468880" cy="2240279"/>
           </a:xfrm>
           <a:prstGeom prst="rect">
             <a:avLst/>
@@ -15606,7 +15604,7 @@
         </p:spPr>
         <p:txBody>
           <a:bodyPr wrap="square">
-            <a:spAutoFit/>
+            <a:normAutofit/>
           </a:bodyPr>
           <a:lstStyle/>
           <a:p>
@@ -15655,7 +15653,7 @@
         <p:spPr>
           <a:xfrm>
             <a:off x="4251959" y="1554480"/>
-            <a:ext cx="3520440" cy="4023360"/>
+            <a:ext cx="3520440" cy="2651760"/>
           </a:xfrm>
           <a:prstGeom prst="roundRect">
             <a:avLst>
@@ -15797,7 +15795,7 @@
         <p:spPr>
           <a:xfrm>
             <a:off x="5120640" y="1810512"/>
-            <a:ext cx="2468880" cy="3611880"/>
+            <a:ext cx="2468880" cy="2240279"/>
           </a:xfrm>
           <a:prstGeom prst="rect">
             <a:avLst/>
@@ -15806,7 +15804,7 @@
         </p:spPr>
         <p:txBody>
           <a:bodyPr wrap="square">
-            <a:spAutoFit/>
+            <a:normAutofit/>
           </a:bodyPr>
           <a:lstStyle/>
           <a:p>
@@ -15855,7 +15853,7 @@
         <p:spPr>
           <a:xfrm>
             <a:off x="7955279" y="1554480"/>
-            <a:ext cx="3520440" cy="4023360"/>
+            <a:ext cx="3520440" cy="2651760"/>
           </a:xfrm>
           <a:prstGeom prst="roundRect">
             <a:avLst>
@@ -15997,7 +15995,7 @@
         <p:spPr>
           <a:xfrm>
             <a:off x="8823959" y="1810512"/>
-            <a:ext cx="2468880" cy="3611880"/>
+            <a:ext cx="2468880" cy="2240279"/>
           </a:xfrm>
           <a:prstGeom prst="rect">
             <a:avLst/>
@@ -16006,7 +16004,7 @@
         </p:spPr>
         <p:txBody>
           <a:bodyPr wrap="square">
-            <a:spAutoFit/>
+            <a:normAutofit/>
           </a:bodyPr>
           <a:lstStyle/>
           <a:p>
@@ -20403,7 +20401,7 @@
         <p:spPr>
           <a:xfrm>
             <a:off x="548640" y="1463040"/>
-            <a:ext cx="5394960" cy="3291840"/>
+            <a:ext cx="5394960" cy="2926080"/>
           </a:xfrm>
           <a:prstGeom prst="roundRect">
             <a:avLst>
@@ -20545,7 +20543,7 @@
         <p:spPr>
           <a:xfrm>
             <a:off x="1417319" y="1719072"/>
-            <a:ext cx="4343400" cy="2880360"/>
+            <a:ext cx="4343400" cy="2514600"/>
           </a:xfrm>
           <a:prstGeom prst="rect">
             <a:avLst/>
@@ -20554,7 +20552,7 @@
         </p:spPr>
         <p:txBody>
           <a:bodyPr wrap="square">
-            <a:spAutoFit/>
+            <a:normAutofit/>
           </a:bodyPr>
           <a:lstStyle/>
           <a:p>
@@ -20641,7 +20639,7 @@
         <p:spPr>
           <a:xfrm>
             <a:off x="6245352" y="1463040"/>
-            <a:ext cx="5394960" cy="3291840"/>
+            <a:ext cx="5394960" cy="2926080"/>
           </a:xfrm>
           <a:prstGeom prst="roundRect">
             <a:avLst>
@@ -20783,7 +20781,7 @@
         <p:spPr>
           <a:xfrm>
             <a:off x="7114032" y="1719072"/>
-            <a:ext cx="4343400" cy="2880360"/>
+            <a:ext cx="4343400" cy="2514600"/>
           </a:xfrm>
           <a:prstGeom prst="rect">
             <a:avLst/>
@@ -20792,7 +20790,7 @@
         </p:spPr>
         <p:txBody>
           <a:bodyPr wrap="square">
-            <a:spAutoFit/>
+            <a:normAutofit/>
           </a:bodyPr>
           <a:lstStyle/>
           <a:p>
@@ -22214,14 +22212,16 @@
         </p:nvSpPr>
         <p:spPr>
           <a:xfrm>
-            <a:off x="6309360" y="4709160"/>
-            <a:ext cx="5303520" cy="1143000"/>
+            <a:off x="548640" y="5074920"/>
+            <a:ext cx="11064240" cy="777240"/>
           </a:xfrm>
           <a:prstGeom prst="roundRect">
-            <a:avLst/>
+            <a:avLst>
+              <a:gd name="adj" fmla="val 12000"/>
+            </a:avLst>
           </a:prstGeom>
           <a:solidFill>
-            <a:srgbClr val="2B7BC4"/>
+            <a:srgbClr val="144E4C"/>
           </a:solidFill>
           <a:ln>
             <a:noFill/>
@@ -22247,7 +22247,7 @@
           <a:p>
             <a:pPr algn="ctr"/>
             <a:r>
-              <a:rPr sz="1700" b="1" i="0">
+              <a:rPr sz="1600" b="1" i="0">
                 <a:solidFill>
                   <a:srgbClr val="FFFFFF"/>
                 </a:solidFill>
@@ -23638,7 +23638,7 @@
         </p:spPr>
         <p:txBody>
           <a:bodyPr wrap="square">
-            <a:spAutoFit/>
+            <a:normAutofit/>
           </a:bodyPr>
           <a:lstStyle/>
           <a:p>
@@ -23838,7 +23838,7 @@
         </p:spPr>
         <p:txBody>
           <a:bodyPr wrap="square">
-            <a:spAutoFit/>
+            <a:normAutofit/>
           </a:bodyPr>
           <a:lstStyle/>
           <a:p>
@@ -24038,7 +24038,7 @@
         </p:spPr>
         <p:txBody>
           <a:bodyPr wrap="square">
-            <a:spAutoFit/>
+            <a:normAutofit/>
           </a:bodyPr>
           <a:lstStyle/>
           <a:p>
@@ -24238,7 +24238,7 @@
         </p:spPr>
         <p:txBody>
           <a:bodyPr wrap="square">
-            <a:spAutoFit/>
+            <a:normAutofit/>
           </a:bodyPr>
           <a:lstStyle/>
           <a:p>
@@ -24438,7 +24438,7 @@
         </p:spPr>
         <p:txBody>
           <a:bodyPr wrap="square">
-            <a:spAutoFit/>
+            <a:normAutofit/>
           </a:bodyPr>
           <a:lstStyle/>
           <a:p>
@@ -24638,7 +24638,7 @@
         </p:spPr>
         <p:txBody>
           <a:bodyPr wrap="square">
-            <a:spAutoFit/>
+            <a:normAutofit/>
           </a:bodyPr>
           <a:lstStyle/>
           <a:p>

--- a/slides/FYDP-I_Defect-to-Delivery.pptx
+++ b/slides/FYDP-I_Defect-to-Delivery.pptx
@@ -3207,7 +3207,7 @@
             <a:avLst/>
           </a:prstGeom>
           <a:solidFill>
-            <a:srgbClr val="1B7A6E"/>
+            <a:srgbClr val="D99A06"/>
           </a:solidFill>
           <a:ln>
             <a:noFill/>
@@ -3523,7 +3523,7 @@
             <a:avLst/>
           </a:prstGeom>
           <a:solidFill>
-            <a:srgbClr val="1B7A6E"/>
+            <a:srgbClr val="D99A06"/>
           </a:solidFill>
           <a:ln>
             <a:noFill/>
@@ -3601,7 +3601,7 @@
             <a:avLst/>
           </a:prstGeom>
           <a:solidFill>
-            <a:srgbClr val="1B7A6E"/>
+            <a:srgbClr val="D99A06"/>
           </a:solidFill>
           <a:ln>
             <a:noFill/>
@@ -5056,7 +5056,7 @@
             <a:avLst/>
           </a:prstGeom>
           <a:solidFill>
-            <a:srgbClr val="1B7A6E"/>
+            <a:srgbClr val="D99A06"/>
           </a:solidFill>
           <a:ln>
             <a:noFill/>
@@ -5134,7 +5134,7 @@
             <a:avLst/>
           </a:prstGeom>
           <a:solidFill>
-            <a:srgbClr val="1B7A6E"/>
+            <a:srgbClr val="D99A06"/>
           </a:solidFill>
           <a:ln>
             <a:noFill/>
@@ -5224,7 +5224,7 @@
             <a:avLst/>
           </a:prstGeom>
           <a:solidFill>
-            <a:srgbClr val="1B7A6E"/>
+            <a:srgbClr val="D99A06"/>
           </a:solidFill>
           <a:ln>
             <a:noFill/>
@@ -5267,7 +5267,7 @@
             <a:avLst/>
           </a:prstGeom>
           <a:solidFill>
-            <a:srgbClr val="1B7A6E"/>
+            <a:srgbClr val="D99A06"/>
           </a:solidFill>
           <a:ln>
             <a:noFill/>
@@ -5424,7 +5424,7 @@
             <a:avLst/>
           </a:prstGeom>
           <a:solidFill>
-            <a:srgbClr val="1B7A6E"/>
+            <a:srgbClr val="D99A06"/>
           </a:solidFill>
           <a:ln>
             <a:noFill/>
@@ -5467,7 +5467,7 @@
             <a:avLst/>
           </a:prstGeom>
           <a:solidFill>
-            <a:srgbClr val="1B7A6E"/>
+            <a:srgbClr val="D99A06"/>
           </a:solidFill>
           <a:ln>
             <a:noFill/>
@@ -5624,7 +5624,7 @@
             <a:avLst/>
           </a:prstGeom>
           <a:solidFill>
-            <a:srgbClr val="1B7A6E"/>
+            <a:srgbClr val="D99A06"/>
           </a:solidFill>
           <a:ln>
             <a:noFill/>
@@ -5667,7 +5667,7 @@
             <a:avLst/>
           </a:prstGeom>
           <a:solidFill>
-            <a:srgbClr val="1B7A6E"/>
+            <a:srgbClr val="D99A06"/>
           </a:solidFill>
           <a:ln>
             <a:noFill/>
@@ -5824,7 +5824,7 @@
             <a:avLst/>
           </a:prstGeom>
           <a:solidFill>
-            <a:srgbClr val="1B7A6E"/>
+            <a:srgbClr val="D99A06"/>
           </a:solidFill>
           <a:ln>
             <a:noFill/>
@@ -5867,7 +5867,7 @@
             <a:avLst/>
           </a:prstGeom>
           <a:solidFill>
-            <a:srgbClr val="1B7A6E"/>
+            <a:srgbClr val="D99A06"/>
           </a:solidFill>
           <a:ln>
             <a:noFill/>
@@ -6108,7 +6108,7 @@
             <a:avLst/>
           </a:prstGeom>
           <a:solidFill>
-            <a:srgbClr val="1B7A6E"/>
+            <a:srgbClr val="D99A06"/>
           </a:solidFill>
           <a:ln>
             <a:noFill/>
@@ -6186,7 +6186,7 @@
             <a:avLst/>
           </a:prstGeom>
           <a:solidFill>
-            <a:srgbClr val="1B7A6E"/>
+            <a:srgbClr val="D99A06"/>
           </a:solidFill>
           <a:ln>
             <a:noFill/>
@@ -6485,7 +6485,7 @@
             <a:avLst/>
           </a:prstGeom>
           <a:solidFill>
-            <a:srgbClr val="1B7A6E"/>
+            <a:srgbClr val="D99A06"/>
           </a:solidFill>
           <a:ln>
             <a:noFill/>
@@ -6563,7 +6563,7 @@
             <a:avLst/>
           </a:prstGeom>
           <a:solidFill>
-            <a:srgbClr val="1B7A6E"/>
+            <a:srgbClr val="D99A06"/>
           </a:solidFill>
           <a:ln>
             <a:noFill/>
@@ -7469,7 +7469,7 @@
             <a:avLst/>
           </a:prstGeom>
           <a:solidFill>
-            <a:srgbClr val="1B7A6E"/>
+            <a:srgbClr val="D99A06"/>
           </a:solidFill>
           <a:ln>
             <a:noFill/>
@@ -7547,7 +7547,7 @@
             <a:avLst/>
           </a:prstGeom>
           <a:solidFill>
-            <a:srgbClr val="1B7A6E"/>
+            <a:srgbClr val="D99A06"/>
           </a:solidFill>
           <a:ln>
             <a:noFill/>
@@ -7637,7 +7637,7 @@
             <a:avLst/>
           </a:prstGeom>
           <a:solidFill>
-            <a:srgbClr val="1B7A6E"/>
+            <a:srgbClr val="D99A06"/>
           </a:solidFill>
           <a:ln>
             <a:noFill/>
@@ -7680,7 +7680,7 @@
             <a:avLst/>
           </a:prstGeom>
           <a:solidFill>
-            <a:srgbClr val="1B7A6E"/>
+            <a:srgbClr val="D99A06"/>
           </a:solidFill>
           <a:ln>
             <a:noFill/>
@@ -7875,7 +7875,7 @@
             <a:avLst/>
           </a:prstGeom>
           <a:solidFill>
-            <a:srgbClr val="1B7A6E"/>
+            <a:srgbClr val="D99A06"/>
           </a:solidFill>
           <a:ln>
             <a:noFill/>
@@ -7918,7 +7918,7 @@
             <a:avLst/>
           </a:prstGeom>
           <a:solidFill>
-            <a:srgbClr val="1B7A6E"/>
+            <a:srgbClr val="D99A06"/>
           </a:solidFill>
           <a:ln>
             <a:noFill/>
@@ -8200,7 +8200,7 @@
             <a:avLst/>
           </a:prstGeom>
           <a:solidFill>
-            <a:srgbClr val="1B7A6E"/>
+            <a:srgbClr val="D99A06"/>
           </a:solidFill>
           <a:ln>
             <a:noFill/>
@@ -8278,7 +8278,7 @@
             <a:avLst/>
           </a:prstGeom>
           <a:solidFill>
-            <a:srgbClr val="1B7A6E"/>
+            <a:srgbClr val="D99A06"/>
           </a:solidFill>
           <a:ln>
             <a:noFill/>
@@ -9136,7 +9136,7 @@
             <a:avLst/>
           </a:prstGeom>
           <a:solidFill>
-            <a:srgbClr val="1B7A6E"/>
+            <a:srgbClr val="D99A06"/>
           </a:solidFill>
           <a:ln>
             <a:noFill/>
@@ -9214,7 +9214,7 @@
             <a:avLst/>
           </a:prstGeom>
           <a:solidFill>
-            <a:srgbClr val="1B7A6E"/>
+            <a:srgbClr val="D99A06"/>
           </a:solidFill>
           <a:ln>
             <a:noFill/>
@@ -10075,7 +10075,7 @@
             <a:avLst/>
           </a:prstGeom>
           <a:solidFill>
-            <a:srgbClr val="1B7A6E"/>
+            <a:srgbClr val="D99A06"/>
           </a:solidFill>
           <a:ln>
             <a:noFill/>
@@ -10153,7 +10153,7 @@
             <a:avLst/>
           </a:prstGeom>
           <a:solidFill>
-            <a:srgbClr val="1B7A6E"/>
+            <a:srgbClr val="D99A06"/>
           </a:solidFill>
           <a:ln>
             <a:noFill/>
@@ -11415,7 +11415,7 @@
             <a:avLst/>
           </a:prstGeom>
           <a:solidFill>
-            <a:srgbClr val="1B7A6E"/>
+            <a:srgbClr val="D99A06"/>
           </a:solidFill>
           <a:ln>
             <a:noFill/>
@@ -11493,7 +11493,7 @@
             <a:avLst/>
           </a:prstGeom>
           <a:solidFill>
-            <a:srgbClr val="1B7A6E"/>
+            <a:srgbClr val="D99A06"/>
           </a:solidFill>
           <a:ln>
             <a:noFill/>
@@ -11883,8 +11883,8 @@
         </p:nvCxnSpPr>
         <p:spPr>
           <a:xfrm>
-            <a:off x="2560320" y="2103120"/>
-            <a:ext cx="530352" cy="731520"/>
+            <a:off x="2578608" y="2103120"/>
+            <a:ext cx="512064" cy="594360"/>
           </a:xfrm>
           <a:prstGeom prst="line">
             <a:avLst/>
@@ -11919,8 +11919,8 @@
         </p:nvCxnSpPr>
         <p:spPr>
           <a:xfrm flipV="1">
-            <a:off x="2560320" y="2834640"/>
-            <a:ext cx="530352" cy="411480"/>
+            <a:off x="2578608" y="3063240"/>
+            <a:ext cx="512064" cy="182880"/>
           </a:xfrm>
           <a:prstGeom prst="line">
             <a:avLst/>
@@ -11955,8 +11955,8 @@
         </p:nvCxnSpPr>
         <p:spPr>
           <a:xfrm flipV="1">
-            <a:off x="2560320" y="2834640"/>
-            <a:ext cx="530352" cy="1554480"/>
+            <a:off x="2578608" y="3429000"/>
+            <a:ext cx="512064" cy="960120"/>
           </a:xfrm>
           <a:prstGeom prst="line">
             <a:avLst/>
@@ -12253,7 +12253,7 @@
             <a:avLst/>
           </a:prstGeom>
           <a:solidFill>
-            <a:srgbClr val="1B7A6E"/>
+            <a:srgbClr val="D99A06"/>
           </a:solidFill>
           <a:ln>
             <a:noFill/>
@@ -12331,7 +12331,7 @@
             <a:avLst/>
           </a:prstGeom>
           <a:solidFill>
-            <a:srgbClr val="1B7A6E"/>
+            <a:srgbClr val="D99A06"/>
           </a:solidFill>
           <a:ln>
             <a:noFill/>
@@ -13369,7 +13369,7 @@
             <a:avLst/>
           </a:prstGeom>
           <a:solidFill>
-            <a:srgbClr val="1B7A6E"/>
+            <a:srgbClr val="D99A06"/>
           </a:solidFill>
           <a:ln>
             <a:noFill/>
@@ -13447,7 +13447,7 @@
             <a:avLst/>
           </a:prstGeom>
           <a:solidFill>
-            <a:srgbClr val="1B7A6E"/>
+            <a:srgbClr val="D99A06"/>
           </a:solidFill>
           <a:ln>
             <a:noFill/>
@@ -13537,7 +13537,7 @@
             <a:avLst/>
           </a:prstGeom>
           <a:solidFill>
-            <a:srgbClr val="1B7A6E"/>
+            <a:srgbClr val="D99A06"/>
           </a:solidFill>
           <a:ln>
             <a:noFill/>
@@ -13580,7 +13580,7 @@
             <a:avLst/>
           </a:prstGeom>
           <a:solidFill>
-            <a:srgbClr val="1B7A6E"/>
+            <a:srgbClr val="D99A06"/>
           </a:solidFill>
           <a:ln>
             <a:noFill/>
@@ -13756,7 +13756,7 @@
             <a:avLst/>
           </a:prstGeom>
           <a:solidFill>
-            <a:srgbClr val="1B7A6E"/>
+            <a:srgbClr val="D99A06"/>
           </a:solidFill>
           <a:ln>
             <a:noFill/>
@@ -13799,7 +13799,7 @@
             <a:avLst/>
           </a:prstGeom>
           <a:solidFill>
-            <a:srgbClr val="1B7A6E"/>
+            <a:srgbClr val="D99A06"/>
           </a:solidFill>
           <a:ln>
             <a:noFill/>
@@ -13975,7 +13975,7 @@
             <a:avLst/>
           </a:prstGeom>
           <a:solidFill>
-            <a:srgbClr val="1B7A6E"/>
+            <a:srgbClr val="D99A06"/>
           </a:solidFill>
           <a:ln>
             <a:noFill/>
@@ -14018,7 +14018,7 @@
             <a:avLst/>
           </a:prstGeom>
           <a:solidFill>
-            <a:srgbClr val="1B7A6E"/>
+            <a:srgbClr val="D99A06"/>
           </a:solidFill>
           <a:ln>
             <a:noFill/>
@@ -14194,7 +14194,7 @@
             <a:avLst/>
           </a:prstGeom>
           <a:solidFill>
-            <a:srgbClr val="1B7A6E"/>
+            <a:srgbClr val="D99A06"/>
           </a:solidFill>
           <a:ln>
             <a:noFill/>
@@ -14237,7 +14237,7 @@
             <a:avLst/>
           </a:prstGeom>
           <a:solidFill>
-            <a:srgbClr val="1B7A6E"/>
+            <a:srgbClr val="D99A06"/>
           </a:solidFill>
           <a:ln>
             <a:noFill/>
@@ -14413,7 +14413,7 @@
             <a:avLst/>
           </a:prstGeom>
           <a:solidFill>
-            <a:srgbClr val="1B7A6E"/>
+            <a:srgbClr val="D99A06"/>
           </a:solidFill>
           <a:ln>
             <a:noFill/>
@@ -14456,7 +14456,7 @@
             <a:avLst/>
           </a:prstGeom>
           <a:solidFill>
-            <a:srgbClr val="1B7A6E"/>
+            <a:srgbClr val="D99A06"/>
           </a:solidFill>
           <a:ln>
             <a:noFill/>
@@ -14632,7 +14632,7 @@
             <a:avLst/>
           </a:prstGeom>
           <a:solidFill>
-            <a:srgbClr val="1B7A6E"/>
+            <a:srgbClr val="D99A06"/>
           </a:solidFill>
           <a:ln>
             <a:noFill/>
@@ -14675,7 +14675,7 @@
             <a:avLst/>
           </a:prstGeom>
           <a:solidFill>
-            <a:srgbClr val="1B7A6E"/>
+            <a:srgbClr val="D99A06"/>
           </a:solidFill>
           <a:ln>
             <a:noFill/>
@@ -14851,7 +14851,7 @@
             <a:avLst/>
           </a:prstGeom>
           <a:solidFill>
-            <a:srgbClr val="1B7A6E"/>
+            <a:srgbClr val="D99A06"/>
           </a:solidFill>
           <a:ln>
             <a:noFill/>
@@ -14894,7 +14894,7 @@
             <a:avLst/>
           </a:prstGeom>
           <a:solidFill>
-            <a:srgbClr val="1B7A6E"/>
+            <a:srgbClr val="D99A06"/>
           </a:solidFill>
           <a:ln>
             <a:noFill/>
@@ -15070,7 +15070,7 @@
             <a:avLst/>
           </a:prstGeom>
           <a:solidFill>
-            <a:srgbClr val="1B7A6E"/>
+            <a:srgbClr val="D99A06"/>
           </a:solidFill>
           <a:ln>
             <a:noFill/>
@@ -15113,7 +15113,7 @@
             <a:avLst/>
           </a:prstGeom>
           <a:solidFill>
-            <a:srgbClr val="1B7A6E"/>
+            <a:srgbClr val="D99A06"/>
           </a:solidFill>
           <a:ln>
             <a:noFill/>
@@ -15338,7 +15338,7 @@
             <a:avLst/>
           </a:prstGeom>
           <a:solidFill>
-            <a:srgbClr val="1B7A6E"/>
+            <a:srgbClr val="D99A06"/>
           </a:solidFill>
           <a:ln>
             <a:noFill/>
@@ -15416,7 +15416,7 @@
             <a:avLst/>
           </a:prstGeom>
           <a:solidFill>
-            <a:srgbClr val="1B7A6E"/>
+            <a:srgbClr val="D99A06"/>
           </a:solidFill>
           <a:ln>
             <a:noFill/>
@@ -15506,7 +15506,7 @@
             <a:avLst/>
           </a:prstGeom>
           <a:solidFill>
-            <a:srgbClr val="1B7A6E"/>
+            <a:srgbClr val="D99A06"/>
           </a:solidFill>
           <a:ln>
             <a:noFill/>
@@ -15549,7 +15549,7 @@
             <a:avLst/>
           </a:prstGeom>
           <a:solidFill>
-            <a:srgbClr val="1B7A6E"/>
+            <a:srgbClr val="D99A06"/>
           </a:solidFill>
           <a:ln>
             <a:noFill/>
@@ -15706,7 +15706,7 @@
             <a:avLst/>
           </a:prstGeom>
           <a:solidFill>
-            <a:srgbClr val="1B7A6E"/>
+            <a:srgbClr val="D99A06"/>
           </a:solidFill>
           <a:ln>
             <a:noFill/>
@@ -15749,7 +15749,7 @@
             <a:avLst/>
           </a:prstGeom>
           <a:solidFill>
-            <a:srgbClr val="1B7A6E"/>
+            <a:srgbClr val="D99A06"/>
           </a:solidFill>
           <a:ln>
             <a:noFill/>
@@ -15906,7 +15906,7 @@
             <a:avLst/>
           </a:prstGeom>
           <a:solidFill>
-            <a:srgbClr val="1B7A6E"/>
+            <a:srgbClr val="D99A06"/>
           </a:solidFill>
           <a:ln>
             <a:noFill/>
@@ -15949,7 +15949,7 @@
             <a:avLst/>
           </a:prstGeom>
           <a:solidFill>
-            <a:srgbClr val="1B7A6E"/>
+            <a:srgbClr val="D99A06"/>
           </a:solidFill>
           <a:ln>
             <a:noFill/>
@@ -16155,7 +16155,7 @@
             <a:avLst/>
           </a:prstGeom>
           <a:solidFill>
-            <a:srgbClr val="1B7A6E"/>
+            <a:srgbClr val="D99A06"/>
           </a:solidFill>
           <a:ln>
             <a:noFill/>
@@ -16233,7 +16233,7 @@
             <a:avLst/>
           </a:prstGeom>
           <a:solidFill>
-            <a:srgbClr val="1B7A6E"/>
+            <a:srgbClr val="D99A06"/>
           </a:solidFill>
           <a:ln>
             <a:noFill/>
@@ -16830,7 +16830,7 @@
             <a:avLst/>
           </a:prstGeom>
           <a:solidFill>
-            <a:srgbClr val="1B7A6E"/>
+            <a:srgbClr val="D99A06"/>
           </a:solidFill>
           <a:ln>
             <a:noFill/>
@@ -16908,7 +16908,7 @@
             <a:avLst/>
           </a:prstGeom>
           <a:solidFill>
-            <a:srgbClr val="1B7A6E"/>
+            <a:srgbClr val="D99A06"/>
           </a:solidFill>
           <a:ln>
             <a:noFill/>
@@ -18050,7 +18050,7 @@
             <a:avLst/>
           </a:prstGeom>
           <a:solidFill>
-            <a:srgbClr val="1B7A6E"/>
+            <a:srgbClr val="D99A06"/>
           </a:solidFill>
           <a:ln>
             <a:noFill/>
@@ -18128,7 +18128,7 @@
             <a:avLst/>
           </a:prstGeom>
           <a:solidFill>
-            <a:srgbClr val="1B7A6E"/>
+            <a:srgbClr val="D99A06"/>
           </a:solidFill>
           <a:ln>
             <a:noFill/>
@@ -19176,7 +19176,7 @@
             <a:avLst/>
           </a:prstGeom>
           <a:solidFill>
-            <a:srgbClr val="1B7A6E"/>
+            <a:srgbClr val="D99A06"/>
           </a:solidFill>
           <a:ln>
             <a:noFill/>
@@ -19254,7 +19254,7 @@
             <a:avLst/>
           </a:prstGeom>
           <a:solidFill>
-            <a:srgbClr val="1B7A6E"/>
+            <a:srgbClr val="D99A06"/>
           </a:solidFill>
           <a:ln>
             <a:noFill/>
@@ -19707,7 +19707,7 @@
             <a:avLst/>
           </a:prstGeom>
           <a:solidFill>
-            <a:srgbClr val="1B7A6E"/>
+            <a:srgbClr val="D99A06"/>
           </a:solidFill>
           <a:ln>
             <a:noFill/>
@@ -19785,7 +19785,7 @@
             <a:avLst/>
           </a:prstGeom>
           <a:solidFill>
-            <a:srgbClr val="1B7A6E"/>
+            <a:srgbClr val="D99A06"/>
           </a:solidFill>
           <a:ln>
             <a:noFill/>
@@ -20286,7 +20286,7 @@
             <a:avLst/>
           </a:prstGeom>
           <a:solidFill>
-            <a:srgbClr val="1B7A6E"/>
+            <a:srgbClr val="D99A06"/>
           </a:solidFill>
           <a:ln>
             <a:noFill/>
@@ -20364,7 +20364,7 @@
             <a:avLst/>
           </a:prstGeom>
           <a:solidFill>
-            <a:srgbClr val="1B7A6E"/>
+            <a:srgbClr val="D99A06"/>
           </a:solidFill>
           <a:ln>
             <a:noFill/>
@@ -20454,7 +20454,7 @@
             <a:avLst/>
           </a:prstGeom>
           <a:solidFill>
-            <a:srgbClr val="1B7A6E"/>
+            <a:srgbClr val="D99A06"/>
           </a:solidFill>
           <a:ln>
             <a:noFill/>
@@ -20497,7 +20497,7 @@
             <a:avLst/>
           </a:prstGeom>
           <a:solidFill>
-            <a:srgbClr val="1B7A6E"/>
+            <a:srgbClr val="D99A06"/>
           </a:solidFill>
           <a:ln>
             <a:noFill/>
@@ -20692,7 +20692,7 @@
             <a:avLst/>
           </a:prstGeom>
           <a:solidFill>
-            <a:srgbClr val="1B7A6E"/>
+            <a:srgbClr val="D99A06"/>
           </a:solidFill>
           <a:ln>
             <a:noFill/>
@@ -20735,7 +20735,7 @@
             <a:avLst/>
           </a:prstGeom>
           <a:solidFill>
-            <a:srgbClr val="1B7A6E"/>
+            <a:srgbClr val="D99A06"/>
           </a:solidFill>
           <a:ln>
             <a:noFill/>
@@ -21052,7 +21052,7 @@
             <a:avLst/>
           </a:prstGeom>
           <a:solidFill>
-            <a:srgbClr val="1B7A6E"/>
+            <a:srgbClr val="D99A06"/>
           </a:solidFill>
           <a:ln>
             <a:noFill/>
@@ -21296,7 +21296,7 @@
             <a:avLst/>
           </a:prstGeom>
           <a:solidFill>
-            <a:srgbClr val="1B7A6E"/>
+            <a:srgbClr val="D99A06"/>
           </a:solidFill>
           <a:ln>
             <a:noFill/>
@@ -21374,7 +21374,7 @@
             <a:avLst/>
           </a:prstGeom>
           <a:solidFill>
-            <a:srgbClr val="1B7A6E"/>
+            <a:srgbClr val="D99A06"/>
           </a:solidFill>
           <a:ln>
             <a:noFill/>
@@ -21447,11 +21447,20 @@
             <a:r>
               <a:rPr sz="1600" b="1" i="0">
                 <a:solidFill>
+                  <a:srgbClr val="8A6204"/>
+                </a:solidFill>
+                <a:latin typeface="Calibri"/>
+              </a:rPr>
+              <a:t>1.  </a:t>
+            </a:r>
+            <a:r>
+              <a:rPr sz="1600" b="1">
+                <a:solidFill>
                   <a:srgbClr val="144E4C"/>
                 </a:solidFill>
                 <a:latin typeface="Calibri"/>
               </a:rPr>
-              <a:t>1.  Problem &amp; Motivation</a:t>
+              <a:t>Problem &amp; Motivation</a:t>
             </a:r>
           </a:p>
         </p:txBody>
@@ -21501,11 +21510,20 @@
             <a:r>
               <a:rPr sz="1600" b="1" i="0">
                 <a:solidFill>
+                  <a:srgbClr val="8A6204"/>
+                </a:solidFill>
+                <a:latin typeface="Calibri"/>
+              </a:rPr>
+              <a:t>2.  </a:t>
+            </a:r>
+            <a:r>
+              <a:rPr sz="1600" b="1">
+                <a:solidFill>
                   <a:srgbClr val="144E4C"/>
                 </a:solidFill>
                 <a:latin typeface="Calibri"/>
               </a:rPr>
-              <a:t>2.  Objectives &amp; Methodology</a:t>
+              <a:t>Objectives &amp; Methodology</a:t>
             </a:r>
           </a:p>
         </p:txBody>
@@ -21555,11 +21573,20 @@
             <a:r>
               <a:rPr sz="1600" b="1" i="0">
                 <a:solidFill>
+                  <a:srgbClr val="8A6204"/>
+                </a:solidFill>
+                <a:latin typeface="Calibri"/>
+              </a:rPr>
+              <a:t>3.  </a:t>
+            </a:r>
+            <a:r>
+              <a:rPr sz="1600" b="1">
+                <a:solidFill>
                   <a:srgbClr val="144E4C"/>
                 </a:solidFill>
                 <a:latin typeface="Calibri"/>
               </a:rPr>
-              <a:t>3.  Literature Review &amp; Gap Analysis</a:t>
+              <a:t>Literature Review &amp; Gap Analysis</a:t>
             </a:r>
           </a:p>
         </p:txBody>
@@ -21609,11 +21636,20 @@
             <a:r>
               <a:rPr sz="1600" b="1" i="0">
                 <a:solidFill>
+                  <a:srgbClr val="8A6204"/>
+                </a:solidFill>
+                <a:latin typeface="Calibri"/>
+              </a:rPr>
+              <a:t>4.  </a:t>
+            </a:r>
+            <a:r>
+              <a:rPr sz="1600" b="1">
+                <a:solidFill>
                   <a:srgbClr val="144E4C"/>
                 </a:solidFill>
                 <a:latin typeface="Calibri"/>
               </a:rPr>
-              <a:t>4.  Requirement Analysis</a:t>
+              <a:t>Requirement Analysis</a:t>
             </a:r>
           </a:p>
         </p:txBody>
@@ -21663,11 +21699,20 @@
             <a:r>
               <a:rPr sz="1600" b="1" i="0">
                 <a:solidFill>
+                  <a:srgbClr val="8A6204"/>
+                </a:solidFill>
+                <a:latin typeface="Calibri"/>
+              </a:rPr>
+              <a:t>5.  </a:t>
+            </a:r>
+            <a:r>
+              <a:rPr sz="1600" b="1">
+                <a:solidFill>
                   <a:srgbClr val="144E4C"/>
                 </a:solidFill>
                 <a:latin typeface="Calibri"/>
               </a:rPr>
-              <a:t>5.  Dataset Audit</a:t>
+              <a:t>Dataset Audit</a:t>
             </a:r>
           </a:p>
         </p:txBody>
@@ -21717,11 +21762,20 @@
             <a:r>
               <a:rPr sz="1600" b="1" i="0">
                 <a:solidFill>
+                  <a:srgbClr val="8A6204"/>
+                </a:solidFill>
+                <a:latin typeface="Calibri"/>
+              </a:rPr>
+              <a:t>6.  </a:t>
+            </a:r>
+            <a:r>
+              <a:rPr sz="1600" b="1">
+                <a:solidFill>
                   <a:srgbClr val="144E4C"/>
                 </a:solidFill>
                 <a:latin typeface="Calibri"/>
               </a:rPr>
-              <a:t>6.  System Design &amp; Diagrams</a:t>
+              <a:t>System Design &amp; Diagrams</a:t>
             </a:r>
           </a:p>
         </p:txBody>
@@ -21771,11 +21825,20 @@
             <a:r>
               <a:rPr sz="1600" b="1" i="0">
                 <a:solidFill>
+                  <a:srgbClr val="8A6204"/>
+                </a:solidFill>
+                <a:latin typeface="Calibri"/>
+              </a:rPr>
+              <a:t>7.  </a:t>
+            </a:r>
+            <a:r>
+              <a:rPr sz="1600" b="1">
+                <a:solidFill>
                   <a:srgbClr val="144E4C"/>
                 </a:solidFill>
                 <a:latin typeface="Calibri"/>
               </a:rPr>
-              <a:t>7.  Standards &amp; Constraints</a:t>
+              <a:t>Standards &amp; Constraints</a:t>
             </a:r>
           </a:p>
         </p:txBody>
@@ -21825,11 +21888,20 @@
             <a:r>
               <a:rPr sz="1600" b="1" i="0">
                 <a:solidFill>
+                  <a:srgbClr val="8A6204"/>
+                </a:solidFill>
+                <a:latin typeface="Calibri"/>
+              </a:rPr>
+              <a:t>8.  </a:t>
+            </a:r>
+            <a:r>
+              <a:rPr sz="1600" b="1">
+                <a:solidFill>
                   <a:srgbClr val="144E4C"/>
                 </a:solidFill>
                 <a:latin typeface="Calibri"/>
               </a:rPr>
-              <a:t>8.  Budget &amp; Project Plan</a:t>
+              <a:t>Budget &amp; Project Plan</a:t>
             </a:r>
           </a:p>
         </p:txBody>
@@ -21879,11 +21951,20 @@
             <a:r>
               <a:rPr sz="1600" b="1" i="0">
                 <a:solidFill>
+                  <a:srgbClr val="8A6204"/>
+                </a:solidFill>
+                <a:latin typeface="Calibri"/>
+              </a:rPr>
+              <a:t>9.  </a:t>
+            </a:r>
+            <a:r>
+              <a:rPr sz="1600" b="1">
+                <a:solidFill>
                   <a:srgbClr val="144E4C"/>
                 </a:solidFill>
                 <a:latin typeface="Calibri"/>
               </a:rPr>
-              <a:t>9.  Conclusion &amp; Future Work</a:t>
+              <a:t>Conclusion &amp; Future Work</a:t>
             </a:r>
           </a:p>
         </p:txBody>
@@ -21999,7 +22080,7 @@
             <a:avLst/>
           </a:prstGeom>
           <a:solidFill>
-            <a:srgbClr val="1B7A6E"/>
+            <a:srgbClr val="D99A06"/>
           </a:solidFill>
           <a:ln>
             <a:noFill/>
@@ -22077,7 +22158,7 @@
             <a:avLst/>
           </a:prstGeom>
           <a:solidFill>
-            <a:srgbClr val="1B7A6E"/>
+            <a:srgbClr val="D99A06"/>
           </a:solidFill>
           <a:ln>
             <a:noFill/>
@@ -22221,7 +22302,7 @@
             </a:avLst>
           </a:prstGeom>
           <a:solidFill>
-            <a:srgbClr val="144E4C"/>
+            <a:srgbClr val="D99A06"/>
           </a:solidFill>
           <a:ln>
             <a:noFill/>
@@ -22249,7 +22330,7 @@
             <a:r>
               <a:rPr sz="1600" b="1" i="0">
                 <a:solidFill>
-                  <a:srgbClr val="FFFFFF"/>
+                  <a:srgbClr val="144E4C"/>
                 </a:solidFill>
                 <a:latin typeface="Calibri"/>
               </a:rPr>
@@ -22369,7 +22450,7 @@
             <a:avLst/>
           </a:prstGeom>
           <a:solidFill>
-            <a:srgbClr val="1B7A6E"/>
+            <a:srgbClr val="D99A06"/>
           </a:solidFill>
           <a:ln>
             <a:noFill/>
@@ -22447,7 +22528,7 @@
             <a:avLst/>
           </a:prstGeom>
           <a:solidFill>
-            <a:srgbClr val="1B7A6E"/>
+            <a:srgbClr val="D99A06"/>
           </a:solidFill>
           <a:ln>
             <a:noFill/>
@@ -22685,7 +22766,7 @@
             <a:avLst/>
           </a:prstGeom>
           <a:solidFill>
-            <a:srgbClr val="1B7A6E"/>
+            <a:srgbClr val="D99A06"/>
           </a:solidFill>
           <a:ln>
             <a:noFill/>
@@ -22763,7 +22844,7 @@
             <a:avLst/>
           </a:prstGeom>
           <a:solidFill>
-            <a:srgbClr val="1B7A6E"/>
+            <a:srgbClr val="D99A06"/>
           </a:solidFill>
           <a:ln>
             <a:noFill/>
@@ -22806,7 +22887,7 @@
             <a:avLst/>
           </a:prstGeom>
           <a:solidFill>
-            <a:srgbClr val="1B7A6E"/>
+            <a:srgbClr val="D99A06"/>
           </a:solidFill>
           <a:ln>
             <a:noFill/>
@@ -22900,7 +22981,7 @@
             <a:avLst/>
           </a:prstGeom>
           <a:solidFill>
-            <a:srgbClr val="1B7A6E"/>
+            <a:srgbClr val="D99A06"/>
           </a:solidFill>
           <a:ln>
             <a:noFill/>
@@ -22994,7 +23075,7 @@
             <a:avLst/>
           </a:prstGeom>
           <a:solidFill>
-            <a:srgbClr val="1B7A6E"/>
+            <a:srgbClr val="D99A06"/>
           </a:solidFill>
           <a:ln>
             <a:noFill/>
@@ -23088,7 +23169,7 @@
             <a:avLst/>
           </a:prstGeom>
           <a:solidFill>
-            <a:srgbClr val="1B7A6E"/>
+            <a:srgbClr val="D99A06"/>
           </a:solidFill>
           <a:ln>
             <a:noFill/>
@@ -23182,7 +23263,7 @@
             <a:avLst/>
           </a:prstGeom>
           <a:solidFill>
-            <a:srgbClr val="1B7A6E"/>
+            <a:srgbClr val="D99A06"/>
           </a:solidFill>
           <a:ln>
             <a:noFill/>
@@ -23372,7 +23453,7 @@
             <a:avLst/>
           </a:prstGeom>
           <a:solidFill>
-            <a:srgbClr val="1B7A6E"/>
+            <a:srgbClr val="D99A06"/>
           </a:solidFill>
           <a:ln>
             <a:noFill/>
@@ -23450,7 +23531,7 @@
             <a:avLst/>
           </a:prstGeom>
           <a:solidFill>
-            <a:srgbClr val="1B7A6E"/>
+            <a:srgbClr val="D99A06"/>
           </a:solidFill>
           <a:ln>
             <a:noFill/>
@@ -23540,7 +23621,7 @@
             <a:avLst/>
           </a:prstGeom>
           <a:solidFill>
-            <a:srgbClr val="1B7A6E"/>
+            <a:srgbClr val="D99A06"/>
           </a:solidFill>
           <a:ln>
             <a:noFill/>
@@ -23583,7 +23664,7 @@
             <a:avLst/>
           </a:prstGeom>
           <a:solidFill>
-            <a:srgbClr val="1B7A6E"/>
+            <a:srgbClr val="D99A06"/>
           </a:solidFill>
           <a:ln>
             <a:noFill/>
@@ -23740,7 +23821,7 @@
             <a:avLst/>
           </a:prstGeom>
           <a:solidFill>
-            <a:srgbClr val="1B7A6E"/>
+            <a:srgbClr val="D99A06"/>
           </a:solidFill>
           <a:ln>
             <a:noFill/>
@@ -23783,7 +23864,7 @@
             <a:avLst/>
           </a:prstGeom>
           <a:solidFill>
-            <a:srgbClr val="1B7A6E"/>
+            <a:srgbClr val="D99A06"/>
           </a:solidFill>
           <a:ln>
             <a:noFill/>
@@ -23940,7 +24021,7 @@
             <a:avLst/>
           </a:prstGeom>
           <a:solidFill>
-            <a:srgbClr val="1B7A6E"/>
+            <a:srgbClr val="D99A06"/>
           </a:solidFill>
           <a:ln>
             <a:noFill/>
@@ -23983,7 +24064,7 @@
             <a:avLst/>
           </a:prstGeom>
           <a:solidFill>
-            <a:srgbClr val="1B7A6E"/>
+            <a:srgbClr val="D99A06"/>
           </a:solidFill>
           <a:ln>
             <a:noFill/>
@@ -24140,7 +24221,7 @@
             <a:avLst/>
           </a:prstGeom>
           <a:solidFill>
-            <a:srgbClr val="1B7A6E"/>
+            <a:srgbClr val="D99A06"/>
           </a:solidFill>
           <a:ln>
             <a:noFill/>
@@ -24183,7 +24264,7 @@
             <a:avLst/>
           </a:prstGeom>
           <a:solidFill>
-            <a:srgbClr val="1B7A6E"/>
+            <a:srgbClr val="D99A06"/>
           </a:solidFill>
           <a:ln>
             <a:noFill/>
@@ -24340,7 +24421,7 @@
             <a:avLst/>
           </a:prstGeom>
           <a:solidFill>
-            <a:srgbClr val="1B7A6E"/>
+            <a:srgbClr val="D99A06"/>
           </a:solidFill>
           <a:ln>
             <a:noFill/>
@@ -24383,7 +24464,7 @@
             <a:avLst/>
           </a:prstGeom>
           <a:solidFill>
-            <a:srgbClr val="1B7A6E"/>
+            <a:srgbClr val="D99A06"/>
           </a:solidFill>
           <a:ln>
             <a:noFill/>
@@ -24540,7 +24621,7 @@
             <a:avLst/>
           </a:prstGeom>
           <a:solidFill>
-            <a:srgbClr val="1B7A6E"/>
+            <a:srgbClr val="D99A06"/>
           </a:solidFill>
           <a:ln>
             <a:noFill/>
@@ -24583,7 +24664,7 @@
             <a:avLst/>
           </a:prstGeom>
           <a:solidFill>
-            <a:srgbClr val="1B7A6E"/>
+            <a:srgbClr val="D99A06"/>
           </a:solidFill>
           <a:ln>
             <a:noFill/>
@@ -24789,7 +24870,7 @@
             <a:avLst/>
           </a:prstGeom>
           <a:solidFill>
-            <a:srgbClr val="1B7A6E"/>
+            <a:srgbClr val="D99A06"/>
           </a:solidFill>
           <a:ln>
             <a:noFill/>
@@ -24867,7 +24948,7 @@
             <a:avLst/>
           </a:prstGeom>
           <a:solidFill>
-            <a:srgbClr val="1B7A6E"/>
+            <a:srgbClr val="D99A06"/>
           </a:solidFill>
           <a:ln>
             <a:noFill/>
@@ -25530,7 +25611,7 @@
             <a:avLst/>
           </a:prstGeom>
           <a:solidFill>
-            <a:srgbClr val="1B7A6E"/>
+            <a:srgbClr val="D99A06"/>
           </a:solidFill>
           <a:ln>
             <a:noFill/>
@@ -25608,7 +25689,7 @@
             <a:avLst/>
           </a:prstGeom>
           <a:solidFill>
-            <a:srgbClr val="1B7A6E"/>
+            <a:srgbClr val="D99A06"/>
           </a:solidFill>
           <a:ln>
             <a:noFill/>
@@ -25651,7 +25732,7 @@
             <a:avLst/>
           </a:prstGeom>
           <a:solidFill>
-            <a:srgbClr val="1B7A6E"/>
+            <a:srgbClr val="D99A06"/>
           </a:solidFill>
           <a:ln>
             <a:noFill/>
@@ -25679,7 +25760,7 @@
             <a:r>
               <a:rPr sz="1500" b="1" i="0">
                 <a:solidFill>
-                  <a:srgbClr val="FFFFFF"/>
+                  <a:srgbClr val="144E4C"/>
                 </a:solidFill>
                 <a:latin typeface="Calibri"/>
               </a:rPr>
@@ -25745,7 +25826,7 @@
             <a:avLst/>
           </a:prstGeom>
           <a:solidFill>
-            <a:srgbClr val="1B7A6E"/>
+            <a:srgbClr val="D99A06"/>
           </a:solidFill>
           <a:ln>
             <a:noFill/>
@@ -25773,7 +25854,7 @@
             <a:r>
               <a:rPr sz="1500" b="1" i="0">
                 <a:solidFill>
-                  <a:srgbClr val="FFFFFF"/>
+                  <a:srgbClr val="144E4C"/>
                 </a:solidFill>
                 <a:latin typeface="Calibri"/>
               </a:rPr>
@@ -25839,7 +25920,7 @@
             <a:avLst/>
           </a:prstGeom>
           <a:solidFill>
-            <a:srgbClr val="1B7A6E"/>
+            <a:srgbClr val="D99A06"/>
           </a:solidFill>
           <a:ln>
             <a:noFill/>
@@ -25867,7 +25948,7 @@
             <a:r>
               <a:rPr sz="1500" b="1" i="0">
                 <a:solidFill>
-                  <a:srgbClr val="FFFFFF"/>
+                  <a:srgbClr val="144E4C"/>
                 </a:solidFill>
                 <a:latin typeface="Calibri"/>
               </a:rPr>
@@ -25933,7 +26014,7 @@
             <a:avLst/>
           </a:prstGeom>
           <a:solidFill>
-            <a:srgbClr val="1B7A6E"/>
+            <a:srgbClr val="D99A06"/>
           </a:solidFill>
           <a:ln>
             <a:noFill/>
@@ -25961,7 +26042,7 @@
             <a:r>
               <a:rPr sz="1500" b="1" i="0">
                 <a:solidFill>
-                  <a:srgbClr val="FFFFFF"/>
+                  <a:srgbClr val="144E4C"/>
                 </a:solidFill>
                 <a:latin typeface="Calibri"/>
               </a:rPr>

--- a/slides/FYDP-I_Defect-to-Delivery.pptx
+++ b/slides/FYDP-I_Defect-to-Delivery.pptx
@@ -11529,8 +11529,8 @@
         </p:nvSpPr>
         <p:spPr>
           <a:xfrm>
-            <a:off x="640080" y="1645920"/>
-            <a:ext cx="1920240" cy="914400"/>
+            <a:off x="640080" y="1554480"/>
+            <a:ext cx="1920240" cy="868680"/>
           </a:xfrm>
           <a:prstGeom prst="roundRect">
             <a:avLst>
@@ -11588,8 +11588,8 @@
         </p:nvSpPr>
         <p:spPr>
           <a:xfrm>
-            <a:off x="640080" y="2788920"/>
-            <a:ext cx="1920240" cy="914400"/>
+            <a:off x="640080" y="2606040"/>
+            <a:ext cx="1920240" cy="868680"/>
           </a:xfrm>
           <a:prstGeom prst="roundRect">
             <a:avLst>
@@ -11647,8 +11647,8 @@
         </p:nvSpPr>
         <p:spPr>
           <a:xfrm>
-            <a:off x="640080" y="3931920"/>
-            <a:ext cx="1920240" cy="914400"/>
+            <a:off x="640080" y="3657600"/>
+            <a:ext cx="1920240" cy="868680"/>
           </a:xfrm>
           <a:prstGeom prst="roundRect">
             <a:avLst>
@@ -11706,7 +11706,7 @@
         </p:nvSpPr>
         <p:spPr>
           <a:xfrm>
-            <a:off x="3108960" y="2468880"/>
+            <a:off x="3108960" y="2377440"/>
             <a:ext cx="2194560" cy="1188720"/>
           </a:xfrm>
           <a:prstGeom prst="roundRect">
@@ -11765,7 +11765,7 @@
         </p:nvSpPr>
         <p:spPr>
           <a:xfrm>
-            <a:off x="5852160" y="2468880"/>
+            <a:off x="5852160" y="2377440"/>
             <a:ext cx="2011680" cy="1188720"/>
           </a:xfrm>
           <a:prstGeom prst="roundRect">
@@ -11824,7 +11824,7 @@
         </p:nvSpPr>
         <p:spPr>
           <a:xfrm>
-            <a:off x="8412480" y="2468880"/>
+            <a:off x="8412480" y="2377440"/>
             <a:ext cx="2743200" cy="1188720"/>
           </a:xfrm>
           <a:prstGeom prst="roundRect">
@@ -11883,8 +11883,8 @@
         </p:nvCxnSpPr>
         <p:spPr>
           <a:xfrm>
-            <a:off x="2578608" y="2103120"/>
-            <a:ext cx="512064" cy="594360"/>
+            <a:off x="2578608" y="1984248"/>
+            <a:ext cx="512064" cy="667512"/>
           </a:xfrm>
           <a:prstGeom prst="line">
             <a:avLst/>
@@ -11919,8 +11919,8 @@
         </p:nvCxnSpPr>
         <p:spPr>
           <a:xfrm flipV="1">
-            <a:off x="2578608" y="3063240"/>
-            <a:ext cx="512064" cy="182880"/>
+            <a:off x="2578608" y="2971800"/>
+            <a:ext cx="512064" cy="64008"/>
           </a:xfrm>
           <a:prstGeom prst="line">
             <a:avLst/>
@@ -11955,8 +11955,8 @@
         </p:nvCxnSpPr>
         <p:spPr>
           <a:xfrm flipV="1">
-            <a:off x="2578608" y="3429000"/>
-            <a:ext cx="512064" cy="960120"/>
+            <a:off x="2578608" y="3291840"/>
+            <a:ext cx="512064" cy="795528"/>
           </a:xfrm>
           <a:prstGeom prst="line">
             <a:avLst/>
@@ -11991,7 +11991,7 @@
         </p:nvCxnSpPr>
         <p:spPr>
           <a:xfrm>
-            <a:off x="5303520" y="3063240"/>
+            <a:off x="5303520" y="2971800"/>
             <a:ext cx="530352" cy="0"/>
           </a:xfrm>
           <a:prstGeom prst="line">
@@ -12027,7 +12027,7 @@
         </p:nvCxnSpPr>
         <p:spPr>
           <a:xfrm>
-            <a:off x="7863840" y="3063240"/>
+            <a:off x="7863840" y="2971800"/>
             <a:ext cx="530352" cy="0"/>
           </a:xfrm>
           <a:prstGeom prst="line">
@@ -12063,8 +12063,8 @@
         </p:nvSpPr>
         <p:spPr>
           <a:xfrm>
-            <a:off x="1463040" y="4297680"/>
-            <a:ext cx="9235440" cy="777240"/>
+            <a:off x="1463040" y="5029200"/>
+            <a:ext cx="9235440" cy="731520"/>
           </a:xfrm>
           <a:prstGeom prst="roundRect">
             <a:avLst/>
@@ -12115,8 +12115,8 @@
         </p:nvSpPr>
         <p:spPr>
           <a:xfrm>
-            <a:off x="548640" y="5212080"/>
-            <a:ext cx="11064240" cy="640080"/>
+            <a:off x="548640" y="5852160"/>
+            <a:ext cx="11064240" cy="502920"/>
           </a:xfrm>
           <a:prstGeom prst="rect">
             <a:avLst/>
@@ -12131,7 +12131,7 @@
           <a:p>
             <a:pPr algn="ctr"/>
             <a:r>
-              <a:rPr sz="1200" b="0" i="0">
+              <a:rPr sz="1150" b="0" i="0">
                 <a:solidFill>
                   <a:srgbClr val="5B6570"/>
                 </a:solidFill>

--- a/slides/FYDP-I_Defect-to-Delivery.pptx
+++ b/slides/FYDP-I_Defect-to-Delivery.pptx
@@ -32,6 +32,8 @@
     <p:sldId id="280" r:id="rId31"/>
     <p:sldId id="281" r:id="rId32"/>
     <p:sldId id="282" r:id="rId33"/>
+    <p:sldId id="283" r:id="rId34"/>
+    <p:sldId id="284" r:id="rId35"/>
   </p:sldIdLst>
   <p:sldSz cx="12188952" cy="6858000" type="screen4x3"/>
   <p:notesSz cx="6858000" cy="9144000"/>
@@ -3187,7 +3189,7 @@
                 </a:solidFill>
                 <a:latin typeface="Calibri"/>
               </a:rPr>
-              <a:t>1 / 27</a:t>
+              <a:t>1 / 31</a:t>
             </a:r>
           </a:p>
         </p:txBody>
@@ -3503,7 +3505,7 @@
                 </a:solidFill>
                 <a:latin typeface="Calibri"/>
               </a:rPr>
-              <a:t>10 / 27</a:t>
+              <a:t>10 / 31</a:t>
             </a:r>
           </a:p>
         </p:txBody>
@@ -3639,7 +3641,7 @@
         </p:nvGraphicFramePr>
         <p:xfrm>
           <a:off x="548640" y="1417320"/>
-          <a:ext cx="11064240" cy="5029200"/>
+          <a:ext cx="11064240" cy="5486400"/>
         </p:xfrm>
         <a:graphic>
           <a:graphicData uri="http://schemas.openxmlformats.org/drawingml/2006/table">
@@ -4253,7 +4255,7 @@
                           </a:solidFill>
                           <a:latin typeface="Calibri"/>
                         </a:rPr>
-                        <a:t>8</a:t>
+                        <a:t>5</a:t>
                       </a:r>
                     </a:p>
                   </a:txBody>
@@ -4370,7 +4372,7 @@
                           </a:solidFill>
                           <a:latin typeface="Calibri"/>
                         </a:rPr>
-                        <a:t>11</a:t>
+                        <a:t>6</a:t>
                       </a:r>
                     </a:p>
                   </a:txBody>
@@ -4487,7 +4489,7 @@
                           </a:solidFill>
                           <a:latin typeface="Calibri"/>
                         </a:rPr>
-                        <a:t>12</a:t>
+                        <a:t>7</a:t>
                       </a:r>
                     </a:p>
                   </a:txBody>
@@ -4604,7 +4606,7 @@
                           </a:solidFill>
                           <a:latin typeface="Calibri"/>
                         </a:rPr>
-                        <a:t>15</a:t>
+                        <a:t>8</a:t>
                       </a:r>
                     </a:p>
                   </a:txBody>
@@ -4721,7 +4723,7 @@
                           </a:solidFill>
                           <a:latin typeface="Calibri"/>
                         </a:rPr>
-                        <a:t>17</a:t>
+                        <a:t>9</a:t>
                       </a:r>
                     </a:p>
                   </a:txBody>
@@ -4838,7 +4840,7 @@
                           </a:solidFill>
                           <a:latin typeface="Calibri"/>
                         </a:rPr>
-                        <a:t>19 / 20</a:t>
+                        <a:t>10</a:t>
                       </a:r>
                     </a:p>
                   </a:txBody>
@@ -4941,6 +4943,123 @@
                   </a:tcPr>
                 </a:tc>
               </a:tr>
+              <a:tr h="457200">
+                <a:tc>
+                  <a:txBody>
+                    <a:bodyPr/>
+                    <a:lstStyle/>
+                    <a:p>
+                      <a:pPr algn="ctr"/>
+                      <a:r>
+                        <a:rPr sz="1200" b="0" i="0">
+                          <a:solidFill>
+                            <a:srgbClr val="1F2937"/>
+                          </a:solidFill>
+                          <a:latin typeface="Calibri"/>
+                        </a:rPr>
+                        <a:t>11</a:t>
+                      </a:r>
+                    </a:p>
+                  </a:txBody>
+                  <a:tcPr anchor="ctr" marL="73152" marR="73152">
+                    <a:solidFill>
+                      <a:srgbClr val="FFFFFF"/>
+                    </a:solidFill>
+                  </a:tcPr>
+                </a:tc>
+                <a:tc>
+                  <a:txBody>
+                    <a:bodyPr/>
+                    <a:lstStyle/>
+                    <a:p>
+                      <a:pPr algn="ctr"/>
+                      <a:r>
+                        <a:rPr sz="1200" b="0" i="0">
+                          <a:solidFill>
+                            <a:srgbClr val="1F2937"/>
+                          </a:solidFill>
+                          <a:latin typeface="Calibri"/>
+                        </a:rPr>
+                        <a:t>Literature Survey Summary</a:t>
+                      </a:r>
+                    </a:p>
+                  </a:txBody>
+                  <a:tcPr anchor="ctr" marL="73152" marR="73152">
+                    <a:solidFill>
+                      <a:srgbClr val="FFFFFF"/>
+                    </a:solidFill>
+                  </a:tcPr>
+                </a:tc>
+                <a:tc>
+                  <a:txBody>
+                    <a:bodyPr/>
+                    <a:lstStyle/>
+                    <a:p>
+                      <a:pPr algn="ctr"/>
+                      <a:r>
+                        <a:rPr sz="1200" b="0" i="0">
+                          <a:solidFill>
+                            <a:srgbClr val="1F2937"/>
+                          </a:solidFill>
+                          <a:latin typeface="Calibri"/>
+                        </a:rPr>
+                        <a:t>—</a:t>
+                      </a:r>
+                    </a:p>
+                  </a:txBody>
+                  <a:tcPr anchor="ctr" marL="73152" marR="73152">
+                    <a:solidFill>
+                      <a:srgbClr val="FFFFFF"/>
+                    </a:solidFill>
+                  </a:tcPr>
+                </a:tc>
+                <a:tc>
+                  <a:txBody>
+                    <a:bodyPr/>
+                    <a:lstStyle/>
+                    <a:p>
+                      <a:pPr algn="ctr"/>
+                      <a:r>
+                        <a:rPr sz="1200" b="0" i="0">
+                          <a:solidFill>
+                            <a:srgbClr val="1F2937"/>
+                          </a:solidFill>
+                          <a:latin typeface="Calibri"/>
+                        </a:rPr>
+                        <a:t>20 works surveyed</a:t>
+                      </a:r>
+                    </a:p>
+                  </a:txBody>
+                  <a:tcPr anchor="ctr" marL="73152" marR="73152">
+                    <a:solidFill>
+                      <a:srgbClr val="FFFFFF"/>
+                    </a:solidFill>
+                  </a:tcPr>
+                </a:tc>
+                <a:tc>
+                  <a:txBody>
+                    <a:bodyPr/>
+                    <a:lstStyle/>
+                    <a:p>
+                      <a:pPr algn="ctr"/>
+                      <a:r>
+                        <a:rPr sz="1200" b="0" i="0">
+                          <a:solidFill>
+                            <a:srgbClr val="1F2937"/>
+                          </a:solidFill>
+                          <a:latin typeface="Calibri"/>
+                        </a:rPr>
+                        <a:t>2026</a:t>
+                      </a:r>
+                    </a:p>
+                  </a:txBody>
+                  <a:tcPr anchor="ctr" marL="73152" marR="73152">
+                    <a:solidFill>
+                      <a:srgbClr val="FFFFFF"/>
+                    </a:solidFill>
+                  </a:tcPr>
+                </a:tc>
+              </a:tr>
             </a:tbl>
           </a:graphicData>
         </a:graphic>
@@ -5036,7 +5155,7 @@
                 </a:solidFill>
                 <a:latin typeface="Calibri"/>
               </a:rPr>
-              <a:t>11 / 27</a:t>
+              <a:t>11 / 31</a:t>
             </a:r>
           </a:p>
         </p:txBody>
@@ -5295,7 +5414,7 @@
             <a:r>
               <a:rPr sz="1700" b="1" i="0">
                 <a:solidFill>
-                  <a:srgbClr val="FFFFFF"/>
+                  <a:srgbClr val="144E4C"/>
                 </a:solidFill>
                 <a:latin typeface="Calibri"/>
               </a:rPr>
@@ -5495,7 +5614,7 @@
             <a:r>
               <a:rPr sz="1700" b="1" i="0">
                 <a:solidFill>
-                  <a:srgbClr val="FFFFFF"/>
+                  <a:srgbClr val="144E4C"/>
                 </a:solidFill>
                 <a:latin typeface="Calibri"/>
               </a:rPr>
@@ -5695,7 +5814,7 @@
             <a:r>
               <a:rPr sz="1700" b="1" i="0">
                 <a:solidFill>
-                  <a:srgbClr val="FFFFFF"/>
+                  <a:srgbClr val="144E4C"/>
                 </a:solidFill>
                 <a:latin typeface="Calibri"/>
               </a:rPr>
@@ -5895,7 +6014,7 @@
             <a:r>
               <a:rPr sz="1700" b="1" i="0">
                 <a:solidFill>
-                  <a:srgbClr val="FFFFFF"/>
+                  <a:srgbClr val="144E4C"/>
                 </a:solidFill>
                 <a:latin typeface="Calibri"/>
               </a:rPr>
@@ -6088,7 +6207,7 @@
                 </a:solidFill>
                 <a:latin typeface="Calibri"/>
               </a:rPr>
-              <a:t>12 / 27</a:t>
+              <a:t>12 / 31</a:t>
             </a:r>
           </a:p>
         </p:txBody>
@@ -6465,7 +6584,7 @@
                 </a:solidFill>
                 <a:latin typeface="Calibri"/>
               </a:rPr>
-              <a:t>13 / 27</a:t>
+              <a:t>13 / 31</a:t>
             </a:r>
           </a:p>
         </p:txBody>
@@ -7449,7 +7568,7 @@
                 </a:solidFill>
                 <a:latin typeface="Calibri"/>
               </a:rPr>
-              <a:t>14 / 27</a:t>
+              <a:t>14 / 31</a:t>
             </a:r>
           </a:p>
         </p:txBody>
@@ -7708,7 +7827,7 @@
             <a:r>
               <a:rPr sz="1700" b="1" i="0">
                 <a:solidFill>
-                  <a:srgbClr val="FFFFFF"/>
+                  <a:srgbClr val="144E4C"/>
                 </a:solidFill>
                 <a:latin typeface="Calibri"/>
               </a:rPr>
@@ -7946,7 +8065,7 @@
             <a:r>
               <a:rPr sz="1700" b="1" i="0">
                 <a:solidFill>
-                  <a:srgbClr val="FFFFFF"/>
+                  <a:srgbClr val="144E4C"/>
                 </a:solidFill>
                 <a:latin typeface="Calibri"/>
               </a:rPr>
@@ -8180,7 +8299,7 @@
                 </a:solidFill>
                 <a:latin typeface="Calibri"/>
               </a:rPr>
-              <a:t>15 / 27</a:t>
+              <a:t>15 / 31</a:t>
             </a:r>
           </a:p>
         </p:txBody>
@@ -8258,7 +8377,7 @@
                 </a:solidFill>
                 <a:latin typeface="Georgia"/>
               </a:rPr>
-              <a:t>System Diagram (Fig. 3.1)</a:t>
+              <a:t>Pilot Result</a:t>
             </a:r>
           </a:p>
         </p:txBody>
@@ -8308,663 +8427,14 @@
       </p:sp>
       <p:sp>
         <p:nvSpPr>
-          <p:cNvPr id="7" name="Rounded Rectangle 6"/>
-          <p:cNvSpPr/>
-          <p:nvPr/>
-        </p:nvSpPr>
-        <p:spPr>
-          <a:xfrm>
-            <a:off x="640080" y="2011680"/>
-            <a:ext cx="1417320" cy="2103120"/>
-          </a:xfrm>
-          <a:prstGeom prst="roundRect">
-            <a:avLst>
-              <a:gd name="adj" fmla="val 10000"/>
-            </a:avLst>
-          </a:prstGeom>
-          <a:solidFill>
-            <a:srgbClr val="FFFFFF"/>
-          </a:solidFill>
-          <a:ln w="19050">
-            <a:solidFill>
-              <a:srgbClr val="1B7A6E"/>
-            </a:solidFill>
-          </a:ln>
-        </p:spPr>
-        <p:style>
-          <a:lnRef idx="1">
-            <a:schemeClr val="accent1"/>
-          </a:lnRef>
-          <a:fillRef idx="3">
-            <a:schemeClr val="accent1"/>
-          </a:fillRef>
-          <a:effectRef idx="2">
-            <a:schemeClr val="accent1"/>
-          </a:effectRef>
-          <a:fontRef idx="minor">
-            <a:schemeClr val="lt1"/>
-          </a:fontRef>
-        </p:style>
-        <p:txBody>
-          <a:bodyPr rtlCol="0" anchor="ctr" wrap="square">
-            <a:normAutofit/>
-          </a:bodyPr>
-          <a:lstStyle/>
-          <a:p>
-            <a:pPr algn="ctr"/>
-            <a:r>
-              <a:rPr sz="1300" b="0" i="0">
-                <a:solidFill>
-                  <a:srgbClr val="1F2937"/>
-                </a:solidFill>
-                <a:latin typeface="Calibri"/>
-              </a:rPr>
-              <a:t>Camera /
-Image Stream</a:t>
-            </a:r>
-          </a:p>
-        </p:txBody>
-      </p:sp>
-      <p:sp>
-        <p:nvSpPr>
-          <p:cNvPr id="8" name="Rounded Rectangle 7"/>
-          <p:cNvSpPr/>
-          <p:nvPr/>
-        </p:nvSpPr>
-        <p:spPr>
-          <a:xfrm>
-            <a:off x="2377440" y="2011680"/>
-            <a:ext cx="1417320" cy="2103120"/>
-          </a:xfrm>
-          <a:prstGeom prst="roundRect">
-            <a:avLst>
-              <a:gd name="adj" fmla="val 10000"/>
-            </a:avLst>
-          </a:prstGeom>
-          <a:solidFill>
-            <a:srgbClr val="FFFFFF"/>
-          </a:solidFill>
-          <a:ln w="19050">
-            <a:solidFill>
-              <a:srgbClr val="1B7A6E"/>
-            </a:solidFill>
-          </a:ln>
-        </p:spPr>
-        <p:style>
-          <a:lnRef idx="1">
-            <a:schemeClr val="accent1"/>
-          </a:lnRef>
-          <a:fillRef idx="3">
-            <a:schemeClr val="accent1"/>
-          </a:fillRef>
-          <a:effectRef idx="2">
-            <a:schemeClr val="accent1"/>
-          </a:effectRef>
-          <a:fontRef idx="minor">
-            <a:schemeClr val="lt1"/>
-          </a:fontRef>
-        </p:style>
-        <p:txBody>
-          <a:bodyPr rtlCol="0" anchor="ctr" wrap="square">
-            <a:normAutofit/>
-          </a:bodyPr>
-          <a:lstStyle/>
-          <a:p>
-            <a:pPr algn="ctr"/>
-            <a:r>
-              <a:rPr sz="1300" b="0" i="0">
-                <a:solidFill>
-                  <a:srgbClr val="1F2937"/>
-                </a:solidFill>
-                <a:latin typeface="Calibri"/>
-              </a:rPr>
-              <a:t>Industrial
-Preprocessing:
-Denoise, Deblur,
-Low-Light Norm</a:t>
-            </a:r>
-          </a:p>
-        </p:txBody>
-      </p:sp>
-      <p:cxnSp>
-        <p:nvCxnSpPr>
-          <p:cNvPr id="9" name="Connector 8"/>
-          <p:cNvCxnSpPr/>
-          <p:nvPr/>
-        </p:nvCxnSpPr>
-        <p:spPr>
-          <a:xfrm>
-            <a:off x="2084832" y="3063240"/>
-            <a:ext cx="310896" cy="0"/>
-          </a:xfrm>
-          <a:prstGeom prst="line">
-            <a:avLst/>
-          </a:prstGeom>
-          <a:ln w="19050">
-            <a:solidFill>
-              <a:srgbClr val="1F2937"/>
-            </a:solidFill>
-            <a:tailEnd type="triangle" w="med" len="med"/>
-          </a:ln>
-        </p:spPr>
-        <p:style>
-          <a:lnRef idx="2">
-            <a:schemeClr val="accent1"/>
-          </a:lnRef>
-          <a:fillRef idx="0">
-            <a:schemeClr val="accent1"/>
-          </a:fillRef>
-          <a:effectRef idx="1">
-            <a:schemeClr val="accent1"/>
-          </a:effectRef>
-          <a:fontRef idx="minor">
-            <a:schemeClr val="tx1"/>
-          </a:fontRef>
-        </p:style>
-      </p:cxnSp>
-      <p:sp>
-        <p:nvSpPr>
-          <p:cNvPr id="10" name="Rounded Rectangle 9"/>
-          <p:cNvSpPr/>
-          <p:nvPr/>
-        </p:nvSpPr>
-        <p:spPr>
-          <a:xfrm>
-            <a:off x="4114800" y="2011680"/>
-            <a:ext cx="1417320" cy="2103120"/>
-          </a:xfrm>
-          <a:prstGeom prst="roundRect">
-            <a:avLst>
-              <a:gd name="adj" fmla="val 10000"/>
-            </a:avLst>
-          </a:prstGeom>
-          <a:solidFill>
-            <a:srgbClr val="FFFFFF"/>
-          </a:solidFill>
-          <a:ln w="19050">
-            <a:solidFill>
-              <a:srgbClr val="1B7A6E"/>
-            </a:solidFill>
-          </a:ln>
-        </p:spPr>
-        <p:style>
-          <a:lnRef idx="1">
-            <a:schemeClr val="accent1"/>
-          </a:lnRef>
-          <a:fillRef idx="3">
-            <a:schemeClr val="accent1"/>
-          </a:fillRef>
-          <a:effectRef idx="2">
-            <a:schemeClr val="accent1"/>
-          </a:effectRef>
-          <a:fontRef idx="minor">
-            <a:schemeClr val="lt1"/>
-          </a:fontRef>
-        </p:style>
-        <p:txBody>
-          <a:bodyPr rtlCol="0" anchor="ctr" wrap="square">
-            <a:normAutofit/>
-          </a:bodyPr>
-          <a:lstStyle/>
-          <a:p>
-            <a:pPr algn="ctr"/>
-            <a:r>
-              <a:rPr sz="1300" b="0" i="0">
-                <a:solidFill>
-                  <a:srgbClr val="1F2937"/>
-                </a:solidFill>
-                <a:latin typeface="Calibri"/>
-              </a:rPr>
-              <a:t>YOLO Defect
-Detector:
-Type + Boxes
-And Masks</a:t>
-            </a:r>
-          </a:p>
-        </p:txBody>
-      </p:sp>
-      <p:cxnSp>
-        <p:nvCxnSpPr>
-          <p:cNvPr id="11" name="Connector 10"/>
-          <p:cNvCxnSpPr/>
-          <p:nvPr/>
-        </p:nvCxnSpPr>
-        <p:spPr>
-          <a:xfrm>
-            <a:off x="3822191" y="3063240"/>
-            <a:ext cx="310896" cy="0"/>
-          </a:xfrm>
-          <a:prstGeom prst="line">
-            <a:avLst/>
-          </a:prstGeom>
-          <a:ln w="19050">
-            <a:solidFill>
-              <a:srgbClr val="1F2937"/>
-            </a:solidFill>
-            <a:tailEnd type="triangle" w="med" len="med"/>
-          </a:ln>
-        </p:spPr>
-        <p:style>
-          <a:lnRef idx="2">
-            <a:schemeClr val="accent1"/>
-          </a:lnRef>
-          <a:fillRef idx="0">
-            <a:schemeClr val="accent1"/>
-          </a:fillRef>
-          <a:effectRef idx="1">
-            <a:schemeClr val="accent1"/>
-          </a:effectRef>
-          <a:fontRef idx="minor">
-            <a:schemeClr val="tx1"/>
-          </a:fontRef>
-        </p:style>
-      </p:cxnSp>
-      <p:sp>
-        <p:nvSpPr>
-          <p:cNvPr id="12" name="Rounded Rectangle 11"/>
-          <p:cNvSpPr/>
-          <p:nvPr/>
-        </p:nvSpPr>
-        <p:spPr>
-          <a:xfrm>
-            <a:off x="5852160" y="2011680"/>
-            <a:ext cx="1417320" cy="2103120"/>
-          </a:xfrm>
-          <a:prstGeom prst="roundRect">
-            <a:avLst>
-              <a:gd name="adj" fmla="val 10000"/>
-            </a:avLst>
-          </a:prstGeom>
-          <a:solidFill>
-            <a:srgbClr val="FFFFFF"/>
-          </a:solidFill>
-          <a:ln w="19050">
-            <a:solidFill>
-              <a:srgbClr val="1B7A6E"/>
-            </a:solidFill>
-          </a:ln>
-        </p:spPr>
-        <p:style>
-          <a:lnRef idx="1">
-            <a:schemeClr val="accent1"/>
-          </a:lnRef>
-          <a:fillRef idx="3">
-            <a:schemeClr val="accent1"/>
-          </a:fillRef>
-          <a:effectRef idx="2">
-            <a:schemeClr val="accent1"/>
-          </a:effectRef>
-          <a:fontRef idx="minor">
-            <a:schemeClr val="lt1"/>
-          </a:fontRef>
-        </p:style>
-        <p:txBody>
-          <a:bodyPr rtlCol="0" anchor="ctr" wrap="square">
-            <a:normAutofit/>
-          </a:bodyPr>
-          <a:lstStyle/>
-          <a:p>
-            <a:pPr algn="ctr"/>
-            <a:r>
-              <a:rPr sz="1300" b="0" i="0">
-                <a:solidFill>
-                  <a:srgbClr val="1F2937"/>
-                </a:solidFill>
-                <a:latin typeface="Calibri"/>
-              </a:rPr>
-              <a:t>Metadata
-Bridge:
-Ds + Rolling
-Average</a:t>
-            </a:r>
-          </a:p>
-        </p:txBody>
-      </p:sp>
-      <p:cxnSp>
-        <p:nvCxnSpPr>
-          <p:cNvPr id="13" name="Connector 12"/>
-          <p:cNvCxnSpPr/>
-          <p:nvPr/>
-        </p:nvCxnSpPr>
-        <p:spPr>
-          <a:xfrm>
-            <a:off x="5559552" y="3063240"/>
-            <a:ext cx="310896" cy="0"/>
-          </a:xfrm>
-          <a:prstGeom prst="line">
-            <a:avLst/>
-          </a:prstGeom>
-          <a:ln w="19050">
-            <a:solidFill>
-              <a:srgbClr val="1F2937"/>
-            </a:solidFill>
-            <a:tailEnd type="triangle" w="med" len="med"/>
-          </a:ln>
-        </p:spPr>
-        <p:style>
-          <a:lnRef idx="2">
-            <a:schemeClr val="accent1"/>
-          </a:lnRef>
-          <a:fillRef idx="0">
-            <a:schemeClr val="accent1"/>
-          </a:fillRef>
-          <a:effectRef idx="1">
-            <a:schemeClr val="accent1"/>
-          </a:effectRef>
-          <a:fontRef idx="minor">
-            <a:schemeClr val="tx1"/>
-          </a:fontRef>
-        </p:style>
-      </p:cxnSp>
-      <p:sp>
-        <p:nvSpPr>
-          <p:cNvPr id="14" name="Rounded Rectangle 13"/>
-          <p:cNvSpPr/>
-          <p:nvPr/>
-        </p:nvSpPr>
-        <p:spPr>
-          <a:xfrm>
-            <a:off x="7589520" y="2011680"/>
-            <a:ext cx="1417320" cy="2103120"/>
-          </a:xfrm>
-          <a:prstGeom prst="roundRect">
-            <a:avLst>
-              <a:gd name="adj" fmla="val 10000"/>
-            </a:avLst>
-          </a:prstGeom>
-          <a:solidFill>
-            <a:srgbClr val="FFFFFF"/>
-          </a:solidFill>
-          <a:ln w="19050">
-            <a:solidFill>
-              <a:srgbClr val="1B7A6E"/>
-            </a:solidFill>
-          </a:ln>
-        </p:spPr>
-        <p:style>
-          <a:lnRef idx="1">
-            <a:schemeClr val="accent1"/>
-          </a:lnRef>
-          <a:fillRef idx="3">
-            <a:schemeClr val="accent1"/>
-          </a:fillRef>
-          <a:effectRef idx="2">
-            <a:schemeClr val="accent1"/>
-          </a:effectRef>
-          <a:fontRef idx="minor">
-            <a:schemeClr val="lt1"/>
-          </a:fontRef>
-        </p:style>
-        <p:txBody>
-          <a:bodyPr rtlCol="0" anchor="ctr" wrap="square">
-            <a:normAutofit/>
-          </a:bodyPr>
-          <a:lstStyle/>
-          <a:p>
-            <a:pPr algn="ctr"/>
-            <a:r>
-              <a:rPr sz="1300" b="0" i="0">
-                <a:solidFill>
-                  <a:srgbClr val="1F2937"/>
-                </a:solidFill>
-                <a:latin typeface="Calibri"/>
-              </a:rPr>
-              <a:t>Lead Time
-Predictor:
-Random Forest</a:t>
-            </a:r>
-          </a:p>
-        </p:txBody>
-      </p:sp>
-      <p:cxnSp>
-        <p:nvCxnSpPr>
-          <p:cNvPr id="15" name="Connector 14"/>
-          <p:cNvCxnSpPr/>
-          <p:nvPr/>
-        </p:nvCxnSpPr>
-        <p:spPr>
-          <a:xfrm>
-            <a:off x="7296912" y="3063240"/>
-            <a:ext cx="310896" cy="0"/>
-          </a:xfrm>
-          <a:prstGeom prst="line">
-            <a:avLst/>
-          </a:prstGeom>
-          <a:ln w="19050">
-            <a:solidFill>
-              <a:srgbClr val="1F2937"/>
-            </a:solidFill>
-            <a:tailEnd type="triangle" w="med" len="med"/>
-          </a:ln>
-        </p:spPr>
-        <p:style>
-          <a:lnRef idx="2">
-            <a:schemeClr val="accent1"/>
-          </a:lnRef>
-          <a:fillRef idx="0">
-            <a:schemeClr val="accent1"/>
-          </a:fillRef>
-          <a:effectRef idx="1">
-            <a:schemeClr val="accent1"/>
-          </a:effectRef>
-          <a:fontRef idx="minor">
-            <a:schemeClr val="tx1"/>
-          </a:fontRef>
-        </p:style>
-      </p:cxnSp>
-      <p:sp>
-        <p:nvSpPr>
-          <p:cNvPr id="16" name="Rounded Rectangle 15"/>
-          <p:cNvSpPr/>
-          <p:nvPr/>
-        </p:nvSpPr>
-        <p:spPr>
-          <a:xfrm>
-            <a:off x="9509760" y="2011680"/>
-            <a:ext cx="1417320" cy="2103120"/>
-          </a:xfrm>
-          <a:prstGeom prst="roundRect">
-            <a:avLst>
-              <a:gd name="adj" fmla="val 10000"/>
-            </a:avLst>
-          </a:prstGeom>
-          <a:solidFill>
-            <a:srgbClr val="FFFFFF"/>
-          </a:solidFill>
-          <a:ln w="19050">
-            <a:solidFill>
-              <a:srgbClr val="1B7A6E"/>
-            </a:solidFill>
-          </a:ln>
-        </p:spPr>
-        <p:style>
-          <a:lnRef idx="1">
-            <a:schemeClr val="accent1"/>
-          </a:lnRef>
-          <a:fillRef idx="3">
-            <a:schemeClr val="accent1"/>
-          </a:fillRef>
-          <a:effectRef idx="2">
-            <a:schemeClr val="accent1"/>
-          </a:effectRef>
-          <a:fontRef idx="minor">
-            <a:schemeClr val="lt1"/>
-          </a:fontRef>
-        </p:style>
-        <p:txBody>
-          <a:bodyPr rtlCol="0" anchor="ctr" wrap="square">
-            <a:normAutofit/>
-          </a:bodyPr>
-          <a:lstStyle/>
-          <a:p>
-            <a:pPr algn="ctr"/>
-            <a:r>
-              <a:rPr sz="1300" b="0" i="0">
-                <a:solidFill>
-                  <a:srgbClr val="1F2937"/>
-                </a:solidFill>
-                <a:latin typeface="Calibri"/>
-              </a:rPr>
-              <a:t>Planner
-Dashboard</a:t>
-            </a:r>
-          </a:p>
-        </p:txBody>
-      </p:sp>
-      <p:cxnSp>
-        <p:nvCxnSpPr>
-          <p:cNvPr id="17" name="Connector 16"/>
-          <p:cNvCxnSpPr/>
-          <p:nvPr/>
-        </p:nvCxnSpPr>
-        <p:spPr>
-          <a:xfrm>
-            <a:off x="9217152" y="3063240"/>
-            <a:ext cx="310896" cy="0"/>
-          </a:xfrm>
-          <a:prstGeom prst="line">
-            <a:avLst/>
-          </a:prstGeom>
-          <a:ln w="19050">
-            <a:solidFill>
-              <a:srgbClr val="1F2937"/>
-            </a:solidFill>
-            <a:tailEnd type="triangle" w="med" len="med"/>
-          </a:ln>
-        </p:spPr>
-        <p:style>
-          <a:lnRef idx="2">
-            <a:schemeClr val="accent1"/>
-          </a:lnRef>
-          <a:fillRef idx="0">
-            <a:schemeClr val="accent1"/>
-          </a:fillRef>
-          <a:effectRef idx="1">
-            <a:schemeClr val="accent1"/>
-          </a:effectRef>
-          <a:fontRef idx="minor">
-            <a:schemeClr val="tx1"/>
-          </a:fontRef>
-        </p:style>
-      </p:cxnSp>
-      <p:cxnSp>
-        <p:nvCxnSpPr>
-          <p:cNvPr id="18" name="Connector 17"/>
-          <p:cNvCxnSpPr/>
-          <p:nvPr/>
-        </p:nvCxnSpPr>
-        <p:spPr>
-          <a:xfrm>
-            <a:off x="10241280" y="4133087"/>
-            <a:ext cx="0" cy="713233"/>
-          </a:xfrm>
-          <a:prstGeom prst="line">
-            <a:avLst/>
-          </a:prstGeom>
-          <a:ln w="19050">
-            <a:solidFill>
-              <a:srgbClr val="5B6570"/>
-            </a:solidFill>
-            <a:tailEnd type="triangle" w="med" len="med"/>
-          </a:ln>
-        </p:spPr>
-        <p:style>
-          <a:lnRef idx="2">
-            <a:schemeClr val="accent1"/>
-          </a:lnRef>
-          <a:fillRef idx="0">
-            <a:schemeClr val="accent1"/>
-          </a:fillRef>
-          <a:effectRef idx="1">
-            <a:schemeClr val="accent1"/>
-          </a:effectRef>
-          <a:fontRef idx="minor">
-            <a:schemeClr val="tx1"/>
-          </a:fontRef>
-        </p:style>
-      </p:cxnSp>
-      <p:cxnSp>
-        <p:nvCxnSpPr>
-          <p:cNvPr id="19" name="Connector 18"/>
-          <p:cNvCxnSpPr/>
-          <p:nvPr/>
-        </p:nvCxnSpPr>
-        <p:spPr>
-          <a:xfrm flipH="1">
-            <a:off x="1371600" y="4864608"/>
-            <a:ext cx="8851392" cy="0"/>
-          </a:xfrm>
-          <a:prstGeom prst="line">
-            <a:avLst/>
-          </a:prstGeom>
-          <a:ln w="19050">
-            <a:solidFill>
-              <a:srgbClr val="5B6570"/>
-            </a:solidFill>
-            <a:tailEnd type="triangle" w="med" len="med"/>
-          </a:ln>
-        </p:spPr>
-        <p:style>
-          <a:lnRef idx="2">
-            <a:schemeClr val="accent1"/>
-          </a:lnRef>
-          <a:fillRef idx="0">
-            <a:schemeClr val="accent1"/>
-          </a:fillRef>
-          <a:effectRef idx="1">
-            <a:schemeClr val="accent1"/>
-          </a:effectRef>
-          <a:fontRef idx="minor">
-            <a:schemeClr val="tx1"/>
-          </a:fontRef>
-        </p:style>
-      </p:cxnSp>
-      <p:cxnSp>
-        <p:nvCxnSpPr>
-          <p:cNvPr id="20" name="Connector 19"/>
-          <p:cNvCxnSpPr/>
-          <p:nvPr/>
-        </p:nvCxnSpPr>
-        <p:spPr>
-          <a:xfrm flipV="1">
-            <a:off x="1353312" y="4133087"/>
-            <a:ext cx="0" cy="713233"/>
-          </a:xfrm>
-          <a:prstGeom prst="line">
-            <a:avLst/>
-          </a:prstGeom>
-          <a:ln w="19050">
-            <a:solidFill>
-              <a:srgbClr val="5B6570"/>
-            </a:solidFill>
-            <a:tailEnd type="triangle" w="med" len="med"/>
-          </a:ln>
-        </p:spPr>
-        <p:style>
-          <a:lnRef idx="2">
-            <a:schemeClr val="accent1"/>
-          </a:lnRef>
-          <a:fillRef idx="0">
-            <a:schemeClr val="accent1"/>
-          </a:fillRef>
-          <a:effectRef idx="1">
-            <a:schemeClr val="accent1"/>
-          </a:effectRef>
-          <a:fontRef idx="minor">
-            <a:schemeClr val="tx1"/>
-          </a:fontRef>
-        </p:style>
-      </p:cxnSp>
-      <p:sp>
-        <p:nvSpPr>
-          <p:cNvPr id="21" name="TextBox 20"/>
+          <p:cNvPr id="7" name="TextBox 6"/>
           <p:cNvSpPr txBox="1"/>
           <p:nvPr/>
         </p:nvSpPr>
         <p:spPr>
           <a:xfrm>
-            <a:off x="3291840" y="4224528"/>
-            <a:ext cx="5577840" cy="457200"/>
+            <a:off x="548640" y="1463040"/>
+            <a:ext cx="11064240" cy="2743200"/>
           </a:xfrm>
           <a:prstGeom prst="rect">
             <a:avLst/>
@@ -8972,55 +8442,103 @@
           <a:noFill/>
         </p:spPr>
         <p:txBody>
-          <a:bodyPr wrap="square" anchor="ctr">
+          <a:bodyPr wrap="square">
             <a:spAutoFit/>
           </a:bodyPr>
           <a:lstStyle/>
           <a:p>
-            <a:pPr algn="ctr"/>
-            <a:r>
-              <a:rPr sz="1400" b="1" i="0">
-                <a:solidFill>
-                  <a:srgbClr val="5B6570"/>
+            <a:pPr algn="l">
+              <a:spcBef>
+                <a:spcPts val="0"/>
+              </a:spcBef>
+              <a:spcAft>
+                <a:spcPts val="800"/>
+              </a:spcAft>
+            </a:pPr>
+            <a:r>
+              <a:rPr sz="1500" b="0" i="0">
+                <a:solidFill>
+                  <a:srgbClr val="1F2937"/>
                 </a:solidFill>
                 <a:latin typeface="Calibri"/>
               </a:rPr>
-              <a:t>Closed-Loop Feedback</a:t>
-            </a:r>
-          </a:p>
-        </p:txBody>
-      </p:sp>
-      <p:sp>
-        <p:nvSpPr>
-          <p:cNvPr id="22" name="TextBox 21"/>
-          <p:cNvSpPr txBox="1"/>
-          <p:nvPr/>
-        </p:nvSpPr>
-        <p:spPr>
-          <a:xfrm>
-            <a:off x="548640" y="5623560"/>
-            <a:ext cx="11064240" cy="457200"/>
-          </a:xfrm>
-          <a:prstGeom prst="rect">
-            <a:avLst/>
-          </a:prstGeom>
-          <a:noFill/>
-        </p:spPr>
-        <p:txBody>
-          <a:bodyPr wrap="square" anchor="ctr">
-            <a:spAutoFit/>
-          </a:bodyPr>
-          <a:lstStyle/>
-          <a:p>
-            <a:pPr algn="ctr"/>
-            <a:r>
-              <a:rPr sz="1250" b="0" i="0">
-                <a:solidFill>
-                  <a:srgbClr val="5B6570"/>
+              <a:t>▪  naive=0.937 (n=510), honest=0.940 (n=468), accuracy_drop=-0.003.</a:t>
+            </a:r>
+          </a:p>
+          <a:p>
+            <a:pPr algn="l">
+              <a:spcBef>
+                <a:spcPts val="0"/>
+              </a:spcBef>
+              <a:spcAft>
+                <a:spcPts val="800"/>
+              </a:spcAft>
+            </a:pPr>
+            <a:r>
+              <a:rPr sz="1500" b="0" i="0">
+                <a:solidFill>
+                  <a:srgbClr val="1F2937"/>
                 </a:solidFill>
                 <a:latin typeface="Calibri"/>
               </a:rPr>
-              <a:t>Camera → Preprocessing → YOLO Detector → Metadata Bridge (Ds) → Random-Forest Lead-Time Predictor → Planner Dashboard.</a:t>
+              <a:t>▪  The 98% prior claim is unreproducible under clean conditions.</a:t>
+            </a:r>
+          </a:p>
+          <a:p>
+            <a:pPr algn="l">
+              <a:spcBef>
+                <a:spcPts val="0"/>
+              </a:spcBef>
+              <a:spcAft>
+                <a:spcPts val="800"/>
+              </a:spcAft>
+            </a:pPr>
+            <a:r>
+              <a:rPr sz="1500" b="0" i="0">
+                <a:solidFill>
+                  <a:srgbClr val="1F2937"/>
+                </a:solidFill>
+                <a:latin typeface="Calibri"/>
+              </a:rPr>
+              <a:t>▪  Per-class honest F1: defect_free 0.98, stain 0.94, hole 0.88,</a:t>
+            </a:r>
+          </a:p>
+          <a:p>
+            <a:pPr algn="l">
+              <a:spcBef>
+                <a:spcPts val="0"/>
+              </a:spcBef>
+              <a:spcAft>
+                <a:spcPts val="800"/>
+              </a:spcAft>
+            </a:pPr>
+            <a:r>
+              <a:rPr sz="1500" b="0" i="0">
+                <a:solidFill>
+                  <a:srgbClr val="1F2937"/>
+                </a:solidFill>
+                <a:latin typeface="Calibri"/>
+              </a:rPr>
+              <a:t>▪  horizontal 0.79 (recall 0.68), Vertical 0.70, lines too small to quote.</a:t>
+            </a:r>
+          </a:p>
+          <a:p>
+            <a:pPr algn="l">
+              <a:spcBef>
+                <a:spcPts val="0"/>
+              </a:spcBef>
+              <a:spcAft>
+                <a:spcPts val="800"/>
+              </a:spcAft>
+            </a:pPr>
+            <a:r>
+              <a:rPr sz="1500" b="0" i="0">
+                <a:solidFill>
+                  <a:srgbClr val="1F2937"/>
+                </a:solidFill>
+                <a:latin typeface="Calibri"/>
+              </a:rPr>
+              <a:t>▪  Conclusion: audit supported; claim void; Track 2 MAY START.</a:t>
             </a:r>
           </a:p>
         </p:txBody>
@@ -9116,7 +8634,7 @@
                 </a:solidFill>
                 <a:latin typeface="Calibri"/>
               </a:rPr>
-              <a:t>16 / 27</a:t>
+              <a:t>16 / 31</a:t>
             </a:r>
           </a:p>
         </p:txBody>
@@ -9194,7 +8712,7 @@
                 </a:solidFill>
                 <a:latin typeface="Georgia"/>
               </a:rPr>
-              <a:t>Workflow Flowchart (Fig. 3.2)</a:t>
+              <a:t>System Diagram (Fig. 3.1)</a:t>
             </a:r>
           </a:p>
         </p:txBody>
@@ -9250,8 +8768,8 @@
         </p:nvSpPr>
         <p:spPr>
           <a:xfrm>
-            <a:off x="822960" y="1417320"/>
-            <a:ext cx="2011680" cy="502920"/>
+            <a:off x="640080" y="2011680"/>
+            <a:ext cx="1417320" cy="2103120"/>
           </a:xfrm>
           <a:prstGeom prst="roundRect">
             <a:avLst>
@@ -9289,13 +8807,14 @@
           <a:p>
             <a:pPr algn="ctr"/>
             <a:r>
-              <a:rPr sz="1250" b="1" i="0">
+              <a:rPr sz="1300" b="0" i="0">
                 <a:solidFill>
                   <a:srgbClr val="1F2937"/>
                 </a:solidFill>
                 <a:latin typeface="Calibri"/>
               </a:rPr>
-              <a:t>Start</a:t>
+              <a:t>Camera /
+Image Stream</a:t>
             </a:r>
           </a:p>
         </p:txBody>
@@ -9308,8 +8827,8 @@
         </p:nvSpPr>
         <p:spPr>
           <a:xfrm>
-            <a:off x="822960" y="2103120"/>
-            <a:ext cx="2011680" cy="640080"/>
+            <a:off x="2377440" y="2011680"/>
+            <a:ext cx="1417320" cy="2103120"/>
           </a:xfrm>
           <a:prstGeom prst="roundRect">
             <a:avLst>
@@ -9347,27 +8866,66 @@
           <a:p>
             <a:pPr algn="ctr"/>
             <a:r>
-              <a:rPr sz="1250" b="0" i="0">
+              <a:rPr sz="1300" b="0" i="0">
                 <a:solidFill>
                   <a:srgbClr val="1F2937"/>
                 </a:solidFill>
                 <a:latin typeface="Calibri"/>
               </a:rPr>
-              <a:t>Capture Fabric Image / Stream</a:t>
-            </a:r>
-          </a:p>
-        </p:txBody>
-      </p:sp>
-      <p:sp>
-        <p:nvSpPr>
-          <p:cNvPr id="9" name="Rounded Rectangle 8"/>
+              <a:t>Industrial
+Preprocessing:
+Denoise, Deblur,
+Low-Light Norm</a:t>
+            </a:r>
+          </a:p>
+        </p:txBody>
+      </p:sp>
+      <p:cxnSp>
+        <p:nvCxnSpPr>
+          <p:cNvPr id="9" name="Connector 8"/>
+          <p:cNvCxnSpPr/>
+          <p:nvPr/>
+        </p:nvCxnSpPr>
+        <p:spPr>
+          <a:xfrm>
+            <a:off x="2084832" y="3063240"/>
+            <a:ext cx="310896" cy="0"/>
+          </a:xfrm>
+          <a:prstGeom prst="line">
+            <a:avLst/>
+          </a:prstGeom>
+          <a:ln w="19050">
+            <a:solidFill>
+              <a:srgbClr val="1F2937"/>
+            </a:solidFill>
+            <a:tailEnd type="triangle" w="med" len="med"/>
+          </a:ln>
+        </p:spPr>
+        <p:style>
+          <a:lnRef idx="2">
+            <a:schemeClr val="accent1"/>
+          </a:lnRef>
+          <a:fillRef idx="0">
+            <a:schemeClr val="accent1"/>
+          </a:fillRef>
+          <a:effectRef idx="1">
+            <a:schemeClr val="accent1"/>
+          </a:effectRef>
+          <a:fontRef idx="minor">
+            <a:schemeClr val="tx1"/>
+          </a:fontRef>
+        </p:style>
+      </p:cxnSp>
+      <p:sp>
+        <p:nvSpPr>
+          <p:cNvPr id="10" name="Rounded Rectangle 9"/>
           <p:cNvSpPr/>
           <p:nvPr/>
         </p:nvSpPr>
         <p:spPr>
           <a:xfrm>
-            <a:off x="822960" y="2926080"/>
-            <a:ext cx="2011680" cy="731520"/>
+            <a:off x="4114800" y="2011680"/>
+            <a:ext cx="1417320" cy="2103120"/>
           </a:xfrm>
           <a:prstGeom prst="roundRect">
             <a:avLst>
@@ -9405,28 +8963,66 @@
           <a:p>
             <a:pPr algn="ctr"/>
             <a:r>
-              <a:rPr sz="1150" b="0" i="0">
+              <a:rPr sz="1300" b="0" i="0">
                 <a:solidFill>
                   <a:srgbClr val="1F2937"/>
                 </a:solidFill>
                 <a:latin typeface="Calibri"/>
               </a:rPr>
-              <a:t>Preprocessing
-(Resize, Noise Removal, Enhance)</a:t>
-            </a:r>
-          </a:p>
-        </p:txBody>
-      </p:sp>
-      <p:sp>
-        <p:nvSpPr>
-          <p:cNvPr id="10" name="Rounded Rectangle 9"/>
+              <a:t>YOLO Defect
+Detector:
+Type + Boxes
+And Masks</a:t>
+            </a:r>
+          </a:p>
+        </p:txBody>
+      </p:sp>
+      <p:cxnSp>
+        <p:nvCxnSpPr>
+          <p:cNvPr id="11" name="Connector 10"/>
+          <p:cNvCxnSpPr/>
+          <p:nvPr/>
+        </p:nvCxnSpPr>
+        <p:spPr>
+          <a:xfrm>
+            <a:off x="3822191" y="3063240"/>
+            <a:ext cx="310896" cy="0"/>
+          </a:xfrm>
+          <a:prstGeom prst="line">
+            <a:avLst/>
+          </a:prstGeom>
+          <a:ln w="19050">
+            <a:solidFill>
+              <a:srgbClr val="1F2937"/>
+            </a:solidFill>
+            <a:tailEnd type="triangle" w="med" len="med"/>
+          </a:ln>
+        </p:spPr>
+        <p:style>
+          <a:lnRef idx="2">
+            <a:schemeClr val="accent1"/>
+          </a:lnRef>
+          <a:fillRef idx="0">
+            <a:schemeClr val="accent1"/>
+          </a:fillRef>
+          <a:effectRef idx="1">
+            <a:schemeClr val="accent1"/>
+          </a:effectRef>
+          <a:fontRef idx="minor">
+            <a:schemeClr val="tx1"/>
+          </a:fontRef>
+        </p:style>
+      </p:cxnSp>
+      <p:sp>
+        <p:nvSpPr>
+          <p:cNvPr id="12" name="Rounded Rectangle 11"/>
           <p:cNvSpPr/>
           <p:nvPr/>
         </p:nvSpPr>
         <p:spPr>
           <a:xfrm>
-            <a:off x="822960" y="3840480"/>
-            <a:ext cx="2011680" cy="731520"/>
+            <a:off x="5852160" y="2011680"/>
+            <a:ext cx="1417320" cy="2103120"/>
           </a:xfrm>
           <a:prstGeom prst="roundRect">
             <a:avLst>
@@ -9464,31 +9060,71 @@
           <a:p>
             <a:pPr algn="ctr"/>
             <a:r>
-              <a:rPr sz="1150" b="0" i="0">
+              <a:rPr sz="1300" b="0" i="0">
                 <a:solidFill>
                   <a:srgbClr val="1F2937"/>
                 </a:solidFill>
                 <a:latin typeface="Calibri"/>
               </a:rPr>
-              <a:t>YOLO Defect Detection
-(Type + Boxes / Masks)</a:t>
-            </a:r>
-          </a:p>
-        </p:txBody>
-      </p:sp>
-      <p:sp>
-        <p:nvSpPr>
-          <p:cNvPr id="11" name="Diamond 10"/>
+              <a:t>Metadata
+Bridge:
+Ds + Rolling
+Average</a:t>
+            </a:r>
+          </a:p>
+        </p:txBody>
+      </p:sp>
+      <p:cxnSp>
+        <p:nvCxnSpPr>
+          <p:cNvPr id="13" name="Connector 12"/>
+          <p:cNvCxnSpPr/>
+          <p:nvPr/>
+        </p:nvCxnSpPr>
+        <p:spPr>
+          <a:xfrm>
+            <a:off x="5559552" y="3063240"/>
+            <a:ext cx="310896" cy="0"/>
+          </a:xfrm>
+          <a:prstGeom prst="line">
+            <a:avLst/>
+          </a:prstGeom>
+          <a:ln w="19050">
+            <a:solidFill>
+              <a:srgbClr val="1F2937"/>
+            </a:solidFill>
+            <a:tailEnd type="triangle" w="med" len="med"/>
+          </a:ln>
+        </p:spPr>
+        <p:style>
+          <a:lnRef idx="2">
+            <a:schemeClr val="accent1"/>
+          </a:lnRef>
+          <a:fillRef idx="0">
+            <a:schemeClr val="accent1"/>
+          </a:fillRef>
+          <a:effectRef idx="1">
+            <a:schemeClr val="accent1"/>
+          </a:effectRef>
+          <a:fontRef idx="minor">
+            <a:schemeClr val="tx1"/>
+          </a:fontRef>
+        </p:style>
+      </p:cxnSp>
+      <p:sp>
+        <p:nvSpPr>
+          <p:cNvPr id="14" name="Rounded Rectangle 13"/>
           <p:cNvSpPr/>
           <p:nvPr/>
         </p:nvSpPr>
         <p:spPr>
           <a:xfrm>
-            <a:off x="822960" y="4754880"/>
-            <a:ext cx="2011680" cy="822960"/>
-          </a:xfrm>
-          <a:prstGeom prst="diamond">
-            <a:avLst/>
+            <a:off x="7589520" y="2011680"/>
+            <a:ext cx="1417320" cy="2103120"/>
+          </a:xfrm>
+          <a:prstGeom prst="roundRect">
+            <a:avLst>
+              <a:gd name="adj" fmla="val 10000"/>
+            </a:avLst>
           </a:prstGeom>
           <a:solidFill>
             <a:srgbClr val="FFFFFF"/>
@@ -9521,27 +9157,65 @@
           <a:p>
             <a:pPr algn="ctr"/>
             <a:r>
-              <a:rPr sz="1250" b="0" i="0">
+              <a:rPr sz="1300" b="0" i="0">
                 <a:solidFill>
                   <a:srgbClr val="1F2937"/>
                 </a:solidFill>
                 <a:latin typeface="Calibri"/>
               </a:rPr>
-              <a:t>Defect Detected?</a:t>
-            </a:r>
-          </a:p>
-        </p:txBody>
-      </p:sp>
-      <p:sp>
-        <p:nvSpPr>
-          <p:cNvPr id="12" name="Rounded Rectangle 11"/>
+              <a:t>Lead Time
+Predictor:
+Random Forest</a:t>
+            </a:r>
+          </a:p>
+        </p:txBody>
+      </p:sp>
+      <p:cxnSp>
+        <p:nvCxnSpPr>
+          <p:cNvPr id="15" name="Connector 14"/>
+          <p:cNvCxnSpPr/>
+          <p:nvPr/>
+        </p:nvCxnSpPr>
+        <p:spPr>
+          <a:xfrm>
+            <a:off x="7296912" y="3063240"/>
+            <a:ext cx="310896" cy="0"/>
+          </a:xfrm>
+          <a:prstGeom prst="line">
+            <a:avLst/>
+          </a:prstGeom>
+          <a:ln w="19050">
+            <a:solidFill>
+              <a:srgbClr val="1F2937"/>
+            </a:solidFill>
+            <a:tailEnd type="triangle" w="med" len="med"/>
+          </a:ln>
+        </p:spPr>
+        <p:style>
+          <a:lnRef idx="2">
+            <a:schemeClr val="accent1"/>
+          </a:lnRef>
+          <a:fillRef idx="0">
+            <a:schemeClr val="accent1"/>
+          </a:fillRef>
+          <a:effectRef idx="1">
+            <a:schemeClr val="accent1"/>
+          </a:effectRef>
+          <a:fontRef idx="minor">
+            <a:schemeClr val="tx1"/>
+          </a:fontRef>
+        </p:style>
+      </p:cxnSp>
+      <p:sp>
+        <p:nvSpPr>
+          <p:cNvPr id="16" name="Rounded Rectangle 15"/>
           <p:cNvSpPr/>
           <p:nvPr/>
         </p:nvSpPr>
         <p:spPr>
           <a:xfrm>
-            <a:off x="3383280" y="4754880"/>
-            <a:ext cx="2011680" cy="822960"/>
+            <a:off x="9509760" y="2011680"/>
+            <a:ext cx="1417320" cy="2103120"/>
           </a:xfrm>
           <a:prstGeom prst="roundRect">
             <a:avLst>
@@ -9579,184 +9253,18 @@
           <a:p>
             <a:pPr algn="ctr"/>
             <a:r>
-              <a:rPr sz="1100" b="0" i="0">
+              <a:rPr sz="1300" b="0" i="0">
                 <a:solidFill>
                   <a:srgbClr val="1F2937"/>
                 </a:solidFill>
                 <a:latin typeface="Calibri"/>
               </a:rPr>
-              <a:t>Identify Defect Type
-(Hole / Horizontal / Vertical / Lines / Stain)</a:t>
-            </a:r>
-          </a:p>
-        </p:txBody>
-      </p:sp>
-      <p:sp>
-        <p:nvSpPr>
-          <p:cNvPr id="13" name="Rounded Rectangle 12"/>
-          <p:cNvSpPr/>
-          <p:nvPr/>
-        </p:nvSpPr>
-        <p:spPr>
-          <a:xfrm>
-            <a:off x="822960" y="5760720"/>
-            <a:ext cx="2011680" cy="411480"/>
-          </a:xfrm>
-          <a:prstGeom prst="roundRect">
-            <a:avLst>
-              <a:gd name="adj" fmla="val 10000"/>
-            </a:avLst>
-          </a:prstGeom>
-          <a:solidFill>
-            <a:srgbClr val="FFFFFF"/>
-          </a:solidFill>
-          <a:ln w="19050">
-            <a:solidFill>
-              <a:srgbClr val="1B7A6E"/>
-            </a:solidFill>
-          </a:ln>
-        </p:spPr>
-        <p:style>
-          <a:lnRef idx="1">
-            <a:schemeClr val="accent1"/>
-          </a:lnRef>
-          <a:fillRef idx="3">
-            <a:schemeClr val="accent1"/>
-          </a:fillRef>
-          <a:effectRef idx="2">
-            <a:schemeClr val="accent1"/>
-          </a:effectRef>
-          <a:fontRef idx="minor">
-            <a:schemeClr val="lt1"/>
-          </a:fontRef>
-        </p:style>
-        <p:txBody>
-          <a:bodyPr rtlCol="0" anchor="ctr" wrap="square">
-            <a:normAutofit/>
-          </a:bodyPr>
-          <a:lstStyle/>
-          <a:p>
-            <a:pPr algn="ctr"/>
-            <a:r>
-              <a:rPr sz="1100" b="0" i="0">
-                <a:solidFill>
-                  <a:srgbClr val="1F2937"/>
-                </a:solidFill>
-                <a:latin typeface="Calibri"/>
-              </a:rPr>
-              <a:t>Mark Defect-Free, Ds = 0</a:t>
-            </a:r>
-          </a:p>
-        </p:txBody>
-      </p:sp>
-      <p:cxnSp>
-        <p:nvCxnSpPr>
-          <p:cNvPr id="14" name="Connector 13"/>
-          <p:cNvCxnSpPr/>
-          <p:nvPr/>
-        </p:nvCxnSpPr>
-        <p:spPr>
-          <a:xfrm>
-            <a:off x="1828800" y="1938528"/>
-            <a:ext cx="0" cy="146303"/>
-          </a:xfrm>
-          <a:prstGeom prst="line">
-            <a:avLst/>
-          </a:prstGeom>
-          <a:ln w="19050">
-            <a:solidFill>
-              <a:srgbClr val="1F2937"/>
-            </a:solidFill>
-            <a:tailEnd type="triangle" w="med" len="med"/>
-          </a:ln>
-        </p:spPr>
-        <p:style>
-          <a:lnRef idx="2">
-            <a:schemeClr val="accent1"/>
-          </a:lnRef>
-          <a:fillRef idx="0">
-            <a:schemeClr val="accent1"/>
-          </a:fillRef>
-          <a:effectRef idx="1">
-            <a:schemeClr val="accent1"/>
-          </a:effectRef>
-          <a:fontRef idx="minor">
-            <a:schemeClr val="tx1"/>
-          </a:fontRef>
-        </p:style>
-      </p:cxnSp>
-      <p:cxnSp>
-        <p:nvCxnSpPr>
-          <p:cNvPr id="15" name="Connector 14"/>
-          <p:cNvCxnSpPr/>
-          <p:nvPr/>
-        </p:nvCxnSpPr>
-        <p:spPr>
-          <a:xfrm>
-            <a:off x="1828800" y="2761488"/>
-            <a:ext cx="0" cy="146304"/>
-          </a:xfrm>
-          <a:prstGeom prst="line">
-            <a:avLst/>
-          </a:prstGeom>
-          <a:ln w="19050">
-            <a:solidFill>
-              <a:srgbClr val="1F2937"/>
-            </a:solidFill>
-            <a:tailEnd type="triangle" w="med" len="med"/>
-          </a:ln>
-        </p:spPr>
-        <p:style>
-          <a:lnRef idx="2">
-            <a:schemeClr val="accent1"/>
-          </a:lnRef>
-          <a:fillRef idx="0">
-            <a:schemeClr val="accent1"/>
-          </a:fillRef>
-          <a:effectRef idx="1">
-            <a:schemeClr val="accent1"/>
-          </a:effectRef>
-          <a:fontRef idx="minor">
-            <a:schemeClr val="tx1"/>
-          </a:fontRef>
-        </p:style>
-      </p:cxnSp>
-      <p:cxnSp>
-        <p:nvCxnSpPr>
-          <p:cNvPr id="16" name="Connector 15"/>
-          <p:cNvCxnSpPr/>
-          <p:nvPr/>
-        </p:nvCxnSpPr>
-        <p:spPr>
-          <a:xfrm>
-            <a:off x="1828800" y="3675887"/>
-            <a:ext cx="0" cy="146304"/>
-          </a:xfrm>
-          <a:prstGeom prst="line">
-            <a:avLst/>
-          </a:prstGeom>
-          <a:ln w="19050">
-            <a:solidFill>
-              <a:srgbClr val="1F2937"/>
-            </a:solidFill>
-            <a:tailEnd type="triangle" w="med" len="med"/>
-          </a:ln>
-        </p:spPr>
-        <p:style>
-          <a:lnRef idx="2">
-            <a:schemeClr val="accent1"/>
-          </a:lnRef>
-          <a:fillRef idx="0">
-            <a:schemeClr val="accent1"/>
-          </a:fillRef>
-          <a:effectRef idx="1">
-            <a:schemeClr val="accent1"/>
-          </a:effectRef>
-          <a:fontRef idx="minor">
-            <a:schemeClr val="tx1"/>
-          </a:fontRef>
-        </p:style>
-      </p:cxnSp>
+              <a:t>Planner
+Dashboard</a:t>
+            </a:r>
+          </a:p>
+        </p:txBody>
+      </p:sp>
       <p:cxnSp>
         <p:nvCxnSpPr>
           <p:cNvPr id="17" name="Connector 16"/>
@@ -9765,8 +9273,8 @@
         </p:nvCxnSpPr>
         <p:spPr>
           <a:xfrm>
-            <a:off x="1828800" y="4590288"/>
-            <a:ext cx="0" cy="146304"/>
+            <a:off x="9217152" y="3063240"/>
+            <a:ext cx="310896" cy="0"/>
           </a:xfrm>
           <a:prstGeom prst="line">
             <a:avLst/>
@@ -9801,15 +9309,15 @@
         </p:nvCxnSpPr>
         <p:spPr>
           <a:xfrm>
-            <a:off x="1828800" y="5596128"/>
-            <a:ext cx="0" cy="146304"/>
+            <a:off x="10241280" y="4133087"/>
+            <a:ext cx="0" cy="713233"/>
           </a:xfrm>
           <a:prstGeom prst="line">
             <a:avLst/>
           </a:prstGeom>
           <a:ln w="19050">
             <a:solidFill>
-              <a:srgbClr val="1F2937"/>
+              <a:srgbClr val="5B6570"/>
             </a:solidFill>
             <a:tailEnd type="triangle" w="med" len="med"/>
           </a:ln>
@@ -9836,16 +9344,16 @@
           <p:nvPr/>
         </p:nvCxnSpPr>
         <p:spPr>
-          <a:xfrm>
-            <a:off x="2852928" y="5166360"/>
-            <a:ext cx="512064" cy="0"/>
+          <a:xfrm flipH="1">
+            <a:off x="1371600" y="4864608"/>
+            <a:ext cx="8851392" cy="0"/>
           </a:xfrm>
           <a:prstGeom prst="line">
             <a:avLst/>
           </a:prstGeom>
           <a:ln w="19050">
             <a:solidFill>
-              <a:srgbClr val="1F2937"/>
+              <a:srgbClr val="5B6570"/>
             </a:solidFill>
             <a:tailEnd type="triangle" w="med" len="med"/>
           </a:ln>
@@ -9865,16 +9373,52 @@
           </a:fontRef>
         </p:style>
       </p:cxnSp>
-      <p:sp>
-        <p:nvSpPr>
-          <p:cNvPr id="20" name="TextBox 19"/>
+      <p:cxnSp>
+        <p:nvCxnSpPr>
+          <p:cNvPr id="20" name="Connector 19"/>
+          <p:cNvCxnSpPr/>
+          <p:nvPr/>
+        </p:nvCxnSpPr>
+        <p:spPr>
+          <a:xfrm flipV="1">
+            <a:off x="1353312" y="4133087"/>
+            <a:ext cx="0" cy="713233"/>
+          </a:xfrm>
+          <a:prstGeom prst="line">
+            <a:avLst/>
+          </a:prstGeom>
+          <a:ln w="19050">
+            <a:solidFill>
+              <a:srgbClr val="5B6570"/>
+            </a:solidFill>
+            <a:tailEnd type="triangle" w="med" len="med"/>
+          </a:ln>
+        </p:spPr>
+        <p:style>
+          <a:lnRef idx="2">
+            <a:schemeClr val="accent1"/>
+          </a:lnRef>
+          <a:fillRef idx="0">
+            <a:schemeClr val="accent1"/>
+          </a:fillRef>
+          <a:effectRef idx="1">
+            <a:schemeClr val="accent1"/>
+          </a:effectRef>
+          <a:fontRef idx="minor">
+            <a:schemeClr val="tx1"/>
+          </a:fontRef>
+        </p:style>
+      </p:cxnSp>
+      <p:sp>
+        <p:nvSpPr>
+          <p:cNvPr id="21" name="TextBox 20"/>
           <p:cNvSpPr txBox="1"/>
           <p:nvPr/>
         </p:nvSpPr>
         <p:spPr>
           <a:xfrm>
-            <a:off x="6035040" y="1828800"/>
-            <a:ext cx="5577840" cy="4023360"/>
+            <a:off x="3291840" y="4224528"/>
+            <a:ext cx="5577840" cy="457200"/>
           </a:xfrm>
           <a:prstGeom prst="rect">
             <a:avLst/>
@@ -9882,84 +9426,55 @@
           <a:noFill/>
         </p:spPr>
         <p:txBody>
-          <a:bodyPr wrap="square">
+          <a:bodyPr wrap="square" anchor="ctr">
             <a:spAutoFit/>
           </a:bodyPr>
           <a:lstStyle/>
           <a:p>
-            <a:pPr algn="l">
-              <a:spcBef>
-                <a:spcPts val="0"/>
-              </a:spcBef>
-              <a:spcAft>
-                <a:spcPts val="800"/>
-              </a:spcAft>
-            </a:pPr>
-            <a:r>
-              <a:rPr sz="1550" b="0" i="0">
-                <a:solidFill>
-                  <a:srgbClr val="1F2937"/>
+            <a:pPr algn="ctr"/>
+            <a:r>
+              <a:rPr sz="1400" b="1" i="0">
+                <a:solidFill>
+                  <a:srgbClr val="5B6570"/>
                 </a:solidFill>
                 <a:latin typeface="Calibri"/>
               </a:rPr>
-              <a:t>▪  Each Frame Is Loaded, Preprocessed, And Passed Through YOLO Detection.</a:t>
-            </a:r>
-          </a:p>
-          <a:p>
-            <a:pPr algn="l">
-              <a:spcBef>
-                <a:spcPts val="0"/>
-              </a:spcBef>
-              <a:spcAft>
-                <a:spcPts val="800"/>
-              </a:spcAft>
-            </a:pPr>
-            <a:r>
-              <a:rPr sz="1550" b="0" i="0">
-                <a:solidFill>
-                  <a:srgbClr val="1F2937"/>
+              <a:t>Closed-Loop Feedback</a:t>
+            </a:r>
+          </a:p>
+        </p:txBody>
+      </p:sp>
+      <p:sp>
+        <p:nvSpPr>
+          <p:cNvPr id="22" name="TextBox 21"/>
+          <p:cNvSpPr txBox="1"/>
+          <p:nvPr/>
+        </p:nvSpPr>
+        <p:spPr>
+          <a:xfrm>
+            <a:off x="548640" y="5623560"/>
+            <a:ext cx="11064240" cy="457200"/>
+          </a:xfrm>
+          <a:prstGeom prst="rect">
+            <a:avLst/>
+          </a:prstGeom>
+          <a:noFill/>
+        </p:spPr>
+        <p:txBody>
+          <a:bodyPr wrap="square" anchor="ctr">
+            <a:spAutoFit/>
+          </a:bodyPr>
+          <a:lstStyle/>
+          <a:p>
+            <a:pPr algn="ctr"/>
+            <a:r>
+              <a:rPr sz="1250" b="0" i="0">
+                <a:solidFill>
+                  <a:srgbClr val="5B6570"/>
                 </a:solidFill>
                 <a:latin typeface="Calibri"/>
               </a:rPr>
-              <a:t>▪  A Defect Triggers Area + Ds Computation; A Clean Frame Sets Ds = 0.</a:t>
-            </a:r>
-          </a:p>
-          <a:p>
-            <a:pPr algn="l">
-              <a:spcBef>
-                <a:spcPts val="0"/>
-              </a:spcBef>
-              <a:spcAft>
-                <a:spcPts val="800"/>
-              </a:spcAft>
-            </a:pPr>
-            <a:r>
-              <a:rPr sz="1550" b="0" i="0">
-                <a:solidFill>
-                  <a:srgbClr val="1F2937"/>
-                </a:solidFill>
-                <a:latin typeface="Calibri"/>
-              </a:rPr>
-              <a:t>▪  Ds Feeds A Rolling Average Before The Random Forest Predicts Hours.</a:t>
-            </a:r>
-          </a:p>
-          <a:p>
-            <a:pPr algn="l">
-              <a:spcBef>
-                <a:spcPts val="0"/>
-              </a:spcBef>
-              <a:spcAft>
-                <a:spcPts val="800"/>
-              </a:spcAft>
-            </a:pPr>
-            <a:r>
-              <a:rPr sz="1550" b="0" i="0">
-                <a:solidFill>
-                  <a:srgbClr val="1F2937"/>
-                </a:solidFill>
-                <a:latin typeface="Calibri"/>
-              </a:rPr>
-              <a:t>▪  Result Is Displayed, And The Loop Repeats Until Frames Run Out.</a:t>
+              <a:t>Camera → Preprocessing → YOLO Detector → Metadata Bridge (Ds) → Random-Forest Lead-Time Predictor → Planner Dashboard.</a:t>
             </a:r>
           </a:p>
         </p:txBody>
@@ -10055,7 +9570,7 @@
                 </a:solidFill>
                 <a:latin typeface="Calibri"/>
               </a:rPr>
-              <a:t>17 / 27</a:t>
+              <a:t>17 / 31</a:t>
             </a:r>
           </a:p>
         </p:txBody>
@@ -10133,7 +9648,7 @@
                 </a:solidFill>
                 <a:latin typeface="Georgia"/>
               </a:rPr>
-              <a:t>Data Flow &amp; Metadata Bridge (Fig. 3.3 / 3.4)</a:t>
+              <a:t>Workflow Flowchart (Fig. 3.2)</a:t>
             </a:r>
           </a:p>
         </p:txBody>
@@ -10183,52 +9698,19 @@
       </p:sp>
       <p:sp>
         <p:nvSpPr>
-          <p:cNvPr id="7" name="TextBox 6"/>
-          <p:cNvSpPr txBox="1"/>
-          <p:nvPr/>
-        </p:nvSpPr>
-        <p:spPr>
-          <a:xfrm>
-            <a:off x="548640" y="1417320"/>
-            <a:ext cx="11064240" cy="411480"/>
-          </a:xfrm>
-          <a:prstGeom prst="rect">
-            <a:avLst/>
-          </a:prstGeom>
-          <a:noFill/>
-        </p:spPr>
-        <p:txBody>
-          <a:bodyPr wrap="square" anchor="ctr">
-            <a:spAutoFit/>
-          </a:bodyPr>
-          <a:lstStyle/>
-          <a:p>
-            <a:pPr algn="ctr"/>
-            <a:r>
-              <a:rPr sz="1400" b="1" i="0">
-                <a:solidFill>
-                  <a:srgbClr val="144E4C"/>
-                </a:solidFill>
-                <a:latin typeface="Calibri"/>
-              </a:rPr>
-              <a:t>Level-0 DFD</a:t>
-            </a:r>
-          </a:p>
-        </p:txBody>
-      </p:sp>
-      <p:sp>
-        <p:nvSpPr>
-          <p:cNvPr id="8" name="Oval 7"/>
+          <p:cNvPr id="7" name="Rounded Rectangle 6"/>
           <p:cNvSpPr/>
           <p:nvPr/>
         </p:nvSpPr>
         <p:spPr>
           <a:xfrm>
-            <a:off x="640080" y="1965960"/>
-            <a:ext cx="1737360" cy="822960"/>
-          </a:xfrm>
-          <a:prstGeom prst="ellipse">
-            <a:avLst/>
+            <a:off x="822960" y="1417320"/>
+            <a:ext cx="2011680" cy="502920"/>
+          </a:xfrm>
+          <a:prstGeom prst="roundRect">
+            <a:avLst>
+              <a:gd name="adj" fmla="val 10000"/>
+            </a:avLst>
           </a:prstGeom>
           <a:solidFill>
             <a:srgbClr val="FFFFFF"/>
@@ -10261,30 +9743,32 @@
           <a:p>
             <a:pPr algn="ctr"/>
             <a:r>
-              <a:rPr sz="1200" b="0" i="0">
+              <a:rPr sz="1250" b="1" i="0">
                 <a:solidFill>
                   <a:srgbClr val="1F2937"/>
                 </a:solidFill>
                 <a:latin typeface="Calibri"/>
               </a:rPr>
-              <a:t>Fabric Camera</a:t>
-            </a:r>
-          </a:p>
-        </p:txBody>
-      </p:sp>
-      <p:sp>
-        <p:nvSpPr>
-          <p:cNvPr id="9" name="Oval 8"/>
+              <a:t>Start</a:t>
+            </a:r>
+          </a:p>
+        </p:txBody>
+      </p:sp>
+      <p:sp>
+        <p:nvSpPr>
+          <p:cNvPr id="8" name="Rounded Rectangle 7"/>
           <p:cNvSpPr/>
           <p:nvPr/>
         </p:nvSpPr>
         <p:spPr>
           <a:xfrm>
-            <a:off x="640080" y="2971800"/>
-            <a:ext cx="1737360" cy="822960"/>
-          </a:xfrm>
-          <a:prstGeom prst="ellipse">
-            <a:avLst/>
+            <a:off x="822960" y="2103120"/>
+            <a:ext cx="2011680" cy="640080"/>
+          </a:xfrm>
+          <a:prstGeom prst="roundRect">
+            <a:avLst>
+              <a:gd name="adj" fmla="val 10000"/>
+            </a:avLst>
           </a:prstGeom>
           <a:solidFill>
             <a:srgbClr val="FFFFFF"/>
@@ -10317,30 +9801,32 @@
           <a:p>
             <a:pPr algn="ctr"/>
             <a:r>
-              <a:rPr sz="1200" b="0" i="0">
+              <a:rPr sz="1250" b="0" i="0">
                 <a:solidFill>
                   <a:srgbClr val="1F2937"/>
                 </a:solidFill>
                 <a:latin typeface="Calibri"/>
               </a:rPr>
-              <a:t>Manufacturing Data</a:t>
-            </a:r>
-          </a:p>
-        </p:txBody>
-      </p:sp>
-      <p:sp>
-        <p:nvSpPr>
-          <p:cNvPr id="10" name="Oval 9"/>
+              <a:t>Capture Fabric Image / Stream</a:t>
+            </a:r>
+          </a:p>
+        </p:txBody>
+      </p:sp>
+      <p:sp>
+        <p:nvSpPr>
+          <p:cNvPr id="9" name="Rounded Rectangle 8"/>
           <p:cNvSpPr/>
           <p:nvPr/>
         </p:nvSpPr>
         <p:spPr>
           <a:xfrm>
-            <a:off x="2743200" y="1965960"/>
-            <a:ext cx="2377440" cy="1828800"/>
-          </a:xfrm>
-          <a:prstGeom prst="ellipse">
-            <a:avLst/>
+            <a:off x="822960" y="2926080"/>
+            <a:ext cx="2011680" cy="731520"/>
+          </a:xfrm>
+          <a:prstGeom prst="roundRect">
+            <a:avLst>
+              <a:gd name="adj" fmla="val 10000"/>
+            </a:avLst>
           </a:prstGeom>
           <a:solidFill>
             <a:srgbClr val="FFFFFF"/>
@@ -10373,30 +9859,33 @@
           <a:p>
             <a:pPr algn="ctr"/>
             <a:r>
-              <a:rPr sz="1400" b="1" i="0">
+              <a:rPr sz="1150" b="0" i="0">
                 <a:solidFill>
                   <a:srgbClr val="1F2937"/>
                 </a:solidFill>
                 <a:latin typeface="Calibri"/>
               </a:rPr>
-              <a:t>0 Detect + Score + Predict</a:t>
-            </a:r>
-          </a:p>
-        </p:txBody>
-      </p:sp>
-      <p:sp>
-        <p:nvSpPr>
-          <p:cNvPr id="11" name="Oval 10"/>
+              <a:t>Preprocessing
+(Resize, Noise Removal, Enhance)</a:t>
+            </a:r>
+          </a:p>
+        </p:txBody>
+      </p:sp>
+      <p:sp>
+        <p:nvSpPr>
+          <p:cNvPr id="10" name="Rounded Rectangle 9"/>
           <p:cNvSpPr/>
           <p:nvPr/>
         </p:nvSpPr>
         <p:spPr>
           <a:xfrm>
-            <a:off x="5577840" y="2286000"/>
-            <a:ext cx="2286000" cy="1188720"/>
-          </a:xfrm>
-          <a:prstGeom prst="ellipse">
-            <a:avLst/>
+            <a:off x="822960" y="3840480"/>
+            <a:ext cx="2011680" cy="731520"/>
+          </a:xfrm>
+          <a:prstGeom prst="roundRect">
+            <a:avLst>
+              <a:gd name="adj" fmla="val 10000"/>
+            </a:avLst>
           </a:prstGeom>
           <a:solidFill>
             <a:srgbClr val="FFFFFF"/>
@@ -10429,29 +9918,30 @@
           <a:p>
             <a:pPr algn="ctr"/>
             <a:r>
-              <a:rPr sz="1200" b="0" i="0">
+              <a:rPr sz="1150" b="0" i="0">
                 <a:solidFill>
                   <a:srgbClr val="1F2937"/>
                 </a:solidFill>
                 <a:latin typeface="Calibri"/>
               </a:rPr>
-              <a:t>Result + Ds + Hours</a:t>
-            </a:r>
-          </a:p>
-        </p:txBody>
-      </p:sp>
-      <p:sp>
-        <p:nvSpPr>
-          <p:cNvPr id="12" name="Oval 11"/>
+              <a:t>YOLO Defect Detection
+(Type + Boxes / Masks)</a:t>
+            </a:r>
+          </a:p>
+        </p:txBody>
+      </p:sp>
+      <p:sp>
+        <p:nvSpPr>
+          <p:cNvPr id="11" name="Diamond 10"/>
           <p:cNvSpPr/>
           <p:nvPr/>
         </p:nvSpPr>
         <p:spPr>
           <a:xfrm>
-            <a:off x="8321040" y="2286000"/>
-            <a:ext cx="2286000" cy="1188720"/>
-          </a:xfrm>
-          <a:prstGeom prst="ellipse">
+            <a:off x="822960" y="4754880"/>
+            <a:ext cx="2011680" cy="822960"/>
+          </a:xfrm>
+          <a:prstGeom prst="diamond">
             <a:avLst/>
           </a:prstGeom>
           <a:solidFill>
@@ -10485,53 +9975,134 @@
           <a:p>
             <a:pPr algn="ctr"/>
             <a:r>
-              <a:rPr sz="1200" b="0" i="0">
+              <a:rPr sz="1250" b="0" i="0">
                 <a:solidFill>
                   <a:srgbClr val="1F2937"/>
                 </a:solidFill>
                 <a:latin typeface="Calibri"/>
               </a:rPr>
-              <a:t>Planner / Inspector</a:t>
-            </a:r>
-          </a:p>
-        </p:txBody>
-      </p:sp>
-      <p:cxnSp>
-        <p:nvCxnSpPr>
-          <p:cNvPr id="13" name="Connector 12"/>
-          <p:cNvCxnSpPr/>
-          <p:nvPr/>
-        </p:nvCxnSpPr>
-        <p:spPr>
-          <a:xfrm>
-            <a:off x="2377440" y="2377440"/>
-            <a:ext cx="347472" cy="0"/>
-          </a:xfrm>
-          <a:prstGeom prst="line">
-            <a:avLst/>
-          </a:prstGeom>
+              <a:t>Defect Detected?</a:t>
+            </a:r>
+          </a:p>
+        </p:txBody>
+      </p:sp>
+      <p:sp>
+        <p:nvSpPr>
+          <p:cNvPr id="12" name="Rounded Rectangle 11"/>
+          <p:cNvSpPr/>
+          <p:nvPr/>
+        </p:nvSpPr>
+        <p:spPr>
+          <a:xfrm>
+            <a:off x="3383280" y="4754880"/>
+            <a:ext cx="2011680" cy="822960"/>
+          </a:xfrm>
+          <a:prstGeom prst="roundRect">
+            <a:avLst>
+              <a:gd name="adj" fmla="val 10000"/>
+            </a:avLst>
+          </a:prstGeom>
+          <a:solidFill>
+            <a:srgbClr val="FFFFFF"/>
+          </a:solidFill>
           <a:ln w="19050">
             <a:solidFill>
-              <a:srgbClr val="1F2937"/>
+              <a:srgbClr val="1B7A6E"/>
             </a:solidFill>
-            <a:tailEnd type="triangle" w="med" len="med"/>
           </a:ln>
         </p:spPr>
         <p:style>
-          <a:lnRef idx="2">
+          <a:lnRef idx="1">
             <a:schemeClr val="accent1"/>
           </a:lnRef>
-          <a:fillRef idx="0">
+          <a:fillRef idx="3">
             <a:schemeClr val="accent1"/>
           </a:fillRef>
-          <a:effectRef idx="1">
+          <a:effectRef idx="2">
             <a:schemeClr val="accent1"/>
           </a:effectRef>
           <a:fontRef idx="minor">
-            <a:schemeClr val="tx1"/>
+            <a:schemeClr val="lt1"/>
           </a:fontRef>
         </p:style>
-      </p:cxnSp>
+        <p:txBody>
+          <a:bodyPr rtlCol="0" anchor="ctr" wrap="square">
+            <a:normAutofit/>
+          </a:bodyPr>
+          <a:lstStyle/>
+          <a:p>
+            <a:pPr algn="ctr"/>
+            <a:r>
+              <a:rPr sz="1100" b="0" i="0">
+                <a:solidFill>
+                  <a:srgbClr val="1F2937"/>
+                </a:solidFill>
+                <a:latin typeface="Calibri"/>
+              </a:rPr>
+              <a:t>Identify Defect Type
+(Hole / Horizontal / Vertical / Lines / Stain)</a:t>
+            </a:r>
+          </a:p>
+        </p:txBody>
+      </p:sp>
+      <p:sp>
+        <p:nvSpPr>
+          <p:cNvPr id="13" name="Rounded Rectangle 12"/>
+          <p:cNvSpPr/>
+          <p:nvPr/>
+        </p:nvSpPr>
+        <p:spPr>
+          <a:xfrm>
+            <a:off x="822960" y="5760720"/>
+            <a:ext cx="2011680" cy="411480"/>
+          </a:xfrm>
+          <a:prstGeom prst="roundRect">
+            <a:avLst>
+              <a:gd name="adj" fmla="val 10000"/>
+            </a:avLst>
+          </a:prstGeom>
+          <a:solidFill>
+            <a:srgbClr val="FFFFFF"/>
+          </a:solidFill>
+          <a:ln w="19050">
+            <a:solidFill>
+              <a:srgbClr val="1B7A6E"/>
+            </a:solidFill>
+          </a:ln>
+        </p:spPr>
+        <p:style>
+          <a:lnRef idx="1">
+            <a:schemeClr val="accent1"/>
+          </a:lnRef>
+          <a:fillRef idx="3">
+            <a:schemeClr val="accent1"/>
+          </a:fillRef>
+          <a:effectRef idx="2">
+            <a:schemeClr val="accent1"/>
+          </a:effectRef>
+          <a:fontRef idx="minor">
+            <a:schemeClr val="lt1"/>
+          </a:fontRef>
+        </p:style>
+        <p:txBody>
+          <a:bodyPr rtlCol="0" anchor="ctr" wrap="square">
+            <a:normAutofit/>
+          </a:bodyPr>
+          <a:lstStyle/>
+          <a:p>
+            <a:pPr algn="ctr"/>
+            <a:r>
+              <a:rPr sz="1100" b="0" i="0">
+                <a:solidFill>
+                  <a:srgbClr val="1F2937"/>
+                </a:solidFill>
+                <a:latin typeface="Calibri"/>
+              </a:rPr>
+              <a:t>Mark Defect-Free, Ds = 0</a:t>
+            </a:r>
+          </a:p>
+        </p:txBody>
+      </p:sp>
       <p:cxnSp>
         <p:nvCxnSpPr>
           <p:cNvPr id="14" name="Connector 13"/>
@@ -10540,8 +10111,8 @@
         </p:nvCxnSpPr>
         <p:spPr>
           <a:xfrm>
-            <a:off x="2377440" y="3383280"/>
-            <a:ext cx="347472" cy="0"/>
+            <a:off x="1828800" y="1938528"/>
+            <a:ext cx="0" cy="146303"/>
           </a:xfrm>
           <a:prstGeom prst="line">
             <a:avLst/>
@@ -10576,8 +10147,8 @@
         </p:nvCxnSpPr>
         <p:spPr>
           <a:xfrm>
-            <a:off x="5120640" y="2651760"/>
-            <a:ext cx="438912" cy="0"/>
+            <a:off x="1828800" y="2761488"/>
+            <a:ext cx="0" cy="146304"/>
           </a:xfrm>
           <a:prstGeom prst="line">
             <a:avLst/>
@@ -10612,8 +10183,8 @@
         </p:nvCxnSpPr>
         <p:spPr>
           <a:xfrm>
-            <a:off x="7863840" y="3108960"/>
-            <a:ext cx="438912" cy="0"/>
+            <a:off x="1828800" y="3675887"/>
+            <a:ext cx="0" cy="146304"/>
           </a:xfrm>
           <a:prstGeom prst="line">
             <a:avLst/>
@@ -10640,169 +10211,16 @@
           </a:fontRef>
         </p:style>
       </p:cxnSp>
-      <p:sp>
-        <p:nvSpPr>
-          <p:cNvPr id="17" name="TextBox 16"/>
-          <p:cNvSpPr txBox="1"/>
-          <p:nvPr/>
-        </p:nvSpPr>
-        <p:spPr>
-          <a:xfrm>
-            <a:off x="548640" y="3977639"/>
-            <a:ext cx="11064240" cy="365760"/>
-          </a:xfrm>
-          <a:prstGeom prst="rect">
-            <a:avLst/>
-          </a:prstGeom>
-          <a:noFill/>
-        </p:spPr>
-        <p:txBody>
-          <a:bodyPr wrap="square" anchor="ctr">
-            <a:spAutoFit/>
-          </a:bodyPr>
-          <a:lstStyle/>
-          <a:p>
-            <a:pPr algn="ctr"/>
-            <a:r>
-              <a:rPr sz="1400" b="1" i="0">
-                <a:solidFill>
-                  <a:srgbClr val="144E4C"/>
-                </a:solidFill>
-                <a:latin typeface="Calibri"/>
-              </a:rPr>
-              <a:t>Ds Metadata Bridge (Rolling 10-Frame Average)</a:t>
-            </a:r>
-          </a:p>
-        </p:txBody>
-      </p:sp>
-      <p:sp>
-        <p:nvSpPr>
-          <p:cNvPr id="18" name="Rounded Rectangle 17"/>
-          <p:cNvSpPr/>
-          <p:nvPr/>
-        </p:nvSpPr>
-        <p:spPr>
-          <a:xfrm>
-            <a:off x="640080" y="4434840"/>
-            <a:ext cx="1554480" cy="914400"/>
-          </a:xfrm>
-          <a:prstGeom prst="roundRect">
-            <a:avLst>
-              <a:gd name="adj" fmla="val 10000"/>
-            </a:avLst>
-          </a:prstGeom>
-          <a:solidFill>
-            <a:srgbClr val="E4ECD4"/>
-          </a:solidFill>
-          <a:ln w="19050">
-            <a:solidFill>
-              <a:srgbClr val="1B7A6E"/>
-            </a:solidFill>
-          </a:ln>
-        </p:spPr>
-        <p:style>
-          <a:lnRef idx="1">
-            <a:schemeClr val="accent1"/>
-          </a:lnRef>
-          <a:fillRef idx="3">
-            <a:schemeClr val="accent1"/>
-          </a:fillRef>
-          <a:effectRef idx="2">
-            <a:schemeClr val="accent1"/>
-          </a:effectRef>
-          <a:fontRef idx="minor">
-            <a:schemeClr val="lt1"/>
-          </a:fontRef>
-        </p:style>
-        <p:txBody>
-          <a:bodyPr rtlCol="0" anchor="ctr" wrap="square">
-            <a:normAutofit/>
-          </a:bodyPr>
-          <a:lstStyle/>
-          <a:p>
-            <a:pPr algn="ctr"/>
-            <a:r>
-              <a:rPr sz="1100" b="0" i="0">
-                <a:solidFill>
-                  <a:srgbClr val="1F2937"/>
-                </a:solidFill>
-                <a:latin typeface="Calibri"/>
-              </a:rPr>
-              <a:t>YOLO Output:
-Class, Conf., Box</a:t>
-            </a:r>
-          </a:p>
-        </p:txBody>
-      </p:sp>
-      <p:sp>
-        <p:nvSpPr>
-          <p:cNvPr id="19" name="Rounded Rectangle 18"/>
-          <p:cNvSpPr/>
-          <p:nvPr/>
-        </p:nvSpPr>
-        <p:spPr>
-          <a:xfrm>
-            <a:off x="2404872" y="4434840"/>
-            <a:ext cx="1554480" cy="914400"/>
-          </a:xfrm>
-          <a:prstGeom prst="roundRect">
-            <a:avLst>
-              <a:gd name="adj" fmla="val 10000"/>
-            </a:avLst>
-          </a:prstGeom>
-          <a:solidFill>
-            <a:srgbClr val="E4ECD4"/>
-          </a:solidFill>
-          <a:ln w="19050">
-            <a:solidFill>
-              <a:srgbClr val="1B7A6E"/>
-            </a:solidFill>
-          </a:ln>
-        </p:spPr>
-        <p:style>
-          <a:lnRef idx="1">
-            <a:schemeClr val="accent1"/>
-          </a:lnRef>
-          <a:fillRef idx="3">
-            <a:schemeClr val="accent1"/>
-          </a:fillRef>
-          <a:effectRef idx="2">
-            <a:schemeClr val="accent1"/>
-          </a:effectRef>
-          <a:fontRef idx="minor">
-            <a:schemeClr val="lt1"/>
-          </a:fontRef>
-        </p:style>
-        <p:txBody>
-          <a:bodyPr rtlCol="0" anchor="ctr" wrap="square">
-            <a:normAutofit/>
-          </a:bodyPr>
-          <a:lstStyle/>
-          <a:p>
-            <a:pPr algn="ctr"/>
-            <a:r>
-              <a:rPr sz="1100" b="0" i="0">
-                <a:solidFill>
-                  <a:srgbClr val="1F2937"/>
-                </a:solidFill>
-                <a:latin typeface="Calibri"/>
-              </a:rPr>
-              <a:t>Per-Defect
-Area</a:t>
-            </a:r>
-          </a:p>
-        </p:txBody>
-      </p:sp>
       <p:cxnSp>
         <p:nvCxnSpPr>
-          <p:cNvPr id="20" name="Connector 19"/>
+          <p:cNvPr id="17" name="Connector 16"/>
           <p:cNvCxnSpPr/>
           <p:nvPr/>
         </p:nvCxnSpPr>
         <p:spPr>
           <a:xfrm>
-            <a:off x="2212848" y="4892040"/>
-            <a:ext cx="201167" cy="0"/>
+            <a:off x="1828800" y="4590288"/>
+            <a:ext cx="0" cy="146304"/>
           </a:xfrm>
           <a:prstGeom prst="line">
             <a:avLst/>
@@ -10829,75 +10247,16 @@
           </a:fontRef>
         </p:style>
       </p:cxnSp>
-      <p:sp>
-        <p:nvSpPr>
-          <p:cNvPr id="21" name="Rounded Rectangle 20"/>
-          <p:cNvSpPr/>
-          <p:nvPr/>
-        </p:nvSpPr>
-        <p:spPr>
-          <a:xfrm>
-            <a:off x="4169663" y="4434840"/>
-            <a:ext cx="1554480" cy="914400"/>
-          </a:xfrm>
-          <a:prstGeom prst="roundRect">
-            <a:avLst>
-              <a:gd name="adj" fmla="val 10000"/>
-            </a:avLst>
-          </a:prstGeom>
-          <a:solidFill>
-            <a:srgbClr val="E4ECD4"/>
-          </a:solidFill>
-          <a:ln w="19050">
-            <a:solidFill>
-              <a:srgbClr val="1B7A6E"/>
-            </a:solidFill>
-          </a:ln>
-        </p:spPr>
-        <p:style>
-          <a:lnRef idx="1">
-            <a:schemeClr val="accent1"/>
-          </a:lnRef>
-          <a:fillRef idx="3">
-            <a:schemeClr val="accent1"/>
-          </a:fillRef>
-          <a:effectRef idx="2">
-            <a:schemeClr val="accent1"/>
-          </a:effectRef>
-          <a:fontRef idx="minor">
-            <a:schemeClr val="lt1"/>
-          </a:fontRef>
-        </p:style>
-        <p:txBody>
-          <a:bodyPr rtlCol="0" anchor="ctr" wrap="square">
-            <a:normAutofit/>
-          </a:bodyPr>
-          <a:lstStyle/>
-          <a:p>
-            <a:pPr algn="ctr"/>
-            <a:r>
-              <a:rPr sz="1100" b="0" i="0">
-                <a:solidFill>
-                  <a:srgbClr val="1F2937"/>
-                </a:solidFill>
-                <a:latin typeface="Calibri"/>
-              </a:rPr>
-              <a:t>Sum Defect
-Area</a:t>
-            </a:r>
-          </a:p>
-        </p:txBody>
-      </p:sp>
       <p:cxnSp>
         <p:nvCxnSpPr>
-          <p:cNvPr id="22" name="Connector 21"/>
+          <p:cNvPr id="18" name="Connector 17"/>
           <p:cNvCxnSpPr/>
           <p:nvPr/>
         </p:nvCxnSpPr>
         <p:spPr>
           <a:xfrm>
-            <a:off x="3977639" y="4892040"/>
-            <a:ext cx="201168" cy="0"/>
+            <a:off x="1828800" y="5596128"/>
+            <a:ext cx="0" cy="146304"/>
           </a:xfrm>
           <a:prstGeom prst="line">
             <a:avLst/>
@@ -10924,75 +10283,16 @@
           </a:fontRef>
         </p:style>
       </p:cxnSp>
-      <p:sp>
-        <p:nvSpPr>
-          <p:cNvPr id="23" name="Rounded Rectangle 22"/>
-          <p:cNvSpPr/>
-          <p:nvPr/>
-        </p:nvSpPr>
-        <p:spPr>
-          <a:xfrm>
-            <a:off x="5934456" y="4434840"/>
-            <a:ext cx="1554480" cy="914400"/>
-          </a:xfrm>
-          <a:prstGeom prst="roundRect">
-            <a:avLst>
-              <a:gd name="adj" fmla="val 10000"/>
-            </a:avLst>
-          </a:prstGeom>
-          <a:solidFill>
-            <a:srgbClr val="E4ECD4"/>
-          </a:solidFill>
-          <a:ln w="19050">
-            <a:solidFill>
-              <a:srgbClr val="1B7A6E"/>
-            </a:solidFill>
-          </a:ln>
-        </p:spPr>
-        <p:style>
-          <a:lnRef idx="1">
-            <a:schemeClr val="accent1"/>
-          </a:lnRef>
-          <a:fillRef idx="3">
-            <a:schemeClr val="accent1"/>
-          </a:fillRef>
-          <a:effectRef idx="2">
-            <a:schemeClr val="accent1"/>
-          </a:effectRef>
-          <a:fontRef idx="minor">
-            <a:schemeClr val="lt1"/>
-          </a:fontRef>
-        </p:style>
-        <p:txBody>
-          <a:bodyPr rtlCol="0" anchor="ctr" wrap="square">
-            <a:normAutofit/>
-          </a:bodyPr>
-          <a:lstStyle/>
-          <a:p>
-            <a:pPr algn="ctr"/>
-            <a:r>
-              <a:rPr sz="1100" b="0" i="0">
-                <a:solidFill>
-                  <a:srgbClr val="1F2937"/>
-                </a:solidFill>
-                <a:latin typeface="Calibri"/>
-              </a:rPr>
-              <a:t>Ds =
-Defect / Frame</a:t>
-            </a:r>
-          </a:p>
-        </p:txBody>
-      </p:sp>
       <p:cxnSp>
         <p:nvCxnSpPr>
-          <p:cNvPr id="24" name="Connector 23"/>
+          <p:cNvPr id="19" name="Connector 18"/>
           <p:cNvCxnSpPr/>
           <p:nvPr/>
         </p:nvCxnSpPr>
         <p:spPr>
           <a:xfrm>
-            <a:off x="5742432" y="4892040"/>
-            <a:ext cx="201168" cy="0"/>
+            <a:off x="2852928" y="5166360"/>
+            <a:ext cx="512064" cy="0"/>
           </a:xfrm>
           <a:prstGeom prst="line">
             <a:avLst/>
@@ -11021,289 +10321,103 @@
       </p:cxnSp>
       <p:sp>
         <p:nvSpPr>
-          <p:cNvPr id="25" name="Rounded Rectangle 24"/>
-          <p:cNvSpPr/>
-          <p:nvPr/>
-        </p:nvSpPr>
-        <p:spPr>
-          <a:xfrm>
-            <a:off x="7699248" y="4434840"/>
-            <a:ext cx="1554480" cy="914400"/>
-          </a:xfrm>
-          <a:prstGeom prst="roundRect">
-            <a:avLst>
-              <a:gd name="adj" fmla="val 10000"/>
-            </a:avLst>
-          </a:prstGeom>
-          <a:solidFill>
-            <a:srgbClr val="E4ECD4"/>
-          </a:solidFill>
-          <a:ln w="19050">
-            <a:solidFill>
-              <a:srgbClr val="1B7A6E"/>
-            </a:solidFill>
-          </a:ln>
-        </p:spPr>
-        <p:style>
-          <a:lnRef idx="1">
-            <a:schemeClr val="accent1"/>
-          </a:lnRef>
-          <a:fillRef idx="3">
-            <a:schemeClr val="accent1"/>
-          </a:fillRef>
-          <a:effectRef idx="2">
-            <a:schemeClr val="accent1"/>
-          </a:effectRef>
-          <a:fontRef idx="minor">
-            <a:schemeClr val="lt1"/>
-          </a:fontRef>
-        </p:style>
-        <p:txBody>
-          <a:bodyPr rtlCol="0" anchor="ctr" wrap="square">
-            <a:normAutofit/>
+          <p:cNvPr id="20" name="TextBox 19"/>
+          <p:cNvSpPr txBox="1"/>
+          <p:nvPr/>
+        </p:nvSpPr>
+        <p:spPr>
+          <a:xfrm>
+            <a:off x="6035040" y="1828800"/>
+            <a:ext cx="5577840" cy="4023360"/>
+          </a:xfrm>
+          <a:prstGeom prst="rect">
+            <a:avLst/>
+          </a:prstGeom>
+          <a:noFill/>
+        </p:spPr>
+        <p:txBody>
+          <a:bodyPr wrap="square">
+            <a:spAutoFit/>
           </a:bodyPr>
           <a:lstStyle/>
           <a:p>
-            <a:pPr algn="ctr"/>
-            <a:r>
-              <a:rPr sz="1100" b="0" i="0">
+            <a:pPr algn="l">
+              <a:spcBef>
+                <a:spcPts val="0"/>
+              </a:spcBef>
+              <a:spcAft>
+                <a:spcPts val="800"/>
+              </a:spcAft>
+            </a:pPr>
+            <a:r>
+              <a:rPr sz="1550" b="0" i="0">
                 <a:solidFill>
                   <a:srgbClr val="1F2937"/>
                 </a:solidFill>
                 <a:latin typeface="Calibri"/>
               </a:rPr>
-              <a:t>Rolling Avg.
-Last 10 Frames</a:t>
-            </a:r>
-          </a:p>
-        </p:txBody>
-      </p:sp>
-      <p:cxnSp>
-        <p:nvCxnSpPr>
-          <p:cNvPr id="26" name="Connector 25"/>
-          <p:cNvCxnSpPr/>
-          <p:nvPr/>
-        </p:nvCxnSpPr>
-        <p:spPr>
-          <a:xfrm>
-            <a:off x="7507223" y="4892040"/>
-            <a:ext cx="201169" cy="0"/>
-          </a:xfrm>
-          <a:prstGeom prst="line">
-            <a:avLst/>
-          </a:prstGeom>
-          <a:ln w="19050">
-            <a:solidFill>
-              <a:srgbClr val="1F2937"/>
-            </a:solidFill>
-            <a:tailEnd type="triangle" w="med" len="med"/>
-          </a:ln>
-        </p:spPr>
-        <p:style>
-          <a:lnRef idx="2">
-            <a:schemeClr val="accent1"/>
-          </a:lnRef>
-          <a:fillRef idx="0">
-            <a:schemeClr val="accent1"/>
-          </a:fillRef>
-          <a:effectRef idx="1">
-            <a:schemeClr val="accent1"/>
-          </a:effectRef>
-          <a:fontRef idx="minor">
-            <a:schemeClr val="tx1"/>
-          </a:fontRef>
-        </p:style>
-      </p:cxnSp>
-      <p:sp>
-        <p:nvSpPr>
-          <p:cNvPr id="27" name="Rounded Rectangle 26"/>
-          <p:cNvSpPr/>
-          <p:nvPr/>
-        </p:nvSpPr>
-        <p:spPr>
-          <a:xfrm>
-            <a:off x="9464040" y="4434840"/>
-            <a:ext cx="1554480" cy="914400"/>
-          </a:xfrm>
-          <a:prstGeom prst="roundRect">
-            <a:avLst>
-              <a:gd name="adj" fmla="val 10000"/>
-            </a:avLst>
-          </a:prstGeom>
-          <a:solidFill>
-            <a:srgbClr val="E4ECD4"/>
-          </a:solidFill>
-          <a:ln w="19050">
-            <a:solidFill>
-              <a:srgbClr val="1B7A6E"/>
-            </a:solidFill>
-          </a:ln>
-        </p:spPr>
-        <p:style>
-          <a:lnRef idx="1">
-            <a:schemeClr val="accent1"/>
-          </a:lnRef>
-          <a:fillRef idx="3">
-            <a:schemeClr val="accent1"/>
-          </a:fillRef>
-          <a:effectRef idx="2">
-            <a:schemeClr val="accent1"/>
-          </a:effectRef>
-          <a:fontRef idx="minor">
-            <a:schemeClr val="lt1"/>
-          </a:fontRef>
-        </p:style>
-        <p:txBody>
-          <a:bodyPr rtlCol="0" anchor="ctr" wrap="square">
-            <a:normAutofit/>
-          </a:bodyPr>
-          <a:lstStyle/>
-          <a:p>
-            <a:pPr algn="ctr"/>
-            <a:r>
-              <a:rPr sz="1100" b="0" i="0">
+              <a:t>▪  Each Frame Is Loaded, Preprocessed, And Passed Through YOLO Detection.</a:t>
+            </a:r>
+          </a:p>
+          <a:p>
+            <a:pPr algn="l">
+              <a:spcBef>
+                <a:spcPts val="0"/>
+              </a:spcBef>
+              <a:spcAft>
+                <a:spcPts val="800"/>
+              </a:spcAft>
+            </a:pPr>
+            <a:r>
+              <a:rPr sz="1550" b="0" i="0">
                 <a:solidFill>
                   <a:srgbClr val="1F2937"/>
                 </a:solidFill>
                 <a:latin typeface="Calibri"/>
               </a:rPr>
-              <a:t>Predictor
-Input</a:t>
-            </a:r>
-          </a:p>
-        </p:txBody>
-      </p:sp>
-      <p:cxnSp>
-        <p:nvCxnSpPr>
-          <p:cNvPr id="28" name="Connector 27"/>
-          <p:cNvCxnSpPr/>
-          <p:nvPr/>
-        </p:nvCxnSpPr>
-        <p:spPr>
-          <a:xfrm>
-            <a:off x="9272015" y="4892040"/>
-            <a:ext cx="201169" cy="0"/>
-          </a:xfrm>
-          <a:prstGeom prst="line">
-            <a:avLst/>
-          </a:prstGeom>
-          <a:ln w="19050">
-            <a:solidFill>
-              <a:srgbClr val="1F2937"/>
-            </a:solidFill>
-            <a:tailEnd type="triangle" w="med" len="med"/>
-          </a:ln>
-        </p:spPr>
-        <p:style>
-          <a:lnRef idx="2">
-            <a:schemeClr val="accent1"/>
-          </a:lnRef>
-          <a:fillRef idx="0">
-            <a:schemeClr val="accent1"/>
-          </a:fillRef>
-          <a:effectRef idx="1">
-            <a:schemeClr val="accent1"/>
-          </a:effectRef>
-          <a:fontRef idx="minor">
-            <a:schemeClr val="tx1"/>
-          </a:fontRef>
-        </p:style>
-      </p:cxnSp>
-      <p:sp>
-        <p:nvSpPr>
-          <p:cNvPr id="29" name="Rounded Rectangle 28"/>
-          <p:cNvSpPr/>
-          <p:nvPr/>
-        </p:nvSpPr>
-        <p:spPr>
-          <a:xfrm>
-            <a:off x="5934456" y="5486400"/>
-            <a:ext cx="1554480" cy="658368"/>
-          </a:xfrm>
-          <a:prstGeom prst="roundRect">
-            <a:avLst>
-              <a:gd name="adj" fmla="val 10000"/>
-            </a:avLst>
-          </a:prstGeom>
-          <a:solidFill>
-            <a:srgbClr val="E4ECD4"/>
-          </a:solidFill>
-          <a:ln w="19050">
-            <a:solidFill>
-              <a:srgbClr val="1B7A6E"/>
-            </a:solidFill>
-          </a:ln>
-        </p:spPr>
-        <p:style>
-          <a:lnRef idx="1">
-            <a:schemeClr val="accent1"/>
-          </a:lnRef>
-          <a:fillRef idx="3">
-            <a:schemeClr val="accent1"/>
-          </a:fillRef>
-          <a:effectRef idx="2">
-            <a:schemeClr val="accent1"/>
-          </a:effectRef>
-          <a:fontRef idx="minor">
-            <a:schemeClr val="lt1"/>
-          </a:fontRef>
-        </p:style>
-        <p:txBody>
-          <a:bodyPr rtlCol="0" anchor="ctr" wrap="square">
-            <a:normAutofit/>
-          </a:bodyPr>
-          <a:lstStyle/>
-          <a:p>
-            <a:pPr algn="ctr"/>
-            <a:r>
-              <a:rPr sz="1100" b="0" i="0">
+              <a:t>▪  A Defect Triggers Area + Ds Computation; A Clean Frame Sets Ds = 0.</a:t>
+            </a:r>
+          </a:p>
+          <a:p>
+            <a:pPr algn="l">
+              <a:spcBef>
+                <a:spcPts val="0"/>
+              </a:spcBef>
+              <a:spcAft>
+                <a:spcPts val="800"/>
+              </a:spcAft>
+            </a:pPr>
+            <a:r>
+              <a:rPr sz="1550" b="0" i="0">
                 <a:solidFill>
                   <a:srgbClr val="1F2937"/>
                 </a:solidFill>
                 <a:latin typeface="Calibri"/>
               </a:rPr>
-              <a:t>Frame Area
-H × W</a:t>
-            </a:r>
-          </a:p>
-        </p:txBody>
-      </p:sp>
-      <p:cxnSp>
-        <p:nvCxnSpPr>
-          <p:cNvPr id="30" name="Connector 29"/>
-          <p:cNvCxnSpPr/>
-          <p:nvPr/>
-        </p:nvCxnSpPr>
-        <p:spPr>
-          <a:xfrm flipV="1">
-            <a:off x="6711696" y="5367528"/>
-            <a:ext cx="0" cy="100584"/>
-          </a:xfrm>
-          <a:prstGeom prst="line">
-            <a:avLst/>
-          </a:prstGeom>
-          <a:ln w="19050">
-            <a:solidFill>
-              <a:srgbClr val="1F2937"/>
-            </a:solidFill>
-            <a:tailEnd type="triangle" w="med" len="med"/>
-          </a:ln>
-        </p:spPr>
-        <p:style>
-          <a:lnRef idx="2">
-            <a:schemeClr val="accent1"/>
-          </a:lnRef>
-          <a:fillRef idx="0">
-            <a:schemeClr val="accent1"/>
-          </a:fillRef>
-          <a:effectRef idx="1">
-            <a:schemeClr val="accent1"/>
-          </a:effectRef>
-          <a:fontRef idx="minor">
-            <a:schemeClr val="tx1"/>
-          </a:fontRef>
-        </p:style>
-      </p:cxnSp>
+              <a:t>▪  Ds Feeds A Rolling Average Before The Random Forest Predicts Hours.</a:t>
+            </a:r>
+          </a:p>
+          <a:p>
+            <a:pPr algn="l">
+              <a:spcBef>
+                <a:spcPts val="0"/>
+              </a:spcBef>
+              <a:spcAft>
+                <a:spcPts val="800"/>
+              </a:spcAft>
+            </a:pPr>
+            <a:r>
+              <a:rPr sz="1550" b="0" i="0">
+                <a:solidFill>
+                  <a:srgbClr val="1F2937"/>
+                </a:solidFill>
+                <a:latin typeface="Calibri"/>
+              </a:rPr>
+              <a:t>▪  Result Is Displayed, And The Loop Repeats Until Frames Run Out.</a:t>
+            </a:r>
+          </a:p>
+        </p:txBody>
+      </p:sp>
     </p:spTree>
   </p:cSld>
   <p:clrMapOvr>
@@ -11395,7 +10509,7 @@
                 </a:solidFill>
                 <a:latin typeface="Calibri"/>
               </a:rPr>
-              <a:t>18 / 27</a:t>
+              <a:t>18 / 31</a:t>
             </a:r>
           </a:p>
         </p:txBody>
@@ -11473,7 +10587,7 @@
                 </a:solidFill>
                 <a:latin typeface="Georgia"/>
               </a:rPr>
-              <a:t>Lead-Time ML Pipeline (Fig. 3.5)</a:t>
+              <a:t>Data Flow &amp; Metadata Bridge (Fig. 3.3 / 3.4)</a:t>
             </a:r>
           </a:p>
         </p:txBody>
@@ -11523,19 +10637,52 @@
       </p:sp>
       <p:sp>
         <p:nvSpPr>
-          <p:cNvPr id="7" name="Rounded Rectangle 6"/>
+          <p:cNvPr id="7" name="TextBox 6"/>
+          <p:cNvSpPr txBox="1"/>
+          <p:nvPr/>
+        </p:nvSpPr>
+        <p:spPr>
+          <a:xfrm>
+            <a:off x="548640" y="1417320"/>
+            <a:ext cx="11064240" cy="411480"/>
+          </a:xfrm>
+          <a:prstGeom prst="rect">
+            <a:avLst/>
+          </a:prstGeom>
+          <a:noFill/>
+        </p:spPr>
+        <p:txBody>
+          <a:bodyPr wrap="square" anchor="ctr">
+            <a:spAutoFit/>
+          </a:bodyPr>
+          <a:lstStyle/>
+          <a:p>
+            <a:pPr algn="ctr"/>
+            <a:r>
+              <a:rPr sz="1400" b="1" i="0">
+                <a:solidFill>
+                  <a:srgbClr val="144E4C"/>
+                </a:solidFill>
+                <a:latin typeface="Calibri"/>
+              </a:rPr>
+              <a:t>Level-0 DFD</a:t>
+            </a:r>
+          </a:p>
+        </p:txBody>
+      </p:sp>
+      <p:sp>
+        <p:nvSpPr>
+          <p:cNvPr id="8" name="Oval 7"/>
           <p:cNvSpPr/>
           <p:nvPr/>
         </p:nvSpPr>
         <p:spPr>
           <a:xfrm>
-            <a:off x="640080" y="1554480"/>
-            <a:ext cx="1920240" cy="868680"/>
-          </a:xfrm>
-          <a:prstGeom prst="roundRect">
-            <a:avLst>
-              <a:gd name="adj" fmla="val 10000"/>
-            </a:avLst>
+            <a:off x="640080" y="1965960"/>
+            <a:ext cx="1737360" cy="822960"/>
+          </a:xfrm>
+          <a:prstGeom prst="ellipse">
+            <a:avLst/>
           </a:prstGeom>
           <a:solidFill>
             <a:srgbClr val="FFFFFF"/>
@@ -11568,33 +10715,30 @@
           <a:p>
             <a:pPr algn="ctr"/>
             <a:r>
-              <a:rPr sz="1250" b="0" i="0">
+              <a:rPr sz="1200" b="0" i="0">
                 <a:solidFill>
                   <a:srgbClr val="1F2937"/>
                 </a:solidFill>
                 <a:latin typeface="Calibri"/>
               </a:rPr>
-              <a:t>Machine Speed
-20–100 m/min</a:t>
-            </a:r>
-          </a:p>
-        </p:txBody>
-      </p:sp>
-      <p:sp>
-        <p:nvSpPr>
-          <p:cNvPr id="8" name="Rounded Rectangle 7"/>
+              <a:t>Fabric Camera</a:t>
+            </a:r>
+          </a:p>
+        </p:txBody>
+      </p:sp>
+      <p:sp>
+        <p:nvSpPr>
+          <p:cNvPr id="9" name="Oval 8"/>
           <p:cNvSpPr/>
           <p:nvPr/>
         </p:nvSpPr>
         <p:spPr>
           <a:xfrm>
-            <a:off x="640080" y="2606040"/>
-            <a:ext cx="1920240" cy="868680"/>
-          </a:xfrm>
-          <a:prstGeom prst="roundRect">
-            <a:avLst>
-              <a:gd name="adj" fmla="val 10000"/>
-            </a:avLst>
+            <a:off x="640080" y="2971800"/>
+            <a:ext cx="1737360" cy="822960"/>
+          </a:xfrm>
+          <a:prstGeom prst="ellipse">
+            <a:avLst/>
           </a:prstGeom>
           <a:solidFill>
             <a:srgbClr val="FFFFFF"/>
@@ -11627,33 +10771,30 @@
           <a:p>
             <a:pPr algn="ctr"/>
             <a:r>
-              <a:rPr sz="1250" b="0" i="0">
+              <a:rPr sz="1200" b="0" i="0">
                 <a:solidFill>
                   <a:srgbClr val="1F2937"/>
                 </a:solidFill>
                 <a:latin typeface="Calibri"/>
               </a:rPr>
-              <a:t>Order Quantity
-100–10,000</a:t>
-            </a:r>
-          </a:p>
-        </p:txBody>
-      </p:sp>
-      <p:sp>
-        <p:nvSpPr>
-          <p:cNvPr id="9" name="Rounded Rectangle 8"/>
+              <a:t>Manufacturing Data</a:t>
+            </a:r>
+          </a:p>
+        </p:txBody>
+      </p:sp>
+      <p:sp>
+        <p:nvSpPr>
+          <p:cNvPr id="10" name="Oval 9"/>
           <p:cNvSpPr/>
           <p:nvPr/>
         </p:nvSpPr>
         <p:spPr>
           <a:xfrm>
-            <a:off x="640080" y="3657600"/>
-            <a:ext cx="1920240" cy="868680"/>
-          </a:xfrm>
-          <a:prstGeom prst="roundRect">
-            <a:avLst>
-              <a:gd name="adj" fmla="val 10000"/>
-            </a:avLst>
+            <a:off x="2743200" y="1965960"/>
+            <a:ext cx="2377440" cy="1828800"/>
+          </a:xfrm>
+          <a:prstGeom prst="ellipse">
+            <a:avLst/>
           </a:prstGeom>
           <a:solidFill>
             <a:srgbClr val="FFFFFF"/>
@@ -11686,33 +10827,30 @@
           <a:p>
             <a:pPr algn="ctr"/>
             <a:r>
-              <a:rPr sz="1250" b="0" i="0">
+              <a:rPr sz="1400" b="1" i="0">
                 <a:solidFill>
                   <a:srgbClr val="1F2937"/>
                 </a:solidFill>
                 <a:latin typeface="Calibri"/>
               </a:rPr>
-              <a:t>Defect Density Ds
-0.0–0.5</a:t>
-            </a:r>
-          </a:p>
-        </p:txBody>
-      </p:sp>
-      <p:sp>
-        <p:nvSpPr>
-          <p:cNvPr id="10" name="Rounded Rectangle 9"/>
+              <a:t>0 Detect + Score + Predict</a:t>
+            </a:r>
+          </a:p>
+        </p:txBody>
+      </p:sp>
+      <p:sp>
+        <p:nvSpPr>
+          <p:cNvPr id="11" name="Oval 10"/>
           <p:cNvSpPr/>
           <p:nvPr/>
         </p:nvSpPr>
         <p:spPr>
           <a:xfrm>
-            <a:off x="3108960" y="2377440"/>
-            <a:ext cx="2194560" cy="1188720"/>
-          </a:xfrm>
-          <a:prstGeom prst="roundRect">
-            <a:avLst>
-              <a:gd name="adj" fmla="val 10000"/>
-            </a:avLst>
+            <a:off x="5577840" y="2286000"/>
+            <a:ext cx="2286000" cy="1188720"/>
+          </a:xfrm>
+          <a:prstGeom prst="ellipse">
+            <a:avLst/>
           </a:prstGeom>
           <a:solidFill>
             <a:srgbClr val="FFFFFF"/>
@@ -11745,33 +10883,30 @@
           <a:p>
             <a:pPr algn="ctr"/>
             <a:r>
-              <a:rPr sz="1250" b="1" i="0">
+              <a:rPr sz="1200" b="0" i="0">
                 <a:solidFill>
                   <a:srgbClr val="1F2937"/>
                 </a:solidFill>
                 <a:latin typeface="Calibri"/>
               </a:rPr>
-              <a:t>Random Forest
-100 Trees</a:t>
-            </a:r>
-          </a:p>
-        </p:txBody>
-      </p:sp>
-      <p:sp>
-        <p:nvSpPr>
-          <p:cNvPr id="11" name="Rounded Rectangle 10"/>
+              <a:t>Result + Ds + Hours</a:t>
+            </a:r>
+          </a:p>
+        </p:txBody>
+      </p:sp>
+      <p:sp>
+        <p:nvSpPr>
+          <p:cNvPr id="12" name="Oval 11"/>
           <p:cNvSpPr/>
           <p:nvPr/>
         </p:nvSpPr>
         <p:spPr>
           <a:xfrm>
-            <a:off x="5852160" y="2377440"/>
-            <a:ext cx="2011680" cy="1188720"/>
-          </a:xfrm>
-          <a:prstGeom prst="roundRect">
-            <a:avLst>
-              <a:gd name="adj" fmla="val 10000"/>
-            </a:avLst>
+            <a:off x="8321040" y="2286000"/>
+            <a:ext cx="2286000" cy="1188720"/>
+          </a:xfrm>
+          <a:prstGeom prst="ellipse">
+            <a:avLst/>
           </a:prstGeom>
           <a:solidFill>
             <a:srgbClr val="FFFFFF"/>
@@ -11804,73 +10939,13 @@
           <a:p>
             <a:pPr algn="ctr"/>
             <a:r>
-              <a:rPr sz="1250" b="0" i="0">
+              <a:rPr sz="1200" b="0" i="0">
                 <a:solidFill>
                   <a:srgbClr val="1F2937"/>
                 </a:solidFill>
                 <a:latin typeface="Calibri"/>
               </a:rPr>
-              <a:t>Lead Time
-Hours</a:t>
-            </a:r>
-          </a:p>
-        </p:txBody>
-      </p:sp>
-      <p:sp>
-        <p:nvSpPr>
-          <p:cNvPr id="12" name="Rounded Rectangle 11"/>
-          <p:cNvSpPr/>
-          <p:nvPr/>
-        </p:nvSpPr>
-        <p:spPr>
-          <a:xfrm>
-            <a:off x="8412480" y="2377440"/>
-            <a:ext cx="2743200" cy="1188720"/>
-          </a:xfrm>
-          <a:prstGeom prst="roundRect">
-            <a:avLst>
-              <a:gd name="adj" fmla="val 10000"/>
-            </a:avLst>
-          </a:prstGeom>
-          <a:solidFill>
-            <a:srgbClr val="FFFFFF"/>
-          </a:solidFill>
-          <a:ln w="19050">
-            <a:solidFill>
-              <a:srgbClr val="1B7A6E"/>
-            </a:solidFill>
-          </a:ln>
-        </p:spPr>
-        <p:style>
-          <a:lnRef idx="1">
-            <a:schemeClr val="accent1"/>
-          </a:lnRef>
-          <a:fillRef idx="3">
-            <a:schemeClr val="accent1"/>
-          </a:fillRef>
-          <a:effectRef idx="2">
-            <a:schemeClr val="accent1"/>
-          </a:effectRef>
-          <a:fontRef idx="minor">
-            <a:schemeClr val="lt1"/>
-          </a:fontRef>
-        </p:style>
-        <p:txBody>
-          <a:bodyPr rtlCol="0" anchor="ctr" wrap="square">
-            <a:normAutofit/>
-          </a:bodyPr>
-          <a:lstStyle/>
-          <a:p>
-            <a:pPr algn="ctr"/>
-            <a:r>
-              <a:rPr sz="1250" b="0" i="0">
-                <a:solidFill>
-                  <a:srgbClr val="1F2937"/>
-                </a:solidFill>
-                <a:latin typeface="Calibri"/>
-              </a:rPr>
-              <a:t>MAE / RMSE / R²
-Vs Static + No-Ds</a:t>
+              <a:t>Planner / Inspector</a:t>
             </a:r>
           </a:p>
         </p:txBody>
@@ -11883,8 +10958,8 @@
         </p:nvCxnSpPr>
         <p:spPr>
           <a:xfrm>
-            <a:off x="2578608" y="1984248"/>
-            <a:ext cx="512064" cy="667512"/>
+            <a:off x="2377440" y="2377440"/>
+            <a:ext cx="347472" cy="0"/>
           </a:xfrm>
           <a:prstGeom prst="line">
             <a:avLst/>
@@ -11918,9 +10993,9 @@
           <p:nvPr/>
         </p:nvCxnSpPr>
         <p:spPr>
-          <a:xfrm flipV="1">
-            <a:off x="2578608" y="2971800"/>
-            <a:ext cx="512064" cy="64008"/>
+          <a:xfrm>
+            <a:off x="2377440" y="3383280"/>
+            <a:ext cx="347472" cy="0"/>
           </a:xfrm>
           <a:prstGeom prst="line">
             <a:avLst/>
@@ -11954,9 +11029,9 @@
           <p:nvPr/>
         </p:nvCxnSpPr>
         <p:spPr>
-          <a:xfrm flipV="1">
-            <a:off x="2578608" y="3291840"/>
-            <a:ext cx="512064" cy="795528"/>
+          <a:xfrm>
+            <a:off x="5120640" y="2651760"/>
+            <a:ext cx="438912" cy="0"/>
           </a:xfrm>
           <a:prstGeom prst="line">
             <a:avLst/>
@@ -11991,8 +11066,8 @@
         </p:nvCxnSpPr>
         <p:spPr>
           <a:xfrm>
-            <a:off x="5303520" y="2971800"/>
-            <a:ext cx="530352" cy="0"/>
+            <a:off x="7863840" y="3108960"/>
+            <a:ext cx="438912" cy="0"/>
           </a:xfrm>
           <a:prstGeom prst="line">
             <a:avLst/>
@@ -12019,16 +11094,169 @@
           </a:fontRef>
         </p:style>
       </p:cxnSp>
+      <p:sp>
+        <p:nvSpPr>
+          <p:cNvPr id="17" name="TextBox 16"/>
+          <p:cNvSpPr txBox="1"/>
+          <p:nvPr/>
+        </p:nvSpPr>
+        <p:spPr>
+          <a:xfrm>
+            <a:off x="548640" y="3977639"/>
+            <a:ext cx="11064240" cy="365760"/>
+          </a:xfrm>
+          <a:prstGeom prst="rect">
+            <a:avLst/>
+          </a:prstGeom>
+          <a:noFill/>
+        </p:spPr>
+        <p:txBody>
+          <a:bodyPr wrap="square" anchor="ctr">
+            <a:spAutoFit/>
+          </a:bodyPr>
+          <a:lstStyle/>
+          <a:p>
+            <a:pPr algn="ctr"/>
+            <a:r>
+              <a:rPr sz="1400" b="1" i="0">
+                <a:solidFill>
+                  <a:srgbClr val="144E4C"/>
+                </a:solidFill>
+                <a:latin typeface="Calibri"/>
+              </a:rPr>
+              <a:t>Ds Metadata Bridge (Rolling 10-Frame Average)</a:t>
+            </a:r>
+          </a:p>
+        </p:txBody>
+      </p:sp>
+      <p:sp>
+        <p:nvSpPr>
+          <p:cNvPr id="18" name="Rounded Rectangle 17"/>
+          <p:cNvSpPr/>
+          <p:nvPr/>
+        </p:nvSpPr>
+        <p:spPr>
+          <a:xfrm>
+            <a:off x="640080" y="4434840"/>
+            <a:ext cx="1554480" cy="914400"/>
+          </a:xfrm>
+          <a:prstGeom prst="roundRect">
+            <a:avLst>
+              <a:gd name="adj" fmla="val 10000"/>
+            </a:avLst>
+          </a:prstGeom>
+          <a:solidFill>
+            <a:srgbClr val="E4ECD4"/>
+          </a:solidFill>
+          <a:ln w="19050">
+            <a:solidFill>
+              <a:srgbClr val="1B7A6E"/>
+            </a:solidFill>
+          </a:ln>
+        </p:spPr>
+        <p:style>
+          <a:lnRef idx="1">
+            <a:schemeClr val="accent1"/>
+          </a:lnRef>
+          <a:fillRef idx="3">
+            <a:schemeClr val="accent1"/>
+          </a:fillRef>
+          <a:effectRef idx="2">
+            <a:schemeClr val="accent1"/>
+          </a:effectRef>
+          <a:fontRef idx="minor">
+            <a:schemeClr val="lt1"/>
+          </a:fontRef>
+        </p:style>
+        <p:txBody>
+          <a:bodyPr rtlCol="0" anchor="ctr" wrap="square">
+            <a:normAutofit/>
+          </a:bodyPr>
+          <a:lstStyle/>
+          <a:p>
+            <a:pPr algn="ctr"/>
+            <a:r>
+              <a:rPr sz="1100" b="0" i="0">
+                <a:solidFill>
+                  <a:srgbClr val="1F2937"/>
+                </a:solidFill>
+                <a:latin typeface="Calibri"/>
+              </a:rPr>
+              <a:t>YOLO Output:
+Class, Conf., Box</a:t>
+            </a:r>
+          </a:p>
+        </p:txBody>
+      </p:sp>
+      <p:sp>
+        <p:nvSpPr>
+          <p:cNvPr id="19" name="Rounded Rectangle 18"/>
+          <p:cNvSpPr/>
+          <p:nvPr/>
+        </p:nvSpPr>
+        <p:spPr>
+          <a:xfrm>
+            <a:off x="2404872" y="4434840"/>
+            <a:ext cx="1554480" cy="914400"/>
+          </a:xfrm>
+          <a:prstGeom prst="roundRect">
+            <a:avLst>
+              <a:gd name="adj" fmla="val 10000"/>
+            </a:avLst>
+          </a:prstGeom>
+          <a:solidFill>
+            <a:srgbClr val="E4ECD4"/>
+          </a:solidFill>
+          <a:ln w="19050">
+            <a:solidFill>
+              <a:srgbClr val="1B7A6E"/>
+            </a:solidFill>
+          </a:ln>
+        </p:spPr>
+        <p:style>
+          <a:lnRef idx="1">
+            <a:schemeClr val="accent1"/>
+          </a:lnRef>
+          <a:fillRef idx="3">
+            <a:schemeClr val="accent1"/>
+          </a:fillRef>
+          <a:effectRef idx="2">
+            <a:schemeClr val="accent1"/>
+          </a:effectRef>
+          <a:fontRef idx="minor">
+            <a:schemeClr val="lt1"/>
+          </a:fontRef>
+        </p:style>
+        <p:txBody>
+          <a:bodyPr rtlCol="0" anchor="ctr" wrap="square">
+            <a:normAutofit/>
+          </a:bodyPr>
+          <a:lstStyle/>
+          <a:p>
+            <a:pPr algn="ctr"/>
+            <a:r>
+              <a:rPr sz="1100" b="0" i="0">
+                <a:solidFill>
+                  <a:srgbClr val="1F2937"/>
+                </a:solidFill>
+                <a:latin typeface="Calibri"/>
+              </a:rPr>
+              <a:t>Per-Defect
+Area</a:t>
+            </a:r>
+          </a:p>
+        </p:txBody>
+      </p:sp>
       <p:cxnSp>
         <p:nvCxnSpPr>
-          <p:cNvPr id="17" name="Connector 16"/>
+          <p:cNvPr id="20" name="Connector 19"/>
           <p:cNvCxnSpPr/>
           <p:nvPr/>
         </p:nvCxnSpPr>
         <p:spPr>
           <a:xfrm>
-            <a:off x="7863840" y="2971800"/>
-            <a:ext cx="530352" cy="0"/>
+            <a:off x="2212848" y="4892040"/>
+            <a:ext cx="201167" cy="0"/>
           </a:xfrm>
           <a:prstGeom prst="line">
             <a:avLst/>
@@ -12057,23 +11285,27 @@
       </p:cxnSp>
       <p:sp>
         <p:nvSpPr>
-          <p:cNvPr id="18" name="Rounded Rectangle 17"/>
+          <p:cNvPr id="21" name="Rounded Rectangle 20"/>
           <p:cNvSpPr/>
           <p:nvPr/>
         </p:nvSpPr>
         <p:spPr>
           <a:xfrm>
-            <a:off x="1463040" y="5029200"/>
-            <a:ext cx="9235440" cy="731520"/>
+            <a:off x="4169663" y="4434840"/>
+            <a:ext cx="1554480" cy="914400"/>
           </a:xfrm>
           <a:prstGeom prst="roundRect">
-            <a:avLst/>
+            <a:avLst>
+              <a:gd name="adj" fmla="val 10000"/>
+            </a:avLst>
           </a:prstGeom>
           <a:solidFill>
-            <a:srgbClr val="2E9E5B"/>
+            <a:srgbClr val="E4ECD4"/>
           </a:solidFill>
-          <a:ln>
-            <a:noFill/>
+          <a:ln w="19050">
+            <a:solidFill>
+              <a:srgbClr val="1B7A6E"/>
+            </a:solidFill>
           </a:ln>
         </p:spPr>
         <p:style>
@@ -12091,57 +11323,441 @@
           </a:fontRef>
         </p:style>
         <p:txBody>
-          <a:bodyPr rtlCol="0" anchor="ctr"/>
+          <a:bodyPr rtlCol="0" anchor="ctr" wrap="square">
+            <a:normAutofit/>
+          </a:bodyPr>
           <a:lstStyle/>
           <a:p>
             <a:pPr algn="ctr"/>
             <a:r>
-              <a:rPr sz="2000" b="1" i="0">
-                <a:solidFill>
-                  <a:srgbClr val="FFFFFF"/>
+              <a:rPr sz="1100" b="0" i="0">
+                <a:solidFill>
+                  <a:srgbClr val="1F2937"/>
                 </a:solidFill>
                 <a:latin typeface="Calibri"/>
               </a:rPr>
-              <a:t>Lead = (Qty / Speed) × 0.1 × (1 + 2 × Ds)</a:t>
-            </a:r>
-          </a:p>
-        </p:txBody>
-      </p:sp>
-      <p:sp>
-        <p:nvSpPr>
-          <p:cNvPr id="19" name="TextBox 18"/>
-          <p:cNvSpPr txBox="1"/>
-          <p:nvPr/>
-        </p:nvSpPr>
-        <p:spPr>
-          <a:xfrm>
-            <a:off x="548640" y="5852160"/>
-            <a:ext cx="11064240" cy="502920"/>
-          </a:xfrm>
-          <a:prstGeom prst="rect">
-            <a:avLst/>
-          </a:prstGeom>
-          <a:noFill/>
-        </p:spPr>
-        <p:txBody>
-          <a:bodyPr wrap="square" anchor="ctr">
-            <a:spAutoFit/>
+              <a:t>Sum Defect
+Area</a:t>
+            </a:r>
+          </a:p>
+        </p:txBody>
+      </p:sp>
+      <p:cxnSp>
+        <p:nvCxnSpPr>
+          <p:cNvPr id="22" name="Connector 21"/>
+          <p:cNvCxnSpPr/>
+          <p:nvPr/>
+        </p:nvCxnSpPr>
+        <p:spPr>
+          <a:xfrm>
+            <a:off x="3977639" y="4892040"/>
+            <a:ext cx="201168" cy="0"/>
+          </a:xfrm>
+          <a:prstGeom prst="line">
+            <a:avLst/>
+          </a:prstGeom>
+          <a:ln w="19050">
+            <a:solidFill>
+              <a:srgbClr val="1F2937"/>
+            </a:solidFill>
+            <a:tailEnd type="triangle" w="med" len="med"/>
+          </a:ln>
+        </p:spPr>
+        <p:style>
+          <a:lnRef idx="2">
+            <a:schemeClr val="accent1"/>
+          </a:lnRef>
+          <a:fillRef idx="0">
+            <a:schemeClr val="accent1"/>
+          </a:fillRef>
+          <a:effectRef idx="1">
+            <a:schemeClr val="accent1"/>
+          </a:effectRef>
+          <a:fontRef idx="minor">
+            <a:schemeClr val="tx1"/>
+          </a:fontRef>
+        </p:style>
+      </p:cxnSp>
+      <p:sp>
+        <p:nvSpPr>
+          <p:cNvPr id="23" name="Rounded Rectangle 22"/>
+          <p:cNvSpPr/>
+          <p:nvPr/>
+        </p:nvSpPr>
+        <p:spPr>
+          <a:xfrm>
+            <a:off x="5934456" y="4434840"/>
+            <a:ext cx="1554480" cy="914400"/>
+          </a:xfrm>
+          <a:prstGeom prst="roundRect">
+            <a:avLst>
+              <a:gd name="adj" fmla="val 10000"/>
+            </a:avLst>
+          </a:prstGeom>
+          <a:solidFill>
+            <a:srgbClr val="E4ECD4"/>
+          </a:solidFill>
+          <a:ln w="19050">
+            <a:solidFill>
+              <a:srgbClr val="1B7A6E"/>
+            </a:solidFill>
+          </a:ln>
+        </p:spPr>
+        <p:style>
+          <a:lnRef idx="1">
+            <a:schemeClr val="accent1"/>
+          </a:lnRef>
+          <a:fillRef idx="3">
+            <a:schemeClr val="accent1"/>
+          </a:fillRef>
+          <a:effectRef idx="2">
+            <a:schemeClr val="accent1"/>
+          </a:effectRef>
+          <a:fontRef idx="minor">
+            <a:schemeClr val="lt1"/>
+          </a:fontRef>
+        </p:style>
+        <p:txBody>
+          <a:bodyPr rtlCol="0" anchor="ctr" wrap="square">
+            <a:normAutofit/>
           </a:bodyPr>
           <a:lstStyle/>
           <a:p>
             <a:pPr algn="ctr"/>
             <a:r>
-              <a:rPr sz="1150" b="0" i="0">
-                <a:solidFill>
-                  <a:srgbClr val="5B6570"/>
+              <a:rPr sz="1100" b="0" i="0">
+                <a:solidFill>
+                  <a:srgbClr val="1F2937"/>
                 </a:solidFill>
                 <a:latin typeface="Calibri"/>
               </a:rPr>
-              <a:t>Example: Ds = 0.2 Inflates Predicted Time By 40%. Features: Speed 20–100 m/min, Quantity 100–10,000, Ds 0–0.5, 100-Tree Random Forest, Evaluated Vs Static-Mean And No-Ds Baselines.</a:t>
-            </a:r>
-          </a:p>
-        </p:txBody>
-      </p:sp>
+              <a:t>Ds =
+Defect / Frame</a:t>
+            </a:r>
+          </a:p>
+        </p:txBody>
+      </p:sp>
+      <p:cxnSp>
+        <p:nvCxnSpPr>
+          <p:cNvPr id="24" name="Connector 23"/>
+          <p:cNvCxnSpPr/>
+          <p:nvPr/>
+        </p:nvCxnSpPr>
+        <p:spPr>
+          <a:xfrm>
+            <a:off x="5742432" y="4892040"/>
+            <a:ext cx="201168" cy="0"/>
+          </a:xfrm>
+          <a:prstGeom prst="line">
+            <a:avLst/>
+          </a:prstGeom>
+          <a:ln w="19050">
+            <a:solidFill>
+              <a:srgbClr val="1F2937"/>
+            </a:solidFill>
+            <a:tailEnd type="triangle" w="med" len="med"/>
+          </a:ln>
+        </p:spPr>
+        <p:style>
+          <a:lnRef idx="2">
+            <a:schemeClr val="accent1"/>
+          </a:lnRef>
+          <a:fillRef idx="0">
+            <a:schemeClr val="accent1"/>
+          </a:fillRef>
+          <a:effectRef idx="1">
+            <a:schemeClr val="accent1"/>
+          </a:effectRef>
+          <a:fontRef idx="minor">
+            <a:schemeClr val="tx1"/>
+          </a:fontRef>
+        </p:style>
+      </p:cxnSp>
+      <p:sp>
+        <p:nvSpPr>
+          <p:cNvPr id="25" name="Rounded Rectangle 24"/>
+          <p:cNvSpPr/>
+          <p:nvPr/>
+        </p:nvSpPr>
+        <p:spPr>
+          <a:xfrm>
+            <a:off x="7699248" y="4434840"/>
+            <a:ext cx="1554480" cy="914400"/>
+          </a:xfrm>
+          <a:prstGeom prst="roundRect">
+            <a:avLst>
+              <a:gd name="adj" fmla="val 10000"/>
+            </a:avLst>
+          </a:prstGeom>
+          <a:solidFill>
+            <a:srgbClr val="E4ECD4"/>
+          </a:solidFill>
+          <a:ln w="19050">
+            <a:solidFill>
+              <a:srgbClr val="1B7A6E"/>
+            </a:solidFill>
+          </a:ln>
+        </p:spPr>
+        <p:style>
+          <a:lnRef idx="1">
+            <a:schemeClr val="accent1"/>
+          </a:lnRef>
+          <a:fillRef idx="3">
+            <a:schemeClr val="accent1"/>
+          </a:fillRef>
+          <a:effectRef idx="2">
+            <a:schemeClr val="accent1"/>
+          </a:effectRef>
+          <a:fontRef idx="minor">
+            <a:schemeClr val="lt1"/>
+          </a:fontRef>
+        </p:style>
+        <p:txBody>
+          <a:bodyPr rtlCol="0" anchor="ctr" wrap="square">
+            <a:normAutofit/>
+          </a:bodyPr>
+          <a:lstStyle/>
+          <a:p>
+            <a:pPr algn="ctr"/>
+            <a:r>
+              <a:rPr sz="1100" b="0" i="0">
+                <a:solidFill>
+                  <a:srgbClr val="1F2937"/>
+                </a:solidFill>
+                <a:latin typeface="Calibri"/>
+              </a:rPr>
+              <a:t>Rolling Avg.
+Last 10 Frames</a:t>
+            </a:r>
+          </a:p>
+        </p:txBody>
+      </p:sp>
+      <p:cxnSp>
+        <p:nvCxnSpPr>
+          <p:cNvPr id="26" name="Connector 25"/>
+          <p:cNvCxnSpPr/>
+          <p:nvPr/>
+        </p:nvCxnSpPr>
+        <p:spPr>
+          <a:xfrm>
+            <a:off x="7507223" y="4892040"/>
+            <a:ext cx="201169" cy="0"/>
+          </a:xfrm>
+          <a:prstGeom prst="line">
+            <a:avLst/>
+          </a:prstGeom>
+          <a:ln w="19050">
+            <a:solidFill>
+              <a:srgbClr val="1F2937"/>
+            </a:solidFill>
+            <a:tailEnd type="triangle" w="med" len="med"/>
+          </a:ln>
+        </p:spPr>
+        <p:style>
+          <a:lnRef idx="2">
+            <a:schemeClr val="accent1"/>
+          </a:lnRef>
+          <a:fillRef idx="0">
+            <a:schemeClr val="accent1"/>
+          </a:fillRef>
+          <a:effectRef idx="1">
+            <a:schemeClr val="accent1"/>
+          </a:effectRef>
+          <a:fontRef idx="minor">
+            <a:schemeClr val="tx1"/>
+          </a:fontRef>
+        </p:style>
+      </p:cxnSp>
+      <p:sp>
+        <p:nvSpPr>
+          <p:cNvPr id="27" name="Rounded Rectangle 26"/>
+          <p:cNvSpPr/>
+          <p:nvPr/>
+        </p:nvSpPr>
+        <p:spPr>
+          <a:xfrm>
+            <a:off x="9464040" y="4434840"/>
+            <a:ext cx="1554480" cy="914400"/>
+          </a:xfrm>
+          <a:prstGeom prst="roundRect">
+            <a:avLst>
+              <a:gd name="adj" fmla="val 10000"/>
+            </a:avLst>
+          </a:prstGeom>
+          <a:solidFill>
+            <a:srgbClr val="E4ECD4"/>
+          </a:solidFill>
+          <a:ln w="19050">
+            <a:solidFill>
+              <a:srgbClr val="1B7A6E"/>
+            </a:solidFill>
+          </a:ln>
+        </p:spPr>
+        <p:style>
+          <a:lnRef idx="1">
+            <a:schemeClr val="accent1"/>
+          </a:lnRef>
+          <a:fillRef idx="3">
+            <a:schemeClr val="accent1"/>
+          </a:fillRef>
+          <a:effectRef idx="2">
+            <a:schemeClr val="accent1"/>
+          </a:effectRef>
+          <a:fontRef idx="minor">
+            <a:schemeClr val="lt1"/>
+          </a:fontRef>
+        </p:style>
+        <p:txBody>
+          <a:bodyPr rtlCol="0" anchor="ctr" wrap="square">
+            <a:normAutofit/>
+          </a:bodyPr>
+          <a:lstStyle/>
+          <a:p>
+            <a:pPr algn="ctr"/>
+            <a:r>
+              <a:rPr sz="1100" b="0" i="0">
+                <a:solidFill>
+                  <a:srgbClr val="1F2937"/>
+                </a:solidFill>
+                <a:latin typeface="Calibri"/>
+              </a:rPr>
+              <a:t>Predictor
+Input</a:t>
+            </a:r>
+          </a:p>
+        </p:txBody>
+      </p:sp>
+      <p:cxnSp>
+        <p:nvCxnSpPr>
+          <p:cNvPr id="28" name="Connector 27"/>
+          <p:cNvCxnSpPr/>
+          <p:nvPr/>
+        </p:nvCxnSpPr>
+        <p:spPr>
+          <a:xfrm>
+            <a:off x="9272015" y="4892040"/>
+            <a:ext cx="201169" cy="0"/>
+          </a:xfrm>
+          <a:prstGeom prst="line">
+            <a:avLst/>
+          </a:prstGeom>
+          <a:ln w="19050">
+            <a:solidFill>
+              <a:srgbClr val="1F2937"/>
+            </a:solidFill>
+            <a:tailEnd type="triangle" w="med" len="med"/>
+          </a:ln>
+        </p:spPr>
+        <p:style>
+          <a:lnRef idx="2">
+            <a:schemeClr val="accent1"/>
+          </a:lnRef>
+          <a:fillRef idx="0">
+            <a:schemeClr val="accent1"/>
+          </a:fillRef>
+          <a:effectRef idx="1">
+            <a:schemeClr val="accent1"/>
+          </a:effectRef>
+          <a:fontRef idx="minor">
+            <a:schemeClr val="tx1"/>
+          </a:fontRef>
+        </p:style>
+      </p:cxnSp>
+      <p:sp>
+        <p:nvSpPr>
+          <p:cNvPr id="29" name="Rounded Rectangle 28"/>
+          <p:cNvSpPr/>
+          <p:nvPr/>
+        </p:nvSpPr>
+        <p:spPr>
+          <a:xfrm>
+            <a:off x="5934456" y="5486400"/>
+            <a:ext cx="1554480" cy="658368"/>
+          </a:xfrm>
+          <a:prstGeom prst="roundRect">
+            <a:avLst>
+              <a:gd name="adj" fmla="val 10000"/>
+            </a:avLst>
+          </a:prstGeom>
+          <a:solidFill>
+            <a:srgbClr val="E4ECD4"/>
+          </a:solidFill>
+          <a:ln w="19050">
+            <a:solidFill>
+              <a:srgbClr val="1B7A6E"/>
+            </a:solidFill>
+          </a:ln>
+        </p:spPr>
+        <p:style>
+          <a:lnRef idx="1">
+            <a:schemeClr val="accent1"/>
+          </a:lnRef>
+          <a:fillRef idx="3">
+            <a:schemeClr val="accent1"/>
+          </a:fillRef>
+          <a:effectRef idx="2">
+            <a:schemeClr val="accent1"/>
+          </a:effectRef>
+          <a:fontRef idx="minor">
+            <a:schemeClr val="lt1"/>
+          </a:fontRef>
+        </p:style>
+        <p:txBody>
+          <a:bodyPr rtlCol="0" anchor="ctr" wrap="square">
+            <a:normAutofit/>
+          </a:bodyPr>
+          <a:lstStyle/>
+          <a:p>
+            <a:pPr algn="ctr"/>
+            <a:r>
+              <a:rPr sz="1100" b="0" i="0">
+                <a:solidFill>
+                  <a:srgbClr val="1F2937"/>
+                </a:solidFill>
+                <a:latin typeface="Calibri"/>
+              </a:rPr>
+              <a:t>Frame Area
+H × W</a:t>
+            </a:r>
+          </a:p>
+        </p:txBody>
+      </p:sp>
+      <p:cxnSp>
+        <p:nvCxnSpPr>
+          <p:cNvPr id="30" name="Connector 29"/>
+          <p:cNvCxnSpPr/>
+          <p:nvPr/>
+        </p:nvCxnSpPr>
+        <p:spPr>
+          <a:xfrm flipV="1">
+            <a:off x="6711696" y="5367528"/>
+            <a:ext cx="0" cy="100584"/>
+          </a:xfrm>
+          <a:prstGeom prst="line">
+            <a:avLst/>
+          </a:prstGeom>
+          <a:ln w="19050">
+            <a:solidFill>
+              <a:srgbClr val="1F2937"/>
+            </a:solidFill>
+            <a:tailEnd type="triangle" w="med" len="med"/>
+          </a:ln>
+        </p:spPr>
+        <p:style>
+          <a:lnRef idx="2">
+            <a:schemeClr val="accent1"/>
+          </a:lnRef>
+          <a:fillRef idx="0">
+            <a:schemeClr val="accent1"/>
+          </a:fillRef>
+          <a:effectRef idx="1">
+            <a:schemeClr val="accent1"/>
+          </a:effectRef>
+          <a:fontRef idx="minor">
+            <a:schemeClr val="tx1"/>
+          </a:fontRef>
+        </p:style>
+      </p:cxnSp>
     </p:spTree>
   </p:cSld>
   <p:clrMapOvr>
@@ -12233,7 +11849,7 @@
                 </a:solidFill>
                 <a:latin typeface="Calibri"/>
               </a:rPr>
-              <a:t>19 / 27</a:t>
+              <a:t>19 / 31</a:t>
             </a:r>
           </a:p>
         </p:txBody>
@@ -12311,7 +11927,7 @@
                 </a:solidFill>
                 <a:latin typeface="Georgia"/>
               </a:rPr>
-              <a:t>Four-Point Inspection Grading (Fig. 3.6)</a:t>
+              <a:t>Lead-Time ML Pipeline (Fig. 3.5)</a:t>
             </a:r>
           </a:p>
         </p:txBody>
@@ -12367,8 +11983,8 @@
         </p:nvSpPr>
         <p:spPr>
           <a:xfrm>
-            <a:off x="4480560" y="1463040"/>
-            <a:ext cx="3200400" cy="640080"/>
+            <a:off x="640080" y="1554480"/>
+            <a:ext cx="1920240" cy="868680"/>
           </a:xfrm>
           <a:prstGeom prst="roundRect">
             <a:avLst>
@@ -12406,63 +12022,28 @@
           <a:p>
             <a:pPr algn="ctr"/>
             <a:r>
-              <a:rPr sz="1200" b="0" i="0">
+              <a:rPr sz="1250" b="0" i="0">
                 <a:solidFill>
                   <a:srgbClr val="1F2937"/>
                 </a:solidFill>
                 <a:latin typeface="Calibri"/>
               </a:rPr>
-              <a:t>Calibrate Pixels To Inches (Fixed Geometry)</a:t>
-            </a:r>
-          </a:p>
-        </p:txBody>
-      </p:sp>
-      <p:cxnSp>
-        <p:nvCxnSpPr>
-          <p:cNvPr id="8" name="Connector 7"/>
-          <p:cNvCxnSpPr/>
-          <p:nvPr/>
-        </p:nvCxnSpPr>
-        <p:spPr>
-          <a:xfrm>
-            <a:off x="6080760" y="2121408"/>
-            <a:ext cx="0" cy="146304"/>
-          </a:xfrm>
-          <a:prstGeom prst="line">
-            <a:avLst/>
-          </a:prstGeom>
-          <a:ln w="19050">
-            <a:solidFill>
-              <a:srgbClr val="1F2937"/>
-            </a:solidFill>
-            <a:tailEnd type="triangle" w="med" len="med"/>
-          </a:ln>
-        </p:spPr>
-        <p:style>
-          <a:lnRef idx="2">
-            <a:schemeClr val="accent1"/>
-          </a:lnRef>
-          <a:fillRef idx="0">
-            <a:schemeClr val="accent1"/>
-          </a:fillRef>
-          <a:effectRef idx="1">
-            <a:schemeClr val="accent1"/>
-          </a:effectRef>
-          <a:fontRef idx="minor">
-            <a:schemeClr val="tx1"/>
-          </a:fontRef>
-        </p:style>
-      </p:cxnSp>
-      <p:sp>
-        <p:nvSpPr>
-          <p:cNvPr id="9" name="Rounded Rectangle 8"/>
+              <a:t>Machine Speed
+20–100 m/min</a:t>
+            </a:r>
+          </a:p>
+        </p:txBody>
+      </p:sp>
+      <p:sp>
+        <p:nvSpPr>
+          <p:cNvPr id="8" name="Rounded Rectangle 7"/>
           <p:cNvSpPr/>
           <p:nvPr/>
         </p:nvSpPr>
         <p:spPr>
           <a:xfrm>
-            <a:off x="4480560" y="2286000"/>
-            <a:ext cx="3200400" cy="640080"/>
+            <a:off x="640080" y="2606040"/>
+            <a:ext cx="1920240" cy="868680"/>
           </a:xfrm>
           <a:prstGeom prst="roundRect">
             <a:avLst>
@@ -12500,66 +12081,33 @@
           <a:p>
             <a:pPr algn="ctr"/>
             <a:r>
-              <a:rPr sz="1200" b="0" i="0">
+              <a:rPr sz="1250" b="0" i="0">
                 <a:solidFill>
                   <a:srgbClr val="1F2937"/>
                 </a:solidFill>
                 <a:latin typeface="Calibri"/>
               </a:rPr>
-              <a:t>Measure Fault Length</a:t>
-            </a:r>
-          </a:p>
-        </p:txBody>
-      </p:sp>
-      <p:cxnSp>
-        <p:nvCxnSpPr>
-          <p:cNvPr id="10" name="Connector 9"/>
-          <p:cNvCxnSpPr/>
-          <p:nvPr/>
-        </p:nvCxnSpPr>
-        <p:spPr>
-          <a:xfrm>
-            <a:off x="6080760" y="2944368"/>
-            <a:ext cx="0" cy="146304"/>
-          </a:xfrm>
-          <a:prstGeom prst="line">
-            <a:avLst/>
-          </a:prstGeom>
-          <a:ln w="19050">
-            <a:solidFill>
-              <a:srgbClr val="1F2937"/>
-            </a:solidFill>
-            <a:tailEnd type="triangle" w="med" len="med"/>
-          </a:ln>
-        </p:spPr>
-        <p:style>
-          <a:lnRef idx="2">
-            <a:schemeClr val="accent1"/>
-          </a:lnRef>
-          <a:fillRef idx="0">
-            <a:schemeClr val="accent1"/>
-          </a:fillRef>
-          <a:effectRef idx="1">
-            <a:schemeClr val="accent1"/>
-          </a:effectRef>
-          <a:fontRef idx="minor">
-            <a:schemeClr val="tx1"/>
-          </a:fontRef>
-        </p:style>
-      </p:cxnSp>
-      <p:sp>
-        <p:nvSpPr>
-          <p:cNvPr id="11" name="Diamond 10"/>
+              <a:t>Order Quantity
+100–10,000</a:t>
+            </a:r>
+          </a:p>
+        </p:txBody>
+      </p:sp>
+      <p:sp>
+        <p:nvSpPr>
+          <p:cNvPr id="9" name="Rounded Rectangle 8"/>
           <p:cNvSpPr/>
           <p:nvPr/>
         </p:nvSpPr>
         <p:spPr>
           <a:xfrm>
-            <a:off x="5349240" y="3108960"/>
-            <a:ext cx="1463040" cy="914400"/>
-          </a:xfrm>
-          <a:prstGeom prst="diamond">
-            <a:avLst/>
+            <a:off x="640080" y="3657600"/>
+            <a:ext cx="1920240" cy="868680"/>
+          </a:xfrm>
+          <a:prstGeom prst="roundRect">
+            <a:avLst>
+              <a:gd name="adj" fmla="val 10000"/>
+            </a:avLst>
           </a:prstGeom>
           <a:solidFill>
             <a:srgbClr val="FFFFFF"/>
@@ -12592,27 +12140,28 @@
           <a:p>
             <a:pPr algn="ctr"/>
             <a:r>
-              <a:rPr sz="1250" b="1" i="0">
+              <a:rPr sz="1250" b="0" i="0">
                 <a:solidFill>
                   <a:srgbClr val="1F2937"/>
                 </a:solidFill>
                 <a:latin typeface="Calibri"/>
               </a:rPr>
-              <a:t>Length?</a:t>
-            </a:r>
-          </a:p>
-        </p:txBody>
-      </p:sp>
-      <p:sp>
-        <p:nvSpPr>
-          <p:cNvPr id="12" name="Rounded Rectangle 11"/>
+              <a:t>Defect Density Ds
+0.0–0.5</a:t>
+            </a:r>
+          </a:p>
+        </p:txBody>
+      </p:sp>
+      <p:sp>
+        <p:nvSpPr>
+          <p:cNvPr id="10" name="Rounded Rectangle 9"/>
           <p:cNvSpPr/>
           <p:nvPr/>
         </p:nvSpPr>
         <p:spPr>
           <a:xfrm>
-            <a:off x="640080" y="4480560"/>
-            <a:ext cx="2560320" cy="777240"/>
+            <a:off x="3108960" y="2377440"/>
+            <a:ext cx="2194560" cy="1188720"/>
           </a:xfrm>
           <a:prstGeom prst="roundRect">
             <a:avLst>
@@ -12650,64 +12199,28 @@
           <a:p>
             <a:pPr algn="ctr"/>
             <a:r>
-              <a:rPr sz="1150" b="0" i="0">
+              <a:rPr sz="1250" b="1" i="0">
                 <a:solidFill>
                   <a:srgbClr val="1F2937"/>
                 </a:solidFill>
                 <a:latin typeface="Calibri"/>
               </a:rPr>
-              <a:t>Under 3 In
-1 Point</a:t>
-            </a:r>
-          </a:p>
-        </p:txBody>
-      </p:sp>
-      <p:cxnSp>
-        <p:nvCxnSpPr>
-          <p:cNvPr id="13" name="Connector 12"/>
-          <p:cNvCxnSpPr/>
-          <p:nvPr/>
-        </p:nvCxnSpPr>
-        <p:spPr>
-          <a:xfrm flipH="1">
-            <a:off x="1920239" y="4041648"/>
-            <a:ext cx="3840481" cy="420624"/>
-          </a:xfrm>
-          <a:prstGeom prst="line">
-            <a:avLst/>
-          </a:prstGeom>
-          <a:ln w="19050">
-            <a:solidFill>
-              <a:srgbClr val="1F2937"/>
-            </a:solidFill>
-            <a:tailEnd type="triangle" w="med" len="med"/>
-          </a:ln>
-        </p:spPr>
-        <p:style>
-          <a:lnRef idx="2">
-            <a:schemeClr val="accent1"/>
-          </a:lnRef>
-          <a:fillRef idx="0">
-            <a:schemeClr val="accent1"/>
-          </a:fillRef>
-          <a:effectRef idx="1">
-            <a:schemeClr val="accent1"/>
-          </a:effectRef>
-          <a:fontRef idx="minor">
-            <a:schemeClr val="tx1"/>
-          </a:fontRef>
-        </p:style>
-      </p:cxnSp>
-      <p:sp>
-        <p:nvSpPr>
-          <p:cNvPr id="14" name="Rounded Rectangle 13"/>
+              <a:t>Random Forest
+100 Trees</a:t>
+            </a:r>
+          </a:p>
+        </p:txBody>
+      </p:sp>
+      <p:sp>
+        <p:nvSpPr>
+          <p:cNvPr id="11" name="Rounded Rectangle 10"/>
           <p:cNvSpPr/>
           <p:nvPr/>
         </p:nvSpPr>
         <p:spPr>
           <a:xfrm>
-            <a:off x="3410712" y="4480560"/>
-            <a:ext cx="2560320" cy="777240"/>
+            <a:off x="5852160" y="2377440"/>
+            <a:ext cx="2011680" cy="1188720"/>
           </a:xfrm>
           <a:prstGeom prst="roundRect">
             <a:avLst>
@@ -12745,64 +12258,28 @@
           <a:p>
             <a:pPr algn="ctr"/>
             <a:r>
-              <a:rPr sz="1150" b="0" i="0">
+              <a:rPr sz="1250" b="0" i="0">
                 <a:solidFill>
                   <a:srgbClr val="1F2937"/>
                 </a:solidFill>
                 <a:latin typeface="Calibri"/>
               </a:rPr>
-              <a:t>3 To 6 In
-2 Points</a:t>
-            </a:r>
-          </a:p>
-        </p:txBody>
-      </p:sp>
-      <p:cxnSp>
-        <p:nvCxnSpPr>
-          <p:cNvPr id="15" name="Connector 14"/>
-          <p:cNvCxnSpPr/>
-          <p:nvPr/>
-        </p:nvCxnSpPr>
-        <p:spPr>
-          <a:xfrm flipH="1">
-            <a:off x="4690872" y="4041648"/>
-            <a:ext cx="1298448" cy="420624"/>
-          </a:xfrm>
-          <a:prstGeom prst="line">
-            <a:avLst/>
-          </a:prstGeom>
-          <a:ln w="19050">
-            <a:solidFill>
-              <a:srgbClr val="1F2937"/>
-            </a:solidFill>
-            <a:tailEnd type="triangle" w="med" len="med"/>
-          </a:ln>
-        </p:spPr>
-        <p:style>
-          <a:lnRef idx="2">
-            <a:schemeClr val="accent1"/>
-          </a:lnRef>
-          <a:fillRef idx="0">
-            <a:schemeClr val="accent1"/>
-          </a:fillRef>
-          <a:effectRef idx="1">
-            <a:schemeClr val="accent1"/>
-          </a:effectRef>
-          <a:fontRef idx="minor">
-            <a:schemeClr val="tx1"/>
-          </a:fontRef>
-        </p:style>
-      </p:cxnSp>
-      <p:sp>
-        <p:nvSpPr>
-          <p:cNvPr id="16" name="Rounded Rectangle 15"/>
+              <a:t>Lead Time
+Hours</a:t>
+            </a:r>
+          </a:p>
+        </p:txBody>
+      </p:sp>
+      <p:sp>
+        <p:nvSpPr>
+          <p:cNvPr id="12" name="Rounded Rectangle 11"/>
           <p:cNvSpPr/>
           <p:nvPr/>
         </p:nvSpPr>
         <p:spPr>
           <a:xfrm>
-            <a:off x="6181344" y="4480560"/>
-            <a:ext cx="2560320" cy="777240"/>
+            <a:off x="8412480" y="2377440"/>
+            <a:ext cx="2743200" cy="1188720"/>
           </a:xfrm>
           <a:prstGeom prst="roundRect">
             <a:avLst>
@@ -12840,218 +12317,28 @@
           <a:p>
             <a:pPr algn="ctr"/>
             <a:r>
-              <a:rPr sz="1150" b="0" i="0">
+              <a:rPr sz="1250" b="0" i="0">
                 <a:solidFill>
                   <a:srgbClr val="1F2937"/>
                 </a:solidFill>
                 <a:latin typeface="Calibri"/>
               </a:rPr>
-              <a:t>6 To 9 In
-3 Points</a:t>
+              <a:t>MAE / RMSE / R²
+Vs Static + No-Ds</a:t>
             </a:r>
           </a:p>
         </p:txBody>
       </p:sp>
       <p:cxnSp>
         <p:nvCxnSpPr>
-          <p:cNvPr id="17" name="Connector 16"/>
+          <p:cNvPr id="13" name="Connector 12"/>
           <p:cNvCxnSpPr/>
           <p:nvPr/>
         </p:nvCxnSpPr>
         <p:spPr>
           <a:xfrm>
-            <a:off x="6217920" y="4041648"/>
-            <a:ext cx="1243584" cy="420624"/>
-          </a:xfrm>
-          <a:prstGeom prst="line">
-            <a:avLst/>
-          </a:prstGeom>
-          <a:ln w="19050">
-            <a:solidFill>
-              <a:srgbClr val="1F2937"/>
-            </a:solidFill>
-            <a:tailEnd type="triangle" w="med" len="med"/>
-          </a:ln>
-        </p:spPr>
-        <p:style>
-          <a:lnRef idx="2">
-            <a:schemeClr val="accent1"/>
-          </a:lnRef>
-          <a:fillRef idx="0">
-            <a:schemeClr val="accent1"/>
-          </a:fillRef>
-          <a:effectRef idx="1">
-            <a:schemeClr val="accent1"/>
-          </a:effectRef>
-          <a:fontRef idx="minor">
-            <a:schemeClr val="tx1"/>
-          </a:fontRef>
-        </p:style>
-      </p:cxnSp>
-      <p:sp>
-        <p:nvSpPr>
-          <p:cNvPr id="18" name="Rounded Rectangle 17"/>
-          <p:cNvSpPr/>
-          <p:nvPr/>
-        </p:nvSpPr>
-        <p:spPr>
-          <a:xfrm>
-            <a:off x="8951976" y="4480560"/>
-            <a:ext cx="2560320" cy="777240"/>
-          </a:xfrm>
-          <a:prstGeom prst="roundRect">
-            <a:avLst>
-              <a:gd name="adj" fmla="val 10000"/>
-            </a:avLst>
-          </a:prstGeom>
-          <a:solidFill>
-            <a:srgbClr val="FFFFFF"/>
-          </a:solidFill>
-          <a:ln w="19050">
-            <a:solidFill>
-              <a:srgbClr val="1B7A6E"/>
-            </a:solidFill>
-          </a:ln>
-        </p:spPr>
-        <p:style>
-          <a:lnRef idx="1">
-            <a:schemeClr val="accent1"/>
-          </a:lnRef>
-          <a:fillRef idx="3">
-            <a:schemeClr val="accent1"/>
-          </a:fillRef>
-          <a:effectRef idx="2">
-            <a:schemeClr val="accent1"/>
-          </a:effectRef>
-          <a:fontRef idx="minor">
-            <a:schemeClr val="lt1"/>
-          </a:fontRef>
-        </p:style>
-        <p:txBody>
-          <a:bodyPr rtlCol="0" anchor="ctr" wrap="square">
-            <a:normAutofit/>
-          </a:bodyPr>
-          <a:lstStyle/>
-          <a:p>
-            <a:pPr algn="ctr"/>
-            <a:r>
-              <a:rPr sz="1150" b="0" i="0">
-                <a:solidFill>
-                  <a:srgbClr val="1F2937"/>
-                </a:solidFill>
-                <a:latin typeface="Calibri"/>
-              </a:rPr>
-              <a:t>Over 9 In Or
-Hole Over 1 In
-4 Points</a:t>
-            </a:r>
-          </a:p>
-        </p:txBody>
-      </p:sp>
-      <p:cxnSp>
-        <p:nvCxnSpPr>
-          <p:cNvPr id="19" name="Connector 18"/>
-          <p:cNvCxnSpPr/>
-          <p:nvPr/>
-        </p:nvCxnSpPr>
-        <p:spPr>
-          <a:xfrm>
-            <a:off x="6446520" y="4041648"/>
-            <a:ext cx="3785616" cy="420624"/>
-          </a:xfrm>
-          <a:prstGeom prst="line">
-            <a:avLst/>
-          </a:prstGeom>
-          <a:ln w="19050">
-            <a:solidFill>
-              <a:srgbClr val="1F2937"/>
-            </a:solidFill>
-            <a:tailEnd type="triangle" w="med" len="med"/>
-          </a:ln>
-        </p:spPr>
-        <p:style>
-          <a:lnRef idx="2">
-            <a:schemeClr val="accent1"/>
-          </a:lnRef>
-          <a:fillRef idx="0">
-            <a:schemeClr val="accent1"/>
-          </a:fillRef>
-          <a:effectRef idx="1">
-            <a:schemeClr val="accent1"/>
-          </a:effectRef>
-          <a:fontRef idx="minor">
-            <a:schemeClr val="tx1"/>
-          </a:fontRef>
-        </p:style>
-      </p:cxnSp>
-      <p:sp>
-        <p:nvSpPr>
-          <p:cNvPr id="20" name="Rounded Rectangle 19"/>
-          <p:cNvSpPr/>
-          <p:nvPr/>
-        </p:nvSpPr>
-        <p:spPr>
-          <a:xfrm>
-            <a:off x="4800600" y="5440680"/>
-            <a:ext cx="2560320" cy="731520"/>
-          </a:xfrm>
-          <a:prstGeom prst="roundRect">
-            <a:avLst>
-              <a:gd name="adj" fmla="val 10000"/>
-            </a:avLst>
-          </a:prstGeom>
-          <a:solidFill>
-            <a:srgbClr val="FFFFFF"/>
-          </a:solidFill>
-          <a:ln w="19050">
-            <a:solidFill>
-              <a:srgbClr val="1B7A6E"/>
-            </a:solidFill>
-          </a:ln>
-        </p:spPr>
-        <p:style>
-          <a:lnRef idx="1">
-            <a:schemeClr val="accent1"/>
-          </a:lnRef>
-          <a:fillRef idx="3">
-            <a:schemeClr val="accent1"/>
-          </a:fillRef>
-          <a:effectRef idx="2">
-            <a:schemeClr val="accent1"/>
-          </a:effectRef>
-          <a:fontRef idx="minor">
-            <a:schemeClr val="lt1"/>
-          </a:fontRef>
-        </p:style>
-        <p:txBody>
-          <a:bodyPr rtlCol="0" anchor="ctr" wrap="square">
-            <a:normAutofit/>
-          </a:bodyPr>
-          <a:lstStyle/>
-          <a:p>
-            <a:pPr algn="ctr"/>
-            <a:r>
-              <a:rPr sz="1150" b="0" i="0">
-                <a:solidFill>
-                  <a:srgbClr val="1F2937"/>
-                </a:solidFill>
-                <a:latin typeface="Calibri"/>
-              </a:rPr>
-              <a:t>Roll Grade From Total + Length + Weight</a:t>
-            </a:r>
-          </a:p>
-        </p:txBody>
-      </p:sp>
-      <p:cxnSp>
-        <p:nvCxnSpPr>
-          <p:cNvPr id="21" name="Connector 20"/>
-          <p:cNvCxnSpPr/>
-          <p:nvPr/>
-        </p:nvCxnSpPr>
-        <p:spPr>
-          <a:xfrm>
-            <a:off x="1920239" y="5276088"/>
-            <a:ext cx="0" cy="118872"/>
+            <a:off x="2578608" y="1984248"/>
+            <a:ext cx="512064" cy="667512"/>
           </a:xfrm>
           <a:prstGeom prst="line">
             <a:avLst/>
@@ -13080,14 +12367,14 @@
       </p:cxnSp>
       <p:cxnSp>
         <p:nvCxnSpPr>
-          <p:cNvPr id="22" name="Connector 21"/>
+          <p:cNvPr id="14" name="Connector 13"/>
           <p:cNvCxnSpPr/>
           <p:nvPr/>
         </p:nvCxnSpPr>
         <p:spPr>
-          <a:xfrm>
-            <a:off x="4690872" y="5276088"/>
-            <a:ext cx="0" cy="118872"/>
+          <a:xfrm flipV="1">
+            <a:off x="2578608" y="2971800"/>
+            <a:ext cx="512064" cy="64008"/>
           </a:xfrm>
           <a:prstGeom prst="line">
             <a:avLst/>
@@ -13116,14 +12403,14 @@
       </p:cxnSp>
       <p:cxnSp>
         <p:nvCxnSpPr>
-          <p:cNvPr id="23" name="Connector 22"/>
+          <p:cNvPr id="15" name="Connector 14"/>
           <p:cNvCxnSpPr/>
           <p:nvPr/>
         </p:nvCxnSpPr>
         <p:spPr>
-          <a:xfrm>
-            <a:off x="7461504" y="5276088"/>
-            <a:ext cx="0" cy="118872"/>
+          <a:xfrm flipV="1">
+            <a:off x="2578608" y="3291840"/>
+            <a:ext cx="512064" cy="795528"/>
           </a:xfrm>
           <a:prstGeom prst="line">
             <a:avLst/>
@@ -13152,14 +12439,14 @@
       </p:cxnSp>
       <p:cxnSp>
         <p:nvCxnSpPr>
-          <p:cNvPr id="24" name="Connector 23"/>
+          <p:cNvPr id="16" name="Connector 15"/>
           <p:cNvCxnSpPr/>
           <p:nvPr/>
         </p:nvCxnSpPr>
         <p:spPr>
           <a:xfrm>
-            <a:off x="10232136" y="5276088"/>
-            <a:ext cx="0" cy="118872"/>
+            <a:off x="5303520" y="2971800"/>
+            <a:ext cx="530352" cy="0"/>
           </a:xfrm>
           <a:prstGeom prst="line">
             <a:avLst/>
@@ -13188,14 +12475,14 @@
       </p:cxnSp>
       <p:cxnSp>
         <p:nvCxnSpPr>
-          <p:cNvPr id="25" name="Connector 24"/>
+          <p:cNvPr id="17" name="Connector 16"/>
           <p:cNvCxnSpPr/>
           <p:nvPr/>
         </p:nvCxnSpPr>
         <p:spPr>
           <a:xfrm>
-            <a:off x="1920240" y="5394960"/>
-            <a:ext cx="8311896" cy="0"/>
+            <a:off x="7863840" y="2971800"/>
+            <a:ext cx="530352" cy="0"/>
           </a:xfrm>
           <a:prstGeom prst="line">
             <a:avLst/>
@@ -13222,42 +12509,93 @@
           </a:fontRef>
         </p:style>
       </p:cxnSp>
-      <p:cxnSp>
-        <p:nvCxnSpPr>
-          <p:cNvPr id="26" name="Connector 25"/>
-          <p:cNvCxnSpPr/>
-          <p:nvPr/>
-        </p:nvCxnSpPr>
-        <p:spPr>
-          <a:xfrm>
-            <a:off x="6080760" y="5394960"/>
-            <a:ext cx="0" cy="27432"/>
-          </a:xfrm>
-          <a:prstGeom prst="line">
-            <a:avLst/>
-          </a:prstGeom>
-          <a:ln w="19050">
-            <a:solidFill>
-              <a:srgbClr val="1F2937"/>
-            </a:solidFill>
-            <a:tailEnd type="triangle" w="med" len="med"/>
+      <p:sp>
+        <p:nvSpPr>
+          <p:cNvPr id="18" name="Rounded Rectangle 17"/>
+          <p:cNvSpPr/>
+          <p:nvPr/>
+        </p:nvSpPr>
+        <p:spPr>
+          <a:xfrm>
+            <a:off x="1463040" y="5029200"/>
+            <a:ext cx="9235440" cy="731520"/>
+          </a:xfrm>
+          <a:prstGeom prst="roundRect">
+            <a:avLst/>
+          </a:prstGeom>
+          <a:solidFill>
+            <a:srgbClr val="2E9E5B"/>
+          </a:solidFill>
+          <a:ln>
+            <a:noFill/>
           </a:ln>
         </p:spPr>
         <p:style>
-          <a:lnRef idx="2">
+          <a:lnRef idx="1">
             <a:schemeClr val="accent1"/>
           </a:lnRef>
-          <a:fillRef idx="0">
+          <a:fillRef idx="3">
             <a:schemeClr val="accent1"/>
           </a:fillRef>
-          <a:effectRef idx="1">
+          <a:effectRef idx="2">
             <a:schemeClr val="accent1"/>
           </a:effectRef>
           <a:fontRef idx="minor">
-            <a:schemeClr val="tx1"/>
+            <a:schemeClr val="lt1"/>
           </a:fontRef>
         </p:style>
-      </p:cxnSp>
+        <p:txBody>
+          <a:bodyPr rtlCol="0" anchor="ctr"/>
+          <a:lstStyle/>
+          <a:p>
+            <a:pPr algn="ctr"/>
+            <a:r>
+              <a:rPr sz="2000" b="1" i="0">
+                <a:solidFill>
+                  <a:srgbClr val="FFFFFF"/>
+                </a:solidFill>
+                <a:latin typeface="Calibri"/>
+              </a:rPr>
+              <a:t>Lead = (Qty / Speed) × 0.1 × (1 + 2 × Ds)</a:t>
+            </a:r>
+          </a:p>
+        </p:txBody>
+      </p:sp>
+      <p:sp>
+        <p:nvSpPr>
+          <p:cNvPr id="19" name="TextBox 18"/>
+          <p:cNvSpPr txBox="1"/>
+          <p:nvPr/>
+        </p:nvSpPr>
+        <p:spPr>
+          <a:xfrm>
+            <a:off x="548640" y="5852160"/>
+            <a:ext cx="11064240" cy="502920"/>
+          </a:xfrm>
+          <a:prstGeom prst="rect">
+            <a:avLst/>
+          </a:prstGeom>
+          <a:noFill/>
+        </p:spPr>
+        <p:txBody>
+          <a:bodyPr wrap="square" anchor="ctr">
+            <a:spAutoFit/>
+          </a:bodyPr>
+          <a:lstStyle/>
+          <a:p>
+            <a:pPr algn="ctr"/>
+            <a:r>
+              <a:rPr sz="1150" b="0" i="0">
+                <a:solidFill>
+                  <a:srgbClr val="5B6570"/>
+                </a:solidFill>
+                <a:latin typeface="Calibri"/>
+              </a:rPr>
+              <a:t>Example: Ds = 0.2 Inflates Predicted Time By 40%. Features: Speed 20–100 m/min, Quantity 100–10,000, Ds 0–0.5, 100-Tree Random Forest, Evaluated Vs Static-Mean And No-Ds Baselines.</a:t>
+            </a:r>
+          </a:p>
+        </p:txBody>
+      </p:sp>
     </p:spTree>
   </p:cSld>
   <p:clrMapOvr>
@@ -13349,7 +12687,7 @@
                 </a:solidFill>
                 <a:latin typeface="Calibri"/>
               </a:rPr>
-              <a:t>2 / 27</a:t>
+              <a:t>2 / 31</a:t>
             </a:r>
           </a:p>
         </p:txBody>
@@ -13608,7 +12946,7 @@
             <a:r>
               <a:rPr sz="1700" b="1" i="0">
                 <a:solidFill>
-                  <a:srgbClr val="FFFFFF"/>
+                  <a:srgbClr val="144E4C"/>
                 </a:solidFill>
                 <a:latin typeface="Calibri"/>
               </a:rPr>
@@ -13827,7 +13165,7 @@
             <a:r>
               <a:rPr sz="1700" b="1" i="0">
                 <a:solidFill>
-                  <a:srgbClr val="FFFFFF"/>
+                  <a:srgbClr val="144E4C"/>
                 </a:solidFill>
                 <a:latin typeface="Calibri"/>
               </a:rPr>
@@ -14046,7 +13384,7 @@
             <a:r>
               <a:rPr sz="1700" b="1" i="0">
                 <a:solidFill>
-                  <a:srgbClr val="FFFFFF"/>
+                  <a:srgbClr val="144E4C"/>
                 </a:solidFill>
                 <a:latin typeface="Calibri"/>
               </a:rPr>
@@ -14265,7 +13603,7 @@
             <a:r>
               <a:rPr sz="1700" b="1" i="0">
                 <a:solidFill>
-                  <a:srgbClr val="FFFFFF"/>
+                  <a:srgbClr val="144E4C"/>
                 </a:solidFill>
                 <a:latin typeface="Calibri"/>
               </a:rPr>
@@ -14484,7 +13822,7 @@
             <a:r>
               <a:rPr sz="1700" b="1" i="0">
                 <a:solidFill>
-                  <a:srgbClr val="FFFFFF"/>
+                  <a:srgbClr val="144E4C"/>
                 </a:solidFill>
                 <a:latin typeface="Calibri"/>
               </a:rPr>
@@ -14703,7 +14041,7 @@
             <a:r>
               <a:rPr sz="1700" b="1" i="0">
                 <a:solidFill>
-                  <a:srgbClr val="FFFFFF"/>
+                  <a:srgbClr val="144E4C"/>
                 </a:solidFill>
                 <a:latin typeface="Calibri"/>
               </a:rPr>
@@ -14922,7 +14260,7 @@
             <a:r>
               <a:rPr sz="1700" b="1" i="0">
                 <a:solidFill>
-                  <a:srgbClr val="FFFFFF"/>
+                  <a:srgbClr val="144E4C"/>
                 </a:solidFill>
                 <a:latin typeface="Calibri"/>
               </a:rPr>
@@ -15141,7 +14479,7 @@
             <a:r>
               <a:rPr sz="1700" b="1" i="0">
                 <a:solidFill>
-                  <a:srgbClr val="FFFFFF"/>
+                  <a:srgbClr val="144E4C"/>
                 </a:solidFill>
                 <a:latin typeface="Calibri"/>
               </a:rPr>
@@ -15318,7 +14656,7 @@
                 </a:solidFill>
                 <a:latin typeface="Calibri"/>
               </a:rPr>
-              <a:t>20 / 27</a:t>
+              <a:t>20 / 31</a:t>
             </a:r>
           </a:p>
         </p:txBody>
@@ -15396,7 +14734,7 @@
                 </a:solidFill>
                 <a:latin typeface="Georgia"/>
               </a:rPr>
-              <a:t>Standards &amp; Compliance</a:t>
+              <a:t>Four-Point Inspection Grading (Fig. 3.6)</a:t>
             </a:r>
           </a:p>
         </p:txBody>
@@ -15452,20 +14790,20 @@
         </p:nvSpPr>
         <p:spPr>
           <a:xfrm>
-            <a:off x="548640" y="1554480"/>
-            <a:ext cx="3520440" cy="2651760"/>
+            <a:off x="4480560" y="1463040"/>
+            <a:ext cx="3200400" cy="640080"/>
           </a:xfrm>
           <a:prstGeom prst="roundRect">
             <a:avLst>
-              <a:gd name="adj" fmla="val 6000"/>
+              <a:gd name="adj" fmla="val 10000"/>
             </a:avLst>
           </a:prstGeom>
           <a:solidFill>
             <a:srgbClr val="FFFFFF"/>
           </a:solidFill>
-          <a:ln w="15875">
+          <a:ln w="19050">
             <a:solidFill>
-              <a:srgbClr val="D8D2C2"/>
+              <a:srgbClr val="1B7A6E"/>
             </a:solidFill>
           </a:ln>
         </p:spPr>
@@ -15484,32 +14822,83 @@
           </a:fontRef>
         </p:style>
         <p:txBody>
-          <a:bodyPr rtlCol="0" anchor="ctr"/>
+          <a:bodyPr rtlCol="0" anchor="ctr" wrap="square">
+            <a:normAutofit/>
+          </a:bodyPr>
           <a:lstStyle/>
           <a:p>
             <a:pPr algn="ctr"/>
-          </a:p>
-        </p:txBody>
-      </p:sp>
-      <p:sp>
-        <p:nvSpPr>
-          <p:cNvPr id="8" name="Rounded Rectangle 7"/>
+            <a:r>
+              <a:rPr sz="1200" b="0" i="0">
+                <a:solidFill>
+                  <a:srgbClr val="1F2937"/>
+                </a:solidFill>
+                <a:latin typeface="Calibri"/>
+              </a:rPr>
+              <a:t>Calibrate Pixels To Inches (Fixed Geometry)</a:t>
+            </a:r>
+          </a:p>
+        </p:txBody>
+      </p:sp>
+      <p:cxnSp>
+        <p:nvCxnSpPr>
+          <p:cNvPr id="8" name="Connector 7"/>
+          <p:cNvCxnSpPr/>
+          <p:nvPr/>
+        </p:nvCxnSpPr>
+        <p:spPr>
+          <a:xfrm>
+            <a:off x="6080760" y="2121408"/>
+            <a:ext cx="0" cy="146304"/>
+          </a:xfrm>
+          <a:prstGeom prst="line">
+            <a:avLst/>
+          </a:prstGeom>
+          <a:ln w="19050">
+            <a:solidFill>
+              <a:srgbClr val="1F2937"/>
+            </a:solidFill>
+            <a:tailEnd type="triangle" w="med" len="med"/>
+          </a:ln>
+        </p:spPr>
+        <p:style>
+          <a:lnRef idx="2">
+            <a:schemeClr val="accent1"/>
+          </a:lnRef>
+          <a:fillRef idx="0">
+            <a:schemeClr val="accent1"/>
+          </a:fillRef>
+          <a:effectRef idx="1">
+            <a:schemeClr val="accent1"/>
+          </a:effectRef>
+          <a:fontRef idx="minor">
+            <a:schemeClr val="tx1"/>
+          </a:fontRef>
+        </p:style>
+      </p:cxnSp>
+      <p:sp>
+        <p:nvSpPr>
+          <p:cNvPr id="9" name="Rounded Rectangle 8"/>
           <p:cNvSpPr/>
           <p:nvPr/>
         </p:nvSpPr>
         <p:spPr>
           <a:xfrm>
-            <a:off x="548640" y="1554480"/>
-            <a:ext cx="3520440" cy="82296"/>
+            <a:off x="4480560" y="2286000"/>
+            <a:ext cx="3200400" cy="640080"/>
           </a:xfrm>
           <a:prstGeom prst="roundRect">
-            <a:avLst/>
+            <a:avLst>
+              <a:gd name="adj" fmla="val 10000"/>
+            </a:avLst>
           </a:prstGeom>
           <a:solidFill>
-            <a:srgbClr val="D99A06"/>
+            <a:srgbClr val="FFFFFF"/>
           </a:solidFill>
-          <a:ln>
-            <a:noFill/>
+          <a:ln w="19050">
+            <a:solidFill>
+              <a:srgbClr val="1B7A6E"/>
+            </a:solidFill>
           </a:ln>
         </p:spPr>
         <p:style>
@@ -15527,32 +14916,81 @@
           </a:fontRef>
         </p:style>
         <p:txBody>
-          <a:bodyPr rtlCol="0" anchor="ctr"/>
+          <a:bodyPr rtlCol="0" anchor="ctr" wrap="square">
+            <a:normAutofit/>
+          </a:bodyPr>
           <a:lstStyle/>
           <a:p>
             <a:pPr algn="ctr"/>
-          </a:p>
-        </p:txBody>
-      </p:sp>
-      <p:sp>
-        <p:nvSpPr>
-          <p:cNvPr id="9" name="Oval 8"/>
+            <a:r>
+              <a:rPr sz="1200" b="0" i="0">
+                <a:solidFill>
+                  <a:srgbClr val="1F2937"/>
+                </a:solidFill>
+                <a:latin typeface="Calibri"/>
+              </a:rPr>
+              <a:t>Measure Fault Length</a:t>
+            </a:r>
+          </a:p>
+        </p:txBody>
+      </p:sp>
+      <p:cxnSp>
+        <p:nvCxnSpPr>
+          <p:cNvPr id="10" name="Connector 9"/>
+          <p:cNvCxnSpPr/>
+          <p:nvPr/>
+        </p:nvCxnSpPr>
+        <p:spPr>
+          <a:xfrm>
+            <a:off x="6080760" y="2944368"/>
+            <a:ext cx="0" cy="146304"/>
+          </a:xfrm>
+          <a:prstGeom prst="line">
+            <a:avLst/>
+          </a:prstGeom>
+          <a:ln w="19050">
+            <a:solidFill>
+              <a:srgbClr val="1F2937"/>
+            </a:solidFill>
+            <a:tailEnd type="triangle" w="med" len="med"/>
+          </a:ln>
+        </p:spPr>
+        <p:style>
+          <a:lnRef idx="2">
+            <a:schemeClr val="accent1"/>
+          </a:lnRef>
+          <a:fillRef idx="0">
+            <a:schemeClr val="accent1"/>
+          </a:fillRef>
+          <a:effectRef idx="1">
+            <a:schemeClr val="accent1"/>
+          </a:effectRef>
+          <a:fontRef idx="minor">
+            <a:schemeClr val="tx1"/>
+          </a:fontRef>
+        </p:style>
+      </p:cxnSp>
+      <p:sp>
+        <p:nvSpPr>
+          <p:cNvPr id="11" name="Diamond 10"/>
           <p:cNvSpPr/>
           <p:nvPr/>
         </p:nvSpPr>
         <p:spPr>
           <a:xfrm>
-            <a:off x="804672" y="1847088"/>
-            <a:ext cx="475488" cy="475488"/>
-          </a:xfrm>
-          <a:prstGeom prst="ellipse">
+            <a:off x="5349240" y="3108960"/>
+            <a:ext cx="1463040" cy="914400"/>
+          </a:xfrm>
+          <a:prstGeom prst="diamond">
             <a:avLst/>
           </a:prstGeom>
           <a:solidFill>
-            <a:srgbClr val="D99A06"/>
+            <a:srgbClr val="FFFFFF"/>
           </a:solidFill>
-          <a:ln>
-            <a:noFill/>
+          <a:ln w="19050">
+            <a:solidFill>
+              <a:srgbClr val="1B7A6E"/>
+            </a:solidFill>
           </a:ln>
         </p:spPr>
         <p:style>
@@ -15570,102 +15008,46 @@
           </a:fontRef>
         </p:style>
         <p:txBody>
-          <a:bodyPr rtlCol="0" anchor="ctr" wrap="square"/>
-          <a:lstStyle/>
-          <a:p>
-            <a:pPr algn="ctr"/>
-            <a:r>
-              <a:rPr sz="1700" b="1" i="0">
-                <a:solidFill>
-                  <a:srgbClr val="FFFFFF"/>
-                </a:solidFill>
-                <a:latin typeface="Calibri"/>
-              </a:rPr>
-              <a:t>1</a:t>
-            </a:r>
-          </a:p>
-        </p:txBody>
-      </p:sp>
-      <p:sp>
-        <p:nvSpPr>
-          <p:cNvPr id="10" name="TextBox 9"/>
-          <p:cNvSpPr txBox="1"/>
-          <p:nvPr/>
-        </p:nvSpPr>
-        <p:spPr>
-          <a:xfrm>
-            <a:off x="1417319" y="1810512"/>
-            <a:ext cx="2468880" cy="2240279"/>
-          </a:xfrm>
-          <a:prstGeom prst="rect">
-            <a:avLst/>
-          </a:prstGeom>
-          <a:noFill/>
-        </p:spPr>
-        <p:txBody>
-          <a:bodyPr wrap="square">
+          <a:bodyPr rtlCol="0" anchor="ctr" wrap="square">
             <a:normAutofit/>
           </a:bodyPr>
           <a:lstStyle/>
           <a:p>
-            <a:pPr algn="l">
-              <a:spcAft>
-                <a:spcPts val="600"/>
-              </a:spcAft>
-            </a:pPr>
-            <a:r>
-              <a:rPr sz="1600" b="1" i="0">
-                <a:solidFill>
-                  <a:srgbClr val="144E4C"/>
+            <a:pPr algn="ctr"/>
+            <a:r>
+              <a:rPr sz="1250" b="1" i="0">
+                <a:solidFill>
+                  <a:srgbClr val="1F2937"/>
                 </a:solidFill>
                 <a:latin typeface="Calibri"/>
               </a:rPr>
-              <a:t>Software</a:t>
-            </a:r>
-          </a:p>
-          <a:p>
-            <a:pPr algn="l">
-              <a:spcBef>
-                <a:spcPts val="0"/>
-              </a:spcBef>
-              <a:spcAft>
-                <a:spcPts val="300"/>
-              </a:spcAft>
-            </a:pPr>
-            <a:r>
-              <a:rPr sz="1350" b="0" i="0">
-                <a:solidFill>
-                  <a:srgbClr val="5B6570"/>
-                </a:solidFill>
-                <a:latin typeface="Calibri"/>
-              </a:rPr>
-              <a:t>Reusable Packages, Central Configuration, Version Control With Reviewable Manifests, Seeded Deterministic Training, COCO / YOLO Interchange Formats.</a:t>
-            </a:r>
-          </a:p>
-        </p:txBody>
-      </p:sp>
-      <p:sp>
-        <p:nvSpPr>
-          <p:cNvPr id="11" name="Rounded Rectangle 10"/>
+              <a:t>Length?</a:t>
+            </a:r>
+          </a:p>
+        </p:txBody>
+      </p:sp>
+      <p:sp>
+        <p:nvSpPr>
+          <p:cNvPr id="12" name="Rounded Rectangle 11"/>
           <p:cNvSpPr/>
           <p:nvPr/>
         </p:nvSpPr>
         <p:spPr>
           <a:xfrm>
-            <a:off x="4251959" y="1554480"/>
-            <a:ext cx="3520440" cy="2651760"/>
+            <a:off x="640080" y="4480560"/>
+            <a:ext cx="2560320" cy="777240"/>
           </a:xfrm>
           <a:prstGeom prst="roundRect">
             <a:avLst>
-              <a:gd name="adj" fmla="val 6000"/>
+              <a:gd name="adj" fmla="val 10000"/>
             </a:avLst>
           </a:prstGeom>
           <a:solidFill>
             <a:srgbClr val="FFFFFF"/>
           </a:solidFill>
-          <a:ln w="15875">
+          <a:ln w="19050">
             <a:solidFill>
-              <a:srgbClr val="D8D2C2"/>
+              <a:srgbClr val="1B7A6E"/>
             </a:solidFill>
           </a:ln>
         </p:spPr>
@@ -15684,32 +15066,84 @@
           </a:fontRef>
         </p:style>
         <p:txBody>
-          <a:bodyPr rtlCol="0" anchor="ctr"/>
+          <a:bodyPr rtlCol="0" anchor="ctr" wrap="square">
+            <a:normAutofit/>
+          </a:bodyPr>
           <a:lstStyle/>
           <a:p>
             <a:pPr algn="ctr"/>
-          </a:p>
-        </p:txBody>
-      </p:sp>
-      <p:sp>
-        <p:nvSpPr>
-          <p:cNvPr id="12" name="Rounded Rectangle 11"/>
+            <a:r>
+              <a:rPr sz="1150" b="0" i="0">
+                <a:solidFill>
+                  <a:srgbClr val="1F2937"/>
+                </a:solidFill>
+                <a:latin typeface="Calibri"/>
+              </a:rPr>
+              <a:t>Under 3 In
+1 Point</a:t>
+            </a:r>
+          </a:p>
+        </p:txBody>
+      </p:sp>
+      <p:cxnSp>
+        <p:nvCxnSpPr>
+          <p:cNvPr id="13" name="Connector 12"/>
+          <p:cNvCxnSpPr/>
+          <p:nvPr/>
+        </p:nvCxnSpPr>
+        <p:spPr>
+          <a:xfrm flipH="1">
+            <a:off x="1920239" y="4041648"/>
+            <a:ext cx="3840481" cy="420624"/>
+          </a:xfrm>
+          <a:prstGeom prst="line">
+            <a:avLst/>
+          </a:prstGeom>
+          <a:ln w="19050">
+            <a:solidFill>
+              <a:srgbClr val="1F2937"/>
+            </a:solidFill>
+            <a:tailEnd type="triangle" w="med" len="med"/>
+          </a:ln>
+        </p:spPr>
+        <p:style>
+          <a:lnRef idx="2">
+            <a:schemeClr val="accent1"/>
+          </a:lnRef>
+          <a:fillRef idx="0">
+            <a:schemeClr val="accent1"/>
+          </a:fillRef>
+          <a:effectRef idx="1">
+            <a:schemeClr val="accent1"/>
+          </a:effectRef>
+          <a:fontRef idx="minor">
+            <a:schemeClr val="tx1"/>
+          </a:fontRef>
+        </p:style>
+      </p:cxnSp>
+      <p:sp>
+        <p:nvSpPr>
+          <p:cNvPr id="14" name="Rounded Rectangle 13"/>
           <p:cNvSpPr/>
           <p:nvPr/>
         </p:nvSpPr>
         <p:spPr>
           <a:xfrm>
-            <a:off x="4251959" y="1554480"/>
-            <a:ext cx="3520440" cy="82296"/>
+            <a:off x="3410712" y="4480560"/>
+            <a:ext cx="2560320" cy="777240"/>
           </a:xfrm>
           <a:prstGeom prst="roundRect">
-            <a:avLst/>
+            <a:avLst>
+              <a:gd name="adj" fmla="val 10000"/>
+            </a:avLst>
           </a:prstGeom>
           <a:solidFill>
-            <a:srgbClr val="D99A06"/>
+            <a:srgbClr val="FFFFFF"/>
           </a:solidFill>
-          <a:ln>
-            <a:noFill/>
+          <a:ln w="19050">
+            <a:solidFill>
+              <a:srgbClr val="1B7A6E"/>
+            </a:solidFill>
           </a:ln>
         </p:spPr>
         <p:style>
@@ -15727,32 +15161,84 @@
           </a:fontRef>
         </p:style>
         <p:txBody>
-          <a:bodyPr rtlCol="0" anchor="ctr"/>
+          <a:bodyPr rtlCol="0" anchor="ctr" wrap="square">
+            <a:normAutofit/>
+          </a:bodyPr>
           <a:lstStyle/>
           <a:p>
             <a:pPr algn="ctr"/>
-          </a:p>
-        </p:txBody>
-      </p:sp>
-      <p:sp>
-        <p:nvSpPr>
-          <p:cNvPr id="13" name="Oval 12"/>
+            <a:r>
+              <a:rPr sz="1150" b="0" i="0">
+                <a:solidFill>
+                  <a:srgbClr val="1F2937"/>
+                </a:solidFill>
+                <a:latin typeface="Calibri"/>
+              </a:rPr>
+              <a:t>3 To 6 In
+2 Points</a:t>
+            </a:r>
+          </a:p>
+        </p:txBody>
+      </p:sp>
+      <p:cxnSp>
+        <p:nvCxnSpPr>
+          <p:cNvPr id="15" name="Connector 14"/>
+          <p:cNvCxnSpPr/>
+          <p:nvPr/>
+        </p:nvCxnSpPr>
+        <p:spPr>
+          <a:xfrm flipH="1">
+            <a:off x="4690872" y="4041648"/>
+            <a:ext cx="1298448" cy="420624"/>
+          </a:xfrm>
+          <a:prstGeom prst="line">
+            <a:avLst/>
+          </a:prstGeom>
+          <a:ln w="19050">
+            <a:solidFill>
+              <a:srgbClr val="1F2937"/>
+            </a:solidFill>
+            <a:tailEnd type="triangle" w="med" len="med"/>
+          </a:ln>
+        </p:spPr>
+        <p:style>
+          <a:lnRef idx="2">
+            <a:schemeClr val="accent1"/>
+          </a:lnRef>
+          <a:fillRef idx="0">
+            <a:schemeClr val="accent1"/>
+          </a:fillRef>
+          <a:effectRef idx="1">
+            <a:schemeClr val="accent1"/>
+          </a:effectRef>
+          <a:fontRef idx="minor">
+            <a:schemeClr val="tx1"/>
+          </a:fontRef>
+        </p:style>
+      </p:cxnSp>
+      <p:sp>
+        <p:nvSpPr>
+          <p:cNvPr id="16" name="Rounded Rectangle 15"/>
           <p:cNvSpPr/>
           <p:nvPr/>
         </p:nvSpPr>
         <p:spPr>
           <a:xfrm>
-            <a:off x="4507992" y="1847088"/>
-            <a:ext cx="475488" cy="475488"/>
-          </a:xfrm>
-          <a:prstGeom prst="ellipse">
-            <a:avLst/>
+            <a:off x="6181344" y="4480560"/>
+            <a:ext cx="2560320" cy="777240"/>
+          </a:xfrm>
+          <a:prstGeom prst="roundRect">
+            <a:avLst>
+              <a:gd name="adj" fmla="val 10000"/>
+            </a:avLst>
           </a:prstGeom>
           <a:solidFill>
-            <a:srgbClr val="D99A06"/>
+            <a:srgbClr val="FFFFFF"/>
           </a:solidFill>
-          <a:ln>
-            <a:noFill/>
+          <a:ln w="19050">
+            <a:solidFill>
+              <a:srgbClr val="1B7A6E"/>
+            </a:solidFill>
           </a:ln>
         </p:spPr>
         <p:style>
@@ -15770,102 +15256,83 @@
           </a:fontRef>
         </p:style>
         <p:txBody>
-          <a:bodyPr rtlCol="0" anchor="ctr" wrap="square"/>
-          <a:lstStyle/>
-          <a:p>
-            <a:pPr algn="ctr"/>
-            <a:r>
-              <a:rPr sz="1700" b="1" i="0">
-                <a:solidFill>
-                  <a:srgbClr val="FFFFFF"/>
-                </a:solidFill>
-                <a:latin typeface="Calibri"/>
-              </a:rPr>
-              <a:t>2</a:t>
-            </a:r>
-          </a:p>
-        </p:txBody>
-      </p:sp>
-      <p:sp>
-        <p:nvSpPr>
-          <p:cNvPr id="14" name="TextBox 13"/>
-          <p:cNvSpPr txBox="1"/>
-          <p:nvPr/>
-        </p:nvSpPr>
-        <p:spPr>
-          <a:xfrm>
-            <a:off x="5120640" y="1810512"/>
-            <a:ext cx="2468880" cy="2240279"/>
-          </a:xfrm>
-          <a:prstGeom prst="rect">
-            <a:avLst/>
-          </a:prstGeom>
-          <a:noFill/>
-        </p:spPr>
-        <p:txBody>
-          <a:bodyPr wrap="square">
+          <a:bodyPr rtlCol="0" anchor="ctr" wrap="square">
             <a:normAutofit/>
           </a:bodyPr>
           <a:lstStyle/>
           <a:p>
-            <a:pPr algn="l">
-              <a:spcAft>
-                <a:spcPts val="600"/>
-              </a:spcAft>
-            </a:pPr>
-            <a:r>
-              <a:rPr sz="1600" b="1" i="0">
-                <a:solidFill>
-                  <a:srgbClr val="144E4C"/>
+            <a:pPr algn="ctr"/>
+            <a:r>
+              <a:rPr sz="1150" b="0" i="0">
+                <a:solidFill>
+                  <a:srgbClr val="1F2937"/>
                 </a:solidFill>
                 <a:latin typeface="Calibri"/>
               </a:rPr>
-              <a:t>Hardware</a:t>
-            </a:r>
-          </a:p>
-          <a:p>
-            <a:pPr algn="l">
-              <a:spcBef>
-                <a:spcPts val="0"/>
-              </a:spcBef>
-              <a:spcAft>
-                <a:spcPts val="300"/>
-              </a:spcAft>
-            </a:pPr>
-            <a:r>
-              <a:rPr sz="1350" b="0" i="0">
-                <a:solidFill>
-                  <a:srgbClr val="5B6570"/>
-                </a:solidFill>
-                <a:latin typeface="Calibri"/>
-              </a:rPr>
-              <a:t>Fixed-Geometry Calibration For Grading, Jetson-Class Edge Device With TensorRT, Factory-Safe Power Envelope.</a:t>
-            </a:r>
-          </a:p>
-        </p:txBody>
-      </p:sp>
-      <p:sp>
-        <p:nvSpPr>
-          <p:cNvPr id="15" name="Rounded Rectangle 14"/>
+              <a:t>6 To 9 In
+3 Points</a:t>
+            </a:r>
+          </a:p>
+        </p:txBody>
+      </p:sp>
+      <p:cxnSp>
+        <p:nvCxnSpPr>
+          <p:cNvPr id="17" name="Connector 16"/>
+          <p:cNvCxnSpPr/>
+          <p:nvPr/>
+        </p:nvCxnSpPr>
+        <p:spPr>
+          <a:xfrm>
+            <a:off x="6217920" y="4041648"/>
+            <a:ext cx="1243584" cy="420624"/>
+          </a:xfrm>
+          <a:prstGeom prst="line">
+            <a:avLst/>
+          </a:prstGeom>
+          <a:ln w="19050">
+            <a:solidFill>
+              <a:srgbClr val="1F2937"/>
+            </a:solidFill>
+            <a:tailEnd type="triangle" w="med" len="med"/>
+          </a:ln>
+        </p:spPr>
+        <p:style>
+          <a:lnRef idx="2">
+            <a:schemeClr val="accent1"/>
+          </a:lnRef>
+          <a:fillRef idx="0">
+            <a:schemeClr val="accent1"/>
+          </a:fillRef>
+          <a:effectRef idx="1">
+            <a:schemeClr val="accent1"/>
+          </a:effectRef>
+          <a:fontRef idx="minor">
+            <a:schemeClr val="tx1"/>
+          </a:fontRef>
+        </p:style>
+      </p:cxnSp>
+      <p:sp>
+        <p:nvSpPr>
+          <p:cNvPr id="18" name="Rounded Rectangle 17"/>
           <p:cNvSpPr/>
           <p:nvPr/>
         </p:nvSpPr>
         <p:spPr>
           <a:xfrm>
-            <a:off x="7955279" y="1554480"/>
-            <a:ext cx="3520440" cy="2651760"/>
+            <a:off x="8951976" y="4480560"/>
+            <a:ext cx="2560320" cy="777240"/>
           </a:xfrm>
           <a:prstGeom prst="roundRect">
             <a:avLst>
-              <a:gd name="adj" fmla="val 6000"/>
+              <a:gd name="adj" fmla="val 10000"/>
             </a:avLst>
           </a:prstGeom>
           <a:solidFill>
             <a:srgbClr val="FFFFFF"/>
           </a:solidFill>
-          <a:ln w="15875">
+          <a:ln w="19050">
             <a:solidFill>
-              <a:srgbClr val="D8D2C2"/>
+              <a:srgbClr val="1B7A6E"/>
             </a:solidFill>
           </a:ln>
         </p:spPr>
@@ -15884,32 +15351,85 @@
           </a:fontRef>
         </p:style>
         <p:txBody>
-          <a:bodyPr rtlCol="0" anchor="ctr"/>
+          <a:bodyPr rtlCol="0" anchor="ctr" wrap="square">
+            <a:normAutofit/>
+          </a:bodyPr>
           <a:lstStyle/>
           <a:p>
             <a:pPr algn="ctr"/>
-          </a:p>
-        </p:txBody>
-      </p:sp>
-      <p:sp>
-        <p:nvSpPr>
-          <p:cNvPr id="16" name="Rounded Rectangle 15"/>
+            <a:r>
+              <a:rPr sz="1150" b="0" i="0">
+                <a:solidFill>
+                  <a:srgbClr val="1F2937"/>
+                </a:solidFill>
+                <a:latin typeface="Calibri"/>
+              </a:rPr>
+              <a:t>Over 9 In Or
+Hole Over 1 In
+4 Points</a:t>
+            </a:r>
+          </a:p>
+        </p:txBody>
+      </p:sp>
+      <p:cxnSp>
+        <p:nvCxnSpPr>
+          <p:cNvPr id="19" name="Connector 18"/>
+          <p:cNvCxnSpPr/>
+          <p:nvPr/>
+        </p:nvCxnSpPr>
+        <p:spPr>
+          <a:xfrm>
+            <a:off x="6446520" y="4041648"/>
+            <a:ext cx="3785616" cy="420624"/>
+          </a:xfrm>
+          <a:prstGeom prst="line">
+            <a:avLst/>
+          </a:prstGeom>
+          <a:ln w="19050">
+            <a:solidFill>
+              <a:srgbClr val="1F2937"/>
+            </a:solidFill>
+            <a:tailEnd type="triangle" w="med" len="med"/>
+          </a:ln>
+        </p:spPr>
+        <p:style>
+          <a:lnRef idx="2">
+            <a:schemeClr val="accent1"/>
+          </a:lnRef>
+          <a:fillRef idx="0">
+            <a:schemeClr val="accent1"/>
+          </a:fillRef>
+          <a:effectRef idx="1">
+            <a:schemeClr val="accent1"/>
+          </a:effectRef>
+          <a:fontRef idx="minor">
+            <a:schemeClr val="tx1"/>
+          </a:fontRef>
+        </p:style>
+      </p:cxnSp>
+      <p:sp>
+        <p:nvSpPr>
+          <p:cNvPr id="20" name="Rounded Rectangle 19"/>
           <p:cNvSpPr/>
           <p:nvPr/>
         </p:nvSpPr>
         <p:spPr>
           <a:xfrm>
-            <a:off x="7955279" y="1554480"/>
-            <a:ext cx="3520440" cy="82296"/>
+            <a:off x="4800600" y="5440680"/>
+            <a:ext cx="2560320" cy="731520"/>
           </a:xfrm>
           <a:prstGeom prst="roundRect">
-            <a:avLst/>
+            <a:avLst>
+              <a:gd name="adj" fmla="val 10000"/>
+            </a:avLst>
           </a:prstGeom>
           <a:solidFill>
-            <a:srgbClr val="D99A06"/>
+            <a:srgbClr val="FFFFFF"/>
           </a:solidFill>
-          <a:ln>
-            <a:noFill/>
+          <a:ln w="19050">
+            <a:solidFill>
+              <a:srgbClr val="1B7A6E"/>
+            </a:solidFill>
           </a:ln>
         </p:spPr>
         <p:style>
@@ -15927,123 +15447,240 @@
           </a:fontRef>
         </p:style>
         <p:txBody>
-          <a:bodyPr rtlCol="0" anchor="ctr"/>
+          <a:bodyPr rtlCol="0" anchor="ctr" wrap="square">
+            <a:normAutofit/>
+          </a:bodyPr>
           <a:lstStyle/>
           <a:p>
             <a:pPr algn="ctr"/>
-          </a:p>
-        </p:txBody>
-      </p:sp>
-      <p:sp>
-        <p:nvSpPr>
-          <p:cNvPr id="17" name="Oval 16"/>
-          <p:cNvSpPr/>
-          <p:nvPr/>
-        </p:nvSpPr>
-        <p:spPr>
-          <a:xfrm>
-            <a:off x="8211311" y="1847088"/>
-            <a:ext cx="475488" cy="475488"/>
-          </a:xfrm>
-          <a:prstGeom prst="ellipse">
-            <a:avLst/>
-          </a:prstGeom>
-          <a:solidFill>
-            <a:srgbClr val="D99A06"/>
-          </a:solidFill>
-          <a:ln>
-            <a:noFill/>
+            <a:r>
+              <a:rPr sz="1150" b="0" i="0">
+                <a:solidFill>
+                  <a:srgbClr val="1F2937"/>
+                </a:solidFill>
+                <a:latin typeface="Calibri"/>
+              </a:rPr>
+              <a:t>Roll Grade From Total + Length + Weight</a:t>
+            </a:r>
+          </a:p>
+        </p:txBody>
+      </p:sp>
+      <p:cxnSp>
+        <p:nvCxnSpPr>
+          <p:cNvPr id="21" name="Connector 20"/>
+          <p:cNvCxnSpPr/>
+          <p:nvPr/>
+        </p:nvCxnSpPr>
+        <p:spPr>
+          <a:xfrm>
+            <a:off x="1920239" y="5276088"/>
+            <a:ext cx="0" cy="118872"/>
+          </a:xfrm>
+          <a:prstGeom prst="line">
+            <a:avLst/>
+          </a:prstGeom>
+          <a:ln w="19050">
+            <a:solidFill>
+              <a:srgbClr val="1F2937"/>
+            </a:solidFill>
+            <a:tailEnd type="triangle" w="med" len="med"/>
           </a:ln>
         </p:spPr>
         <p:style>
-          <a:lnRef idx="1">
+          <a:lnRef idx="2">
             <a:schemeClr val="accent1"/>
           </a:lnRef>
-          <a:fillRef idx="3">
+          <a:fillRef idx="0">
             <a:schemeClr val="accent1"/>
           </a:fillRef>
-          <a:effectRef idx="2">
+          <a:effectRef idx="1">
             <a:schemeClr val="accent1"/>
           </a:effectRef>
           <a:fontRef idx="minor">
-            <a:schemeClr val="lt1"/>
+            <a:schemeClr val="tx1"/>
           </a:fontRef>
         </p:style>
-        <p:txBody>
-          <a:bodyPr rtlCol="0" anchor="ctr" wrap="square"/>
-          <a:lstStyle/>
-          <a:p>
-            <a:pPr algn="ctr"/>
-            <a:r>
-              <a:rPr sz="1700" b="1" i="0">
-                <a:solidFill>
-                  <a:srgbClr val="FFFFFF"/>
-                </a:solidFill>
-                <a:latin typeface="Calibri"/>
-              </a:rPr>
-              <a:t>3</a:t>
-            </a:r>
-          </a:p>
-        </p:txBody>
-      </p:sp>
-      <p:sp>
-        <p:nvSpPr>
-          <p:cNvPr id="18" name="TextBox 17"/>
-          <p:cNvSpPr txBox="1"/>
-          <p:nvPr/>
-        </p:nvSpPr>
-        <p:spPr>
-          <a:xfrm>
-            <a:off x="8823959" y="1810512"/>
-            <a:ext cx="2468880" cy="2240279"/>
-          </a:xfrm>
-          <a:prstGeom prst="rect">
-            <a:avLst/>
-          </a:prstGeom>
-          <a:noFill/>
-        </p:spPr>
-        <p:txBody>
-          <a:bodyPr wrap="square">
-            <a:normAutofit/>
-          </a:bodyPr>
-          <a:lstStyle/>
-          <a:p>
-            <a:pPr algn="l">
-              <a:spcAft>
-                <a:spcPts val="600"/>
-              </a:spcAft>
-            </a:pPr>
-            <a:r>
-              <a:rPr sz="1600" b="1" i="0">
-                <a:solidFill>
-                  <a:srgbClr val="144E4C"/>
-                </a:solidFill>
-                <a:latin typeface="Calibri"/>
-              </a:rPr>
-              <a:t>Communication</a:t>
-            </a:r>
-          </a:p>
-          <a:p>
-            <a:pPr algn="l">
-              <a:spcBef>
-                <a:spcPts val="0"/>
-              </a:spcBef>
-              <a:spcAft>
-                <a:spcPts val="300"/>
-              </a:spcAft>
-            </a:pPr>
-            <a:r>
-              <a:rPr sz="1350" b="0" i="0">
-                <a:solidFill>
-                  <a:srgbClr val="5B6570"/>
-                </a:solidFill>
-                <a:latin typeface="Calibri"/>
-              </a:rPr>
-              <a:t>REST File Handoff To The MES And Dashboard Over HTTP; No Proprietary Protocols.</a:t>
-            </a:r>
-          </a:p>
-        </p:txBody>
-      </p:sp>
+      </p:cxnSp>
+      <p:cxnSp>
+        <p:nvCxnSpPr>
+          <p:cNvPr id="22" name="Connector 21"/>
+          <p:cNvCxnSpPr/>
+          <p:nvPr/>
+        </p:nvCxnSpPr>
+        <p:spPr>
+          <a:xfrm>
+            <a:off x="4690872" y="5276088"/>
+            <a:ext cx="0" cy="118872"/>
+          </a:xfrm>
+          <a:prstGeom prst="line">
+            <a:avLst/>
+          </a:prstGeom>
+          <a:ln w="19050">
+            <a:solidFill>
+              <a:srgbClr val="1F2937"/>
+            </a:solidFill>
+            <a:tailEnd type="triangle" w="med" len="med"/>
+          </a:ln>
+        </p:spPr>
+        <p:style>
+          <a:lnRef idx="2">
+            <a:schemeClr val="accent1"/>
+          </a:lnRef>
+          <a:fillRef idx="0">
+            <a:schemeClr val="accent1"/>
+          </a:fillRef>
+          <a:effectRef idx="1">
+            <a:schemeClr val="accent1"/>
+          </a:effectRef>
+          <a:fontRef idx="minor">
+            <a:schemeClr val="tx1"/>
+          </a:fontRef>
+        </p:style>
+      </p:cxnSp>
+      <p:cxnSp>
+        <p:nvCxnSpPr>
+          <p:cNvPr id="23" name="Connector 22"/>
+          <p:cNvCxnSpPr/>
+          <p:nvPr/>
+        </p:nvCxnSpPr>
+        <p:spPr>
+          <a:xfrm>
+            <a:off x="7461504" y="5276088"/>
+            <a:ext cx="0" cy="118872"/>
+          </a:xfrm>
+          <a:prstGeom prst="line">
+            <a:avLst/>
+          </a:prstGeom>
+          <a:ln w="19050">
+            <a:solidFill>
+              <a:srgbClr val="1F2937"/>
+            </a:solidFill>
+            <a:tailEnd type="triangle" w="med" len="med"/>
+          </a:ln>
+        </p:spPr>
+        <p:style>
+          <a:lnRef idx="2">
+            <a:schemeClr val="accent1"/>
+          </a:lnRef>
+          <a:fillRef idx="0">
+            <a:schemeClr val="accent1"/>
+          </a:fillRef>
+          <a:effectRef idx="1">
+            <a:schemeClr val="accent1"/>
+          </a:effectRef>
+          <a:fontRef idx="minor">
+            <a:schemeClr val="tx1"/>
+          </a:fontRef>
+        </p:style>
+      </p:cxnSp>
+      <p:cxnSp>
+        <p:nvCxnSpPr>
+          <p:cNvPr id="24" name="Connector 23"/>
+          <p:cNvCxnSpPr/>
+          <p:nvPr/>
+        </p:nvCxnSpPr>
+        <p:spPr>
+          <a:xfrm>
+            <a:off x="10232136" y="5276088"/>
+            <a:ext cx="0" cy="118872"/>
+          </a:xfrm>
+          <a:prstGeom prst="line">
+            <a:avLst/>
+          </a:prstGeom>
+          <a:ln w="19050">
+            <a:solidFill>
+              <a:srgbClr val="1F2937"/>
+            </a:solidFill>
+            <a:tailEnd type="triangle" w="med" len="med"/>
+          </a:ln>
+        </p:spPr>
+        <p:style>
+          <a:lnRef idx="2">
+            <a:schemeClr val="accent1"/>
+          </a:lnRef>
+          <a:fillRef idx="0">
+            <a:schemeClr val="accent1"/>
+          </a:fillRef>
+          <a:effectRef idx="1">
+            <a:schemeClr val="accent1"/>
+          </a:effectRef>
+          <a:fontRef idx="minor">
+            <a:schemeClr val="tx1"/>
+          </a:fontRef>
+        </p:style>
+      </p:cxnSp>
+      <p:cxnSp>
+        <p:nvCxnSpPr>
+          <p:cNvPr id="25" name="Connector 24"/>
+          <p:cNvCxnSpPr/>
+          <p:nvPr/>
+        </p:nvCxnSpPr>
+        <p:spPr>
+          <a:xfrm>
+            <a:off x="1920240" y="5394960"/>
+            <a:ext cx="8311896" cy="0"/>
+          </a:xfrm>
+          <a:prstGeom prst="line">
+            <a:avLst/>
+          </a:prstGeom>
+          <a:ln w="19050">
+            <a:solidFill>
+              <a:srgbClr val="1F2937"/>
+            </a:solidFill>
+            <a:tailEnd type="triangle" w="med" len="med"/>
+          </a:ln>
+        </p:spPr>
+        <p:style>
+          <a:lnRef idx="2">
+            <a:schemeClr val="accent1"/>
+          </a:lnRef>
+          <a:fillRef idx="0">
+            <a:schemeClr val="accent1"/>
+          </a:fillRef>
+          <a:effectRef idx="1">
+            <a:schemeClr val="accent1"/>
+          </a:effectRef>
+          <a:fontRef idx="minor">
+            <a:schemeClr val="tx1"/>
+          </a:fontRef>
+        </p:style>
+      </p:cxnSp>
+      <p:cxnSp>
+        <p:nvCxnSpPr>
+          <p:cNvPr id="26" name="Connector 25"/>
+          <p:cNvCxnSpPr/>
+          <p:nvPr/>
+        </p:nvCxnSpPr>
+        <p:spPr>
+          <a:xfrm>
+            <a:off x="6080760" y="5394960"/>
+            <a:ext cx="0" cy="27432"/>
+          </a:xfrm>
+          <a:prstGeom prst="line">
+            <a:avLst/>
+          </a:prstGeom>
+          <a:ln w="19050">
+            <a:solidFill>
+              <a:srgbClr val="1F2937"/>
+            </a:solidFill>
+            <a:tailEnd type="triangle" w="med" len="med"/>
+          </a:ln>
+        </p:spPr>
+        <p:style>
+          <a:lnRef idx="2">
+            <a:schemeClr val="accent1"/>
+          </a:lnRef>
+          <a:fillRef idx="0">
+            <a:schemeClr val="accent1"/>
+          </a:fillRef>
+          <a:effectRef idx="1">
+            <a:schemeClr val="accent1"/>
+          </a:effectRef>
+          <a:fontRef idx="minor">
+            <a:schemeClr val="tx1"/>
+          </a:fontRef>
+        </p:style>
+      </p:cxnSp>
     </p:spTree>
   </p:cSld>
   <p:clrMapOvr>
@@ -16135,7 +15772,824 @@
                 </a:solidFill>
                 <a:latin typeface="Calibri"/>
               </a:rPr>
-              <a:t>21 / 27</a:t>
+              <a:t>21 / 31</a:t>
+            </a:r>
+          </a:p>
+        </p:txBody>
+      </p:sp>
+      <p:sp>
+        <p:nvSpPr>
+          <p:cNvPr id="4" name="Rectangle 3"/>
+          <p:cNvSpPr/>
+          <p:nvPr/>
+        </p:nvSpPr>
+        <p:spPr>
+          <a:xfrm>
+            <a:off x="0" y="0"/>
+            <a:ext cx="12188952" cy="64008"/>
+          </a:xfrm>
+          <a:prstGeom prst="rect">
+            <a:avLst/>
+          </a:prstGeom>
+          <a:solidFill>
+            <a:srgbClr val="D99A06"/>
+          </a:solidFill>
+          <a:ln>
+            <a:noFill/>
+          </a:ln>
+        </p:spPr>
+        <p:style>
+          <a:lnRef idx="1">
+            <a:schemeClr val="accent1"/>
+          </a:lnRef>
+          <a:fillRef idx="3">
+            <a:schemeClr val="accent1"/>
+          </a:fillRef>
+          <a:effectRef idx="2">
+            <a:schemeClr val="accent1"/>
+          </a:effectRef>
+          <a:fontRef idx="minor">
+            <a:schemeClr val="lt1"/>
+          </a:fontRef>
+        </p:style>
+        <p:txBody>
+          <a:bodyPr rtlCol="0" anchor="ctr"/>
+          <a:lstStyle/>
+          <a:p>
+            <a:pPr algn="ctr"/>
+          </a:p>
+        </p:txBody>
+      </p:sp>
+      <p:sp>
+        <p:nvSpPr>
+          <p:cNvPr id="5" name="TextBox 4"/>
+          <p:cNvSpPr txBox="1"/>
+          <p:nvPr/>
+        </p:nvSpPr>
+        <p:spPr>
+          <a:xfrm>
+            <a:off x="548640" y="320040"/>
+            <a:ext cx="11064240" cy="822960"/>
+          </a:xfrm>
+          <a:prstGeom prst="rect">
+            <a:avLst/>
+          </a:prstGeom>
+          <a:noFill/>
+        </p:spPr>
+        <p:txBody>
+          <a:bodyPr wrap="square">
+            <a:spAutoFit/>
+          </a:bodyPr>
+          <a:lstStyle/>
+          <a:p>
+            <a:pPr algn="l"/>
+            <a:r>
+              <a:rPr sz="3400" b="1" i="0">
+                <a:solidFill>
+                  <a:srgbClr val="144E4C"/>
+                </a:solidFill>
+                <a:latin typeface="Georgia"/>
+              </a:rPr>
+              <a:t>Standards &amp; Compliance</a:t>
+            </a:r>
+          </a:p>
+        </p:txBody>
+      </p:sp>
+      <p:sp>
+        <p:nvSpPr>
+          <p:cNvPr id="6" name="Rectangle 5"/>
+          <p:cNvSpPr/>
+          <p:nvPr/>
+        </p:nvSpPr>
+        <p:spPr>
+          <a:xfrm>
+            <a:off x="566928" y="1078992"/>
+            <a:ext cx="1005840" cy="50292"/>
+          </a:xfrm>
+          <a:prstGeom prst="rect">
+            <a:avLst/>
+          </a:prstGeom>
+          <a:solidFill>
+            <a:srgbClr val="D99A06"/>
+          </a:solidFill>
+          <a:ln>
+            <a:noFill/>
+          </a:ln>
+        </p:spPr>
+        <p:style>
+          <a:lnRef idx="1">
+            <a:schemeClr val="accent1"/>
+          </a:lnRef>
+          <a:fillRef idx="3">
+            <a:schemeClr val="accent1"/>
+          </a:fillRef>
+          <a:effectRef idx="2">
+            <a:schemeClr val="accent1"/>
+          </a:effectRef>
+          <a:fontRef idx="minor">
+            <a:schemeClr val="lt1"/>
+          </a:fontRef>
+        </p:style>
+        <p:txBody>
+          <a:bodyPr rtlCol="0" anchor="ctr"/>
+          <a:lstStyle/>
+          <a:p>
+            <a:pPr algn="ctr"/>
+          </a:p>
+        </p:txBody>
+      </p:sp>
+      <p:sp>
+        <p:nvSpPr>
+          <p:cNvPr id="7" name="Rounded Rectangle 6"/>
+          <p:cNvSpPr/>
+          <p:nvPr/>
+        </p:nvSpPr>
+        <p:spPr>
+          <a:xfrm>
+            <a:off x="548640" y="1554480"/>
+            <a:ext cx="3520440" cy="2651760"/>
+          </a:xfrm>
+          <a:prstGeom prst="roundRect">
+            <a:avLst>
+              <a:gd name="adj" fmla="val 6000"/>
+            </a:avLst>
+          </a:prstGeom>
+          <a:solidFill>
+            <a:srgbClr val="FFFFFF"/>
+          </a:solidFill>
+          <a:ln w="15875">
+            <a:solidFill>
+              <a:srgbClr val="D8D2C2"/>
+            </a:solidFill>
+          </a:ln>
+        </p:spPr>
+        <p:style>
+          <a:lnRef idx="1">
+            <a:schemeClr val="accent1"/>
+          </a:lnRef>
+          <a:fillRef idx="3">
+            <a:schemeClr val="accent1"/>
+          </a:fillRef>
+          <a:effectRef idx="2">
+            <a:schemeClr val="accent1"/>
+          </a:effectRef>
+          <a:fontRef idx="minor">
+            <a:schemeClr val="lt1"/>
+          </a:fontRef>
+        </p:style>
+        <p:txBody>
+          <a:bodyPr rtlCol="0" anchor="ctr"/>
+          <a:lstStyle/>
+          <a:p>
+            <a:pPr algn="ctr"/>
+          </a:p>
+        </p:txBody>
+      </p:sp>
+      <p:sp>
+        <p:nvSpPr>
+          <p:cNvPr id="8" name="Rounded Rectangle 7"/>
+          <p:cNvSpPr/>
+          <p:nvPr/>
+        </p:nvSpPr>
+        <p:spPr>
+          <a:xfrm>
+            <a:off x="548640" y="1554480"/>
+            <a:ext cx="3520440" cy="82296"/>
+          </a:xfrm>
+          <a:prstGeom prst="roundRect">
+            <a:avLst/>
+          </a:prstGeom>
+          <a:solidFill>
+            <a:srgbClr val="D99A06"/>
+          </a:solidFill>
+          <a:ln>
+            <a:noFill/>
+          </a:ln>
+        </p:spPr>
+        <p:style>
+          <a:lnRef idx="1">
+            <a:schemeClr val="accent1"/>
+          </a:lnRef>
+          <a:fillRef idx="3">
+            <a:schemeClr val="accent1"/>
+          </a:fillRef>
+          <a:effectRef idx="2">
+            <a:schemeClr val="accent1"/>
+          </a:effectRef>
+          <a:fontRef idx="minor">
+            <a:schemeClr val="lt1"/>
+          </a:fontRef>
+        </p:style>
+        <p:txBody>
+          <a:bodyPr rtlCol="0" anchor="ctr"/>
+          <a:lstStyle/>
+          <a:p>
+            <a:pPr algn="ctr"/>
+          </a:p>
+        </p:txBody>
+      </p:sp>
+      <p:sp>
+        <p:nvSpPr>
+          <p:cNvPr id="9" name="Oval 8"/>
+          <p:cNvSpPr/>
+          <p:nvPr/>
+        </p:nvSpPr>
+        <p:spPr>
+          <a:xfrm>
+            <a:off x="804672" y="1847088"/>
+            <a:ext cx="475488" cy="475488"/>
+          </a:xfrm>
+          <a:prstGeom prst="ellipse">
+            <a:avLst/>
+          </a:prstGeom>
+          <a:solidFill>
+            <a:srgbClr val="D99A06"/>
+          </a:solidFill>
+          <a:ln>
+            <a:noFill/>
+          </a:ln>
+        </p:spPr>
+        <p:style>
+          <a:lnRef idx="1">
+            <a:schemeClr val="accent1"/>
+          </a:lnRef>
+          <a:fillRef idx="3">
+            <a:schemeClr val="accent1"/>
+          </a:fillRef>
+          <a:effectRef idx="2">
+            <a:schemeClr val="accent1"/>
+          </a:effectRef>
+          <a:fontRef idx="minor">
+            <a:schemeClr val="lt1"/>
+          </a:fontRef>
+        </p:style>
+        <p:txBody>
+          <a:bodyPr rtlCol="0" anchor="ctr" wrap="square"/>
+          <a:lstStyle/>
+          <a:p>
+            <a:pPr algn="ctr"/>
+            <a:r>
+              <a:rPr sz="1700" b="1" i="0">
+                <a:solidFill>
+                  <a:srgbClr val="144E4C"/>
+                </a:solidFill>
+                <a:latin typeface="Calibri"/>
+              </a:rPr>
+              <a:t>1</a:t>
+            </a:r>
+          </a:p>
+        </p:txBody>
+      </p:sp>
+      <p:sp>
+        <p:nvSpPr>
+          <p:cNvPr id="10" name="TextBox 9"/>
+          <p:cNvSpPr txBox="1"/>
+          <p:nvPr/>
+        </p:nvSpPr>
+        <p:spPr>
+          <a:xfrm>
+            <a:off x="1417319" y="1810512"/>
+            <a:ext cx="2468880" cy="2240279"/>
+          </a:xfrm>
+          <a:prstGeom prst="rect">
+            <a:avLst/>
+          </a:prstGeom>
+          <a:noFill/>
+        </p:spPr>
+        <p:txBody>
+          <a:bodyPr wrap="square">
+            <a:normAutofit/>
+          </a:bodyPr>
+          <a:lstStyle/>
+          <a:p>
+            <a:pPr algn="l">
+              <a:spcAft>
+                <a:spcPts val="600"/>
+              </a:spcAft>
+            </a:pPr>
+            <a:r>
+              <a:rPr sz="1600" b="1" i="0">
+                <a:solidFill>
+                  <a:srgbClr val="144E4C"/>
+                </a:solidFill>
+                <a:latin typeface="Calibri"/>
+              </a:rPr>
+              <a:t>Software</a:t>
+            </a:r>
+          </a:p>
+          <a:p>
+            <a:pPr algn="l">
+              <a:spcBef>
+                <a:spcPts val="0"/>
+              </a:spcBef>
+              <a:spcAft>
+                <a:spcPts val="300"/>
+              </a:spcAft>
+            </a:pPr>
+            <a:r>
+              <a:rPr sz="1350" b="0" i="0">
+                <a:solidFill>
+                  <a:srgbClr val="5B6570"/>
+                </a:solidFill>
+                <a:latin typeface="Calibri"/>
+              </a:rPr>
+              <a:t>Reusable Packages, Central Configuration, Version Control With Reviewable Manifests, Seeded Deterministic Training, COCO / YOLO Interchange Formats.</a:t>
+            </a:r>
+          </a:p>
+        </p:txBody>
+      </p:sp>
+      <p:sp>
+        <p:nvSpPr>
+          <p:cNvPr id="11" name="Rounded Rectangle 10"/>
+          <p:cNvSpPr/>
+          <p:nvPr/>
+        </p:nvSpPr>
+        <p:spPr>
+          <a:xfrm>
+            <a:off x="4251959" y="1554480"/>
+            <a:ext cx="3520440" cy="2651760"/>
+          </a:xfrm>
+          <a:prstGeom prst="roundRect">
+            <a:avLst>
+              <a:gd name="adj" fmla="val 6000"/>
+            </a:avLst>
+          </a:prstGeom>
+          <a:solidFill>
+            <a:srgbClr val="FFFFFF"/>
+          </a:solidFill>
+          <a:ln w="15875">
+            <a:solidFill>
+              <a:srgbClr val="D8D2C2"/>
+            </a:solidFill>
+          </a:ln>
+        </p:spPr>
+        <p:style>
+          <a:lnRef idx="1">
+            <a:schemeClr val="accent1"/>
+          </a:lnRef>
+          <a:fillRef idx="3">
+            <a:schemeClr val="accent1"/>
+          </a:fillRef>
+          <a:effectRef idx="2">
+            <a:schemeClr val="accent1"/>
+          </a:effectRef>
+          <a:fontRef idx="minor">
+            <a:schemeClr val="lt1"/>
+          </a:fontRef>
+        </p:style>
+        <p:txBody>
+          <a:bodyPr rtlCol="0" anchor="ctr"/>
+          <a:lstStyle/>
+          <a:p>
+            <a:pPr algn="ctr"/>
+          </a:p>
+        </p:txBody>
+      </p:sp>
+      <p:sp>
+        <p:nvSpPr>
+          <p:cNvPr id="12" name="Rounded Rectangle 11"/>
+          <p:cNvSpPr/>
+          <p:nvPr/>
+        </p:nvSpPr>
+        <p:spPr>
+          <a:xfrm>
+            <a:off x="4251959" y="1554480"/>
+            <a:ext cx="3520440" cy="82296"/>
+          </a:xfrm>
+          <a:prstGeom prst="roundRect">
+            <a:avLst/>
+          </a:prstGeom>
+          <a:solidFill>
+            <a:srgbClr val="D99A06"/>
+          </a:solidFill>
+          <a:ln>
+            <a:noFill/>
+          </a:ln>
+        </p:spPr>
+        <p:style>
+          <a:lnRef idx="1">
+            <a:schemeClr val="accent1"/>
+          </a:lnRef>
+          <a:fillRef idx="3">
+            <a:schemeClr val="accent1"/>
+          </a:fillRef>
+          <a:effectRef idx="2">
+            <a:schemeClr val="accent1"/>
+          </a:effectRef>
+          <a:fontRef idx="minor">
+            <a:schemeClr val="lt1"/>
+          </a:fontRef>
+        </p:style>
+        <p:txBody>
+          <a:bodyPr rtlCol="0" anchor="ctr"/>
+          <a:lstStyle/>
+          <a:p>
+            <a:pPr algn="ctr"/>
+          </a:p>
+        </p:txBody>
+      </p:sp>
+      <p:sp>
+        <p:nvSpPr>
+          <p:cNvPr id="13" name="Oval 12"/>
+          <p:cNvSpPr/>
+          <p:nvPr/>
+        </p:nvSpPr>
+        <p:spPr>
+          <a:xfrm>
+            <a:off x="4507992" y="1847088"/>
+            <a:ext cx="475488" cy="475488"/>
+          </a:xfrm>
+          <a:prstGeom prst="ellipse">
+            <a:avLst/>
+          </a:prstGeom>
+          <a:solidFill>
+            <a:srgbClr val="D99A06"/>
+          </a:solidFill>
+          <a:ln>
+            <a:noFill/>
+          </a:ln>
+        </p:spPr>
+        <p:style>
+          <a:lnRef idx="1">
+            <a:schemeClr val="accent1"/>
+          </a:lnRef>
+          <a:fillRef idx="3">
+            <a:schemeClr val="accent1"/>
+          </a:fillRef>
+          <a:effectRef idx="2">
+            <a:schemeClr val="accent1"/>
+          </a:effectRef>
+          <a:fontRef idx="minor">
+            <a:schemeClr val="lt1"/>
+          </a:fontRef>
+        </p:style>
+        <p:txBody>
+          <a:bodyPr rtlCol="0" anchor="ctr" wrap="square"/>
+          <a:lstStyle/>
+          <a:p>
+            <a:pPr algn="ctr"/>
+            <a:r>
+              <a:rPr sz="1700" b="1" i="0">
+                <a:solidFill>
+                  <a:srgbClr val="144E4C"/>
+                </a:solidFill>
+                <a:latin typeface="Calibri"/>
+              </a:rPr>
+              <a:t>2</a:t>
+            </a:r>
+          </a:p>
+        </p:txBody>
+      </p:sp>
+      <p:sp>
+        <p:nvSpPr>
+          <p:cNvPr id="14" name="TextBox 13"/>
+          <p:cNvSpPr txBox="1"/>
+          <p:nvPr/>
+        </p:nvSpPr>
+        <p:spPr>
+          <a:xfrm>
+            <a:off x="5120640" y="1810512"/>
+            <a:ext cx="2468880" cy="2240279"/>
+          </a:xfrm>
+          <a:prstGeom prst="rect">
+            <a:avLst/>
+          </a:prstGeom>
+          <a:noFill/>
+        </p:spPr>
+        <p:txBody>
+          <a:bodyPr wrap="square">
+            <a:normAutofit/>
+          </a:bodyPr>
+          <a:lstStyle/>
+          <a:p>
+            <a:pPr algn="l">
+              <a:spcAft>
+                <a:spcPts val="600"/>
+              </a:spcAft>
+            </a:pPr>
+            <a:r>
+              <a:rPr sz="1600" b="1" i="0">
+                <a:solidFill>
+                  <a:srgbClr val="144E4C"/>
+                </a:solidFill>
+                <a:latin typeface="Calibri"/>
+              </a:rPr>
+              <a:t>Hardware</a:t>
+            </a:r>
+          </a:p>
+          <a:p>
+            <a:pPr algn="l">
+              <a:spcBef>
+                <a:spcPts val="0"/>
+              </a:spcBef>
+              <a:spcAft>
+                <a:spcPts val="300"/>
+              </a:spcAft>
+            </a:pPr>
+            <a:r>
+              <a:rPr sz="1350" b="0" i="0">
+                <a:solidFill>
+                  <a:srgbClr val="5B6570"/>
+                </a:solidFill>
+                <a:latin typeface="Calibri"/>
+              </a:rPr>
+              <a:t>Fixed-Geometry Calibration For Grading, Jetson-Class Edge Device With TensorRT, Factory-Safe Power Envelope.</a:t>
+            </a:r>
+          </a:p>
+        </p:txBody>
+      </p:sp>
+      <p:sp>
+        <p:nvSpPr>
+          <p:cNvPr id="15" name="Rounded Rectangle 14"/>
+          <p:cNvSpPr/>
+          <p:nvPr/>
+        </p:nvSpPr>
+        <p:spPr>
+          <a:xfrm>
+            <a:off x="7955279" y="1554480"/>
+            <a:ext cx="3520440" cy="2651760"/>
+          </a:xfrm>
+          <a:prstGeom prst="roundRect">
+            <a:avLst>
+              <a:gd name="adj" fmla="val 6000"/>
+            </a:avLst>
+          </a:prstGeom>
+          <a:solidFill>
+            <a:srgbClr val="FFFFFF"/>
+          </a:solidFill>
+          <a:ln w="15875">
+            <a:solidFill>
+              <a:srgbClr val="D8D2C2"/>
+            </a:solidFill>
+          </a:ln>
+        </p:spPr>
+        <p:style>
+          <a:lnRef idx="1">
+            <a:schemeClr val="accent1"/>
+          </a:lnRef>
+          <a:fillRef idx="3">
+            <a:schemeClr val="accent1"/>
+          </a:fillRef>
+          <a:effectRef idx="2">
+            <a:schemeClr val="accent1"/>
+          </a:effectRef>
+          <a:fontRef idx="minor">
+            <a:schemeClr val="lt1"/>
+          </a:fontRef>
+        </p:style>
+        <p:txBody>
+          <a:bodyPr rtlCol="0" anchor="ctr"/>
+          <a:lstStyle/>
+          <a:p>
+            <a:pPr algn="ctr"/>
+          </a:p>
+        </p:txBody>
+      </p:sp>
+      <p:sp>
+        <p:nvSpPr>
+          <p:cNvPr id="16" name="Rounded Rectangle 15"/>
+          <p:cNvSpPr/>
+          <p:nvPr/>
+        </p:nvSpPr>
+        <p:spPr>
+          <a:xfrm>
+            <a:off x="7955279" y="1554480"/>
+            <a:ext cx="3520440" cy="82296"/>
+          </a:xfrm>
+          <a:prstGeom prst="roundRect">
+            <a:avLst/>
+          </a:prstGeom>
+          <a:solidFill>
+            <a:srgbClr val="D99A06"/>
+          </a:solidFill>
+          <a:ln>
+            <a:noFill/>
+          </a:ln>
+        </p:spPr>
+        <p:style>
+          <a:lnRef idx="1">
+            <a:schemeClr val="accent1"/>
+          </a:lnRef>
+          <a:fillRef idx="3">
+            <a:schemeClr val="accent1"/>
+          </a:fillRef>
+          <a:effectRef idx="2">
+            <a:schemeClr val="accent1"/>
+          </a:effectRef>
+          <a:fontRef idx="minor">
+            <a:schemeClr val="lt1"/>
+          </a:fontRef>
+        </p:style>
+        <p:txBody>
+          <a:bodyPr rtlCol="0" anchor="ctr"/>
+          <a:lstStyle/>
+          <a:p>
+            <a:pPr algn="ctr"/>
+          </a:p>
+        </p:txBody>
+      </p:sp>
+      <p:sp>
+        <p:nvSpPr>
+          <p:cNvPr id="17" name="Oval 16"/>
+          <p:cNvSpPr/>
+          <p:nvPr/>
+        </p:nvSpPr>
+        <p:spPr>
+          <a:xfrm>
+            <a:off x="8211311" y="1847088"/>
+            <a:ext cx="475488" cy="475488"/>
+          </a:xfrm>
+          <a:prstGeom prst="ellipse">
+            <a:avLst/>
+          </a:prstGeom>
+          <a:solidFill>
+            <a:srgbClr val="D99A06"/>
+          </a:solidFill>
+          <a:ln>
+            <a:noFill/>
+          </a:ln>
+        </p:spPr>
+        <p:style>
+          <a:lnRef idx="1">
+            <a:schemeClr val="accent1"/>
+          </a:lnRef>
+          <a:fillRef idx="3">
+            <a:schemeClr val="accent1"/>
+          </a:fillRef>
+          <a:effectRef idx="2">
+            <a:schemeClr val="accent1"/>
+          </a:effectRef>
+          <a:fontRef idx="minor">
+            <a:schemeClr val="lt1"/>
+          </a:fontRef>
+        </p:style>
+        <p:txBody>
+          <a:bodyPr rtlCol="0" anchor="ctr" wrap="square"/>
+          <a:lstStyle/>
+          <a:p>
+            <a:pPr algn="ctr"/>
+            <a:r>
+              <a:rPr sz="1700" b="1" i="0">
+                <a:solidFill>
+                  <a:srgbClr val="144E4C"/>
+                </a:solidFill>
+                <a:latin typeface="Calibri"/>
+              </a:rPr>
+              <a:t>3</a:t>
+            </a:r>
+          </a:p>
+        </p:txBody>
+      </p:sp>
+      <p:sp>
+        <p:nvSpPr>
+          <p:cNvPr id="18" name="TextBox 17"/>
+          <p:cNvSpPr txBox="1"/>
+          <p:nvPr/>
+        </p:nvSpPr>
+        <p:spPr>
+          <a:xfrm>
+            <a:off x="8823959" y="1810512"/>
+            <a:ext cx="2468880" cy="2240279"/>
+          </a:xfrm>
+          <a:prstGeom prst="rect">
+            <a:avLst/>
+          </a:prstGeom>
+          <a:noFill/>
+        </p:spPr>
+        <p:txBody>
+          <a:bodyPr wrap="square">
+            <a:normAutofit/>
+          </a:bodyPr>
+          <a:lstStyle/>
+          <a:p>
+            <a:pPr algn="l">
+              <a:spcAft>
+                <a:spcPts val="600"/>
+              </a:spcAft>
+            </a:pPr>
+            <a:r>
+              <a:rPr sz="1600" b="1" i="0">
+                <a:solidFill>
+                  <a:srgbClr val="144E4C"/>
+                </a:solidFill>
+                <a:latin typeface="Calibri"/>
+              </a:rPr>
+              <a:t>Communication</a:t>
+            </a:r>
+          </a:p>
+          <a:p>
+            <a:pPr algn="l">
+              <a:spcBef>
+                <a:spcPts val="0"/>
+              </a:spcBef>
+              <a:spcAft>
+                <a:spcPts val="300"/>
+              </a:spcAft>
+            </a:pPr>
+            <a:r>
+              <a:rPr sz="1350" b="0" i="0">
+                <a:solidFill>
+                  <a:srgbClr val="5B6570"/>
+                </a:solidFill>
+                <a:latin typeface="Calibri"/>
+              </a:rPr>
+              <a:t>REST File Handoff To The MES And Dashboard Over HTTP; No Proprietary Protocols.</a:t>
+            </a:r>
+          </a:p>
+        </p:txBody>
+      </p:sp>
+    </p:spTree>
+  </p:cSld>
+  <p:clrMapOvr>
+    <a:masterClrMapping/>
+  </p:clrMapOvr>
+</p:sld>
+</file>
+
+<file path=ppt/slides/slide22.xml><?xml version="1.0" encoding="utf-8"?>
+<p:sld xmlns:a="http://schemas.openxmlformats.org/drawingml/2006/main" xmlns:p="http://schemas.openxmlformats.org/presentationml/2006/main" xmlns:r="http://schemas.openxmlformats.org/officeDocument/2006/relationships">
+  <p:cSld>
+    <p:bg>
+      <p:bgPr>
+        <a:solidFill>
+          <a:srgbClr val="FAF7EF"/>
+        </a:solidFill>
+        <a:effectLst/>
+      </p:bgPr>
+    </p:bg>
+    <p:spTree>
+      <p:nvGrpSpPr>
+        <p:cNvPr id="1" name=""/>
+        <p:cNvGrpSpPr/>
+        <p:nvPr/>
+      </p:nvGrpSpPr>
+      <p:grpSpPr/>
+      <p:sp>
+        <p:nvSpPr>
+          <p:cNvPr id="2" name="TextBox 1"/>
+          <p:cNvSpPr txBox="1"/>
+          <p:nvPr/>
+        </p:nvSpPr>
+        <p:spPr>
+          <a:xfrm>
+            <a:off x="548640" y="6419088"/>
+            <a:ext cx="9144000" cy="274320"/>
+          </a:xfrm>
+          <a:prstGeom prst="rect">
+            <a:avLst/>
+          </a:prstGeom>
+          <a:noFill/>
+        </p:spPr>
+        <p:txBody>
+          <a:bodyPr wrap="square">
+            <a:spAutoFit/>
+          </a:bodyPr>
+          <a:lstStyle/>
+          <a:p>
+            <a:pPr algn="l"/>
+            <a:r>
+              <a:rPr sz="900" b="0" i="0">
+                <a:solidFill>
+                  <a:srgbClr val="8A8F98"/>
+                </a:solidFill>
+                <a:latin typeface="Calibri"/>
+              </a:rPr>
+              <a:t>Defect-to-Delivery  |  FYDP-I  •  Group: 262-034</a:t>
+            </a:r>
+          </a:p>
+        </p:txBody>
+      </p:sp>
+      <p:sp>
+        <p:nvSpPr>
+          <p:cNvPr id="3" name="TextBox 2"/>
+          <p:cNvSpPr txBox="1"/>
+          <p:nvPr/>
+        </p:nvSpPr>
+        <p:spPr>
+          <a:xfrm>
+            <a:off x="10972800" y="6419088"/>
+            <a:ext cx="640080" cy="274320"/>
+          </a:xfrm>
+          <a:prstGeom prst="rect">
+            <a:avLst/>
+          </a:prstGeom>
+          <a:noFill/>
+        </p:spPr>
+        <p:txBody>
+          <a:bodyPr wrap="none">
+            <a:spAutoFit/>
+          </a:bodyPr>
+          <a:lstStyle/>
+          <a:p>
+            <a:pPr algn="r"/>
+            <a:r>
+              <a:rPr sz="900" b="0" i="0">
+                <a:solidFill>
+                  <a:srgbClr val="8A8F98"/>
+                </a:solidFill>
+                <a:latin typeface="Calibri"/>
+              </a:rPr>
+              <a:t>22 / 31</a:t>
             </a:r>
           </a:p>
         </p:txBody>
@@ -16727,7 +17181,7 @@
 </p:sld>
 </file>
 
-<file path=ppt/slides/slide22.xml><?xml version="1.0" encoding="utf-8"?>
+<file path=ppt/slides/slide23.xml><?xml version="1.0" encoding="utf-8"?>
 <p:sld xmlns:a="http://schemas.openxmlformats.org/drawingml/2006/main" xmlns:p="http://schemas.openxmlformats.org/presentationml/2006/main" xmlns:r="http://schemas.openxmlformats.org/officeDocument/2006/relationships">
   <p:cSld>
     <p:bg>
@@ -16810,7 +17264,7 @@
                 </a:solidFill>
                 <a:latin typeface="Calibri"/>
               </a:rPr>
-              <a:t>22 / 27</a:t>
+              <a:t>23 / 31</a:t>
             </a:r>
           </a:p>
         </p:txBody>
@@ -16946,7 +17400,7 @@
         </p:nvGraphicFramePr>
         <p:xfrm>
           <a:off x="548640" y="1417320"/>
-          <a:ext cx="8138160" cy="4992624"/>
+          <a:ext cx="8138160" cy="5376672"/>
         </p:xfrm>
         <a:graphic>
           <a:graphicData uri="http://schemas.openxmlformats.org/drawingml/2006/table">
@@ -17848,7 +18302,7 @@
                           </a:solidFill>
                           <a:latin typeface="Calibri"/>
                         </a:rPr>
-                        <a:t>Documentation, Printing, Binding, Presentation</a:t>
+                        <a:t>Jetson Orin Nano / Edge Deployment Kit</a:t>
                       </a:r>
                     </a:p>
                   </a:txBody>
@@ -17871,7 +18325,7 @@
                           </a:solidFill>
                           <a:latin typeface="Calibri"/>
                         </a:rPr>
-                        <a:t>2,500</a:t>
+                        <a:t>25,000</a:t>
                       </a:r>
                     </a:p>
                   </a:txBody>
@@ -17882,6 +18336,77 @@
                   </a:tcPr>
                 </a:tc>
               </a:tr>
+              <a:tr h="384048">
+                <a:tc>
+                  <a:txBody>
+                    <a:bodyPr/>
+                    <a:lstStyle/>
+                    <a:p>
+                      <a:pPr algn="ctr"/>
+                      <a:r>
+                        <a:rPr sz="1200" b="0" i="0">
+                          <a:solidFill>
+                            <a:srgbClr val="1F2937"/>
+                          </a:solidFill>
+                          <a:latin typeface="Calibri"/>
+                        </a:rPr>
+                        <a:t>13</a:t>
+                      </a:r>
+                    </a:p>
+                  </a:txBody>
+                  <a:tcPr anchor="ctr" marL="73152" marR="73152">
+                    <a:solidFill>
+                      <a:srgbClr val="FFFFFF"/>
+                    </a:solidFill>
+                  </a:tcPr>
+                </a:tc>
+                <a:tc>
+                  <a:txBody>
+                    <a:bodyPr/>
+                    <a:lstStyle/>
+                    <a:p>
+                      <a:pPr algn="ctr"/>
+                      <a:r>
+                        <a:rPr sz="1200" b="0" i="0">
+                          <a:solidFill>
+                            <a:srgbClr val="1F2937"/>
+                          </a:solidFill>
+                          <a:latin typeface="Calibri"/>
+                        </a:rPr>
+                        <a:t>Documentation, Printing, Binding, Presentation</a:t>
+                      </a:r>
+                    </a:p>
+                  </a:txBody>
+                  <a:tcPr anchor="ctr" marL="73152" marR="73152">
+                    <a:solidFill>
+                      <a:srgbClr val="FFFFFF"/>
+                    </a:solidFill>
+                  </a:tcPr>
+                </a:tc>
+                <a:tc>
+                  <a:txBody>
+                    <a:bodyPr/>
+                    <a:lstStyle/>
+                    <a:p>
+                      <a:pPr algn="ctr"/>
+                      <a:r>
+                        <a:rPr sz="1200" b="0" i="0">
+                          <a:solidFill>
+                            <a:srgbClr val="1F2937"/>
+                          </a:solidFill>
+                          <a:latin typeface="Calibri"/>
+                        </a:rPr>
+                        <a:t>2,500</a:t>
+                      </a:r>
+                    </a:p>
+                  </a:txBody>
+                  <a:tcPr anchor="ctr" marL="73152" marR="73152">
+                    <a:solidFill>
+                      <a:srgbClr val="FFFFFF"/>
+                    </a:solidFill>
+                  </a:tcPr>
+                </a:tc>
+              </a:tr>
             </a:tbl>
           </a:graphicData>
         </a:graphic>
@@ -17934,7 +18459,7 @@
                 <a:latin typeface="Calibri"/>
               </a:rPr>
               <a:t>Estimation Total
-16,000 BDT</a:t>
+42,000 BDT</a:t>
             </a:r>
           </a:p>
         </p:txBody>
@@ -17947,7 +18472,7 @@
 </p:sld>
 </file>
 
-<file path=ppt/slides/slide23.xml><?xml version="1.0" encoding="utf-8"?>
+<file path=ppt/slides/slide24.xml><?xml version="1.0" encoding="utf-8"?>
 <p:sld xmlns:a="http://schemas.openxmlformats.org/drawingml/2006/main" xmlns:p="http://schemas.openxmlformats.org/presentationml/2006/main" xmlns:r="http://schemas.openxmlformats.org/officeDocument/2006/relationships">
   <p:cSld>
     <p:bg>
@@ -18030,7 +18555,7 @@
                 </a:solidFill>
                 <a:latin typeface="Calibri"/>
               </a:rPr>
-              <a:t>23 / 27</a:t>
+              <a:t>24 / 31</a:t>
             </a:r>
           </a:p>
         </p:txBody>
@@ -19073,7 +19598,7 @@
 </p:sld>
 </file>
 
-<file path=ppt/slides/slide24.xml><?xml version="1.0" encoding="utf-8"?>
+<file path=ppt/slides/slide25.xml><?xml version="1.0" encoding="utf-8"?>
 <p:sld xmlns:a="http://schemas.openxmlformats.org/drawingml/2006/main" xmlns:p="http://schemas.openxmlformats.org/presentationml/2006/main" xmlns:r="http://schemas.openxmlformats.org/officeDocument/2006/relationships">
   <p:cSld>
     <p:bg>
@@ -19156,7 +19681,7 @@
                 </a:solidFill>
                 <a:latin typeface="Calibri"/>
               </a:rPr>
-              <a:t>24 / 27</a:t>
+              <a:t>25 / 31</a:t>
             </a:r>
           </a:p>
         </p:txBody>
@@ -19234,7 +19759,700 @@
                 </a:solidFill>
                 <a:latin typeface="Georgia"/>
               </a:rPr>
-              <a:t>Complex Engineering Problem Mapping (Table 4.2)</a:t>
+              <a:t>Risks &amp; Mitigations</a:t>
+            </a:r>
+          </a:p>
+        </p:txBody>
+      </p:sp>
+      <p:sp>
+        <p:nvSpPr>
+          <p:cNvPr id="6" name="Rectangle 5"/>
+          <p:cNvSpPr/>
+          <p:nvPr/>
+        </p:nvSpPr>
+        <p:spPr>
+          <a:xfrm>
+            <a:off x="566928" y="1078992"/>
+            <a:ext cx="1005840" cy="50292"/>
+          </a:xfrm>
+          <a:prstGeom prst="rect">
+            <a:avLst/>
+          </a:prstGeom>
+          <a:solidFill>
+            <a:srgbClr val="D99A06"/>
+          </a:solidFill>
+          <a:ln>
+            <a:noFill/>
+          </a:ln>
+        </p:spPr>
+        <p:style>
+          <a:lnRef idx="1">
+            <a:schemeClr val="accent1"/>
+          </a:lnRef>
+          <a:fillRef idx="3">
+            <a:schemeClr val="accent1"/>
+          </a:fillRef>
+          <a:effectRef idx="2">
+            <a:schemeClr val="accent1"/>
+          </a:effectRef>
+          <a:fontRef idx="minor">
+            <a:schemeClr val="lt1"/>
+          </a:fontRef>
+        </p:style>
+        <p:txBody>
+          <a:bodyPr rtlCol="0" anchor="ctr"/>
+          <a:lstStyle/>
+          <a:p>
+            <a:pPr algn="ctr"/>
+          </a:p>
+        </p:txBody>
+      </p:sp>
+      <p:sp>
+        <p:nvSpPr>
+          <p:cNvPr id="7" name="Rounded Rectangle 6"/>
+          <p:cNvSpPr/>
+          <p:nvPr/>
+        </p:nvSpPr>
+        <p:spPr>
+          <a:xfrm>
+            <a:off x="548640" y="1463040"/>
+            <a:ext cx="5394960" cy="3291840"/>
+          </a:xfrm>
+          <a:prstGeom prst="roundRect">
+            <a:avLst>
+              <a:gd name="adj" fmla="val 6000"/>
+            </a:avLst>
+          </a:prstGeom>
+          <a:solidFill>
+            <a:srgbClr val="FFFFFF"/>
+          </a:solidFill>
+          <a:ln w="15875">
+            <a:solidFill>
+              <a:srgbClr val="D8D2C2"/>
+            </a:solidFill>
+          </a:ln>
+        </p:spPr>
+        <p:style>
+          <a:lnRef idx="1">
+            <a:schemeClr val="accent1"/>
+          </a:lnRef>
+          <a:fillRef idx="3">
+            <a:schemeClr val="accent1"/>
+          </a:fillRef>
+          <a:effectRef idx="2">
+            <a:schemeClr val="accent1"/>
+          </a:effectRef>
+          <a:fontRef idx="minor">
+            <a:schemeClr val="lt1"/>
+          </a:fontRef>
+        </p:style>
+        <p:txBody>
+          <a:bodyPr rtlCol="0" anchor="ctr"/>
+          <a:lstStyle/>
+          <a:p>
+            <a:pPr algn="ctr"/>
+          </a:p>
+        </p:txBody>
+      </p:sp>
+      <p:sp>
+        <p:nvSpPr>
+          <p:cNvPr id="8" name="Rounded Rectangle 7"/>
+          <p:cNvSpPr/>
+          <p:nvPr/>
+        </p:nvSpPr>
+        <p:spPr>
+          <a:xfrm>
+            <a:off x="548640" y="1463040"/>
+            <a:ext cx="5394960" cy="82296"/>
+          </a:xfrm>
+          <a:prstGeom prst="roundRect">
+            <a:avLst/>
+          </a:prstGeom>
+          <a:solidFill>
+            <a:srgbClr val="D99A06"/>
+          </a:solidFill>
+          <a:ln>
+            <a:noFill/>
+          </a:ln>
+        </p:spPr>
+        <p:style>
+          <a:lnRef idx="1">
+            <a:schemeClr val="accent1"/>
+          </a:lnRef>
+          <a:fillRef idx="3">
+            <a:schemeClr val="accent1"/>
+          </a:fillRef>
+          <a:effectRef idx="2">
+            <a:schemeClr val="accent1"/>
+          </a:effectRef>
+          <a:fontRef idx="minor">
+            <a:schemeClr val="lt1"/>
+          </a:fontRef>
+        </p:style>
+        <p:txBody>
+          <a:bodyPr rtlCol="0" anchor="ctr"/>
+          <a:lstStyle/>
+          <a:p>
+            <a:pPr algn="ctr"/>
+          </a:p>
+        </p:txBody>
+      </p:sp>
+      <p:sp>
+        <p:nvSpPr>
+          <p:cNvPr id="9" name="Oval 8"/>
+          <p:cNvSpPr/>
+          <p:nvPr/>
+        </p:nvSpPr>
+        <p:spPr>
+          <a:xfrm>
+            <a:off x="804672" y="1755648"/>
+            <a:ext cx="475488" cy="475488"/>
+          </a:xfrm>
+          <a:prstGeom prst="ellipse">
+            <a:avLst/>
+          </a:prstGeom>
+          <a:solidFill>
+            <a:srgbClr val="D99A06"/>
+          </a:solidFill>
+          <a:ln>
+            <a:noFill/>
+          </a:ln>
+        </p:spPr>
+        <p:style>
+          <a:lnRef idx="1">
+            <a:schemeClr val="accent1"/>
+          </a:lnRef>
+          <a:fillRef idx="3">
+            <a:schemeClr val="accent1"/>
+          </a:fillRef>
+          <a:effectRef idx="2">
+            <a:schemeClr val="accent1"/>
+          </a:effectRef>
+          <a:fontRef idx="minor">
+            <a:schemeClr val="lt1"/>
+          </a:fontRef>
+        </p:style>
+        <p:txBody>
+          <a:bodyPr rtlCol="0" anchor="ctr" wrap="square"/>
+          <a:lstStyle/>
+          <a:p>
+            <a:pPr algn="ctr"/>
+            <a:r>
+              <a:rPr sz="1700" b="1" i="0">
+                <a:solidFill>
+                  <a:srgbClr val="144E4C"/>
+                </a:solidFill>
+                <a:latin typeface="Calibri"/>
+              </a:rPr>
+              <a:t>⚠</a:t>
+            </a:r>
+          </a:p>
+        </p:txBody>
+      </p:sp>
+      <p:sp>
+        <p:nvSpPr>
+          <p:cNvPr id="10" name="TextBox 9"/>
+          <p:cNvSpPr txBox="1"/>
+          <p:nvPr/>
+        </p:nvSpPr>
+        <p:spPr>
+          <a:xfrm>
+            <a:off x="1417319" y="1719072"/>
+            <a:ext cx="4343400" cy="2880360"/>
+          </a:xfrm>
+          <a:prstGeom prst="rect">
+            <a:avLst/>
+          </a:prstGeom>
+          <a:noFill/>
+        </p:spPr>
+        <p:txBody>
+          <a:bodyPr wrap="square">
+            <a:normAutofit/>
+          </a:bodyPr>
+          <a:lstStyle/>
+          <a:p>
+            <a:pPr algn="l">
+              <a:spcAft>
+                <a:spcPts val="600"/>
+              </a:spcAft>
+            </a:pPr>
+            <a:r>
+              <a:rPr sz="1200" b="1" i="0">
+                <a:solidFill>
+                  <a:srgbClr val="144E4C"/>
+                </a:solidFill>
+                <a:latin typeface="Calibri"/>
+              </a:rPr>
+              <a:t>Key Risks</a:t>
+            </a:r>
+          </a:p>
+          <a:p>
+            <a:pPr algn="l">
+              <a:spcBef>
+                <a:spcPts val="0"/>
+              </a:spcBef>
+              <a:spcAft>
+                <a:spcPts val="300"/>
+              </a:spcAft>
+            </a:pPr>
+            <a:r>
+              <a:rPr sz="1100" b="0" i="0">
+                <a:solidFill>
+                  <a:srgbClr val="5B6570"/>
+                </a:solidFill>
+                <a:latin typeface="Calibri"/>
+              </a:rPr>
+              <a:t>Free T4 GPU quota: already exhausted once; fallback to Kaggle (30h/week) or local M1 overnight run.</a:t>
+            </a:r>
+          </a:p>
+          <a:p>
+            <a:pPr algn="l">
+              <a:spcBef>
+                <a:spcPts val="0"/>
+              </a:spcBef>
+              <a:spcAft>
+                <a:spcPts val="300"/>
+              </a:spcAft>
+            </a:pPr>
+            <a:r>
+              <a:rPr sz="1100" b="0" i="0">
+                <a:solidFill>
+                  <a:srgbClr val="5B6570"/>
+                </a:solidFill>
+                <a:latin typeface="Calibri"/>
+              </a:rPr>
+              <a:t>Factory data access: if unavailable, fallback to calibrated queuing simulation with documented parameters; paired Ds‑vs‑defect analysis is the contribution.</a:t>
+            </a:r>
+          </a:p>
+          <a:p>
+            <a:pPr algn="l">
+              <a:spcBef>
+                <a:spcPts val="0"/>
+              </a:spcBef>
+              <a:spcAft>
+                <a:spcPts val="300"/>
+              </a:spcAft>
+            </a:pPr>
+            <a:r>
+              <a:rPr sz="1100" b="0" i="0">
+                <a:solidFill>
+                  <a:srgbClr val="5B6570"/>
+                </a:solidFill>
+                <a:latin typeface="Calibri"/>
+              </a:rPr>
+              <a:t>Quarantine ambiguity: 152‑file lines batch may hide a second quarantine; visual review still open.</a:t>
+            </a:r>
+          </a:p>
+        </p:txBody>
+      </p:sp>
+      <p:sp>
+        <p:nvSpPr>
+          <p:cNvPr id="11" name="Rounded Rectangle 10"/>
+          <p:cNvSpPr/>
+          <p:nvPr/>
+        </p:nvSpPr>
+        <p:spPr>
+          <a:xfrm>
+            <a:off x="6245352" y="1463040"/>
+            <a:ext cx="5394960" cy="3291840"/>
+          </a:xfrm>
+          <a:prstGeom prst="roundRect">
+            <a:avLst>
+              <a:gd name="adj" fmla="val 6000"/>
+            </a:avLst>
+          </a:prstGeom>
+          <a:solidFill>
+            <a:srgbClr val="FFFFFF"/>
+          </a:solidFill>
+          <a:ln w="15875">
+            <a:solidFill>
+              <a:srgbClr val="D8D2C2"/>
+            </a:solidFill>
+          </a:ln>
+        </p:spPr>
+        <p:style>
+          <a:lnRef idx="1">
+            <a:schemeClr val="accent1"/>
+          </a:lnRef>
+          <a:fillRef idx="3">
+            <a:schemeClr val="accent1"/>
+          </a:fillRef>
+          <a:effectRef idx="2">
+            <a:schemeClr val="accent1"/>
+          </a:effectRef>
+          <a:fontRef idx="minor">
+            <a:schemeClr val="lt1"/>
+          </a:fontRef>
+        </p:style>
+        <p:txBody>
+          <a:bodyPr rtlCol="0" anchor="ctr"/>
+          <a:lstStyle/>
+          <a:p>
+            <a:pPr algn="ctr"/>
+          </a:p>
+        </p:txBody>
+      </p:sp>
+      <p:sp>
+        <p:nvSpPr>
+          <p:cNvPr id="12" name="Rounded Rectangle 11"/>
+          <p:cNvSpPr/>
+          <p:nvPr/>
+        </p:nvSpPr>
+        <p:spPr>
+          <a:xfrm>
+            <a:off x="6245352" y="1463040"/>
+            <a:ext cx="5394960" cy="82296"/>
+          </a:xfrm>
+          <a:prstGeom prst="roundRect">
+            <a:avLst/>
+          </a:prstGeom>
+          <a:solidFill>
+            <a:srgbClr val="D99A06"/>
+          </a:solidFill>
+          <a:ln>
+            <a:noFill/>
+          </a:ln>
+        </p:spPr>
+        <p:style>
+          <a:lnRef idx="1">
+            <a:schemeClr val="accent1"/>
+          </a:lnRef>
+          <a:fillRef idx="3">
+            <a:schemeClr val="accent1"/>
+          </a:fillRef>
+          <a:effectRef idx="2">
+            <a:schemeClr val="accent1"/>
+          </a:effectRef>
+          <a:fontRef idx="minor">
+            <a:schemeClr val="lt1"/>
+          </a:fontRef>
+        </p:style>
+        <p:txBody>
+          <a:bodyPr rtlCol="0" anchor="ctr"/>
+          <a:lstStyle/>
+          <a:p>
+            <a:pPr algn="ctr"/>
+          </a:p>
+        </p:txBody>
+      </p:sp>
+      <p:sp>
+        <p:nvSpPr>
+          <p:cNvPr id="13" name="Oval 12"/>
+          <p:cNvSpPr/>
+          <p:nvPr/>
+        </p:nvSpPr>
+        <p:spPr>
+          <a:xfrm>
+            <a:off x="6501384" y="1755648"/>
+            <a:ext cx="475488" cy="475488"/>
+          </a:xfrm>
+          <a:prstGeom prst="ellipse">
+            <a:avLst/>
+          </a:prstGeom>
+          <a:solidFill>
+            <a:srgbClr val="D99A06"/>
+          </a:solidFill>
+          <a:ln>
+            <a:noFill/>
+          </a:ln>
+        </p:spPr>
+        <p:style>
+          <a:lnRef idx="1">
+            <a:schemeClr val="accent1"/>
+          </a:lnRef>
+          <a:fillRef idx="3">
+            <a:schemeClr val="accent1"/>
+          </a:fillRef>
+          <a:effectRef idx="2">
+            <a:schemeClr val="accent1"/>
+          </a:effectRef>
+          <a:fontRef idx="minor">
+            <a:schemeClr val="lt1"/>
+          </a:fontRef>
+        </p:style>
+        <p:txBody>
+          <a:bodyPr rtlCol="0" anchor="ctr" wrap="square"/>
+          <a:lstStyle/>
+          <a:p>
+            <a:pPr algn="ctr"/>
+            <a:r>
+              <a:rPr sz="1700" b="1" i="0">
+                <a:solidFill>
+                  <a:srgbClr val="144E4C"/>
+                </a:solidFill>
+                <a:latin typeface="Calibri"/>
+              </a:rPr>
+              <a:t>✓</a:t>
+            </a:r>
+          </a:p>
+        </p:txBody>
+      </p:sp>
+      <p:sp>
+        <p:nvSpPr>
+          <p:cNvPr id="14" name="TextBox 13"/>
+          <p:cNvSpPr txBox="1"/>
+          <p:nvPr/>
+        </p:nvSpPr>
+        <p:spPr>
+          <a:xfrm>
+            <a:off x="7114032" y="1719072"/>
+            <a:ext cx="4343400" cy="2880360"/>
+          </a:xfrm>
+          <a:prstGeom prst="rect">
+            <a:avLst/>
+          </a:prstGeom>
+          <a:noFill/>
+        </p:spPr>
+        <p:txBody>
+          <a:bodyPr wrap="square">
+            <a:normAutofit/>
+          </a:bodyPr>
+          <a:lstStyle/>
+          <a:p>
+            <a:pPr algn="l">
+              <a:spcAft>
+                <a:spcPts val="600"/>
+              </a:spcAft>
+            </a:pPr>
+            <a:r>
+              <a:rPr sz="1200" b="1" i="0">
+                <a:solidFill>
+                  <a:srgbClr val="144E4C"/>
+                </a:solidFill>
+                <a:latin typeface="Calibri"/>
+              </a:rPr>
+              <a:t>Mitigations</a:t>
+            </a:r>
+          </a:p>
+          <a:p>
+            <a:pPr algn="l">
+              <a:spcBef>
+                <a:spcPts val="0"/>
+              </a:spcBef>
+              <a:spcAft>
+                <a:spcPts val="300"/>
+              </a:spcAft>
+            </a:pPr>
+            <a:r>
+              <a:rPr sz="1100" b="0" i="0">
+                <a:solidFill>
+                  <a:srgbClr val="5B6570"/>
+                </a:solidFill>
+                <a:latin typeface="Calibri"/>
+              </a:rPr>
+              <a:t>Checkpoint sync every 10 min during training so quota loss costs minutes, not hours.</a:t>
+            </a:r>
+          </a:p>
+          <a:p>
+            <a:pPr algn="l">
+              <a:spcBef>
+                <a:spcPts val="0"/>
+              </a:spcBef>
+              <a:spcAft>
+                <a:spcPts val="300"/>
+              </a:spcAft>
+            </a:pPr>
+            <a:r>
+              <a:rPr sz="1100" b="0" i="0">
+                <a:solidFill>
+                  <a:srgbClr val="5B6570"/>
+                </a:solidFill>
+                <a:latin typeface="Calibri"/>
+              </a:rPr>
+              <a:t>Paired dataset (defect counts + our Ds) is itself a contribution if factory declines.</a:t>
+            </a:r>
+          </a:p>
+          <a:p>
+            <a:pPr algn="l">
+              <a:spcBef>
+                <a:spcPts val="0"/>
+              </a:spcBef>
+              <a:spcAft>
+                <a:spcPts val="300"/>
+              </a:spcAft>
+            </a:pPr>
+            <a:r>
+              <a:rPr sz="1100" b="0" i="0">
+                <a:solidFill>
+                  <a:srgbClr val="5B6570"/>
+                </a:solidFill>
+                <a:latin typeface="Calibri"/>
+              </a:rPr>
+              <a:t>Visual review of lines batch in progress; interim: report as ‘suspicious’ in datasheet.</a:t>
+            </a:r>
+          </a:p>
+        </p:txBody>
+      </p:sp>
+    </p:spTree>
+  </p:cSld>
+  <p:clrMapOvr>
+    <a:masterClrMapping/>
+  </p:clrMapOvr>
+</p:sld>
+</file>
+
+<file path=ppt/slides/slide26.xml><?xml version="1.0" encoding="utf-8"?>
+<p:sld xmlns:a="http://schemas.openxmlformats.org/drawingml/2006/main" xmlns:p="http://schemas.openxmlformats.org/presentationml/2006/main" xmlns:r="http://schemas.openxmlformats.org/officeDocument/2006/relationships">
+  <p:cSld>
+    <p:bg>
+      <p:bgPr>
+        <a:solidFill>
+          <a:srgbClr val="FAF7EF"/>
+        </a:solidFill>
+        <a:effectLst/>
+      </p:bgPr>
+    </p:bg>
+    <p:spTree>
+      <p:nvGrpSpPr>
+        <p:cNvPr id="1" name=""/>
+        <p:cNvGrpSpPr/>
+        <p:nvPr/>
+      </p:nvGrpSpPr>
+      <p:grpSpPr/>
+      <p:sp>
+        <p:nvSpPr>
+          <p:cNvPr id="2" name="TextBox 1"/>
+          <p:cNvSpPr txBox="1"/>
+          <p:nvPr/>
+        </p:nvSpPr>
+        <p:spPr>
+          <a:xfrm>
+            <a:off x="548640" y="6419088"/>
+            <a:ext cx="9144000" cy="274320"/>
+          </a:xfrm>
+          <a:prstGeom prst="rect">
+            <a:avLst/>
+          </a:prstGeom>
+          <a:noFill/>
+        </p:spPr>
+        <p:txBody>
+          <a:bodyPr wrap="square">
+            <a:spAutoFit/>
+          </a:bodyPr>
+          <a:lstStyle/>
+          <a:p>
+            <a:pPr algn="l"/>
+            <a:r>
+              <a:rPr sz="900" b="0" i="0">
+                <a:solidFill>
+                  <a:srgbClr val="8A8F98"/>
+                </a:solidFill>
+                <a:latin typeface="Calibri"/>
+              </a:rPr>
+              <a:t>Defect-to-Delivery  |  FYDP-I  •  Group: 262-034</a:t>
+            </a:r>
+          </a:p>
+        </p:txBody>
+      </p:sp>
+      <p:sp>
+        <p:nvSpPr>
+          <p:cNvPr id="3" name="TextBox 2"/>
+          <p:cNvSpPr txBox="1"/>
+          <p:nvPr/>
+        </p:nvSpPr>
+        <p:spPr>
+          <a:xfrm>
+            <a:off x="10972800" y="6419088"/>
+            <a:ext cx="640080" cy="274320"/>
+          </a:xfrm>
+          <a:prstGeom prst="rect">
+            <a:avLst/>
+          </a:prstGeom>
+          <a:noFill/>
+        </p:spPr>
+        <p:txBody>
+          <a:bodyPr wrap="none">
+            <a:spAutoFit/>
+          </a:bodyPr>
+          <a:lstStyle/>
+          <a:p>
+            <a:pPr algn="r"/>
+            <a:r>
+              <a:rPr sz="900" b="0" i="0">
+                <a:solidFill>
+                  <a:srgbClr val="8A8F98"/>
+                </a:solidFill>
+                <a:latin typeface="Calibri"/>
+              </a:rPr>
+              <a:t>26 / 31</a:t>
+            </a:r>
+          </a:p>
+        </p:txBody>
+      </p:sp>
+      <p:sp>
+        <p:nvSpPr>
+          <p:cNvPr id="4" name="Rectangle 3"/>
+          <p:cNvSpPr/>
+          <p:nvPr/>
+        </p:nvSpPr>
+        <p:spPr>
+          <a:xfrm>
+            <a:off x="0" y="0"/>
+            <a:ext cx="12188952" cy="64008"/>
+          </a:xfrm>
+          <a:prstGeom prst="rect">
+            <a:avLst/>
+          </a:prstGeom>
+          <a:solidFill>
+            <a:srgbClr val="D99A06"/>
+          </a:solidFill>
+          <a:ln>
+            <a:noFill/>
+          </a:ln>
+        </p:spPr>
+        <p:style>
+          <a:lnRef idx="1">
+            <a:schemeClr val="accent1"/>
+          </a:lnRef>
+          <a:fillRef idx="3">
+            <a:schemeClr val="accent1"/>
+          </a:fillRef>
+          <a:effectRef idx="2">
+            <a:schemeClr val="accent1"/>
+          </a:effectRef>
+          <a:fontRef idx="minor">
+            <a:schemeClr val="lt1"/>
+          </a:fontRef>
+        </p:style>
+        <p:txBody>
+          <a:bodyPr rtlCol="0" anchor="ctr"/>
+          <a:lstStyle/>
+          <a:p>
+            <a:pPr algn="ctr"/>
+          </a:p>
+        </p:txBody>
+      </p:sp>
+      <p:sp>
+        <p:nvSpPr>
+          <p:cNvPr id="5" name="TextBox 4"/>
+          <p:cNvSpPr txBox="1"/>
+          <p:nvPr/>
+        </p:nvSpPr>
+        <p:spPr>
+          <a:xfrm>
+            <a:off x="548640" y="320040"/>
+            <a:ext cx="11064240" cy="822960"/>
+          </a:xfrm>
+          <a:prstGeom prst="rect">
+            <a:avLst/>
+          </a:prstGeom>
+          <a:noFill/>
+        </p:spPr>
+        <p:txBody>
+          <a:bodyPr wrap="square">
+            <a:spAutoFit/>
+          </a:bodyPr>
+          <a:lstStyle/>
+          <a:p>
+            <a:pPr algn="l"/>
+            <a:r>
+              <a:rPr sz="3400" b="1" i="0">
+                <a:solidFill>
+                  <a:srgbClr val="144E4C"/>
+                </a:solidFill>
+                <a:latin typeface="Georgia"/>
+              </a:rPr>
+              <a:t>Project Plan (Fig. 5.1)</a:t>
             </a:r>
           </a:p>
         </p:txBody>
@@ -19604,7 +20822,7 @@
 </p:sld>
 </file>
 
-<file path=ppt/slides/slide25.xml><?xml version="1.0" encoding="utf-8"?>
+<file path=ppt/slides/slide27.xml><?xml version="1.0" encoding="utf-8"?>
 <p:sld xmlns:a="http://schemas.openxmlformats.org/drawingml/2006/main" xmlns:p="http://schemas.openxmlformats.org/presentationml/2006/main" xmlns:r="http://schemas.openxmlformats.org/officeDocument/2006/relationships">
   <p:cSld>
     <p:bg>
@@ -19687,7 +20905,7 @@
                 </a:solidFill>
                 <a:latin typeface="Calibri"/>
               </a:rPr>
-              <a:t>25 / 27</a:t>
+              <a:t>27 / 31</a:t>
             </a:r>
           </a:p>
         </p:txBody>
@@ -20183,7 +21401,7 @@
 </p:sld>
 </file>
 
-<file path=ppt/slides/slide26.xml><?xml version="1.0" encoding="utf-8"?>
+<file path=ppt/slides/slide28.xml><?xml version="1.0" encoding="utf-8"?>
 <p:sld xmlns:a="http://schemas.openxmlformats.org/drawingml/2006/main" xmlns:p="http://schemas.openxmlformats.org/presentationml/2006/main" xmlns:r="http://schemas.openxmlformats.org/officeDocument/2006/relationships">
   <p:cSld>
     <p:bg>
@@ -20266,7 +21484,7 @@
                 </a:solidFill>
                 <a:latin typeface="Calibri"/>
               </a:rPr>
-              <a:t>26 / 27</a:t>
+              <a:t>28 / 31</a:t>
             </a:r>
           </a:p>
         </p:txBody>
@@ -20525,7 +21743,7 @@
             <a:r>
               <a:rPr sz="1700" b="1" i="0">
                 <a:solidFill>
-                  <a:srgbClr val="FFFFFF"/>
+                  <a:srgbClr val="144E4C"/>
                 </a:solidFill>
                 <a:latin typeface="Calibri"/>
               </a:rPr>
@@ -20763,7 +21981,7 @@
             <a:r>
               <a:rPr sz="1700" b="1" i="0">
                 <a:solidFill>
-                  <a:srgbClr val="FFFFFF"/>
+                  <a:srgbClr val="144E4C"/>
                 </a:solidFill>
                 <a:latin typeface="Calibri"/>
               </a:rPr>
@@ -20949,7 +22167,7 @@
 </p:sld>
 </file>
 
-<file path=ppt/slides/slide27.xml><?xml version="1.0" encoding="utf-8"?>
+<file path=ppt/slides/slide29.xml><?xml version="1.0" encoding="utf-8"?>
 <p:sld xmlns:a="http://schemas.openxmlformats.org/drawingml/2006/main" xmlns:p="http://schemas.openxmlformats.org/presentationml/2006/main" xmlns:r="http://schemas.openxmlformats.org/officeDocument/2006/relationships">
   <p:cSld>
     <p:bg>
@@ -21032,7 +22250,7 @@
                 </a:solidFill>
                 <a:latin typeface="Calibri"/>
               </a:rPr>
-              <a:t>27 / 27</a:t>
+              <a:t>29 / 31</a:t>
             </a:r>
           </a:p>
         </p:txBody>
@@ -21276,7 +22494,7 @@
                 </a:solidFill>
                 <a:latin typeface="Calibri"/>
               </a:rPr>
-              <a:t>3 / 27</a:t>
+              <a:t>3 / 31</a:t>
             </a:r>
           </a:p>
         </p:txBody>
@@ -21649,7 +22867,7 @@
                 </a:solidFill>
                 <a:latin typeface="Calibri"/>
               </a:rPr>
-              <a:t>Requirement Analysis</a:t>
+              <a:t>Requirement Analysis &amp; Dataset Audit</a:t>
             </a:r>
           </a:p>
         </p:txBody>
@@ -21712,7 +22930,7 @@
                 </a:solidFill>
                 <a:latin typeface="Calibri"/>
               </a:rPr>
-              <a:t>Dataset Audit</a:t>
+              <a:t>System Design &amp; Diagrams</a:t>
             </a:r>
           </a:p>
         </p:txBody>
@@ -21775,7 +22993,7 @@
                 </a:solidFill>
                 <a:latin typeface="Calibri"/>
               </a:rPr>
-              <a:t>System Design &amp; Diagrams</a:t>
+              <a:t>Standards, Constraints, Budget &amp; Plan</a:t>
             </a:r>
           </a:p>
         </p:txBody>
@@ -21830,132 +23048,6 @@
                 <a:latin typeface="Calibri"/>
               </a:rPr>
               <a:t>7.  </a:t>
-            </a:r>
-            <a:r>
-              <a:rPr sz="1600" b="1">
-                <a:solidFill>
-                  <a:srgbClr val="144E4C"/>
-                </a:solidFill>
-                <a:latin typeface="Calibri"/>
-              </a:rPr>
-              <a:t>Standards &amp; Constraints</a:t>
-            </a:r>
-          </a:p>
-        </p:txBody>
-      </p:sp>
-      <p:sp>
-        <p:nvSpPr>
-          <p:cNvPr id="14" name="Rounded Rectangle 13"/>
-          <p:cNvSpPr/>
-          <p:nvPr/>
-        </p:nvSpPr>
-        <p:spPr>
-          <a:xfrm>
-            <a:off x="4526280" y="4572000"/>
-            <a:ext cx="3383280" cy="1005840"/>
-          </a:xfrm>
-          <a:prstGeom prst="roundRect">
-            <a:avLst/>
-          </a:prstGeom>
-          <a:solidFill>
-            <a:srgbClr val="FFFFFF"/>
-          </a:solidFill>
-          <a:ln w="15875">
-            <a:solidFill>
-              <a:srgbClr val="D8D2C2"/>
-            </a:solidFill>
-          </a:ln>
-        </p:spPr>
-        <p:style>
-          <a:lnRef idx="1">
-            <a:schemeClr val="accent1"/>
-          </a:lnRef>
-          <a:fillRef idx="3">
-            <a:schemeClr val="accent1"/>
-          </a:fillRef>
-          <a:effectRef idx="2">
-            <a:schemeClr val="accent1"/>
-          </a:effectRef>
-          <a:fontRef idx="minor">
-            <a:schemeClr val="lt1"/>
-          </a:fontRef>
-        </p:style>
-        <p:txBody>
-          <a:bodyPr rtlCol="0" anchor="ctr" wrap="square"/>
-          <a:lstStyle/>
-          <a:p>
-            <a:pPr algn="ctr"/>
-            <a:r>
-              <a:rPr sz="1600" b="1" i="0">
-                <a:solidFill>
-                  <a:srgbClr val="8A6204"/>
-                </a:solidFill>
-                <a:latin typeface="Calibri"/>
-              </a:rPr>
-              <a:t>8.  </a:t>
-            </a:r>
-            <a:r>
-              <a:rPr sz="1600" b="1">
-                <a:solidFill>
-                  <a:srgbClr val="144E4C"/>
-                </a:solidFill>
-                <a:latin typeface="Calibri"/>
-              </a:rPr>
-              <a:t>Budget &amp; Project Plan</a:t>
-            </a:r>
-          </a:p>
-        </p:txBody>
-      </p:sp>
-      <p:sp>
-        <p:nvSpPr>
-          <p:cNvPr id="15" name="Rounded Rectangle 14"/>
-          <p:cNvSpPr/>
-          <p:nvPr/>
-        </p:nvSpPr>
-        <p:spPr>
-          <a:xfrm>
-            <a:off x="8229600" y="4572000"/>
-            <a:ext cx="3383280" cy="1005840"/>
-          </a:xfrm>
-          <a:prstGeom prst="roundRect">
-            <a:avLst/>
-          </a:prstGeom>
-          <a:solidFill>
-            <a:srgbClr val="FFFFFF"/>
-          </a:solidFill>
-          <a:ln w="15875">
-            <a:solidFill>
-              <a:srgbClr val="D8D2C2"/>
-            </a:solidFill>
-          </a:ln>
-        </p:spPr>
-        <p:style>
-          <a:lnRef idx="1">
-            <a:schemeClr val="accent1"/>
-          </a:lnRef>
-          <a:fillRef idx="3">
-            <a:schemeClr val="accent1"/>
-          </a:fillRef>
-          <a:effectRef idx="2">
-            <a:schemeClr val="accent1"/>
-          </a:effectRef>
-          <a:fontRef idx="minor">
-            <a:schemeClr val="lt1"/>
-          </a:fontRef>
-        </p:style>
-        <p:txBody>
-          <a:bodyPr rtlCol="0" anchor="ctr" wrap="square"/>
-          <a:lstStyle/>
-          <a:p>
-            <a:pPr algn="ctr"/>
-            <a:r>
-              <a:rPr sz="1600" b="1" i="0">
-                <a:solidFill>
-                  <a:srgbClr val="8A6204"/>
-                </a:solidFill>
-                <a:latin typeface="Calibri"/>
-              </a:rPr>
-              <a:t>9.  </a:t>
             </a:r>
             <a:r>
               <a:rPr sz="1600" b="1">
@@ -22060,7 +23152,7 @@
                 </a:solidFill>
                 <a:latin typeface="Calibri"/>
               </a:rPr>
-              <a:t>4 / 27</a:t>
+              <a:t>4 / 31</a:t>
             </a:r>
           </a:p>
         </p:txBody>
@@ -22430,7 +23522,7 @@
                 </a:solidFill>
                 <a:latin typeface="Calibri"/>
               </a:rPr>
-              <a:t>5 / 27</a:t>
+              <a:t>5 / 31</a:t>
             </a:r>
           </a:p>
         </p:txBody>
@@ -22650,7 +23742,7 @@
                 </a:solidFill>
                 <a:latin typeface="Calibri"/>
               </a:rPr>
-              <a:t>▪  A Prior Split Reached 98% Accuracy — We Treat That As An Upper Bound To Be Re-Tested Honestly, Not A Final Result.</a:t>
+              <a:t>▪  A Prior Split Reached 98% Accuracy — Honestly Re-Tested At 93.7–94.0% (See Pilot Result); The 98% Is An Upper Bound, Not A Result.</a:t>
             </a:r>
           </a:p>
         </p:txBody>
@@ -22746,7 +23838,7 @@
                 </a:solidFill>
                 <a:latin typeface="Calibri"/>
               </a:rPr>
-              <a:t>6 / 27</a:t>
+              <a:t>6 / 31</a:t>
             </a:r>
           </a:p>
         </p:txBody>
@@ -23433,7 +24525,7 @@
                 </a:solidFill>
                 <a:latin typeface="Calibri"/>
               </a:rPr>
-              <a:t>7 / 27</a:t>
+              <a:t>7 / 31</a:t>
             </a:r>
           </a:p>
         </p:txBody>
@@ -23692,7 +24784,7 @@
             <a:r>
               <a:rPr sz="1700" b="1" i="0">
                 <a:solidFill>
-                  <a:srgbClr val="FFFFFF"/>
+                  <a:srgbClr val="144E4C"/>
                 </a:solidFill>
                 <a:latin typeface="Calibri"/>
               </a:rPr>
@@ -23892,7 +24984,7 @@
             <a:r>
               <a:rPr sz="1700" b="1" i="0">
                 <a:solidFill>
-                  <a:srgbClr val="FFFFFF"/>
+                  <a:srgbClr val="144E4C"/>
                 </a:solidFill>
                 <a:latin typeface="Calibri"/>
               </a:rPr>
@@ -24092,7 +25184,7 @@
             <a:r>
               <a:rPr sz="1700" b="1" i="0">
                 <a:solidFill>
-                  <a:srgbClr val="FFFFFF"/>
+                  <a:srgbClr val="144E4C"/>
                 </a:solidFill>
                 <a:latin typeface="Calibri"/>
               </a:rPr>
@@ -24292,7 +25384,7 @@
             <a:r>
               <a:rPr sz="1700" b="1" i="0">
                 <a:solidFill>
-                  <a:srgbClr val="FFFFFF"/>
+                  <a:srgbClr val="144E4C"/>
                 </a:solidFill>
                 <a:latin typeface="Calibri"/>
               </a:rPr>
@@ -24492,7 +25584,7 @@
             <a:r>
               <a:rPr sz="1700" b="1" i="0">
                 <a:solidFill>
-                  <a:srgbClr val="FFFFFF"/>
+                  <a:srgbClr val="144E4C"/>
                 </a:solidFill>
                 <a:latin typeface="Calibri"/>
               </a:rPr>
@@ -24692,7 +25784,7 @@
             <a:r>
               <a:rPr sz="1700" b="1" i="0">
                 <a:solidFill>
-                  <a:srgbClr val="FFFFFF"/>
+                  <a:srgbClr val="144E4C"/>
                 </a:solidFill>
                 <a:latin typeface="Calibri"/>
               </a:rPr>
@@ -24850,7 +25942,7 @@
                 </a:solidFill>
                 <a:latin typeface="Calibri"/>
               </a:rPr>
-              <a:t>8 / 27</a:t>
+              <a:t>8 / 31</a:t>
             </a:r>
           </a:p>
         </p:txBody>
@@ -25591,7 +26683,7 @@
                 </a:solidFill>
                 <a:latin typeface="Calibri"/>
               </a:rPr>
-              <a:t>9 / 27</a:t>
+              <a:t>9 / 31</a:t>
             </a:r>
           </a:p>
         </p:txBody>

--- a/slides/FYDP-I_Defect-to-Delivery.pptx
+++ b/slides/FYDP-I_Defect-to-Delivery.pptx
@@ -5150,16 +5150,85 @@
           </a:p>
         </p:txBody>
       </p:sp>
+      <p:sp>
+        <p:nvSpPr>
+          <p:cNvPr id="5" name="TextBox 4"/>
+          <p:cNvSpPr txBox="1"/>
+          <p:nvPr/>
+        </p:nvSpPr>
+        <p:spPr>
+          <a:xfrm>
+            <a:off x="548640" y="6419088"/>
+            <a:ext cx="9144000" cy="274320"/>
+          </a:xfrm>
+          <a:prstGeom prst="rect">
+            <a:avLst/>
+          </a:prstGeom>
+          <a:noFill/>
+        </p:spPr>
+        <p:txBody>
+          <a:bodyPr wrap="none">
+            <a:spAutoFit/>
+          </a:bodyPr>
+          <a:lstStyle/>
+          <a:p>
+            <a:r>
+              <a:rPr sz="900">
+                <a:solidFill>
+                  <a:srgbClr val="8A8F98"/>
+                </a:solidFill>
+                <a:latin typeface="Calibri"/>
+              </a:rPr>
+              <a:t>Defect-to-Delivery  |  FYDP-I  •  Group: 262-034</a:t>
+            </a:r>
+          </a:p>
+        </p:txBody>
+      </p:sp>
+      <p:sp>
+        <p:nvSpPr>
+          <p:cNvPr id="6" name="TextBox 5"/>
+          <p:cNvSpPr txBox="1"/>
+          <p:nvPr/>
+        </p:nvSpPr>
+        <p:spPr>
+          <a:xfrm>
+            <a:off x="10972800" y="6419088"/>
+            <a:ext cx="640080" cy="274320"/>
+          </a:xfrm>
+          <a:prstGeom prst="rect">
+            <a:avLst/>
+          </a:prstGeom>
+          <a:noFill/>
+        </p:spPr>
+        <p:txBody>
+          <a:bodyPr wrap="none">
+            <a:spAutoFit/>
+          </a:bodyPr>
+          <a:lstStyle/>
+          <a:p>
+            <a:pPr algn="r"/>
+            <a:r>
+              <a:rPr sz="900">
+                <a:solidFill>
+                  <a:srgbClr val="8A8F98"/>
+                </a:solidFill>
+                <a:latin typeface="Calibri"/>
+              </a:rPr>
+              <a:t>11 / 30</a:t>
+            </a:r>
+          </a:p>
+        </p:txBody>
+      </p:sp>
       <p:pic>
         <p:nvPicPr>
-          <p:cNvPr id="4" name="Picture 3" descr="taxonomy.png"/>
+          <p:cNvPr id="7" name="Picture 6" descr="taxonomy.png"/>
           <p:cNvPicPr>
             <a:picLocks noChangeAspect="1"/>
           </p:cNvPicPr>
           <p:nvPr/>
         </p:nvPicPr>
         <p:blipFill>
-          <a:blip r:embed="rId2"/>
+          <a:blip r:embed="rId3"/>
           <a:stretch>
             <a:fillRect/>
           </a:stretch>
@@ -5167,82 +5236,13 @@
         <p:spPr>
           <a:xfrm>
             <a:off x="868680" y="1234440"/>
-            <a:ext cx="10424160" cy="5832065"/>
+            <a:ext cx="10424160" cy="3911016"/>
           </a:xfrm>
           <a:prstGeom prst="rect">
             <a:avLst/>
           </a:prstGeom>
         </p:spPr>
       </p:pic>
-      <p:sp>
-        <p:nvSpPr>
-          <p:cNvPr id="5" name="TextBox 4"/>
-          <p:cNvSpPr txBox="1"/>
-          <p:nvPr/>
-        </p:nvSpPr>
-        <p:spPr>
-          <a:xfrm>
-            <a:off x="548640" y="6419088"/>
-            <a:ext cx="9144000" cy="274320"/>
-          </a:xfrm>
-          <a:prstGeom prst="rect">
-            <a:avLst/>
-          </a:prstGeom>
-          <a:noFill/>
-        </p:spPr>
-        <p:txBody>
-          <a:bodyPr wrap="none">
-            <a:spAutoFit/>
-          </a:bodyPr>
-          <a:lstStyle/>
-          <a:p>
-            <a:r>
-              <a:rPr sz="900">
-                <a:solidFill>
-                  <a:srgbClr val="8A8F98"/>
-                </a:solidFill>
-                <a:latin typeface="Calibri"/>
-              </a:rPr>
-              <a:t>Defect-to-Delivery  |  FYDP-I  •  Group: 262-034</a:t>
-            </a:r>
-          </a:p>
-        </p:txBody>
-      </p:sp>
-      <p:sp>
-        <p:nvSpPr>
-          <p:cNvPr id="6" name="TextBox 5"/>
-          <p:cNvSpPr txBox="1"/>
-          <p:nvPr/>
-        </p:nvSpPr>
-        <p:spPr>
-          <a:xfrm>
-            <a:off x="10972800" y="6419088"/>
-            <a:ext cx="640080" cy="274320"/>
-          </a:xfrm>
-          <a:prstGeom prst="rect">
-            <a:avLst/>
-          </a:prstGeom>
-          <a:noFill/>
-        </p:spPr>
-        <p:txBody>
-          <a:bodyPr wrap="none">
-            <a:spAutoFit/>
-          </a:bodyPr>
-          <a:lstStyle/>
-          <a:p>
-            <a:pPr algn="r"/>
-            <a:r>
-              <a:rPr sz="900">
-                <a:solidFill>
-                  <a:srgbClr val="8A8F98"/>
-                </a:solidFill>
-                <a:latin typeface="Calibri"/>
-              </a:rPr>
-              <a:t>11 / 30</a:t>
-            </a:r>
-          </a:p>
-        </p:txBody>
-      </p:sp>
     </p:spTree>
   </p:cSld>
   <p:clrMapOvr>

--- a/slides/FYDP-I_Defect-to-Delivery.pptx
+++ b/slides/FYDP-I_Defect-to-Delivery.pptx
@@ -31,6 +31,7 @@
     <p:sldId id="277" r:id="rId28"/>
     <p:sldId id="278" r:id="rId29"/>
     <p:sldId id="279" r:id="rId30"/>
+    <p:sldId id="286" r:id="rId37"/>
     <p:sldId id="280" r:id="rId31"/>
     <p:sldId id="282" r:id="rId33"/>
     <p:sldId id="283" r:id="rId34"/>
@@ -3190,7 +3191,7 @@
                 </a:solidFill>
                 <a:latin typeface="Calibri"/>
               </a:rPr>
-              <a:t>1 / 30</a:t>
+              <a:t>1 / 31</a:t>
             </a:r>
           </a:p>
         </p:txBody>
@@ -3338,7 +3339,7 @@
                 </a:solidFill>
                 <a:latin typeface="Calibri"/>
               </a:rPr>
-              <a:t>A Closed-Loop Vision &amp; Machine-Learning System For Fabric Defect Detection And Production Lead-Time Prediction</a:t>
+              <a:t>Fabric Defect Detection and Leadtime Prediction</a:t>
             </a:r>
           </a:p>
         </p:txBody>
@@ -3506,7 +3507,7 @@
                 </a:solidFill>
                 <a:latin typeface="Calibri"/>
               </a:rPr>
-              <a:t>10 / 30</a:t>
+              <a:t>10 / 31</a:t>
             </a:r>
           </a:p>
         </p:txBody>
@@ -3584,7 +3585,7 @@
                 </a:solidFill>
                 <a:latin typeface="Georgia"/>
               </a:rPr>
-              <a:t>Literature Analysis (Selected)</a:t>
+              <a:t>Literature Analysis (Table 2.1, Selected)</a:t>
             </a:r>
           </a:p>
         </p:txBody>
@@ -5214,7 +5215,7 @@
                 </a:solidFill>
                 <a:latin typeface="Calibri"/>
               </a:rPr>
-              <a:t>11 / 30</a:t>
+              <a:t>11 / 31</a:t>
             </a:r>
           </a:p>
         </p:txBody>
@@ -5334,7 +5335,7 @@
                 </a:solidFill>
                 <a:latin typeface="Calibri"/>
               </a:rPr>
-              <a:t>12 / 30</a:t>
+              <a:t>12 / 31</a:t>
             </a:r>
           </a:p>
         </p:txBody>
@@ -6382,13 +6383,12 @@
                 <a:tableStyleId>{5C22544A-7EE6-4342-B048-85BDC9FD1C3A}</a:tableStyleId>
               </a:tblPr>
               <a:tblGrid>
-                <a:gridCol w="1580605"/>
-                <a:gridCol w="1580605"/>
-                <a:gridCol w="1580605"/>
-                <a:gridCol w="1580605"/>
-                <a:gridCol w="1580605"/>
-                <a:gridCol w="1580605"/>
-                <a:gridCol w="1580610"/>
+                <a:gridCol w="1844040"/>
+                <a:gridCol w="1844040"/>
+                <a:gridCol w="1844040"/>
+                <a:gridCol w="1844040"/>
+                <a:gridCol w="1844040"/>
+                <a:gridCol w="1844040"/>
               </a:tblGrid>
               <a:tr h="384048">
                 <a:tc>
@@ -6428,29 +6428,6 @@
                           <a:latin typeface="Calibri"/>
                         </a:rPr>
                         <a:t>Ours</a:t>
-                      </a:r>
-                    </a:p>
-                  </a:txBody>
-                  <a:tcPr anchor="ctr">
-                    <a:solidFill>
-                      <a:srgbClr val="144E7D"/>
-                    </a:solidFill>
-                  </a:tcPr>
-                </a:tc>
-                <a:tc>
-                  <a:txBody>
-                    <a:bodyPr/>
-                    <a:lstStyle/>
-                    <a:p>
-                      <a:pPr algn="ctr"/>
-                      <a:r>
-                        <a:rPr sz="1100" b="1">
-                          <a:solidFill>
-                            <a:srgbClr val="FFFFFF"/>
-                          </a:solidFill>
-                          <a:latin typeface="Calibri"/>
-                        </a:rPr>
-                        <a:t>Kotha</a:t>
                       </a:r>
                     </a:p>
                   </a:txBody>
@@ -6636,29 +6613,6 @@
                           </a:solidFill>
                           <a:latin typeface="Calibri"/>
                         </a:rPr>
-                        <a:t>✓</a:t>
-                      </a:r>
-                    </a:p>
-                  </a:txBody>
-                  <a:tcPr anchor="ctr">
-                    <a:solidFill>
-                      <a:srgbClr val="FFFFFF"/>
-                    </a:solidFill>
-                  </a:tcPr>
-                </a:tc>
-                <a:tc>
-                  <a:txBody>
-                    <a:bodyPr/>
-                    <a:lstStyle/>
-                    <a:p>
-                      <a:pPr algn="ctr"/>
-                      <a:r>
-                        <a:rPr sz="1100">
-                          <a:solidFill>
-                            <a:srgbClr val="144E7D"/>
-                          </a:solidFill>
-                          <a:latin typeface="Calibri"/>
-                        </a:rPr>
                         <a:t>—</a:t>
                       </a:r>
                     </a:p>
@@ -6776,30 +6730,7 @@
                           </a:solidFill>
                           <a:latin typeface="Calibri"/>
                         </a:rPr>
-                        <a:t>—</a:t>
-                      </a:r>
-                    </a:p>
-                  </a:txBody>
-                  <a:tcPr anchor="ctr">
-                    <a:solidFill>
-                      <a:srgbClr val="FAE7EF"/>
-                    </a:solidFill>
-                  </a:tcPr>
-                </a:tc>
-                <a:tc>
-                  <a:txBody>
-                    <a:bodyPr/>
-                    <a:lstStyle/>
-                    <a:p>
-                      <a:pPr algn="ctr"/>
-                      <a:r>
-                        <a:rPr sz="1100">
-                          <a:solidFill>
-                            <a:srgbClr val="144E7D"/>
-                          </a:solidFill>
-                          <a:latin typeface="Calibri"/>
-                        </a:rPr>
-                        <a:t>—</a:t>
+                        <a:t>✓</a:t>
                       </a:r>
                     </a:p>
                   </a:txBody>
@@ -6917,29 +6848,6 @@
                           <a:latin typeface="Calibri"/>
                         </a:rPr>
                         <a:t>✓</a:t>
-                      </a:r>
-                    </a:p>
-                  </a:txBody>
-                  <a:tcPr anchor="ctr">
-                    <a:solidFill>
-                      <a:srgbClr val="FFFFFF"/>
-                    </a:solidFill>
-                  </a:tcPr>
-                </a:tc>
-                <a:tc>
-                  <a:txBody>
-                    <a:bodyPr/>
-                    <a:lstStyle/>
-                    <a:p>
-                      <a:pPr algn="ctr"/>
-                      <a:r>
-                        <a:rPr sz="1100">
-                          <a:solidFill>
-                            <a:srgbClr val="144E7D"/>
-                          </a:solidFill>
-                          <a:latin typeface="Calibri"/>
-                        </a:rPr>
-                        <a:t>—</a:t>
                       </a:r>
                     </a:p>
                   </a:txBody>
@@ -7171,29 +7079,6 @@
                           </a:solidFill>
                           <a:latin typeface="Calibri"/>
                         </a:rPr>
-                        <a:t>—</a:t>
-                      </a:r>
-                    </a:p>
-                  </a:txBody>
-                  <a:tcPr anchor="ctr">
-                    <a:solidFill>
-                      <a:srgbClr val="FAE7EF"/>
-                    </a:solidFill>
-                  </a:tcPr>
-                </a:tc>
-                <a:tc>
-                  <a:txBody>
-                    <a:bodyPr/>
-                    <a:lstStyle/>
-                    <a:p>
-                      <a:pPr algn="ctr"/>
-                      <a:r>
-                        <a:rPr sz="1100">
-                          <a:solidFill>
-                            <a:srgbClr val="144E7D"/>
-                          </a:solidFill>
-                          <a:latin typeface="Calibri"/>
-                        </a:rPr>
                         <a:t>0.937→0.940</a:t>
                       </a:r>
                     </a:p>
@@ -7266,29 +7151,6 @@
                           <a:latin typeface="Calibri"/>
                         </a:rPr>
                         <a:t>—</a:t>
-                      </a:r>
-                    </a:p>
-                  </a:txBody>
-                  <a:tcPr anchor="ctr">
-                    <a:solidFill>
-                      <a:srgbClr val="FFFFFF"/>
-                    </a:solidFill>
-                  </a:tcPr>
-                </a:tc>
-                <a:tc>
-                  <a:txBody>
-                    <a:bodyPr/>
-                    <a:lstStyle/>
-                    <a:p>
-                      <a:pPr algn="ctr"/>
-                      <a:r>
-                        <a:rPr sz="1100">
-                          <a:solidFill>
-                            <a:srgbClr val="144E7D"/>
-                          </a:solidFill>
-                          <a:latin typeface="Calibri"/>
-                        </a:rPr>
-                        <a:t>✓</a:t>
                       </a:r>
                     </a:p>
                   </a:txBody>
@@ -7406,29 +7268,6 @@
                           <a:latin typeface="Calibri"/>
                         </a:rPr>
                         <a:t>—</a:t>
-                      </a:r>
-                    </a:p>
-                  </a:txBody>
-                  <a:tcPr anchor="ctr">
-                    <a:solidFill>
-                      <a:srgbClr val="FAE7EF"/>
-                    </a:solidFill>
-                  </a:tcPr>
-                </a:tc>
-                <a:tc>
-                  <a:txBody>
-                    <a:bodyPr/>
-                    <a:lstStyle/>
-                    <a:p>
-                      <a:pPr algn="ctr"/>
-                      <a:r>
-                        <a:rPr sz="1100">
-                          <a:solidFill>
-                            <a:srgbClr val="144E7D"/>
-                          </a:solidFill>
-                          <a:latin typeface="Calibri"/>
-                        </a:rPr>
-                        <a:t>✓</a:t>
                       </a:r>
                     </a:p>
                   </a:txBody>
@@ -7660,29 +7499,6 @@
                           </a:solidFill>
                           <a:latin typeface="Calibri"/>
                         </a:rPr>
-                        <a:t>—</a:t>
-                      </a:r>
-                    </a:p>
-                  </a:txBody>
-                  <a:tcPr anchor="ctr">
-                    <a:solidFill>
-                      <a:srgbClr val="FFFFFF"/>
-                    </a:solidFill>
-                  </a:tcPr>
-                </a:tc>
-                <a:tc>
-                  <a:txBody>
-                    <a:bodyPr/>
-                    <a:lstStyle/>
-                    <a:p>
-                      <a:pPr algn="ctr"/>
-                      <a:r>
-                        <a:rPr sz="1100">
-                          <a:solidFill>
-                            <a:srgbClr val="144E7D"/>
-                          </a:solidFill>
-                          <a:latin typeface="Calibri"/>
-                        </a:rPr>
                         <a:t>Explicit</a:t>
                       </a:r>
                     </a:p>
@@ -7762,7 +7578,7 @@
                 </a:solidFill>
                 <a:latin typeface="Calibri"/>
               </a:rPr>
-              <a:t>13 / 30</a:t>
+              <a:t>13 / 31</a:t>
             </a:r>
           </a:p>
         </p:txBody>
@@ -7858,7 +7674,7 @@
                 </a:solidFill>
                 <a:latin typeface="Calibri"/>
               </a:rPr>
-              <a:t>14 / 30</a:t>
+              <a:t>14 / 31</a:t>
             </a:r>
           </a:p>
         </p:txBody>
@@ -8139,7 +7955,7 @@
                 </a:solidFill>
                 <a:latin typeface="Calibri"/>
               </a:rPr>
-              <a:t>▪  Six Pipeline Function Groups From Image Input To Dashboard Display, Plus Six Quality Attributes With Measurable Targets (≥15 FPS, mAP Tracking, Zero-Overlap Splits).</a:t>
+              <a:t>▪  Table 3.1 Coverage Grouped Into FR1–FR6 And NFR1–NFR6 (See Report §3.1); Grading Per §3.2.8.</a:t>
             </a:r>
           </a:p>
         </p:txBody>
@@ -8235,7 +8051,7 @@
                 </a:solidFill>
                 <a:latin typeface="Calibri"/>
               </a:rPr>
-              <a:t>15 / 30</a:t>
+              <a:t>15 / 31</a:t>
             </a:r>
           </a:p>
         </p:txBody>
@@ -8313,7 +8129,7 @@
                 </a:solidFill>
                 <a:latin typeface="Georgia"/>
               </a:rPr>
-              <a:t>Dataset: Classes &amp; Audited Composition</a:t>
+              <a:t>Dataset: Classes &amp; Audited Composition (Tables 3.2, 3.3)</a:t>
             </a:r>
           </a:p>
         </p:txBody>
@@ -8682,7 +8498,7 @@
                           </a:solidFill>
                           <a:latin typeface="Calibri"/>
                         </a:rPr>
-                        <a:t>Lines</a:t>
+                        <a:t>Line</a:t>
                       </a:r>
                     </a:p>
                   </a:txBody>
@@ -9219,7 +9035,7 @@
                 </a:solidFill>
                 <a:latin typeface="Calibri"/>
               </a:rPr>
-              <a:t>16 / 30</a:t>
+              <a:t>16 / 31</a:t>
             </a:r>
           </a:p>
         </p:txBody>
@@ -9521,7 +9337,7 @@
                 </a:solidFill>
                 <a:latin typeface="Calibri"/>
               </a:rPr>
-              <a:t>Quarantine Ledger (Table 3.3)</a:t>
+              <a:t>Quarantine Ledger (Table 3.4)</a:t>
             </a:r>
           </a:p>
           <a:p>
@@ -9759,7 +9575,7 @@
                 </a:solidFill>
                 <a:latin typeface="Calibri"/>
               </a:rPr>
-              <a:t>Group-Aware Split (Table 3.4)</a:t>
+              <a:t>Group-Aware Split (Table 3.5)</a:t>
             </a:r>
           </a:p>
           <a:p>
@@ -9950,7 +9766,7 @@
                 </a:solidFill>
                 <a:latin typeface="Calibri"/>
               </a:rPr>
-              <a:t>17 / 30</a:t>
+              <a:t>17 / 31</a:t>
             </a:r>
           </a:p>
         </p:txBody>
@@ -10285,7 +10101,7 @@
                 </a:solidFill>
                 <a:latin typeface="Calibri"/>
               </a:rPr>
-              <a:t>18 / 30</a:t>
+              <a:t>18 / 31</a:t>
             </a:r>
           </a:p>
         </p:txBody>
@@ -10363,7 +10179,7 @@
                 </a:solidFill>
                 <a:latin typeface="Georgia"/>
               </a:rPr>
-              <a:t>System Diagram (Fig. 3.1)</a:t>
+              <a:t>Proposed System Diagram (Fig. 3.2)</a:t>
             </a:r>
           </a:p>
         </p:txBody>
@@ -11221,7 +11037,7 @@
                 </a:solidFill>
                 <a:latin typeface="Calibri"/>
               </a:rPr>
-              <a:t>19 / 30</a:t>
+              <a:t>19 / 31</a:t>
             </a:r>
           </a:p>
         </p:txBody>
@@ -11299,7 +11115,7 @@
                 </a:solidFill>
                 <a:latin typeface="Georgia"/>
               </a:rPr>
-              <a:t>Workflow Flowchart (Fig. 3.2)</a:t>
+              <a:t>System Workflow (Fig. 3.5)</a:t>
             </a:r>
           </a:p>
         </p:txBody>
@@ -12160,7 +11976,7 @@
                 </a:solidFill>
                 <a:latin typeface="Calibri"/>
               </a:rPr>
-              <a:t>2 / 30</a:t>
+              <a:t>2 / 31</a:t>
             </a:r>
           </a:p>
         </p:txBody>
@@ -13157,7 +12973,7 @@
                 </a:solidFill>
                 <a:latin typeface="Calibri"/>
               </a:rPr>
-              <a:t>Literature Review &amp; Gap Analysis</a:t>
+              <a:t>Literature &amp; Gap Analysis</a:t>
             </a:r>
           </a:p>
         </p:txBody>
@@ -13557,7 +13373,7 @@
                 </a:solidFill>
                 <a:latin typeface="Calibri"/>
               </a:rPr>
-              <a:t>Mohammed Amin</a:t>
+              <a:t>Mohammad Amin</a:t>
             </a:r>
           </a:p>
           <a:p>
@@ -13995,7 +13811,7 @@
                 </a:solidFill>
                 <a:latin typeface="Calibri"/>
               </a:rPr>
-              <a:t>Md. Mostafizur Rahman Murad</a:t>
+              <a:t>Mustafizur Rahman Murad</a:t>
             </a:r>
           </a:p>
           <a:p>
@@ -14129,7 +13945,7 @@
                 </a:solidFill>
                 <a:latin typeface="Calibri"/>
               </a:rPr>
-              <a:t>20 / 30</a:t>
+              <a:t>20 / 31</a:t>
             </a:r>
           </a:p>
         </p:txBody>
@@ -14207,7 +14023,7 @@
                 </a:solidFill>
                 <a:latin typeface="Georgia"/>
               </a:rPr>
-              <a:t>Data Flow &amp; Metadata Bridge (Fig. 3.3 / 3.4)</a:t>
+              <a:t>Metadata Bridge (Fig. 3.6)</a:t>
             </a:r>
           </a:p>
         </p:txBody>
@@ -15469,7 +15285,7 @@
                 </a:solidFill>
                 <a:latin typeface="Calibri"/>
               </a:rPr>
-              <a:t>21 / 30</a:t>
+              <a:t>21 / 31</a:t>
             </a:r>
           </a:p>
         </p:txBody>
@@ -15547,7 +15363,7 @@
                 </a:solidFill>
                 <a:latin typeface="Georgia"/>
               </a:rPr>
-              <a:t>Lead-Time ML Pipeline (Fig. 3.5)</a:t>
+              <a:t>Machine Learning Pipeline (Fig. 3.7)</a:t>
             </a:r>
           </a:p>
         </p:txBody>
@@ -16307,7 +16123,7 @@
                 </a:solidFill>
                 <a:latin typeface="Calibri"/>
               </a:rPr>
-              <a:t>22 / 30</a:t>
+              <a:t>22 / 31</a:t>
             </a:r>
           </a:p>
         </p:txBody>
@@ -16385,7 +16201,7 @@
                 </a:solidFill>
                 <a:latin typeface="Georgia"/>
               </a:rPr>
-              <a:t>Four-Point Inspection Grading (Fig. 3.6)</a:t>
+              <a:t>Four-Point Inspection Grading (Fig. 3.8)</a:t>
             </a:r>
           </a:p>
         </p:txBody>
@@ -17423,7 +17239,7 @@
                 </a:solidFill>
                 <a:latin typeface="Calibri"/>
               </a:rPr>
-              <a:t>23 / 30</a:t>
+              <a:t>23 / 31</a:t>
             </a:r>
           </a:p>
         </p:txBody>
@@ -18240,7 +18056,7 @@
                 </a:solidFill>
                 <a:latin typeface="Calibri"/>
               </a:rPr>
-              <a:t>24 / 30</a:t>
+              <a:t>24 / 31</a:t>
             </a:r>
           </a:p>
         </p:txBody>
@@ -18915,7 +18731,7 @@
                 </a:solidFill>
                 <a:latin typeface="Calibri"/>
               </a:rPr>
-              <a:t>25 / 30</a:t>
+              <a:t>25 / 31</a:t>
             </a:r>
           </a:p>
         </p:txBody>
@@ -18993,7 +18809,7 @@
                 </a:solidFill>
                 <a:latin typeface="Georgia"/>
               </a:rPr>
-              <a:t>Estimated Project Budget (Table 4.1)</a:t>
+              <a:t>Estimated Project Budget (Table 5.1)</a:t>
             </a:r>
           </a:p>
         </p:txBody>
@@ -19041,9 +18857,62 @@
           </a:p>
         </p:txBody>
       </p:sp>
+      <p:sp>
+        <p:nvSpPr>
+          <p:cNvPr id="8" name="Rounded Rectangle 7"/>
+          <p:cNvSpPr/>
+          <p:nvPr/>
+        </p:nvSpPr>
+        <p:spPr>
+          <a:xfrm>
+            <a:off x="9144000" y="2743200"/>
+            <a:ext cx="2468880" cy="1371600"/>
+          </a:xfrm>
+          <a:prstGeom prst="roundRect">
+            <a:avLst/>
+          </a:prstGeom>
+          <a:solidFill>
+            <a:srgbClr val="D9A406"/>
+          </a:solidFill>
+          <a:ln>
+            <a:noFill/>
+          </a:ln>
+        </p:spPr>
+        <p:style>
+          <a:lnRef idx="1">
+            <a:schemeClr val="accent1"/>
+          </a:lnRef>
+          <a:fillRef idx="3">
+            <a:schemeClr val="accent1"/>
+          </a:fillRef>
+          <a:effectRef idx="2">
+            <a:schemeClr val="accent1"/>
+          </a:effectRef>
+          <a:fontRef idx="minor">
+            <a:schemeClr val="lt1"/>
+          </a:fontRef>
+        </p:style>
+        <p:txBody>
+          <a:bodyPr rtlCol="0" anchor="ctr"/>
+          <a:lstStyle/>
+          <a:p>
+            <a:pPr algn="ctr"/>
+            <a:r>
+              <a:rPr sz="1800" b="1" i="0">
+                <a:solidFill>
+                  <a:srgbClr val="1F2937"/>
+                </a:solidFill>
+                <a:latin typeface="Calibri"/>
+              </a:rPr>
+              <a:t>Estimation Total
+16,000 BDT</a:t>
+            </a:r>
+          </a:p>
+        </p:txBody>
+      </p:sp>
       <p:graphicFrame>
         <p:nvGraphicFramePr>
-          <p:cNvPr id="7" name="Table 6"/>
+          <p:cNvPr id="9" name="Table 8"/>
           <p:cNvGraphicFramePr>
             <a:graphicFrameLocks noGrp="1"/>
           </p:cNvGraphicFramePr>
@@ -19051,7 +18920,7 @@
         </p:nvGraphicFramePr>
         <p:xfrm>
           <a:off x="548640" y="1417320"/>
-          <a:ext cx="8138160" cy="5376672"/>
+          <a:ext cx="8138160" cy="4526280"/>
         </p:xfrm>
         <a:graphic>
           <a:graphicData uri="http://schemas.openxmlformats.org/drawingml/2006/table">
@@ -19060,11 +18929,10 @@
                 <a:tableStyleId>{5C22544A-7EE6-4342-B048-85BDC9FD1C3A}</a:tableStyleId>
               </a:tblPr>
               <a:tblGrid>
-                <a:gridCol w="640080"/>
-                <a:gridCol w="5486400"/>
-                <a:gridCol w="2011680"/>
+                <a:gridCol w="5760720"/>
+                <a:gridCol w="2377440"/>
               </a:tblGrid>
-              <a:tr h="384048">
+              <a:tr h="502920">
                 <a:tc>
                   <a:txBody>
                     <a:bodyPr/>
@@ -19072,17 +18940,17 @@
                     <a:p>
                       <a:pPr algn="ctr"/>
                       <a:r>
-                        <a:rPr sz="1300" b="1" i="0">
+                        <a:rPr sz="1300" b="1">
                           <a:solidFill>
                             <a:srgbClr val="FFFFFF"/>
                           </a:solidFill>
                           <a:latin typeface="Calibri"/>
                         </a:rPr>
-                        <a:t>SL</a:t>
+                        <a:t>Cost Category</a:t>
                       </a:r>
                     </a:p>
                   </a:txBody>
-                  <a:tcPr anchor="ctr" marL="73152" marR="73152">
+                  <a:tcPr anchor="ctr">
                     <a:solidFill>
                       <a:srgbClr val="144E4C"/>
                     </a:solidFill>
@@ -19095,22 +18963,24 @@
                     <a:p>
                       <a:pPr algn="ctr"/>
                       <a:r>
-                        <a:rPr sz="1300" b="1" i="0">
+                        <a:rPr sz="1300" b="1">
                           <a:solidFill>
                             <a:srgbClr val="FFFFFF"/>
                           </a:solidFill>
                           <a:latin typeface="Calibri"/>
                         </a:rPr>
-                        <a:t>Purpose</a:t>
+                        <a:t>Estimated Cost (BDT)</a:t>
                       </a:r>
                     </a:p>
                   </a:txBody>
-                  <a:tcPr anchor="ctr" marL="73152" marR="73152">
+                  <a:tcPr anchor="ctr">
                     <a:solidFill>
                       <a:srgbClr val="144E4C"/>
                     </a:solidFill>
                   </a:tcPr>
                 </a:tc>
+              </a:tr>
+              <a:tr h="502920">
                 <a:tc>
                   <a:txBody>
                     <a:bodyPr/>
@@ -19118,42 +18988,17 @@
                     <a:p>
                       <a:pPr algn="ctr"/>
                       <a:r>
-                        <a:rPr sz="1300" b="1" i="0">
-                          <a:solidFill>
-                            <a:srgbClr val="FFFFFF"/>
-                          </a:solidFill>
-                          <a:latin typeface="Calibri"/>
-                        </a:rPr>
-                        <a:t>Amount (BDT)</a:t>
-                      </a:r>
-                    </a:p>
-                  </a:txBody>
-                  <a:tcPr anchor="ctr" marL="73152" marR="73152">
-                    <a:solidFill>
-                      <a:srgbClr val="144E4C"/>
-                    </a:solidFill>
-                  </a:tcPr>
-                </a:tc>
-              </a:tr>
-              <a:tr h="384048">
-                <a:tc>
-                  <a:txBody>
-                    <a:bodyPr/>
-                    <a:lstStyle/>
-                    <a:p>
-                      <a:pPr algn="ctr"/>
-                      <a:r>
-                        <a:rPr sz="1200" b="0" i="0">
+                        <a:rPr sz="1200" b="0">
                           <a:solidFill>
                             <a:srgbClr val="1F2937"/>
                           </a:solidFill>
                           <a:latin typeface="Calibri"/>
                         </a:rPr>
-                        <a:t>1</a:t>
+                        <a:t>Dataset Preparation And Auditing</a:t>
                       </a:r>
                     </a:p>
                   </a:txBody>
-                  <a:tcPr anchor="ctr" marL="73152" marR="73152">
+                  <a:tcPr anchor="ctr">
                     <a:solidFill>
                       <a:srgbClr val="FFFFFF"/>
                     </a:solidFill>
@@ -19166,17 +19011,90 @@
                     <a:p>
                       <a:pPr algn="ctr"/>
                       <a:r>
-                        <a:rPr sz="1200" b="0" i="0">
+                        <a:rPr sz="1200" b="0">
                           <a:solidFill>
                             <a:srgbClr val="1F2937"/>
                           </a:solidFill>
                           <a:latin typeface="Calibri"/>
                         </a:rPr>
-                        <a:t>Fabric Swatch Collection &amp; Manual Verification</a:t>
+                        <a:t>2,000</a:t>
                       </a:r>
                     </a:p>
                   </a:txBody>
-                  <a:tcPr anchor="ctr" marL="73152" marR="73152">
+                  <a:tcPr anchor="ctr">
+                    <a:solidFill>
+                      <a:srgbClr val="FFFFFF"/>
+                    </a:solidFill>
+                  </a:tcPr>
+                </a:tc>
+              </a:tr>
+              <a:tr h="502920">
+                <a:tc>
+                  <a:txBody>
+                    <a:bodyPr/>
+                    <a:lstStyle/>
+                    <a:p>
+                      <a:pPr algn="ctr"/>
+                      <a:r>
+                        <a:rPr sz="1200" b="0">
+                          <a:solidFill>
+                            <a:srgbClr val="1F2937"/>
+                          </a:solidFill>
+                          <a:latin typeface="Calibri"/>
+                        </a:rPr>
+                        <a:t>Camera And Image Acquisition Resources</a:t>
+                      </a:r>
+                    </a:p>
+                  </a:txBody>
+                  <a:tcPr anchor="ctr">
+                    <a:solidFill>
+                      <a:srgbClr val="EFEAD9"/>
+                    </a:solidFill>
+                  </a:tcPr>
+                </a:tc>
+                <a:tc>
+                  <a:txBody>
+                    <a:bodyPr/>
+                    <a:lstStyle/>
+                    <a:p>
+                      <a:pPr algn="ctr"/>
+                      <a:r>
+                        <a:rPr sz="1200" b="0">
+                          <a:solidFill>
+                            <a:srgbClr val="1F2937"/>
+                          </a:solidFill>
+                          <a:latin typeface="Calibri"/>
+                        </a:rPr>
+                        <a:t>4,000</a:t>
+                      </a:r>
+                    </a:p>
+                  </a:txBody>
+                  <a:tcPr anchor="ctr">
+                    <a:solidFill>
+                      <a:srgbClr val="EFEAD9"/>
+                    </a:solidFill>
+                  </a:tcPr>
+                </a:tc>
+              </a:tr>
+              <a:tr h="502920">
+                <a:tc>
+                  <a:txBody>
+                    <a:bodyPr/>
+                    <a:lstStyle/>
+                    <a:p>
+                      <a:pPr algn="ctr"/>
+                      <a:r>
+                        <a:rPr sz="1200" b="0">
+                          <a:solidFill>
+                            <a:srgbClr val="1F2937"/>
+                          </a:solidFill>
+                          <a:latin typeface="Calibri"/>
+                        </a:rPr>
+                        <a:t>Computing And Development Resources</a:t>
+                      </a:r>
+                    </a:p>
+                  </a:txBody>
+                  <a:tcPr anchor="ctr">
                     <a:solidFill>
                       <a:srgbClr val="FFFFFF"/>
                     </a:solidFill>
@@ -19189,24 +19107,24 @@
                     <a:p>
                       <a:pPr algn="ctr"/>
                       <a:r>
-                        <a:rPr sz="1200" b="0" i="0">
+                        <a:rPr sz="1200" b="0">
                           <a:solidFill>
                             <a:srgbClr val="1F2937"/>
                           </a:solidFill>
                           <a:latin typeface="Calibri"/>
                         </a:rPr>
-                        <a:t>1,500</a:t>
+                        <a:t>3,000</a:t>
                       </a:r>
                     </a:p>
                   </a:txBody>
-                  <a:tcPr anchor="ctr" marL="73152" marR="73152">
+                  <a:tcPr anchor="ctr">
                     <a:solidFill>
                       <a:srgbClr val="FFFFFF"/>
                     </a:solidFill>
                   </a:tcPr>
                 </a:tc>
               </a:tr>
-              <a:tr h="384048">
+              <a:tr h="502920">
                 <a:tc>
                   <a:txBody>
                     <a:bodyPr/>
@@ -19214,17 +19132,17 @@
                     <a:p>
                       <a:pPr algn="ctr"/>
                       <a:r>
-                        <a:rPr sz="1200" b="0" i="0">
+                        <a:rPr sz="1200" b="0">
                           <a:solidFill>
                             <a:srgbClr val="1F2937"/>
                           </a:solidFill>
                           <a:latin typeface="Calibri"/>
                         </a:rPr>
-                        <a:t>2</a:t>
+                        <a:t>Testing And Integration</a:t>
                       </a:r>
                     </a:p>
                   </a:txBody>
-                  <a:tcPr anchor="ctr" marL="73152" marR="73152">
+                  <a:tcPr anchor="ctr">
                     <a:solidFill>
                       <a:srgbClr val="EFEAD9"/>
                     </a:solidFill>
@@ -19237,17 +19155,90 @@
                     <a:p>
                       <a:pPr algn="ctr"/>
                       <a:r>
-                        <a:rPr sz="1200" b="0" i="0">
+                        <a:rPr sz="1200" b="0">
                           <a:solidFill>
                             <a:srgbClr val="1F2937"/>
                           </a:solidFill>
                           <a:latin typeface="Calibri"/>
                         </a:rPr>
-                        <a:t>Industrial Inspection Camera (USB 1080p)</a:t>
+                        <a:t>2,000</a:t>
                       </a:r>
                     </a:p>
                   </a:txBody>
-                  <a:tcPr anchor="ctr" marL="73152" marR="73152">
+                  <a:tcPr anchor="ctr">
+                    <a:solidFill>
+                      <a:srgbClr val="EFEAD9"/>
+                    </a:solidFill>
+                  </a:tcPr>
+                </a:tc>
+              </a:tr>
+              <a:tr h="502920">
+                <a:tc>
+                  <a:txBody>
+                    <a:bodyPr/>
+                    <a:lstStyle/>
+                    <a:p>
+                      <a:pPr algn="ctr"/>
+                      <a:r>
+                        <a:rPr sz="1200" b="0">
+                          <a:solidFill>
+                            <a:srgbClr val="1F2937"/>
+                          </a:solidFill>
+                          <a:latin typeface="Calibri"/>
+                        </a:rPr>
+                        <a:t>Edge Deployment And Hardware-Related Resources</a:t>
+                      </a:r>
+                    </a:p>
+                  </a:txBody>
+                  <a:tcPr anchor="ctr">
+                    <a:solidFill>
+                      <a:srgbClr val="FFFFFF"/>
+                    </a:solidFill>
+                  </a:tcPr>
+                </a:tc>
+                <a:tc>
+                  <a:txBody>
+                    <a:bodyPr/>
+                    <a:lstStyle/>
+                    <a:p>
+                      <a:pPr algn="ctr"/>
+                      <a:r>
+                        <a:rPr sz="1200" b="0">
+                          <a:solidFill>
+                            <a:srgbClr val="1F2937"/>
+                          </a:solidFill>
+                          <a:latin typeface="Calibri"/>
+                        </a:rPr>
+                        <a:t>3,000</a:t>
+                      </a:r>
+                    </a:p>
+                  </a:txBody>
+                  <a:tcPr anchor="ctr">
+                    <a:solidFill>
+                      <a:srgbClr val="FFFFFF"/>
+                    </a:solidFill>
+                  </a:tcPr>
+                </a:tc>
+              </a:tr>
+              <a:tr h="502920">
+                <a:tc>
+                  <a:txBody>
+                    <a:bodyPr/>
+                    <a:lstStyle/>
+                    <a:p>
+                      <a:pPr algn="ctr"/>
+                      <a:r>
+                        <a:rPr sz="1200" b="0">
+                          <a:solidFill>
+                            <a:srgbClr val="1F2937"/>
+                          </a:solidFill>
+                          <a:latin typeface="Calibri"/>
+                        </a:rPr>
+                        <a:t>Documentation And Presentation</a:t>
+                      </a:r>
+                    </a:p>
+                  </a:txBody>
+                  <a:tcPr anchor="ctr">
                     <a:solidFill>
                       <a:srgbClr val="EFEAD9"/>
                     </a:solidFill>
@@ -19260,24 +19251,24 @@
                     <a:p>
                       <a:pPr algn="ctr"/>
                       <a:r>
-                        <a:rPr sz="1200" b="0" i="0">
+                        <a:rPr sz="1200" b="0">
                           <a:solidFill>
                             <a:srgbClr val="1F2937"/>
                           </a:solidFill>
                           <a:latin typeface="Calibri"/>
                         </a:rPr>
-                        <a:t>3,500</a:t>
+                        <a:t>1,000</a:t>
                       </a:r>
                     </a:p>
                   </a:txBody>
-                  <a:tcPr anchor="ctr" marL="73152" marR="73152">
+                  <a:tcPr anchor="ctr">
                     <a:solidFill>
                       <a:srgbClr val="EFEAD9"/>
                     </a:solidFill>
                   </a:tcPr>
                 </a:tc>
               </a:tr>
-              <a:tr h="384048">
+              <a:tr h="502920">
                 <a:tc>
                   <a:txBody>
                     <a:bodyPr/>
@@ -19285,17 +19276,17 @@
                     <a:p>
                       <a:pPr algn="ctr"/>
                       <a:r>
-                        <a:rPr sz="1200" b="0" i="0">
+                        <a:rPr sz="1200" b="0">
                           <a:solidFill>
                             <a:srgbClr val="1F2937"/>
                           </a:solidFill>
                           <a:latin typeface="Calibri"/>
                         </a:rPr>
-                        <a:t>3</a:t>
+                        <a:t>Miscellaneous Expenses</a:t>
                       </a:r>
                     </a:p>
                   </a:txBody>
-                  <a:tcPr anchor="ctr" marL="73152" marR="73152">
+                  <a:tcPr anchor="ctr">
                     <a:solidFill>
                       <a:srgbClr val="FFFFFF"/>
                     </a:solidFill>
@@ -19308,30 +19299,7 @@
                     <a:p>
                       <a:pPr algn="ctr"/>
                       <a:r>
-                        <a:rPr sz="1200" b="0" i="0">
-                          <a:solidFill>
-                            <a:srgbClr val="1F2937"/>
-                          </a:solidFill>
-                          <a:latin typeface="Calibri"/>
-                        </a:rPr>
-                        <a:t>Fixed-Geometry Mounting Frame / Fixture</a:t>
-                      </a:r>
-                    </a:p>
-                  </a:txBody>
-                  <a:tcPr anchor="ctr" marL="73152" marR="73152">
-                    <a:solidFill>
-                      <a:srgbClr val="FFFFFF"/>
-                    </a:solidFill>
-                  </a:tcPr>
-                </a:tc>
-                <a:tc>
-                  <a:txBody>
-                    <a:bodyPr/>
-                    <a:lstStyle/>
-                    <a:p>
-                      <a:pPr algn="ctr"/>
-                      <a:r>
-                        <a:rPr sz="1200" b="0" i="0">
+                        <a:rPr sz="1200" b="0">
                           <a:solidFill>
                             <a:srgbClr val="1F2937"/>
                           </a:solidFill>
@@ -19341,14 +19309,14 @@
                       </a:r>
                     </a:p>
                   </a:txBody>
-                  <a:tcPr anchor="ctr" marL="73152" marR="73152">
+                  <a:tcPr anchor="ctr">
                     <a:solidFill>
                       <a:srgbClr val="FFFFFF"/>
                     </a:solidFill>
                   </a:tcPr>
                 </a:tc>
               </a:tr>
-              <a:tr h="384048">
+              <a:tr h="502920">
                 <a:tc>
                   <a:txBody>
                     <a:bodyPr/>
@@ -19356,17 +19324,17 @@
                     <a:p>
                       <a:pPr algn="ctr"/>
                       <a:r>
-                        <a:rPr sz="1200" b="0" i="0">
+                        <a:rPr sz="1200" b="1">
                           <a:solidFill>
                             <a:srgbClr val="1F2937"/>
                           </a:solidFill>
                           <a:latin typeface="Calibri"/>
                         </a:rPr>
-                        <a:t>4</a:t>
+                        <a:t>Total</a:t>
                       </a:r>
                     </a:p>
                   </a:txBody>
-                  <a:tcPr anchor="ctr" marL="73152" marR="73152">
+                  <a:tcPr anchor="ctr">
                     <a:solidFill>
                       <a:srgbClr val="EFEAD9"/>
                     </a:solidFill>
@@ -19379,681 +19347,19 @@
                     <a:p>
                       <a:pPr algn="ctr"/>
                       <a:r>
-                        <a:rPr sz="1200" b="0" i="0">
+                        <a:rPr sz="1200" b="1">
                           <a:solidFill>
                             <a:srgbClr val="1F2937"/>
                           </a:solidFill>
                           <a:latin typeface="Calibri"/>
                         </a:rPr>
-                        <a:t>Calibration Materials (Ruler, Grid Chart)</a:t>
+                        <a:t>16,000</a:t>
                       </a:r>
                     </a:p>
                   </a:txBody>
-                  <a:tcPr anchor="ctr" marL="73152" marR="73152">
+                  <a:tcPr anchor="ctr">
                     <a:solidFill>
                       <a:srgbClr val="EFEAD9"/>
-                    </a:solidFill>
-                  </a:tcPr>
-                </a:tc>
-                <a:tc>
-                  <a:txBody>
-                    <a:bodyPr/>
-                    <a:lstStyle/>
-                    <a:p>
-                      <a:pPr algn="ctr"/>
-                      <a:r>
-                        <a:rPr sz="1200" b="0" i="0">
-                          <a:solidFill>
-                            <a:srgbClr val="1F2937"/>
-                          </a:solidFill>
-                          <a:latin typeface="Calibri"/>
-                        </a:rPr>
-                        <a:t>600</a:t>
-                      </a:r>
-                    </a:p>
-                  </a:txBody>
-                  <a:tcPr anchor="ctr" marL="73152" marR="73152">
-                    <a:solidFill>
-                      <a:srgbClr val="EFEAD9"/>
-                    </a:solidFill>
-                  </a:tcPr>
-                </a:tc>
-              </a:tr>
-              <a:tr h="384048">
-                <a:tc>
-                  <a:txBody>
-                    <a:bodyPr/>
-                    <a:lstStyle/>
-                    <a:p>
-                      <a:pPr algn="ctr"/>
-                      <a:r>
-                        <a:rPr sz="1200" b="0" i="0">
-                          <a:solidFill>
-                            <a:srgbClr val="1F2937"/>
-                          </a:solidFill>
-                          <a:latin typeface="Calibri"/>
-                        </a:rPr>
-                        <a:t>5</a:t>
-                      </a:r>
-                    </a:p>
-                  </a:txBody>
-                  <a:tcPr anchor="ctr" marL="73152" marR="73152">
-                    <a:solidFill>
-                      <a:srgbClr val="FFFFFF"/>
-                    </a:solidFill>
-                  </a:tcPr>
-                </a:tc>
-                <a:tc>
-                  <a:txBody>
-                    <a:bodyPr/>
-                    <a:lstStyle/>
-                    <a:p>
-                      <a:pPr algn="ctr"/>
-                      <a:r>
-                        <a:rPr sz="1200" b="0" i="0">
-                          <a:solidFill>
-                            <a:srgbClr val="1F2937"/>
-                          </a:solidFill>
-                          <a:latin typeface="Calibri"/>
-                        </a:rPr>
-                        <a:t>Dept. GPU Lab + Free Cloud Compute</a:t>
-                      </a:r>
-                    </a:p>
-                  </a:txBody>
-                  <a:tcPr anchor="ctr" marL="73152" marR="73152">
-                    <a:solidFill>
-                      <a:srgbClr val="FFFFFF"/>
-                    </a:solidFill>
-                  </a:tcPr>
-                </a:tc>
-                <a:tc>
-                  <a:txBody>
-                    <a:bodyPr/>
-                    <a:lstStyle/>
-                    <a:p>
-                      <a:pPr algn="ctr"/>
-                      <a:r>
-                        <a:rPr sz="1200" b="0" i="0">
-                          <a:solidFill>
-                            <a:srgbClr val="1F2937"/>
-                          </a:solidFill>
-                          <a:latin typeface="Calibri"/>
-                        </a:rPr>
-                        <a:t>0</a:t>
-                      </a:r>
-                    </a:p>
-                  </a:txBody>
-                  <a:tcPr anchor="ctr" marL="73152" marR="73152">
-                    <a:solidFill>
-                      <a:srgbClr val="FFFFFF"/>
-                    </a:solidFill>
-                  </a:tcPr>
-                </a:tc>
-              </a:tr>
-              <a:tr h="384048">
-                <a:tc>
-                  <a:txBody>
-                    <a:bodyPr/>
-                    <a:lstStyle/>
-                    <a:p>
-                      <a:pPr algn="ctr"/>
-                      <a:r>
-                        <a:rPr sz="1200" b="0" i="0">
-                          <a:solidFill>
-                            <a:srgbClr val="1F2937"/>
-                          </a:solidFill>
-                          <a:latin typeface="Calibri"/>
-                        </a:rPr>
-                        <a:t>6</a:t>
-                      </a:r>
-                    </a:p>
-                  </a:txBody>
-                  <a:tcPr anchor="ctr" marL="73152" marR="73152">
-                    <a:solidFill>
-                      <a:srgbClr val="EFEAD9"/>
-                    </a:solidFill>
-                  </a:tcPr>
-                </a:tc>
-                <a:tc>
-                  <a:txBody>
-                    <a:bodyPr/>
-                    <a:lstStyle/>
-                    <a:p>
-                      <a:pPr algn="ctr"/>
-                      <a:r>
-                        <a:rPr sz="1200" b="0" i="0">
-                          <a:solidFill>
-                            <a:srgbClr val="1F2937"/>
-                          </a:solidFill>
-                          <a:latin typeface="Calibri"/>
-                        </a:rPr>
-                        <a:t>Additional GPU Compute Beyond Free Quota</a:t>
-                      </a:r>
-                    </a:p>
-                  </a:txBody>
-                  <a:tcPr anchor="ctr" marL="73152" marR="73152">
-                    <a:solidFill>
-                      <a:srgbClr val="EFEAD9"/>
-                    </a:solidFill>
-                  </a:tcPr>
-                </a:tc>
-                <a:tc>
-                  <a:txBody>
-                    <a:bodyPr/>
-                    <a:lstStyle/>
-                    <a:p>
-                      <a:pPr algn="ctr"/>
-                      <a:r>
-                        <a:rPr sz="1200" b="0" i="0">
-                          <a:solidFill>
-                            <a:srgbClr val="1F2937"/>
-                          </a:solidFill>
-                          <a:latin typeface="Calibri"/>
-                        </a:rPr>
-                        <a:t>3,000</a:t>
-                      </a:r>
-                    </a:p>
-                  </a:txBody>
-                  <a:tcPr anchor="ctr" marL="73152" marR="73152">
-                    <a:solidFill>
-                      <a:srgbClr val="EFEAD9"/>
-                    </a:solidFill>
-                  </a:tcPr>
-                </a:tc>
-              </a:tr>
-              <a:tr h="384048">
-                <a:tc>
-                  <a:txBody>
-                    <a:bodyPr/>
-                    <a:lstStyle/>
-                    <a:p>
-                      <a:pPr algn="ctr"/>
-                      <a:r>
-                        <a:rPr sz="1200" b="0" i="0">
-                          <a:solidFill>
-                            <a:srgbClr val="1F2937"/>
-                          </a:solidFill>
-                          <a:latin typeface="Calibri"/>
-                        </a:rPr>
-                        <a:t>7</a:t>
-                      </a:r>
-                    </a:p>
-                  </a:txBody>
-                  <a:tcPr anchor="ctr" marL="73152" marR="73152">
-                    <a:solidFill>
-                      <a:srgbClr val="FFFFFF"/>
-                    </a:solidFill>
-                  </a:tcPr>
-                </a:tc>
-                <a:tc>
-                  <a:txBody>
-                    <a:bodyPr/>
-                    <a:lstStyle/>
-                    <a:p>
-                      <a:pPr algn="ctr"/>
-                      <a:r>
-                        <a:rPr sz="1200" b="0" i="0">
-                          <a:solidFill>
-                            <a:srgbClr val="1F2937"/>
-                          </a:solidFill>
-                          <a:latin typeface="Calibri"/>
-                        </a:rPr>
-                        <a:t>Cloud Storage For Dataset &amp; Hash Manifests (1 Yr)</a:t>
-                      </a:r>
-                    </a:p>
-                  </a:txBody>
-                  <a:tcPr anchor="ctr" marL="73152" marR="73152">
-                    <a:solidFill>
-                      <a:srgbClr val="FFFFFF"/>
-                    </a:solidFill>
-                  </a:tcPr>
-                </a:tc>
-                <a:tc>
-                  <a:txBody>
-                    <a:bodyPr/>
-                    <a:lstStyle/>
-                    <a:p>
-                      <a:pPr algn="ctr"/>
-                      <a:r>
-                        <a:rPr sz="1200" b="0" i="0">
-                          <a:solidFill>
-                            <a:srgbClr val="1F2937"/>
-                          </a:solidFill>
-                          <a:latin typeface="Calibri"/>
-                        </a:rPr>
-                        <a:t>2,400</a:t>
-                      </a:r>
-                    </a:p>
-                  </a:txBody>
-                  <a:tcPr anchor="ctr" marL="73152" marR="73152">
-                    <a:solidFill>
-                      <a:srgbClr val="FFFFFF"/>
-                    </a:solidFill>
-                  </a:tcPr>
-                </a:tc>
-              </a:tr>
-              <a:tr h="384048">
-                <a:tc>
-                  <a:txBody>
-                    <a:bodyPr/>
-                    <a:lstStyle/>
-                    <a:p>
-                      <a:pPr algn="ctr"/>
-                      <a:r>
-                        <a:rPr sz="1200" b="0" i="0">
-                          <a:solidFill>
-                            <a:srgbClr val="1F2937"/>
-                          </a:solidFill>
-                          <a:latin typeface="Calibri"/>
-                        </a:rPr>
-                        <a:t>8</a:t>
-                      </a:r>
-                    </a:p>
-                  </a:txBody>
-                  <a:tcPr anchor="ctr" marL="73152" marR="73152">
-                    <a:solidFill>
-                      <a:srgbClr val="EFEAD9"/>
-                    </a:solidFill>
-                  </a:tcPr>
-                </a:tc>
-                <a:tc>
-                  <a:txBody>
-                    <a:bodyPr/>
-                    <a:lstStyle/>
-                    <a:p>
-                      <a:pPr algn="ctr"/>
-                      <a:r>
-                        <a:rPr sz="1200" b="0" i="0">
-                          <a:solidFill>
-                            <a:srgbClr val="1F2937"/>
-                          </a:solidFill>
-                          <a:latin typeface="Calibri"/>
-                        </a:rPr>
-                        <a:t>Existing Laptops / PCs</a:t>
-                      </a:r>
-                    </a:p>
-                  </a:txBody>
-                  <a:tcPr anchor="ctr" marL="73152" marR="73152">
-                    <a:solidFill>
-                      <a:srgbClr val="EFEAD9"/>
-                    </a:solidFill>
-                  </a:tcPr>
-                </a:tc>
-                <a:tc>
-                  <a:txBody>
-                    <a:bodyPr/>
-                    <a:lstStyle/>
-                    <a:p>
-                      <a:pPr algn="ctr"/>
-                      <a:r>
-                        <a:rPr sz="1200" b="0" i="0">
-                          <a:solidFill>
-                            <a:srgbClr val="1F2937"/>
-                          </a:solidFill>
-                          <a:latin typeface="Calibri"/>
-                        </a:rPr>
-                        <a:t>0</a:t>
-                      </a:r>
-                    </a:p>
-                  </a:txBody>
-                  <a:tcPr anchor="ctr" marL="73152" marR="73152">
-                    <a:solidFill>
-                      <a:srgbClr val="EFEAD9"/>
-                    </a:solidFill>
-                  </a:tcPr>
-                </a:tc>
-              </a:tr>
-              <a:tr h="384048">
-                <a:tc>
-                  <a:txBody>
-                    <a:bodyPr/>
-                    <a:lstStyle/>
-                    <a:p>
-                      <a:pPr algn="ctr"/>
-                      <a:r>
-                        <a:rPr sz="1200" b="0" i="0">
-                          <a:solidFill>
-                            <a:srgbClr val="1F2937"/>
-                          </a:solidFill>
-                          <a:latin typeface="Calibri"/>
-                        </a:rPr>
-                        <a:t>9</a:t>
-                      </a:r>
-                    </a:p>
-                  </a:txBody>
-                  <a:tcPr anchor="ctr" marL="73152" marR="73152">
-                    <a:solidFill>
-                      <a:srgbClr val="FFFFFF"/>
-                    </a:solidFill>
-                  </a:tcPr>
-                </a:tc>
-                <a:tc>
-                  <a:txBody>
-                    <a:bodyPr/>
-                    <a:lstStyle/>
-                    <a:p>
-                      <a:pPr algn="ctr"/>
-                      <a:r>
-                        <a:rPr sz="1200" b="0" i="0">
-                          <a:solidFill>
-                            <a:srgbClr val="1F2937"/>
-                          </a:solidFill>
-                          <a:latin typeface="Calibri"/>
-                        </a:rPr>
-                        <a:t>ML Libraries (YOLO, OpenCV, Scikit-Learn)</a:t>
-                      </a:r>
-                    </a:p>
-                  </a:txBody>
-                  <a:tcPr anchor="ctr" marL="73152" marR="73152">
-                    <a:solidFill>
-                      <a:srgbClr val="FFFFFF"/>
-                    </a:solidFill>
-                  </a:tcPr>
-                </a:tc>
-                <a:tc>
-                  <a:txBody>
-                    <a:bodyPr/>
-                    <a:lstStyle/>
-                    <a:p>
-                      <a:pPr algn="ctr"/>
-                      <a:r>
-                        <a:rPr sz="1200" b="0" i="0">
-                          <a:solidFill>
-                            <a:srgbClr val="1F2937"/>
-                          </a:solidFill>
-                          <a:latin typeface="Calibri"/>
-                        </a:rPr>
-                        <a:t>0</a:t>
-                      </a:r>
-                    </a:p>
-                  </a:txBody>
-                  <a:tcPr anchor="ctr" marL="73152" marR="73152">
-                    <a:solidFill>
-                      <a:srgbClr val="FFFFFF"/>
-                    </a:solidFill>
-                  </a:tcPr>
-                </a:tc>
-              </a:tr>
-              <a:tr h="384048">
-                <a:tc>
-                  <a:txBody>
-                    <a:bodyPr/>
-                    <a:lstStyle/>
-                    <a:p>
-                      <a:pPr algn="ctr"/>
-                      <a:r>
-                        <a:rPr sz="1200" b="0" i="0">
-                          <a:solidFill>
-                            <a:srgbClr val="1F2937"/>
-                          </a:solidFill>
-                          <a:latin typeface="Calibri"/>
-                        </a:rPr>
-                        <a:t>10</a:t>
-                      </a:r>
-                    </a:p>
-                  </a:txBody>
-                  <a:tcPr anchor="ctr" marL="73152" marR="73152">
-                    <a:solidFill>
-                      <a:srgbClr val="EFEAD9"/>
-                    </a:solidFill>
-                  </a:tcPr>
-                </a:tc>
-                <a:tc>
-                  <a:txBody>
-                    <a:bodyPr/>
-                    <a:lstStyle/>
-                    <a:p>
-                      <a:pPr algn="ctr"/>
-                      <a:r>
-                        <a:rPr sz="1200" b="0" i="0">
-                          <a:solidFill>
-                            <a:srgbClr val="1F2937"/>
-                          </a:solidFill>
-                          <a:latin typeface="Calibri"/>
-                        </a:rPr>
-                        <a:t>Dev Tools &amp; Version Control</a:t>
-                      </a:r>
-                    </a:p>
-                  </a:txBody>
-                  <a:tcPr anchor="ctr" marL="73152" marR="73152">
-                    <a:solidFill>
-                      <a:srgbClr val="EFEAD9"/>
-                    </a:solidFill>
-                  </a:tcPr>
-                </a:tc>
-                <a:tc>
-                  <a:txBody>
-                    <a:bodyPr/>
-                    <a:lstStyle/>
-                    <a:p>
-                      <a:pPr algn="ctr"/>
-                      <a:r>
-                        <a:rPr sz="1200" b="0" i="0">
-                          <a:solidFill>
-                            <a:srgbClr val="1F2937"/>
-                          </a:solidFill>
-                          <a:latin typeface="Calibri"/>
-                        </a:rPr>
-                        <a:t>0</a:t>
-                      </a:r>
-                    </a:p>
-                  </a:txBody>
-                  <a:tcPr anchor="ctr" marL="73152" marR="73152">
-                    <a:solidFill>
-                      <a:srgbClr val="EFEAD9"/>
-                    </a:solidFill>
-                  </a:tcPr>
-                </a:tc>
-              </a:tr>
-              <a:tr h="384048">
-                <a:tc>
-                  <a:txBody>
-                    <a:bodyPr/>
-                    <a:lstStyle/>
-                    <a:p>
-                      <a:pPr algn="ctr"/>
-                      <a:r>
-                        <a:rPr sz="1200" b="0" i="0">
-                          <a:solidFill>
-                            <a:srgbClr val="1F2937"/>
-                          </a:solidFill>
-                          <a:latin typeface="Calibri"/>
-                        </a:rPr>
-                        <a:t>11</a:t>
-                      </a:r>
-                    </a:p>
-                  </a:txBody>
-                  <a:tcPr anchor="ctr" marL="73152" marR="73152">
-                    <a:solidFill>
-                      <a:srgbClr val="FFFFFF"/>
-                    </a:solidFill>
-                  </a:tcPr>
-                </a:tc>
-                <a:tc>
-                  <a:txBody>
-                    <a:bodyPr/>
-                    <a:lstStyle/>
-                    <a:p>
-                      <a:pPr algn="ctr"/>
-                      <a:r>
-                        <a:rPr sz="1200" b="0" i="0">
-                          <a:solidFill>
-                            <a:srgbClr val="1F2937"/>
-                          </a:solidFill>
-                          <a:latin typeface="Calibri"/>
-                        </a:rPr>
-                        <a:t>Internet Connectivity &amp; Dataset Transfer</a:t>
-                      </a:r>
-                    </a:p>
-                  </a:txBody>
-                  <a:tcPr anchor="ctr" marL="73152" marR="73152">
-                    <a:solidFill>
-                      <a:srgbClr val="FFFFFF"/>
-                    </a:solidFill>
-                  </a:tcPr>
-                </a:tc>
-                <a:tc>
-                  <a:txBody>
-                    <a:bodyPr/>
-                    <a:lstStyle/>
-                    <a:p>
-                      <a:pPr algn="ctr"/>
-                      <a:r>
-                        <a:rPr sz="1200" b="0" i="0">
-                          <a:solidFill>
-                            <a:srgbClr val="1F2937"/>
-                          </a:solidFill>
-                          <a:latin typeface="Calibri"/>
-                        </a:rPr>
-                        <a:t>1,500</a:t>
-                      </a:r>
-                    </a:p>
-                  </a:txBody>
-                  <a:tcPr anchor="ctr" marL="73152" marR="73152">
-                    <a:solidFill>
-                      <a:srgbClr val="FFFFFF"/>
-                    </a:solidFill>
-                  </a:tcPr>
-                </a:tc>
-              </a:tr>
-              <a:tr h="384048">
-                <a:tc>
-                  <a:txBody>
-                    <a:bodyPr/>
-                    <a:lstStyle/>
-                    <a:p>
-                      <a:pPr algn="ctr"/>
-                      <a:r>
-                        <a:rPr sz="1200" b="0" i="0">
-                          <a:solidFill>
-                            <a:srgbClr val="1F2937"/>
-                          </a:solidFill>
-                          <a:latin typeface="Calibri"/>
-                        </a:rPr>
-                        <a:t>12</a:t>
-                      </a:r>
-                    </a:p>
-                  </a:txBody>
-                  <a:tcPr anchor="ctr" marL="73152" marR="73152">
-                    <a:solidFill>
-                      <a:srgbClr val="EFEAD9"/>
-                    </a:solidFill>
-                  </a:tcPr>
-                </a:tc>
-                <a:tc>
-                  <a:txBody>
-                    <a:bodyPr/>
-                    <a:lstStyle/>
-                    <a:p>
-                      <a:pPr algn="ctr"/>
-                      <a:r>
-                        <a:rPr sz="1200" b="0" i="0">
-                          <a:solidFill>
-                            <a:srgbClr val="1F2937"/>
-                          </a:solidFill>
-                          <a:latin typeface="Calibri"/>
-                        </a:rPr>
-                        <a:t>Jetson Orin Nano / Edge Deployment Kit</a:t>
-                      </a:r>
-                    </a:p>
-                  </a:txBody>
-                  <a:tcPr anchor="ctr" marL="73152" marR="73152">
-                    <a:solidFill>
-                      <a:srgbClr val="EFEAD9"/>
-                    </a:solidFill>
-                  </a:tcPr>
-                </a:tc>
-                <a:tc>
-                  <a:txBody>
-                    <a:bodyPr/>
-                    <a:lstStyle/>
-                    <a:p>
-                      <a:pPr algn="ctr"/>
-                      <a:r>
-                        <a:rPr sz="1200" b="0" i="0">
-                          <a:solidFill>
-                            <a:srgbClr val="1F2937"/>
-                          </a:solidFill>
-                          <a:latin typeface="Calibri"/>
-                        </a:rPr>
-                        <a:t>25,000</a:t>
-                      </a:r>
-                    </a:p>
-                  </a:txBody>
-                  <a:tcPr anchor="ctr" marL="73152" marR="73152">
-                    <a:solidFill>
-                      <a:srgbClr val="EFEAD9"/>
-                    </a:solidFill>
-                  </a:tcPr>
-                </a:tc>
-              </a:tr>
-              <a:tr h="384048">
-                <a:tc>
-                  <a:txBody>
-                    <a:bodyPr/>
-                    <a:lstStyle/>
-                    <a:p>
-                      <a:pPr algn="ctr"/>
-                      <a:r>
-                        <a:rPr sz="1200" b="0" i="0">
-                          <a:solidFill>
-                            <a:srgbClr val="1F2937"/>
-                          </a:solidFill>
-                          <a:latin typeface="Calibri"/>
-                        </a:rPr>
-                        <a:t>13</a:t>
-                      </a:r>
-                    </a:p>
-                  </a:txBody>
-                  <a:tcPr anchor="ctr" marL="73152" marR="73152">
-                    <a:solidFill>
-                      <a:srgbClr val="FFFFFF"/>
-                    </a:solidFill>
-                  </a:tcPr>
-                </a:tc>
-                <a:tc>
-                  <a:txBody>
-                    <a:bodyPr/>
-                    <a:lstStyle/>
-                    <a:p>
-                      <a:pPr algn="ctr"/>
-                      <a:r>
-                        <a:rPr sz="1200" b="0" i="0">
-                          <a:solidFill>
-                            <a:srgbClr val="1F2937"/>
-                          </a:solidFill>
-                          <a:latin typeface="Calibri"/>
-                        </a:rPr>
-                        <a:t>Documentation, Printing, Binding, Presentation</a:t>
-                      </a:r>
-                    </a:p>
-                  </a:txBody>
-                  <a:tcPr anchor="ctr" marL="73152" marR="73152">
-                    <a:solidFill>
-                      <a:srgbClr val="FFFFFF"/>
-                    </a:solidFill>
-                  </a:tcPr>
-                </a:tc>
-                <a:tc>
-                  <a:txBody>
-                    <a:bodyPr/>
-                    <a:lstStyle/>
-                    <a:p>
-                      <a:pPr algn="ctr"/>
-                      <a:r>
-                        <a:rPr sz="1200" b="0" i="0">
-                          <a:solidFill>
-                            <a:srgbClr val="1F2937"/>
-                          </a:solidFill>
-                          <a:latin typeface="Calibri"/>
-                        </a:rPr>
-                        <a:t>2,500</a:t>
-                      </a:r>
-                    </a:p>
-                  </a:txBody>
-                  <a:tcPr anchor="ctr" marL="73152" marR="73152">
-                    <a:solidFill>
-                      <a:srgbClr val="FFFFFF"/>
                     </a:solidFill>
                   </a:tcPr>
                 </a:tc>
@@ -20062,59 +19368,6 @@
           </a:graphicData>
         </a:graphic>
       </p:graphicFrame>
-      <p:sp>
-        <p:nvSpPr>
-          <p:cNvPr id="8" name="Rounded Rectangle 7"/>
-          <p:cNvSpPr/>
-          <p:nvPr/>
-        </p:nvSpPr>
-        <p:spPr>
-          <a:xfrm>
-            <a:off x="9144000" y="2743200"/>
-            <a:ext cx="2468880" cy="1371600"/>
-          </a:xfrm>
-          <a:prstGeom prst="roundRect">
-            <a:avLst/>
-          </a:prstGeom>
-          <a:solidFill>
-            <a:srgbClr val="D9A406"/>
-          </a:solidFill>
-          <a:ln>
-            <a:noFill/>
-          </a:ln>
-        </p:spPr>
-        <p:style>
-          <a:lnRef idx="1">
-            <a:schemeClr val="accent1"/>
-          </a:lnRef>
-          <a:fillRef idx="3">
-            <a:schemeClr val="accent1"/>
-          </a:fillRef>
-          <a:effectRef idx="2">
-            <a:schemeClr val="accent1"/>
-          </a:effectRef>
-          <a:fontRef idx="minor">
-            <a:schemeClr val="lt1"/>
-          </a:fontRef>
-        </p:style>
-        <p:txBody>
-          <a:bodyPr rtlCol="0" anchor="ctr"/>
-          <a:lstStyle/>
-          <a:p>
-            <a:pPr algn="ctr"/>
-            <a:r>
-              <a:rPr sz="1800" b="1" i="0">
-                <a:solidFill>
-                  <a:srgbClr val="1F2937"/>
-                </a:solidFill>
-                <a:latin typeface="Calibri"/>
-              </a:rPr>
-              <a:t>Estimation Total
-42,000 BDT</a:t>
-            </a:r>
-          </a:p>
-        </p:txBody>
-      </p:sp>
     </p:spTree>
   </p:cSld>
   <p:clrMapOvr>
@@ -20206,7 +19459,7 @@
                 </a:solidFill>
                 <a:latin typeface="Calibri"/>
               </a:rPr>
-              <a:t>26 / 30</a:t>
+              <a:t>26 / 31</a:t>
             </a:r>
           </a:p>
         </p:txBody>
@@ -20284,7 +19537,7 @@
                 </a:solidFill>
                 <a:latin typeface="Georgia"/>
               </a:rPr>
-              <a:t>Project Plan (Fig. 5.1)</a:t>
+              <a:t>Project Plan (Table 3.7; Gantt: Fig. 3.9)</a:t>
             </a:r>
           </a:p>
         </p:txBody>
@@ -20332,9 +19585,44 @@
           </a:p>
         </p:txBody>
       </p:sp>
+      <p:sp>
+        <p:nvSpPr>
+          <p:cNvPr id="8" name="TextBox 7"/>
+          <p:cNvSpPr txBox="1"/>
+          <p:nvPr/>
+        </p:nvSpPr>
+        <p:spPr>
+          <a:xfrm>
+            <a:off x="548640" y="5806440"/>
+            <a:ext cx="11064240" cy="457200"/>
+          </a:xfrm>
+          <a:prstGeom prst="rect">
+            <a:avLst/>
+          </a:prstGeom>
+          <a:noFill/>
+        </p:spPr>
+        <p:txBody>
+          <a:bodyPr wrap="square" anchor="ctr">
+            <a:spAutoFit/>
+          </a:bodyPr>
+          <a:lstStyle/>
+          <a:p>
+            <a:pPr algn="ctr"/>
+            <a:r>
+              <a:rPr sz="1300" b="0" i="0">
+                <a:solidFill>
+                  <a:srgbClr val="5B6570"/>
+                </a:solidFill>
+                <a:latin typeface="Calibri"/>
+              </a:rPr>
+              <a:t>Audit / Split (Done) → Reproduction → Segmentation → Anomaly → Planning → Edge → Write-Up, Over 32 Weeks. Full Gantt: Report Fig. 3.9.</a:t>
+            </a:r>
+          </a:p>
+        </p:txBody>
+      </p:sp>
       <p:graphicFrame>
         <p:nvGraphicFramePr>
-          <p:cNvPr id="7" name="Table 6"/>
+          <p:cNvPr id="9" name="Table 8"/>
           <p:cNvGraphicFramePr>
             <a:graphicFrameLocks noGrp="1"/>
           </p:cNvGraphicFramePr>
@@ -20351,10 +19639,8 @@
                 <a:tableStyleId>{5C22544A-7EE6-4342-B048-85BDC9FD1C3A}</a:tableStyleId>
               </a:tblPr>
               <a:tblGrid>
-                <a:gridCol w="914400"/>
-                <a:gridCol w="5120640"/>
-                <a:gridCol w="2011680"/>
-                <a:gridCol w="3017520"/>
+                <a:gridCol w="5760720"/>
+                <a:gridCol w="5303520"/>
               </a:tblGrid>
               <a:tr h="502920">
                 <a:tc>
@@ -20364,17 +19650,17 @@
                     <a:p>
                       <a:pPr algn="ctr"/>
                       <a:r>
-                        <a:rPr sz="1400" b="1" i="0">
+                        <a:rPr sz="1300" b="1">
                           <a:solidFill>
                             <a:srgbClr val="FFFFFF"/>
                           </a:solidFill>
                           <a:latin typeface="Calibri"/>
                         </a:rPr>
-                        <a:t>Sprint</a:t>
+                        <a:t>Stage</a:t>
                       </a:r>
                     </a:p>
                   </a:txBody>
-                  <a:tcPr anchor="ctr" marL="73152" marR="73152">
+                  <a:tcPr anchor="ctr">
                     <a:solidFill>
                       <a:srgbClr val="144E4C"/>
                     </a:solidFill>
@@ -20387,63 +19673,17 @@
                     <a:p>
                       <a:pPr algn="ctr"/>
                       <a:r>
-                        <a:rPr sz="1400" b="1" i="0">
+                        <a:rPr sz="1300" b="1">
                           <a:solidFill>
                             <a:srgbClr val="FFFFFF"/>
                           </a:solidFill>
                           <a:latin typeface="Calibri"/>
                         </a:rPr>
-                        <a:t>Focus</a:t>
+                        <a:t>Schedule / Status</a:t>
                       </a:r>
                     </a:p>
                   </a:txBody>
-                  <a:tcPr anchor="ctr" marL="73152" marR="73152">
-                    <a:solidFill>
-                      <a:srgbClr val="144E4C"/>
-                    </a:solidFill>
-                  </a:tcPr>
-                </a:tc>
-                <a:tc>
-                  <a:txBody>
-                    <a:bodyPr/>
-                    <a:lstStyle/>
-                    <a:p>
-                      <a:pPr algn="ctr"/>
-                      <a:r>
-                        <a:rPr sz="1400" b="1" i="0">
-                          <a:solidFill>
-                            <a:srgbClr val="FFFFFF"/>
-                          </a:solidFill>
-                          <a:latin typeface="Calibri"/>
-                        </a:rPr>
-                        <a:t>Weeks</a:t>
-                      </a:r>
-                    </a:p>
-                  </a:txBody>
-                  <a:tcPr anchor="ctr" marL="73152" marR="73152">
-                    <a:solidFill>
-                      <a:srgbClr val="144E4C"/>
-                    </a:solidFill>
-                  </a:tcPr>
-                </a:tc>
-                <a:tc>
-                  <a:txBody>
-                    <a:bodyPr/>
-                    <a:lstStyle/>
-                    <a:p>
-                      <a:pPr algn="ctr"/>
-                      <a:r>
-                        <a:rPr sz="1400" b="1" i="0">
-                          <a:solidFill>
-                            <a:srgbClr val="FFFFFF"/>
-                          </a:solidFill>
-                          <a:latin typeface="Calibri"/>
-                        </a:rPr>
-                        <a:t>Owner</a:t>
-                      </a:r>
-                    </a:p>
-                  </a:txBody>
-                  <a:tcPr anchor="ctr" marL="73152" marR="73152">
+                  <a:tcPr anchor="ctr">
                     <a:solidFill>
                       <a:srgbClr val="144E4C"/>
                     </a:solidFill>
@@ -20458,17 +19698,17 @@
                     <a:p>
                       <a:pPr algn="ctr"/>
                       <a:r>
-                        <a:rPr sz="1300" b="0" i="0">
+                        <a:rPr sz="1200" b="0">
                           <a:solidFill>
                             <a:srgbClr val="1F2937"/>
                           </a:solidFill>
                           <a:latin typeface="Calibri"/>
                         </a:rPr>
-                        <a:t>S1</a:t>
+                        <a:t>Audit / Split</a:t>
                       </a:r>
                     </a:p>
                   </a:txBody>
-                  <a:tcPr anchor="ctr" marL="73152" marR="73152">
+                  <a:tcPr anchor="ctr">
                     <a:solidFill>
                       <a:srgbClr val="FFFFFF"/>
                     </a:solidFill>
@@ -20481,63 +19721,17 @@
                     <a:p>
                       <a:pPr algn="ctr"/>
                       <a:r>
-                        <a:rPr sz="1300" b="0" i="0">
+                        <a:rPr sz="1200" b="0">
                           <a:solidFill>
                             <a:srgbClr val="1F2937"/>
                           </a:solidFill>
                           <a:latin typeface="Calibri"/>
                         </a:rPr>
-                        <a:t>Data Preparation And Requirements</a:t>
+                        <a:t>Completed</a:t>
                       </a:r>
                     </a:p>
                   </a:txBody>
-                  <a:tcPr anchor="ctr" marL="73152" marR="73152">
-                    <a:solidFill>
-                      <a:srgbClr val="FFFFFF"/>
-                    </a:solidFill>
-                  </a:tcPr>
-                </a:tc>
-                <a:tc>
-                  <a:txBody>
-                    <a:bodyPr/>
-                    <a:lstStyle/>
-                    <a:p>
-                      <a:pPr algn="ctr"/>
-                      <a:r>
-                        <a:rPr sz="1300" b="0" i="0">
-                          <a:solidFill>
-                            <a:srgbClr val="1F2937"/>
-                          </a:solidFill>
-                          <a:latin typeface="Calibri"/>
-                        </a:rPr>
-                        <a:t>1–2</a:t>
-                      </a:r>
-                    </a:p>
-                  </a:txBody>
-                  <a:tcPr anchor="ctr" marL="73152" marR="73152">
-                    <a:solidFill>
-                      <a:srgbClr val="FFFFFF"/>
-                    </a:solidFill>
-                  </a:tcPr>
-                </a:tc>
-                <a:tc>
-                  <a:txBody>
-                    <a:bodyPr/>
-                    <a:lstStyle/>
-                    <a:p>
-                      <a:pPr algn="ctr"/>
-                      <a:r>
-                        <a:rPr sz="1300" b="0" i="0">
-                          <a:solidFill>
-                            <a:srgbClr val="1F2937"/>
-                          </a:solidFill>
-                          <a:latin typeface="Calibri"/>
-                        </a:rPr>
-                        <a:t>Riya, Labib</a:t>
-                      </a:r>
-                    </a:p>
-                  </a:txBody>
-                  <a:tcPr anchor="ctr" marL="73152" marR="73152">
+                  <a:tcPr anchor="ctr">
                     <a:solidFill>
                       <a:srgbClr val="FFFFFF"/>
                     </a:solidFill>
@@ -20552,17 +19746,17 @@
                     <a:p>
                       <a:pPr algn="ctr"/>
                       <a:r>
-                        <a:rPr sz="1300" b="0" i="0">
+                        <a:rPr sz="1200" b="0">
                           <a:solidFill>
                             <a:srgbClr val="1F2937"/>
                           </a:solidFill>
                           <a:latin typeface="Calibri"/>
                         </a:rPr>
-                        <a:t>S2</a:t>
+                        <a:t>Reproduction</a:t>
                       </a:r>
                     </a:p>
                   </a:txBody>
-                  <a:tcPr anchor="ctr" marL="73152" marR="73152">
+                  <a:tcPr anchor="ctr">
                     <a:solidFill>
                       <a:srgbClr val="EFEAD9"/>
                     </a:solidFill>
@@ -20575,63 +19769,17 @@
                     <a:p>
                       <a:pPr algn="ctr"/>
                       <a:r>
-                        <a:rPr sz="1300" b="0" i="0">
+                        <a:rPr sz="1200" b="0">
                           <a:solidFill>
                             <a:srgbClr val="1F2937"/>
                           </a:solidFill>
                           <a:latin typeface="Calibri"/>
                         </a:rPr>
-                        <a:t>Setup And Preprocessing</a:t>
+                        <a:t>Weeks 1–2</a:t>
                       </a:r>
                     </a:p>
                   </a:txBody>
-                  <a:tcPr anchor="ctr" marL="73152" marR="73152">
-                    <a:solidFill>
-                      <a:srgbClr val="EFEAD9"/>
-                    </a:solidFill>
-                  </a:tcPr>
-                </a:tc>
-                <a:tc>
-                  <a:txBody>
-                    <a:bodyPr/>
-                    <a:lstStyle/>
-                    <a:p>
-                      <a:pPr algn="ctr"/>
-                      <a:r>
-                        <a:rPr sz="1300" b="0" i="0">
-                          <a:solidFill>
-                            <a:srgbClr val="1F2937"/>
-                          </a:solidFill>
-                          <a:latin typeface="Calibri"/>
-                        </a:rPr>
-                        <a:t>3–4</a:t>
-                      </a:r>
-                    </a:p>
-                  </a:txBody>
-                  <a:tcPr anchor="ctr" marL="73152" marR="73152">
-                    <a:solidFill>
-                      <a:srgbClr val="EFEAD9"/>
-                    </a:solidFill>
-                  </a:tcPr>
-                </a:tc>
-                <a:tc>
-                  <a:txBody>
-                    <a:bodyPr/>
-                    <a:lstStyle/>
-                    <a:p>
-                      <a:pPr algn="ctr"/>
-                      <a:r>
-                        <a:rPr sz="1300" b="0" i="0">
-                          <a:solidFill>
-                            <a:srgbClr val="1F2937"/>
-                          </a:solidFill>
-                          <a:latin typeface="Calibri"/>
-                        </a:rPr>
-                        <a:t>Zahin, Riya</a:t>
-                      </a:r>
-                    </a:p>
-                  </a:txBody>
-                  <a:tcPr anchor="ctr" marL="73152" marR="73152">
+                  <a:tcPr anchor="ctr">
                     <a:solidFill>
                       <a:srgbClr val="EFEAD9"/>
                     </a:solidFill>
@@ -20646,17 +19794,17 @@
                     <a:p>
                       <a:pPr algn="ctr"/>
                       <a:r>
-                        <a:rPr sz="1300" b="0" i="0">
+                        <a:rPr sz="1200" b="0">
                           <a:solidFill>
                             <a:srgbClr val="1F2937"/>
                           </a:solidFill>
                           <a:latin typeface="Calibri"/>
                         </a:rPr>
-                        <a:t>S3</a:t>
+                        <a:t>Segmentation</a:t>
                       </a:r>
                     </a:p>
                   </a:txBody>
-                  <a:tcPr anchor="ctr" marL="73152" marR="73152">
+                  <a:tcPr anchor="ctr">
                     <a:solidFill>
                       <a:srgbClr val="FFFFFF"/>
                     </a:solidFill>
@@ -20669,63 +19817,17 @@
                     <a:p>
                       <a:pPr algn="ctr"/>
                       <a:r>
-                        <a:rPr sz="1300" b="0" i="0">
+                        <a:rPr sz="1200" b="0">
                           <a:solidFill>
                             <a:srgbClr val="1F2937"/>
                           </a:solidFill>
                           <a:latin typeface="Calibri"/>
                         </a:rPr>
-                        <a:t>Defect Detection</a:t>
+                        <a:t>Weeks 3–10</a:t>
                       </a:r>
                     </a:p>
                   </a:txBody>
-                  <a:tcPr anchor="ctr" marL="73152" marR="73152">
-                    <a:solidFill>
-                      <a:srgbClr val="FFFFFF"/>
-                    </a:solidFill>
-                  </a:tcPr>
-                </a:tc>
-                <a:tc>
-                  <a:txBody>
-                    <a:bodyPr/>
-                    <a:lstStyle/>
-                    <a:p>
-                      <a:pPr algn="ctr"/>
-                      <a:r>
-                        <a:rPr sz="1300" b="0" i="0">
-                          <a:solidFill>
-                            <a:srgbClr val="1F2937"/>
-                          </a:solidFill>
-                          <a:latin typeface="Calibri"/>
-                        </a:rPr>
-                        <a:t>5–6</a:t>
-                      </a:r>
-                    </a:p>
-                  </a:txBody>
-                  <a:tcPr anchor="ctr" marL="73152" marR="73152">
-                    <a:solidFill>
-                      <a:srgbClr val="FFFFFF"/>
-                    </a:solidFill>
-                  </a:tcPr>
-                </a:tc>
-                <a:tc>
-                  <a:txBody>
-                    <a:bodyPr/>
-                    <a:lstStyle/>
-                    <a:p>
-                      <a:pPr algn="ctr"/>
-                      <a:r>
-                        <a:rPr sz="1300" b="0" i="0">
-                          <a:solidFill>
-                            <a:srgbClr val="1F2937"/>
-                          </a:solidFill>
-                          <a:latin typeface="Calibri"/>
-                        </a:rPr>
-                        <a:t>Zahin</a:t>
-                      </a:r>
-                    </a:p>
-                  </a:txBody>
-                  <a:tcPr anchor="ctr" marL="73152" marR="73152">
+                  <a:tcPr anchor="ctr">
                     <a:solidFill>
                       <a:srgbClr val="FFFFFF"/>
                     </a:solidFill>
@@ -20740,17 +19842,17 @@
                     <a:p>
                       <a:pPr algn="ctr"/>
                       <a:r>
-                        <a:rPr sz="1300" b="0" i="0">
+                        <a:rPr sz="1200" b="0">
                           <a:solidFill>
                             <a:srgbClr val="1F2937"/>
                           </a:solidFill>
                           <a:latin typeface="Calibri"/>
                         </a:rPr>
-                        <a:t>S4</a:t>
+                        <a:t>Anomaly Detection</a:t>
                       </a:r>
                     </a:p>
                   </a:txBody>
-                  <a:tcPr anchor="ctr" marL="73152" marR="73152">
+                  <a:tcPr anchor="ctr">
                     <a:solidFill>
                       <a:srgbClr val="EFEAD9"/>
                     </a:solidFill>
@@ -20763,63 +19865,17 @@
                     <a:p>
                       <a:pPr algn="ctr"/>
                       <a:r>
-                        <a:rPr sz="1300" b="0" i="0">
+                        <a:rPr sz="1200" b="0">
                           <a:solidFill>
                             <a:srgbClr val="1F2937"/>
                           </a:solidFill>
                           <a:latin typeface="Calibri"/>
                         </a:rPr>
-                        <a:t>Anomaly Detection And Metadata</a:t>
+                        <a:t>Weeks 8–14</a:t>
                       </a:r>
                     </a:p>
                   </a:txBody>
-                  <a:tcPr anchor="ctr" marL="73152" marR="73152">
-                    <a:solidFill>
-                      <a:srgbClr val="EFEAD9"/>
-                    </a:solidFill>
-                  </a:tcPr>
-                </a:tc>
-                <a:tc>
-                  <a:txBody>
-                    <a:bodyPr/>
-                    <a:lstStyle/>
-                    <a:p>
-                      <a:pPr algn="ctr"/>
-                      <a:r>
-                        <a:rPr sz="1300" b="0" i="0">
-                          <a:solidFill>
-                            <a:srgbClr val="1F2937"/>
-                          </a:solidFill>
-                          <a:latin typeface="Calibri"/>
-                        </a:rPr>
-                        <a:t>7–8</a:t>
-                      </a:r>
-                    </a:p>
-                  </a:txBody>
-                  <a:tcPr anchor="ctr" marL="73152" marR="73152">
-                    <a:solidFill>
-                      <a:srgbClr val="EFEAD9"/>
-                    </a:solidFill>
-                  </a:tcPr>
-                </a:tc>
-                <a:tc>
-                  <a:txBody>
-                    <a:bodyPr/>
-                    <a:lstStyle/>
-                    <a:p>
-                      <a:pPr algn="ctr"/>
-                      <a:r>
-                        <a:rPr sz="1300" b="0" i="0">
-                          <a:solidFill>
-                            <a:srgbClr val="1F2937"/>
-                          </a:solidFill>
-                          <a:latin typeface="Calibri"/>
-                        </a:rPr>
-                        <a:t>Amin, Niloy</a:t>
-                      </a:r>
-                    </a:p>
-                  </a:txBody>
-                  <a:tcPr anchor="ctr" marL="73152" marR="73152">
+                  <a:tcPr anchor="ctr">
                     <a:solidFill>
                       <a:srgbClr val="EFEAD9"/>
                     </a:solidFill>
@@ -20834,17 +19890,17 @@
                     <a:p>
                       <a:pPr algn="ctr"/>
                       <a:r>
-                        <a:rPr sz="1300" b="0" i="0">
+                        <a:rPr sz="1200" b="0">
                           <a:solidFill>
                             <a:srgbClr val="1F2937"/>
                           </a:solidFill>
                           <a:latin typeface="Calibri"/>
                         </a:rPr>
-                        <a:t>S5</a:t>
+                        <a:t>Lead-Time Planning</a:t>
                       </a:r>
                     </a:p>
                   </a:txBody>
-                  <a:tcPr anchor="ctr" marL="73152" marR="73152">
+                  <a:tcPr anchor="ctr">
                     <a:solidFill>
                       <a:srgbClr val="FFFFFF"/>
                     </a:solidFill>
@@ -20857,63 +19913,17 @@
                     <a:p>
                       <a:pPr algn="ctr"/>
                       <a:r>
-                        <a:rPr sz="1300" b="0" i="0">
+                        <a:rPr sz="1200" b="0">
                           <a:solidFill>
                             <a:srgbClr val="1F2937"/>
                           </a:solidFill>
                           <a:latin typeface="Calibri"/>
                         </a:rPr>
-                        <a:t>Lead-Time Prediction</a:t>
+                        <a:t>Weeks 12–18</a:t>
                       </a:r>
                     </a:p>
                   </a:txBody>
-                  <a:tcPr anchor="ctr" marL="73152" marR="73152">
-                    <a:solidFill>
-                      <a:srgbClr val="FFFFFF"/>
-                    </a:solidFill>
-                  </a:tcPr>
-                </a:tc>
-                <a:tc>
-                  <a:txBody>
-                    <a:bodyPr/>
-                    <a:lstStyle/>
-                    <a:p>
-                      <a:pPr algn="ctr"/>
-                      <a:r>
-                        <a:rPr sz="1300" b="0" i="0">
-                          <a:solidFill>
-                            <a:srgbClr val="1F2937"/>
-                          </a:solidFill>
-                          <a:latin typeface="Calibri"/>
-                        </a:rPr>
-                        <a:t>9–10</a:t>
-                      </a:r>
-                    </a:p>
-                  </a:txBody>
-                  <a:tcPr anchor="ctr" marL="73152" marR="73152">
-                    <a:solidFill>
-                      <a:srgbClr val="FFFFFF"/>
-                    </a:solidFill>
-                  </a:tcPr>
-                </a:tc>
-                <a:tc>
-                  <a:txBody>
-                    <a:bodyPr/>
-                    <a:lstStyle/>
-                    <a:p>
-                      <a:pPr algn="ctr"/>
-                      <a:r>
-                        <a:rPr sz="1300" b="0" i="0">
-                          <a:solidFill>
-                            <a:srgbClr val="1F2937"/>
-                          </a:solidFill>
-                          <a:latin typeface="Calibri"/>
-                        </a:rPr>
-                        <a:t>Zahin</a:t>
-                      </a:r>
-                    </a:p>
-                  </a:txBody>
-                  <a:tcPr anchor="ctr" marL="73152" marR="73152">
+                  <a:tcPr anchor="ctr">
                     <a:solidFill>
                       <a:srgbClr val="FFFFFF"/>
                     </a:solidFill>
@@ -20928,17 +19938,17 @@
                     <a:p>
                       <a:pPr algn="ctr"/>
                       <a:r>
-                        <a:rPr sz="1300" b="0" i="0">
+                        <a:rPr sz="1200" b="0">
                           <a:solidFill>
                             <a:srgbClr val="1F2937"/>
                           </a:solidFill>
                           <a:latin typeface="Calibri"/>
                         </a:rPr>
-                        <a:t>S6</a:t>
+                        <a:t>Edge Deployment</a:t>
                       </a:r>
                     </a:p>
                   </a:txBody>
-                  <a:tcPr anchor="ctr" marL="73152" marR="73152">
+                  <a:tcPr anchor="ctr">
                     <a:solidFill>
                       <a:srgbClr val="EFEAD9"/>
                     </a:solidFill>
@@ -20951,63 +19961,17 @@
                     <a:p>
                       <a:pPr algn="ctr"/>
                       <a:r>
-                        <a:rPr sz="1300" b="0" i="0">
+                        <a:rPr sz="1200" b="0">
                           <a:solidFill>
                             <a:srgbClr val="1F2937"/>
                           </a:solidFill>
                           <a:latin typeface="Calibri"/>
                         </a:rPr>
-                        <a:t>Dashboard Development</a:t>
+                        <a:t>Weeks 16–24</a:t>
                       </a:r>
                     </a:p>
                   </a:txBody>
-                  <a:tcPr anchor="ctr" marL="73152" marR="73152">
-                    <a:solidFill>
-                      <a:srgbClr val="EFEAD9"/>
-                    </a:solidFill>
-                  </a:tcPr>
-                </a:tc>
-                <a:tc>
-                  <a:txBody>
-                    <a:bodyPr/>
-                    <a:lstStyle/>
-                    <a:p>
-                      <a:pPr algn="ctr"/>
-                      <a:r>
-                        <a:rPr sz="1300" b="0" i="0">
-                          <a:solidFill>
-                            <a:srgbClr val="1F2937"/>
-                          </a:solidFill>
-                          <a:latin typeface="Calibri"/>
-                        </a:rPr>
-                        <a:t>11–12</a:t>
-                      </a:r>
-                    </a:p>
-                  </a:txBody>
-                  <a:tcPr anchor="ctr" marL="73152" marR="73152">
-                    <a:solidFill>
-                      <a:srgbClr val="EFEAD9"/>
-                    </a:solidFill>
-                  </a:tcPr>
-                </a:tc>
-                <a:tc>
-                  <a:txBody>
-                    <a:bodyPr/>
-                    <a:lstStyle/>
-                    <a:p>
-                      <a:pPr algn="ctr"/>
-                      <a:r>
-                        <a:rPr sz="1300" b="0" i="0">
-                          <a:solidFill>
-                            <a:srgbClr val="1F2937"/>
-                          </a:solidFill>
-                          <a:latin typeface="Calibri"/>
-                        </a:rPr>
-                        <a:t>Niloy</a:t>
-                      </a:r>
-                    </a:p>
-                  </a:txBody>
-                  <a:tcPr anchor="ctr" marL="73152" marR="73152">
+                  <a:tcPr anchor="ctr">
                     <a:solidFill>
                       <a:srgbClr val="EFEAD9"/>
                     </a:solidFill>
@@ -21022,17 +19986,17 @@
                     <a:p>
                       <a:pPr algn="ctr"/>
                       <a:r>
-                        <a:rPr sz="1300" b="0" i="0">
+                        <a:rPr sz="1200" b="0">
                           <a:solidFill>
                             <a:srgbClr val="1F2937"/>
                           </a:solidFill>
                           <a:latin typeface="Calibri"/>
                         </a:rPr>
-                        <a:t>S7</a:t>
+                        <a:t>Testing And Evaluation</a:t>
                       </a:r>
                     </a:p>
                   </a:txBody>
-                  <a:tcPr anchor="ctr" marL="73152" marR="73152">
+                  <a:tcPr anchor="ctr">
                     <a:solidFill>
                       <a:srgbClr val="FFFFFF"/>
                     </a:solidFill>
@@ -21045,63 +20009,17 @@
                     <a:p>
                       <a:pPr algn="ctr"/>
                       <a:r>
-                        <a:rPr sz="1300" b="0" i="0">
+                        <a:rPr sz="1200" b="0">
                           <a:solidFill>
                             <a:srgbClr val="1F2937"/>
                           </a:solidFill>
                           <a:latin typeface="Calibri"/>
                         </a:rPr>
-                        <a:t>Deployment, Testing And Documentation</a:t>
+                        <a:t>Weeks 24–28</a:t>
                       </a:r>
                     </a:p>
                   </a:txBody>
-                  <a:tcPr anchor="ctr" marL="73152" marR="73152">
-                    <a:solidFill>
-                      <a:srgbClr val="FFFFFF"/>
-                    </a:solidFill>
-                  </a:tcPr>
-                </a:tc>
-                <a:tc>
-                  <a:txBody>
-                    <a:bodyPr/>
-                    <a:lstStyle/>
-                    <a:p>
-                      <a:pPr algn="ctr"/>
-                      <a:r>
-                        <a:rPr sz="1300" b="0" i="0">
-                          <a:solidFill>
-                            <a:srgbClr val="1F2937"/>
-                          </a:solidFill>
-                          <a:latin typeface="Calibri"/>
-                        </a:rPr>
-                        <a:t>13–14</a:t>
-                      </a:r>
-                    </a:p>
-                  </a:txBody>
-                  <a:tcPr anchor="ctr" marL="73152" marR="73152">
-                    <a:solidFill>
-                      <a:srgbClr val="FFFFFF"/>
-                    </a:solidFill>
-                  </a:tcPr>
-                </a:tc>
-                <a:tc>
-                  <a:txBody>
-                    <a:bodyPr/>
-                    <a:lstStyle/>
-                    <a:p>
-                      <a:pPr algn="ctr"/>
-                      <a:r>
-                        <a:rPr sz="1300" b="0" i="0">
-                          <a:solidFill>
-                            <a:srgbClr val="1F2937"/>
-                          </a:solidFill>
-                          <a:latin typeface="Calibri"/>
-                        </a:rPr>
-                        <a:t>Labib, Murad, Riya</a:t>
-                      </a:r>
-                    </a:p>
-                  </a:txBody>
-                  <a:tcPr anchor="ctr" marL="73152" marR="73152">
+                  <a:tcPr anchor="ctr">
                     <a:solidFill>
                       <a:srgbClr val="FFFFFF"/>
                     </a:solidFill>
@@ -21116,17 +20034,17 @@
                     <a:p>
                       <a:pPr algn="ctr"/>
                       <a:r>
-                        <a:rPr sz="1300" b="0" i="0">
+                        <a:rPr sz="1200" b="0">
                           <a:solidFill>
                             <a:srgbClr val="1F2937"/>
                           </a:solidFill>
                           <a:latin typeface="Calibri"/>
                         </a:rPr>
-                        <a:t>S8</a:t>
+                        <a:t>Documentation And Write-Up</a:t>
                       </a:r>
                     </a:p>
                   </a:txBody>
-                  <a:tcPr anchor="ctr" marL="73152" marR="73152">
+                  <a:tcPr anchor="ctr">
                     <a:solidFill>
                       <a:srgbClr val="EFEAD9"/>
                     </a:solidFill>
@@ -21139,63 +20057,17 @@
                     <a:p>
                       <a:pPr algn="ctr"/>
                       <a:r>
-                        <a:rPr sz="1300" b="0" i="0">
+                        <a:rPr sz="1200" b="0">
                           <a:solidFill>
                             <a:srgbClr val="1F2937"/>
                           </a:solidFill>
                           <a:latin typeface="Calibri"/>
                         </a:rPr>
-                        <a:t>Final Integration And Presentation</a:t>
+                        <a:t>Weeks 24–32</a:t>
                       </a:r>
                     </a:p>
                   </a:txBody>
-                  <a:tcPr anchor="ctr" marL="73152" marR="73152">
-                    <a:solidFill>
-                      <a:srgbClr val="EFEAD9"/>
-                    </a:solidFill>
-                  </a:tcPr>
-                </a:tc>
-                <a:tc>
-                  <a:txBody>
-                    <a:bodyPr/>
-                    <a:lstStyle/>
-                    <a:p>
-                      <a:pPr algn="ctr"/>
-                      <a:r>
-                        <a:rPr sz="1300" b="0" i="0">
-                          <a:solidFill>
-                            <a:srgbClr val="1F2937"/>
-                          </a:solidFill>
-                          <a:latin typeface="Calibri"/>
-                        </a:rPr>
-                        <a:t>15–16</a:t>
-                      </a:r>
-                    </a:p>
-                  </a:txBody>
-                  <a:tcPr anchor="ctr" marL="73152" marR="73152">
-                    <a:solidFill>
-                      <a:srgbClr val="EFEAD9"/>
-                    </a:solidFill>
-                  </a:tcPr>
-                </a:tc>
-                <a:tc>
-                  <a:txBody>
-                    <a:bodyPr/>
-                    <a:lstStyle/>
-                    <a:p>
-                      <a:pPr algn="ctr"/>
-                      <a:r>
-                        <a:rPr sz="1300" b="0" i="0">
-                          <a:solidFill>
-                            <a:srgbClr val="1F2937"/>
-                          </a:solidFill>
-                          <a:latin typeface="Calibri"/>
-                        </a:rPr>
-                        <a:t>All</a:t>
-                      </a:r>
-                    </a:p>
-                  </a:txBody>
-                  <a:tcPr anchor="ctr" marL="73152" marR="73152">
+                  <a:tcPr anchor="ctr">
                     <a:solidFill>
                       <a:srgbClr val="EFEAD9"/>
                     </a:solidFill>
@@ -21206,41 +20078,6 @@
           </a:graphicData>
         </a:graphic>
       </p:graphicFrame>
-      <p:sp>
-        <p:nvSpPr>
-          <p:cNvPr id="8" name="TextBox 7"/>
-          <p:cNvSpPr txBox="1"/>
-          <p:nvPr/>
-        </p:nvSpPr>
-        <p:spPr>
-          <a:xfrm>
-            <a:off x="548640" y="5806440"/>
-            <a:ext cx="11064240" cy="457200"/>
-          </a:xfrm>
-          <a:prstGeom prst="rect">
-            <a:avLst/>
-          </a:prstGeom>
-          <a:noFill/>
-        </p:spPr>
-        <p:txBody>
-          <a:bodyPr wrap="square" anchor="ctr">
-            <a:spAutoFit/>
-          </a:bodyPr>
-          <a:lstStyle/>
-          <a:p>
-            <a:pPr algn="ctr"/>
-            <a:r>
-              <a:rPr sz="1300" b="0" i="0">
-                <a:solidFill>
-                  <a:srgbClr val="5B6570"/>
-                </a:solidFill>
-                <a:latin typeface="Calibri"/>
-              </a:rPr>
-              <a:t>Audit / Split (Done) → Reproduction → Segmentation → Anomaly → Planning → Edge → Write-Up, Over 32 Weeks.</a:t>
-            </a:r>
-          </a:p>
-        </p:txBody>
-      </p:sp>
     </p:spTree>
   </p:cSld>
   <p:clrMapOvr>
@@ -21255,7 +20092,7 @@
     <p:bg>
       <p:bgPr>
         <a:solidFill>
-          <a:srgbClr val="FAF7EF"/>
+          <a:srgbClr val="FAE7EF"/>
         </a:solidFill>
         <a:effectLst/>
       </p:bgPr>
@@ -21269,36 +20106,22 @@
       <p:grpSpPr/>
       <p:sp>
         <p:nvSpPr>
-          <p:cNvPr id="2" name="TextBox 1"/>
-          <p:cNvSpPr txBox="1"/>
-          <p:nvPr/>
-        </p:nvSpPr>
-        <p:spPr>
-          <a:xfrm>
-            <a:off x="548640" y="6419088"/>
-            <a:ext cx="9144000" cy="274320"/>
-          </a:xfrm>
-          <a:prstGeom prst="rect">
-            <a:avLst/>
-          </a:prstGeom>
-          <a:noFill/>
-        </p:spPr>
-        <p:txBody>
-          <a:bodyPr wrap="square">
-            <a:spAutoFit/>
-          </a:bodyPr>
-          <a:lstStyle/>
-          <a:p>
-            <a:pPr algn="l"/>
-            <a:r>
-              <a:rPr sz="900" b="0" i="0">
-                <a:solidFill>
-                  <a:srgbClr val="8A8F98"/>
-                </a:solidFill>
-                <a:latin typeface="Calibri"/>
-              </a:rPr>
-              <a:t>Defect-to-Delivery  |  FYDP-I  •  Group: 262-034</a:t>
-            </a:r>
+          <p:cNvPr id="2" name="Title 1"/>
+          <p:cNvSpPr>
+            <a:spLocks noGrp="1"/>
+          </p:cNvSpPr>
+          <p:nvPr>
+            <p:ph type="title"/>
+          </p:nvPr>
+        </p:nvSpPr>
+        <p:spPr/>
+        <p:txBody>
+          <a:bodyPr/>
+          <a:lstStyle/>
+          <a:p>
+            <a:pPr>
+              <a:defRPr/>
+            </a:pPr>
           </a:p>
         </p:txBody>
       </p:sp>
@@ -21310,8 +20133,8 @@
         </p:nvSpPr>
         <p:spPr>
           <a:xfrm>
-            <a:off x="10972800" y="6419088"/>
-            <a:ext cx="640080" cy="274320"/>
+            <a:off x="548640" y="320040"/>
+            <a:ext cx="11064240" cy="822960"/>
           </a:xfrm>
           <a:prstGeom prst="rect">
             <a:avLst/>
@@ -21324,292 +20147,926 @@
           </a:bodyPr>
           <a:lstStyle/>
           <a:p>
-            <a:pPr algn="r"/>
-            <a:r>
-              <a:rPr sz="900">
-                <a:solidFill>
-                  <a:srgbClr val="8A8F98"/>
-                </a:solidFill>
-                <a:latin typeface="Calibri"/>
-              </a:rPr>
-              <a:t>27 / 30</a:t>
-            </a:r>
-          </a:p>
-        </p:txBody>
-      </p:sp>
-      <p:sp>
-        <p:nvSpPr>
-          <p:cNvPr id="4" name="Rectangle 3"/>
-          <p:cNvSpPr/>
-          <p:nvPr/>
-        </p:nvSpPr>
-        <p:spPr>
-          <a:xfrm>
-            <a:off x="0" y="0"/>
-            <a:ext cx="12188952" cy="64008"/>
+            <a:pPr algn="l">
+              <a:defRPr sz="3400" b="1">
+                <a:solidFill>
+                  <a:srgbClr val="144E4C"/>
+                </a:solidFill>
+                <a:latin typeface="Georgia"/>
+              </a:defRPr>
+            </a:pPr>
+            <a:r>
+              <a:rPr sz="3400" b="1">
+                <a:solidFill>
+                  <a:srgbClr val="144E4C"/>
+                </a:solidFill>
+                <a:latin typeface="Georgia"/>
+              </a:rPr>
+              <a:t>Complex Engineering Problem (Tables 5.2, 5.3)</a:t>
+            </a:r>
+          </a:p>
+        </p:txBody>
+      </p:sp>
+      <p:graphicFrame>
+        <p:nvGraphicFramePr>
+          <p:cNvPr id="4" name="Table 3"/>
+          <p:cNvGraphicFramePr>
+            <a:graphicFrameLocks noGrp="1"/>
+          </p:cNvGraphicFramePr>
+          <p:nvPr/>
+        </p:nvGraphicFramePr>
+        <p:xfrm>
+          <a:off x="548640" y="1325880"/>
+          <a:ext cx="11064240" cy="1508760"/>
+        </p:xfrm>
+        <a:graphic>
+          <a:graphicData uri="http://schemas.openxmlformats.org/drawingml/2006/table">
+            <a:tbl>
+              <a:tblPr firstRow="1" bandRow="1">
+                <a:tableStyleId>{5C22544A-7EE6-4342-B048-85BDC9FD1C3A}</a:tableStyleId>
+              </a:tblPr>
+              <a:tblGrid>
+                <a:gridCol w="1580605"/>
+                <a:gridCol w="1580605"/>
+                <a:gridCol w="1580605"/>
+                <a:gridCol w="1580605"/>
+                <a:gridCol w="1580605"/>
+                <a:gridCol w="1580605"/>
+                <a:gridCol w="1580610"/>
+              </a:tblGrid>
+              <a:tr h="502920">
+                <a:tc>
+                  <a:txBody>
+                    <a:bodyPr/>
+                    <a:lstStyle/>
+                    <a:p>
+                      <a:pPr algn="ctr"/>
+                      <a:r>
+                        <a:rPr sz="1300" b="1">
+                          <a:solidFill>
+                            <a:srgbClr val="FFFFFF"/>
+                          </a:solidFill>
+                          <a:latin typeface="Calibri"/>
+                        </a:rPr>
+                        <a:t>P1</a:t>
+                      </a:r>
+                    </a:p>
+                  </a:txBody>
+                  <a:tcPr anchor="ctr">
+                    <a:solidFill>
+                      <a:srgbClr val="144E4C"/>
+                    </a:solidFill>
+                  </a:tcPr>
+                </a:tc>
+                <a:tc>
+                  <a:txBody>
+                    <a:bodyPr/>
+                    <a:lstStyle/>
+                    <a:p>
+                      <a:pPr algn="ctr"/>
+                      <a:r>
+                        <a:rPr sz="1300" b="1">
+                          <a:solidFill>
+                            <a:srgbClr val="FFFFFF"/>
+                          </a:solidFill>
+                          <a:latin typeface="Calibri"/>
+                        </a:rPr>
+                        <a:t>P2</a:t>
+                      </a:r>
+                    </a:p>
+                  </a:txBody>
+                  <a:tcPr anchor="ctr">
+                    <a:solidFill>
+                      <a:srgbClr val="144E4C"/>
+                    </a:solidFill>
+                  </a:tcPr>
+                </a:tc>
+                <a:tc>
+                  <a:txBody>
+                    <a:bodyPr/>
+                    <a:lstStyle/>
+                    <a:p>
+                      <a:pPr algn="ctr"/>
+                      <a:r>
+                        <a:rPr sz="1300" b="1">
+                          <a:solidFill>
+                            <a:srgbClr val="FFFFFF"/>
+                          </a:solidFill>
+                          <a:latin typeface="Calibri"/>
+                        </a:rPr>
+                        <a:t>P3</a:t>
+                      </a:r>
+                    </a:p>
+                  </a:txBody>
+                  <a:tcPr anchor="ctr">
+                    <a:solidFill>
+                      <a:srgbClr val="144E4C"/>
+                    </a:solidFill>
+                  </a:tcPr>
+                </a:tc>
+                <a:tc>
+                  <a:txBody>
+                    <a:bodyPr/>
+                    <a:lstStyle/>
+                    <a:p>
+                      <a:pPr algn="ctr"/>
+                      <a:r>
+                        <a:rPr sz="1300" b="1">
+                          <a:solidFill>
+                            <a:srgbClr val="FFFFFF"/>
+                          </a:solidFill>
+                          <a:latin typeface="Calibri"/>
+                        </a:rPr>
+                        <a:t>P4</a:t>
+                      </a:r>
+                    </a:p>
+                  </a:txBody>
+                  <a:tcPr anchor="ctr">
+                    <a:solidFill>
+                      <a:srgbClr val="144E4C"/>
+                    </a:solidFill>
+                  </a:tcPr>
+                </a:tc>
+                <a:tc>
+                  <a:txBody>
+                    <a:bodyPr/>
+                    <a:lstStyle/>
+                    <a:p>
+                      <a:pPr algn="ctr"/>
+                      <a:r>
+                        <a:rPr sz="1300" b="1">
+                          <a:solidFill>
+                            <a:srgbClr val="FFFFFF"/>
+                          </a:solidFill>
+                          <a:latin typeface="Calibri"/>
+                        </a:rPr>
+                        <a:t>P5</a:t>
+                      </a:r>
+                    </a:p>
+                  </a:txBody>
+                  <a:tcPr anchor="ctr">
+                    <a:solidFill>
+                      <a:srgbClr val="144E4C"/>
+                    </a:solidFill>
+                  </a:tcPr>
+                </a:tc>
+                <a:tc>
+                  <a:txBody>
+                    <a:bodyPr/>
+                    <a:lstStyle/>
+                    <a:p>
+                      <a:pPr algn="ctr"/>
+                      <a:r>
+                        <a:rPr sz="1300" b="1">
+                          <a:solidFill>
+                            <a:srgbClr val="FFFFFF"/>
+                          </a:solidFill>
+                          <a:latin typeface="Calibri"/>
+                        </a:rPr>
+                        <a:t>P6</a:t>
+                      </a:r>
+                    </a:p>
+                  </a:txBody>
+                  <a:tcPr anchor="ctr">
+                    <a:solidFill>
+                      <a:srgbClr val="144E4C"/>
+                    </a:solidFill>
+                  </a:tcPr>
+                </a:tc>
+                <a:tc>
+                  <a:txBody>
+                    <a:bodyPr/>
+                    <a:lstStyle/>
+                    <a:p>
+                      <a:pPr algn="ctr"/>
+                      <a:r>
+                        <a:rPr sz="1300" b="1">
+                          <a:solidFill>
+                            <a:srgbClr val="FFFFFF"/>
+                          </a:solidFill>
+                          <a:latin typeface="Calibri"/>
+                        </a:rPr>
+                        <a:t>P7</a:t>
+                      </a:r>
+                    </a:p>
+                  </a:txBody>
+                  <a:tcPr anchor="ctr">
+                    <a:solidFill>
+                      <a:srgbClr val="144E4C"/>
+                    </a:solidFill>
+                  </a:tcPr>
+                </a:tc>
+              </a:tr>
+              <a:tr h="502920">
+                <a:tc>
+                  <a:txBody>
+                    <a:bodyPr/>
+                    <a:lstStyle/>
+                    <a:p>
+                      <a:pPr algn="ctr"/>
+                      <a:r>
+                        <a:rPr sz="1000" b="0">
+                          <a:solidFill>
+                            <a:srgbClr val="1F2937"/>
+                          </a:solidFill>
+                          <a:latin typeface="Calibri"/>
+                        </a:rPr>
+                        <a:t>Depth Of
+Knowledge</a:t>
+                      </a:r>
+                    </a:p>
+                  </a:txBody>
+                  <a:tcPr anchor="ctr">
+                    <a:solidFill>
+                      <a:srgbClr val="FFFFFF"/>
+                    </a:solidFill>
+                  </a:tcPr>
+                </a:tc>
+                <a:tc>
+                  <a:txBody>
+                    <a:bodyPr/>
+                    <a:lstStyle/>
+                    <a:p>
+                      <a:pPr algn="ctr"/>
+                      <a:r>
+                        <a:rPr sz="1000" b="0">
+                          <a:solidFill>
+                            <a:srgbClr val="1F2937"/>
+                          </a:solidFill>
+                          <a:latin typeface="Calibri"/>
+                        </a:rPr>
+                        <a:t>Conflicting
+Requirements</a:t>
+                      </a:r>
+                    </a:p>
+                  </a:txBody>
+                  <a:tcPr anchor="ctr">
+                    <a:solidFill>
+                      <a:srgbClr val="FFFFFF"/>
+                    </a:solidFill>
+                  </a:tcPr>
+                </a:tc>
+                <a:tc>
+                  <a:txBody>
+                    <a:bodyPr/>
+                    <a:lstStyle/>
+                    <a:p>
+                      <a:pPr algn="ctr"/>
+                      <a:r>
+                        <a:rPr sz="1000" b="0">
+                          <a:solidFill>
+                            <a:srgbClr val="1F2937"/>
+                          </a:solidFill>
+                          <a:latin typeface="Calibri"/>
+                        </a:rPr>
+                        <a:t>Depth Of
+Analysis</a:t>
+                      </a:r>
+                    </a:p>
+                  </a:txBody>
+                  <a:tcPr anchor="ctr">
+                    <a:solidFill>
+                      <a:srgbClr val="FFFFFF"/>
+                    </a:solidFill>
+                  </a:tcPr>
+                </a:tc>
+                <a:tc>
+                  <a:txBody>
+                    <a:bodyPr/>
+                    <a:lstStyle/>
+                    <a:p>
+                      <a:pPr algn="ctr"/>
+                      <a:r>
+                        <a:rPr sz="1000" b="0">
+                          <a:solidFill>
+                            <a:srgbClr val="1F2937"/>
+                          </a:solidFill>
+                          <a:latin typeface="Calibri"/>
+                        </a:rPr>
+                        <a:t>Familiarity
+Of Issues</a:t>
+                      </a:r>
+                    </a:p>
+                  </a:txBody>
+                  <a:tcPr anchor="ctr">
+                    <a:solidFill>
+                      <a:srgbClr val="FFFFFF"/>
+                    </a:solidFill>
+                  </a:tcPr>
+                </a:tc>
+                <a:tc>
+                  <a:txBody>
+                    <a:bodyPr/>
+                    <a:lstStyle/>
+                    <a:p>
+                      <a:pPr algn="ctr"/>
+                      <a:r>
+                        <a:rPr sz="1000" b="0">
+                          <a:solidFill>
+                            <a:srgbClr val="1F2937"/>
+                          </a:solidFill>
+                          <a:latin typeface="Calibri"/>
+                        </a:rPr>
+                        <a:t>Applicable
+Codes</a:t>
+                      </a:r>
+                    </a:p>
+                  </a:txBody>
+                  <a:tcPr anchor="ctr">
+                    <a:solidFill>
+                      <a:srgbClr val="FFFFFF"/>
+                    </a:solidFill>
+                  </a:tcPr>
+                </a:tc>
+                <a:tc>
+                  <a:txBody>
+                    <a:bodyPr/>
+                    <a:lstStyle/>
+                    <a:p>
+                      <a:pPr algn="ctr"/>
+                      <a:r>
+                        <a:rPr sz="1000" b="0">
+                          <a:solidFill>
+                            <a:srgbClr val="1F2937"/>
+                          </a:solidFill>
+                          <a:latin typeface="Calibri"/>
+                        </a:rPr>
+                        <a:t>Stakeholder
+Involvement</a:t>
+                      </a:r>
+                    </a:p>
+                  </a:txBody>
+                  <a:tcPr anchor="ctr">
+                    <a:solidFill>
+                      <a:srgbClr val="FFFFFF"/>
+                    </a:solidFill>
+                  </a:tcPr>
+                </a:tc>
+                <a:tc>
+                  <a:txBody>
+                    <a:bodyPr/>
+                    <a:lstStyle/>
+                    <a:p>
+                      <a:pPr algn="ctr"/>
+                      <a:r>
+                        <a:rPr sz="1000" b="0">
+                          <a:solidFill>
+                            <a:srgbClr val="1F2937"/>
+                          </a:solidFill>
+                          <a:latin typeface="Calibri"/>
+                        </a:rPr>
+                        <a:t>Inter-
+Dependence</a:t>
+                      </a:r>
+                    </a:p>
+                  </a:txBody>
+                  <a:tcPr anchor="ctr">
+                    <a:solidFill>
+                      <a:srgbClr val="FFFFFF"/>
+                    </a:solidFill>
+                  </a:tcPr>
+                </a:tc>
+              </a:tr>
+              <a:tr h="502920">
+                <a:tc>
+                  <a:txBody>
+                    <a:bodyPr/>
+                    <a:lstStyle/>
+                    <a:p>
+                      <a:pPr algn="ctr"/>
+                      <a:r>
+                        <a:rPr sz="1600" b="1">
+                          <a:solidFill>
+                            <a:srgbClr val="144E4C"/>
+                          </a:solidFill>
+                          <a:latin typeface="Calibri"/>
+                        </a:rPr>
+                        <a:t>✓</a:t>
+                      </a:r>
+                    </a:p>
+                  </a:txBody>
+                  <a:tcPr anchor="ctr">
+                    <a:solidFill>
+                      <a:srgbClr val="EFEAD9"/>
+                    </a:solidFill>
+                  </a:tcPr>
+                </a:tc>
+                <a:tc>
+                  <a:txBody>
+                    <a:bodyPr/>
+                    <a:lstStyle/>
+                    <a:p>
+                      <a:pPr algn="ctr"/>
+                      <a:r>
+                        <a:rPr sz="1600" b="1">
+                          <a:solidFill>
+                            <a:srgbClr val="144E4C"/>
+                          </a:solidFill>
+                          <a:latin typeface="Calibri"/>
+                        </a:rPr>
+                        <a:t>✓</a:t>
+                      </a:r>
+                    </a:p>
+                  </a:txBody>
+                  <a:tcPr anchor="ctr">
+                    <a:solidFill>
+                      <a:srgbClr val="EFEAD9"/>
+                    </a:solidFill>
+                  </a:tcPr>
+                </a:tc>
+                <a:tc>
+                  <a:txBody>
+                    <a:bodyPr/>
+                    <a:lstStyle/>
+                    <a:p>
+                      <a:pPr algn="ctr"/>
+                      <a:r>
+                        <a:rPr sz="1600" b="1">
+                          <a:solidFill>
+                            <a:srgbClr val="144E4C"/>
+                          </a:solidFill>
+                          <a:latin typeface="Calibri"/>
+                        </a:rPr>
+                        <a:t>✓</a:t>
+                      </a:r>
+                    </a:p>
+                  </a:txBody>
+                  <a:tcPr anchor="ctr">
+                    <a:solidFill>
+                      <a:srgbClr val="EFEAD9"/>
+                    </a:solidFill>
+                  </a:tcPr>
+                </a:tc>
+                <a:tc>
+                  <a:txBody>
+                    <a:bodyPr/>
+                    <a:lstStyle/>
+                    <a:p>
+                      <a:pPr algn="ctr"/>
+                      <a:r>
+                        <a:rPr sz="1600" b="1">
+                          <a:solidFill>
+                            <a:srgbClr val="144E4C"/>
+                          </a:solidFill>
+                          <a:latin typeface="Calibri"/>
+                        </a:rPr>
+                        <a:t>✗</a:t>
+                      </a:r>
+                    </a:p>
+                  </a:txBody>
+                  <a:tcPr anchor="ctr">
+                    <a:solidFill>
+                      <a:srgbClr val="EFEAD9"/>
+                    </a:solidFill>
+                  </a:tcPr>
+                </a:tc>
+                <a:tc>
+                  <a:txBody>
+                    <a:bodyPr/>
+                    <a:lstStyle/>
+                    <a:p>
+                      <a:pPr algn="ctr"/>
+                      <a:r>
+                        <a:rPr sz="1600" b="1">
+                          <a:solidFill>
+                            <a:srgbClr val="144E4C"/>
+                          </a:solidFill>
+                          <a:latin typeface="Calibri"/>
+                        </a:rPr>
+                        <a:t>✗</a:t>
+                      </a:r>
+                    </a:p>
+                  </a:txBody>
+                  <a:tcPr anchor="ctr">
+                    <a:solidFill>
+                      <a:srgbClr val="EFEAD9"/>
+                    </a:solidFill>
+                  </a:tcPr>
+                </a:tc>
+                <a:tc>
+                  <a:txBody>
+                    <a:bodyPr/>
+                    <a:lstStyle/>
+                    <a:p>
+                      <a:pPr algn="ctr"/>
+                      <a:r>
+                        <a:rPr sz="1600" b="1">
+                          <a:solidFill>
+                            <a:srgbClr val="144E4C"/>
+                          </a:solidFill>
+                          <a:latin typeface="Calibri"/>
+                        </a:rPr>
+                        <a:t>✓</a:t>
+                      </a:r>
+                    </a:p>
+                  </a:txBody>
+                  <a:tcPr anchor="ctr">
+                    <a:solidFill>
+                      <a:srgbClr val="EFEAD9"/>
+                    </a:solidFill>
+                  </a:tcPr>
+                </a:tc>
+                <a:tc>
+                  <a:txBody>
+                    <a:bodyPr/>
+                    <a:lstStyle/>
+                    <a:p>
+                      <a:pPr algn="ctr"/>
+                      <a:r>
+                        <a:rPr sz="1600" b="1">
+                          <a:solidFill>
+                            <a:srgbClr val="144E4C"/>
+                          </a:solidFill>
+                          <a:latin typeface="Calibri"/>
+                        </a:rPr>
+                        <a:t>✓</a:t>
+                      </a:r>
+                    </a:p>
+                  </a:txBody>
+                  <a:tcPr anchor="ctr">
+                    <a:solidFill>
+                      <a:srgbClr val="EFEAD9"/>
+                    </a:solidFill>
+                  </a:tcPr>
+                </a:tc>
+              </a:tr>
+            </a:tbl>
+          </a:graphicData>
+        </a:graphic>
+      </p:graphicFrame>
+      <p:graphicFrame>
+        <p:nvGraphicFramePr>
+          <p:cNvPr id="5" name="Table 4"/>
+          <p:cNvGraphicFramePr>
+            <a:graphicFrameLocks noGrp="1"/>
+          </p:cNvGraphicFramePr>
+          <p:nvPr/>
+        </p:nvGraphicFramePr>
+        <p:xfrm>
+          <a:off x="1463040" y="3063240"/>
+          <a:ext cx="9235440" cy="1051560"/>
+        </p:xfrm>
+        <a:graphic>
+          <a:graphicData uri="http://schemas.openxmlformats.org/drawingml/2006/table">
+            <a:tbl>
+              <a:tblPr firstRow="1" bandRow="1">
+                <a:tableStyleId>{5C22544A-7EE6-4342-B048-85BDC9FD1C3A}</a:tableStyleId>
+              </a:tblPr>
+              <a:tblGrid>
+                <a:gridCol w="1847088"/>
+                <a:gridCol w="1847088"/>
+                <a:gridCol w="1847088"/>
+                <a:gridCol w="1847088"/>
+                <a:gridCol w="1847088"/>
+              </a:tblGrid>
+              <a:tr h="525780">
+                <a:tc>
+                  <a:txBody>
+                    <a:bodyPr/>
+                    <a:lstStyle/>
+                    <a:p>
+                      <a:pPr algn="ctr"/>
+                      <a:r>
+                        <a:rPr sz="1000" b="1">
+                          <a:solidFill>
+                            <a:srgbClr val="FFFFFF"/>
+                          </a:solidFill>
+                          <a:latin typeface="Calibri"/>
+                        </a:rPr>
+                        <a:t>A1: Range Of Resources</a:t>
+                      </a:r>
+                    </a:p>
+                  </a:txBody>
+                  <a:tcPr anchor="ctr">
+                    <a:solidFill>
+                      <a:srgbClr val="144E4C"/>
+                    </a:solidFill>
+                  </a:tcPr>
+                </a:tc>
+                <a:tc>
+                  <a:txBody>
+                    <a:bodyPr/>
+                    <a:lstStyle/>
+                    <a:p>
+                      <a:pPr algn="ctr"/>
+                      <a:r>
+                        <a:rPr sz="1000" b="1">
+                          <a:solidFill>
+                            <a:srgbClr val="FFFFFF"/>
+                          </a:solidFill>
+                          <a:latin typeface="Calibri"/>
+                        </a:rPr>
+                        <a:t>A2: Level Of Interaction</a:t>
+                      </a:r>
+                    </a:p>
+                  </a:txBody>
+                  <a:tcPr anchor="ctr">
+                    <a:solidFill>
+                      <a:srgbClr val="144E4C"/>
+                    </a:solidFill>
+                  </a:tcPr>
+                </a:tc>
+                <a:tc>
+                  <a:txBody>
+                    <a:bodyPr/>
+                    <a:lstStyle/>
+                    <a:p>
+                      <a:pPr algn="ctr"/>
+                      <a:r>
+                        <a:rPr sz="1000" b="1">
+                          <a:solidFill>
+                            <a:srgbClr val="FFFFFF"/>
+                          </a:solidFill>
+                          <a:latin typeface="Calibri"/>
+                        </a:rPr>
+                        <a:t>A3: Innovation</a:t>
+                      </a:r>
+                    </a:p>
+                  </a:txBody>
+                  <a:tcPr anchor="ctr">
+                    <a:solidFill>
+                      <a:srgbClr val="144E4C"/>
+                    </a:solidFill>
+                  </a:tcPr>
+                </a:tc>
+                <a:tc>
+                  <a:txBody>
+                    <a:bodyPr/>
+                    <a:lstStyle/>
+                    <a:p>
+                      <a:pPr algn="ctr"/>
+                      <a:r>
+                        <a:rPr sz="1000" b="1">
+                          <a:solidFill>
+                            <a:srgbClr val="FFFFFF"/>
+                          </a:solidFill>
+                          <a:latin typeface="Calibri"/>
+                        </a:rPr>
+                        <a:t>A4: Consequences For Society And Environment</a:t>
+                      </a:r>
+                    </a:p>
+                  </a:txBody>
+                  <a:tcPr anchor="ctr">
+                    <a:solidFill>
+                      <a:srgbClr val="144E4C"/>
+                    </a:solidFill>
+                  </a:tcPr>
+                </a:tc>
+                <a:tc>
+                  <a:txBody>
+                    <a:bodyPr/>
+                    <a:lstStyle/>
+                    <a:p>
+                      <a:pPr algn="ctr"/>
+                      <a:r>
+                        <a:rPr sz="1000" b="1">
+                          <a:solidFill>
+                            <a:srgbClr val="FFFFFF"/>
+                          </a:solidFill>
+                          <a:latin typeface="Calibri"/>
+                        </a:rPr>
+                        <a:t>A5: Familiarity</a:t>
+                      </a:r>
+                    </a:p>
+                  </a:txBody>
+                  <a:tcPr anchor="ctr">
+                    <a:solidFill>
+                      <a:srgbClr val="144E4C"/>
+                    </a:solidFill>
+                  </a:tcPr>
+                </a:tc>
+              </a:tr>
+              <a:tr h="525780">
+                <a:tc>
+                  <a:txBody>
+                    <a:bodyPr/>
+                    <a:lstStyle/>
+                    <a:p>
+                      <a:pPr algn="ctr"/>
+                      <a:r>
+                        <a:rPr sz="1600" b="1">
+                          <a:solidFill>
+                            <a:srgbClr val="144E4C"/>
+                          </a:solidFill>
+                          <a:latin typeface="Calibri"/>
+                        </a:rPr>
+                        <a:t>✓</a:t>
+                      </a:r>
+                    </a:p>
+                  </a:txBody>
+                  <a:tcPr anchor="ctr">
+                    <a:solidFill>
+                      <a:srgbClr val="EFEAD9"/>
+                    </a:solidFill>
+                  </a:tcPr>
+                </a:tc>
+                <a:tc>
+                  <a:txBody>
+                    <a:bodyPr/>
+                    <a:lstStyle/>
+                    <a:p>
+                      <a:pPr algn="ctr"/>
+                      <a:r>
+                        <a:rPr sz="1600" b="1">
+                          <a:solidFill>
+                            <a:srgbClr val="144E4C"/>
+                          </a:solidFill>
+                          <a:latin typeface="Calibri"/>
+                        </a:rPr>
+                        <a:t>✓</a:t>
+                      </a:r>
+                    </a:p>
+                  </a:txBody>
+                  <a:tcPr anchor="ctr">
+                    <a:solidFill>
+                      <a:srgbClr val="EFEAD9"/>
+                    </a:solidFill>
+                  </a:tcPr>
+                </a:tc>
+                <a:tc>
+                  <a:txBody>
+                    <a:bodyPr/>
+                    <a:lstStyle/>
+                    <a:p>
+                      <a:pPr algn="ctr"/>
+                      <a:r>
+                        <a:rPr sz="1600" b="1">
+                          <a:solidFill>
+                            <a:srgbClr val="144E4C"/>
+                          </a:solidFill>
+                          <a:latin typeface="Calibri"/>
+                        </a:rPr>
+                        <a:t>✓</a:t>
+                      </a:r>
+                    </a:p>
+                  </a:txBody>
+                  <a:tcPr anchor="ctr">
+                    <a:solidFill>
+                      <a:srgbClr val="EFEAD9"/>
+                    </a:solidFill>
+                  </a:tcPr>
+                </a:tc>
+                <a:tc>
+                  <a:txBody>
+                    <a:bodyPr/>
+                    <a:lstStyle/>
+                    <a:p>
+                      <a:pPr algn="ctr"/>
+                      <a:r>
+                        <a:rPr sz="1600" b="1">
+                          <a:solidFill>
+                            <a:srgbClr val="144E4C"/>
+                          </a:solidFill>
+                          <a:latin typeface="Calibri"/>
+                        </a:rPr>
+                        <a:t>✓</a:t>
+                      </a:r>
+                    </a:p>
+                  </a:txBody>
+                  <a:tcPr anchor="ctr">
+                    <a:solidFill>
+                      <a:srgbClr val="EFEAD9"/>
+                    </a:solidFill>
+                  </a:tcPr>
+                </a:tc>
+                <a:tc>
+                  <a:txBody>
+                    <a:bodyPr/>
+                    <a:lstStyle/>
+                    <a:p>
+                      <a:pPr algn="ctr"/>
+                      <a:r>
+                        <a:rPr sz="1600" b="1">
+                          <a:solidFill>
+                            <a:srgbClr val="144E4C"/>
+                          </a:solidFill>
+                          <a:latin typeface="Calibri"/>
+                        </a:rPr>
+                        <a:t>✓</a:t>
+                      </a:r>
+                    </a:p>
+                  </a:txBody>
+                  <a:tcPr anchor="ctr">
+                    <a:solidFill>
+                      <a:srgbClr val="EFEAD9"/>
+                    </a:solidFill>
+                  </a:tcPr>
+                </a:tc>
+              </a:tr>
+            </a:tbl>
+          </a:graphicData>
+        </a:graphic>
+      </p:graphicFrame>
+      <p:sp>
+        <p:nvSpPr>
+          <p:cNvPr id="6" name="TextBox 5"/>
+          <p:cNvSpPr txBox="1"/>
+          <p:nvPr/>
+        </p:nvSpPr>
+        <p:spPr>
+          <a:xfrm>
+            <a:off x="548640" y="4434840"/>
+            <a:ext cx="11064240" cy="1554480"/>
           </a:xfrm>
           <a:prstGeom prst="rect">
             <a:avLst/>
           </a:prstGeom>
-          <a:solidFill>
-            <a:srgbClr val="D99A06"/>
-          </a:solidFill>
-          <a:ln>
-            <a:noFill/>
-          </a:ln>
-        </p:spPr>
-        <p:style>
-          <a:lnRef idx="1">
-            <a:schemeClr val="accent1"/>
-          </a:lnRef>
-          <a:fillRef idx="3">
-            <a:schemeClr val="accent1"/>
-          </a:fillRef>
-          <a:effectRef idx="2">
-            <a:schemeClr val="accent1"/>
-          </a:effectRef>
-          <a:fontRef idx="minor">
-            <a:schemeClr val="lt1"/>
-          </a:fontRef>
-        </p:style>
-        <p:txBody>
-          <a:bodyPr rtlCol="0" anchor="ctr"/>
-          <a:lstStyle/>
-          <a:p>
-            <a:pPr algn="ctr"/>
-          </a:p>
-        </p:txBody>
-      </p:sp>
-      <p:sp>
-        <p:nvSpPr>
-          <p:cNvPr id="5" name="TextBox 4"/>
-          <p:cNvSpPr txBox="1"/>
-          <p:nvPr/>
-        </p:nvSpPr>
-        <p:spPr>
-          <a:xfrm>
-            <a:off x="548640" y="320040"/>
-            <a:ext cx="11064240" cy="822960"/>
-          </a:xfrm>
-          <a:prstGeom prst="rect">
-            <a:avLst/>
-          </a:prstGeom>
           <a:noFill/>
         </p:spPr>
         <p:txBody>
-          <a:bodyPr wrap="square">
+          <a:bodyPr wrap="none">
             <a:spAutoFit/>
           </a:bodyPr>
           <a:lstStyle/>
           <a:p>
-            <a:pPr algn="l"/>
-            <a:r>
-              <a:rPr sz="3400" b="1" i="0">
-                <a:solidFill>
-                  <a:srgbClr val="144E4C"/>
-                </a:solidFill>
-                <a:latin typeface="Georgia"/>
-              </a:rPr>
-              <a:t>Risks &amp; Mitigations</a:t>
-            </a:r>
-          </a:p>
-        </p:txBody>
-      </p:sp>
-      <p:sp>
-        <p:nvSpPr>
-          <p:cNvPr id="6" name="Rectangle 5"/>
-          <p:cNvSpPr/>
-          <p:nvPr/>
-        </p:nvSpPr>
-        <p:spPr>
-          <a:xfrm>
-            <a:off x="566928" y="1078992"/>
-            <a:ext cx="1005840" cy="50292"/>
+            <a:pPr algn="ctr">
+              <a:defRPr sz="1200">
+                <a:solidFill>
+                  <a:srgbClr val="1F2937"/>
+                </a:solidFill>
+                <a:latin typeface="Calibri"/>
+              </a:defRPr>
+            </a:pPr>
+            <a:r>
+              <a:rPr sz="1200">
+                <a:solidFill>
+                  <a:srgbClr val="1F2937"/>
+                </a:solidFill>
+                <a:latin typeface="Calibri"/>
+              </a:rPr>
+              <a:t>P1–P3: CV, DL, Anomaly, RF And Edge Knowledge; Audit, Split, mAP/MAE Analysis. P6–P7: Inspectors And Planners Served; Errors Propagate Preprocess → Ds → Hours.</a:t>
+            </a:r>
+          </a:p>
+          <a:p>
+            <a:pPr algn="ctr">
+              <a:defRPr sz="1200">
+                <a:solidFill>
+                  <a:srgbClr val="1F2937"/>
+                </a:solidFill>
+                <a:latin typeface="Calibri"/>
+              </a:defRPr>
+            </a:pPr>
+            <a:r>
+              <a:rPr sz="1200">
+                <a:solidFill>
+                  <a:srgbClr val="1F2937"/>
+                </a:solidFill>
+                <a:latin typeface="Calibri"/>
+              </a:rPr>
+              <a:t>A1–A5: Full-Stack Resources; Tight Module Interaction; Ds-Fusion Innovation. (Report §5.4)</a:t>
+            </a:r>
+          </a:p>
+        </p:txBody>
+      </p:sp>
+      <p:sp>
+        <p:nvSpPr>
+          <p:cNvPr id="7" name="TextBox 6"/>
+          <p:cNvSpPr txBox="1"/>
+          <p:nvPr/>
+        </p:nvSpPr>
+        <p:spPr>
+          <a:xfrm>
+            <a:off x="548640" y="6419088"/>
+            <a:ext cx="9144000" cy="274320"/>
           </a:xfrm>
           <a:prstGeom prst="rect">
             <a:avLst/>
           </a:prstGeom>
-          <a:solidFill>
-            <a:srgbClr val="D99A06"/>
-          </a:solidFill>
-          <a:ln>
-            <a:noFill/>
-          </a:ln>
-        </p:spPr>
-        <p:style>
-          <a:lnRef idx="1">
-            <a:schemeClr val="accent1"/>
-          </a:lnRef>
-          <a:fillRef idx="3">
-            <a:schemeClr val="accent1"/>
-          </a:fillRef>
-          <a:effectRef idx="2">
-            <a:schemeClr val="accent1"/>
-          </a:effectRef>
-          <a:fontRef idx="minor">
-            <a:schemeClr val="lt1"/>
-          </a:fontRef>
-        </p:style>
-        <p:txBody>
-          <a:bodyPr rtlCol="0" anchor="ctr"/>
-          <a:lstStyle/>
-          <a:p>
-            <a:pPr algn="ctr"/>
-          </a:p>
-        </p:txBody>
-      </p:sp>
-      <p:sp>
-        <p:nvSpPr>
-          <p:cNvPr id="7" name="Rounded Rectangle 6"/>
-          <p:cNvSpPr/>
-          <p:nvPr/>
-        </p:nvSpPr>
-        <p:spPr>
-          <a:xfrm>
-            <a:off x="548640" y="1463040"/>
-            <a:ext cx="5394960" cy="3291840"/>
-          </a:xfrm>
-          <a:prstGeom prst="roundRect">
-            <a:avLst>
-              <a:gd name="adj" fmla="val 6000"/>
-            </a:avLst>
-          </a:prstGeom>
-          <a:solidFill>
-            <a:srgbClr val="FFFFFF"/>
-          </a:solidFill>
-          <a:ln w="15875">
-            <a:solidFill>
-              <a:srgbClr val="D8D2C2"/>
-            </a:solidFill>
-          </a:ln>
-        </p:spPr>
-        <p:style>
-          <a:lnRef idx="1">
-            <a:schemeClr val="accent1"/>
-          </a:lnRef>
-          <a:fillRef idx="3">
-            <a:schemeClr val="accent1"/>
-          </a:fillRef>
-          <a:effectRef idx="2">
-            <a:schemeClr val="accent1"/>
-          </a:effectRef>
-          <a:fontRef idx="minor">
-            <a:schemeClr val="lt1"/>
-          </a:fontRef>
-        </p:style>
-        <p:txBody>
-          <a:bodyPr rtlCol="0" anchor="ctr"/>
-          <a:lstStyle/>
-          <a:p>
-            <a:pPr algn="ctr"/>
-          </a:p>
-        </p:txBody>
-      </p:sp>
-      <p:sp>
-        <p:nvSpPr>
-          <p:cNvPr id="8" name="Rounded Rectangle 7"/>
-          <p:cNvSpPr/>
-          <p:nvPr/>
-        </p:nvSpPr>
-        <p:spPr>
-          <a:xfrm>
-            <a:off x="548640" y="1463040"/>
-            <a:ext cx="5394960" cy="82296"/>
-          </a:xfrm>
-          <a:prstGeom prst="roundRect">
-            <a:avLst/>
-          </a:prstGeom>
-          <a:solidFill>
-            <a:srgbClr val="D99A06"/>
-          </a:solidFill>
-          <a:ln>
-            <a:noFill/>
-          </a:ln>
-        </p:spPr>
-        <p:style>
-          <a:lnRef idx="1">
-            <a:schemeClr val="accent1"/>
-          </a:lnRef>
-          <a:fillRef idx="3">
-            <a:schemeClr val="accent1"/>
-          </a:fillRef>
-          <a:effectRef idx="2">
-            <a:schemeClr val="accent1"/>
-          </a:effectRef>
-          <a:fontRef idx="minor">
-            <a:schemeClr val="lt1"/>
-          </a:fontRef>
-        </p:style>
-        <p:txBody>
-          <a:bodyPr rtlCol="0" anchor="ctr"/>
-          <a:lstStyle/>
-          <a:p>
-            <a:pPr algn="ctr"/>
-          </a:p>
-        </p:txBody>
-      </p:sp>
-      <p:sp>
-        <p:nvSpPr>
-          <p:cNvPr id="9" name="Oval 8"/>
-          <p:cNvSpPr/>
-          <p:nvPr/>
-        </p:nvSpPr>
-        <p:spPr>
-          <a:xfrm>
-            <a:off x="804672" y="1755648"/>
-            <a:ext cx="475488" cy="475488"/>
-          </a:xfrm>
-          <a:prstGeom prst="ellipse">
-            <a:avLst/>
-          </a:prstGeom>
-          <a:solidFill>
-            <a:srgbClr val="D99A06"/>
-          </a:solidFill>
-          <a:ln>
-            <a:noFill/>
-          </a:ln>
-        </p:spPr>
-        <p:style>
-          <a:lnRef idx="1">
-            <a:schemeClr val="accent1"/>
-          </a:lnRef>
-          <a:fillRef idx="3">
-            <a:schemeClr val="accent1"/>
-          </a:fillRef>
-          <a:effectRef idx="2">
-            <a:schemeClr val="accent1"/>
-          </a:effectRef>
-          <a:fontRef idx="minor">
-            <a:schemeClr val="lt1"/>
-          </a:fontRef>
-        </p:style>
-        <p:txBody>
-          <a:bodyPr rtlCol="0" anchor="ctr" wrap="square"/>
-          <a:lstStyle/>
-          <a:p>
-            <a:pPr algn="ctr"/>
-            <a:r>
-              <a:rPr sz="1700" b="1" i="0">
-                <a:solidFill>
-                  <a:srgbClr val="144E4C"/>
+          <a:noFill/>
+        </p:spPr>
+        <p:txBody>
+          <a:bodyPr wrap="none">
+            <a:spAutoFit/>
+          </a:bodyPr>
+          <a:lstStyle/>
+          <a:p>
+            <a:pPr>
+              <a:defRPr>
+                <a:solidFill/>
+              </a:defRPr>
+            </a:pPr>
+            <a:r>
+              <a:rPr sz="900">
+                <a:solidFill>
+                  <a:srgbClr val="8A8F98"/>
                 </a:solidFill>
                 <a:latin typeface="Calibri"/>
               </a:rPr>
-              <a:t>⚠</a:t>
-            </a:r>
-          </a:p>
-        </p:txBody>
-      </p:sp>
-      <p:sp>
-        <p:nvSpPr>
-          <p:cNvPr id="10" name="TextBox 9"/>
+              <a:t>Defect-to-Delivery  |  FYDP-I  •  Group: 262-034</a:t>
+            </a:r>
+          </a:p>
+        </p:txBody>
+      </p:sp>
+      <p:sp>
+        <p:nvSpPr>
+          <p:cNvPr id="8" name="TextBox 7"/>
           <p:cNvSpPr txBox="1"/>
           <p:nvPr/>
         </p:nvSpPr>
         <p:spPr>
           <a:xfrm>
-            <a:off x="1417319" y="1719072"/>
-            <a:ext cx="4343400" cy="2880360"/>
+            <a:off x="10972800" y="6419088"/>
+            <a:ext cx="640080" cy="274320"/>
           </a:xfrm>
           <a:prstGeom prst="rect">
             <a:avLst/>
@@ -21617,319 +21074,24 @@
           <a:noFill/>
         </p:spPr>
         <p:txBody>
-          <a:bodyPr wrap="square">
-            <a:normAutofit/>
+          <a:bodyPr wrap="none">
+            <a:spAutoFit/>
           </a:bodyPr>
           <a:lstStyle/>
           <a:p>
-            <a:pPr algn="l">
-              <a:spcAft>
-                <a:spcPts val="600"/>
-              </a:spcAft>
+            <a:pPr algn="r">
+              <a:defRPr>
+                <a:solidFill/>
+              </a:defRPr>
             </a:pPr>
             <a:r>
-              <a:rPr sz="1200" b="1" i="0">
-                <a:solidFill>
-                  <a:srgbClr val="144E4C"/>
+              <a:rPr sz="900">
+                <a:solidFill>
+                  <a:srgbClr val="8A8F98"/>
                 </a:solidFill>
                 <a:latin typeface="Calibri"/>
               </a:rPr>
-              <a:t>Key Risks</a:t>
-            </a:r>
-          </a:p>
-          <a:p>
-            <a:pPr algn="l">
-              <a:spcBef>
-                <a:spcPts val="0"/>
-              </a:spcBef>
-              <a:spcAft>
-                <a:spcPts val="300"/>
-              </a:spcAft>
-            </a:pPr>
-            <a:r>
-              <a:rPr sz="1100" b="0" i="0">
-                <a:solidFill>
-                  <a:srgbClr val="5B6570"/>
-                </a:solidFill>
-                <a:latin typeface="Calibri"/>
-              </a:rPr>
-              <a:t>Free T4 GPU quota: already exhausted once; fallback to Kaggle (30h/week) or local M1 overnight run.</a:t>
-            </a:r>
-          </a:p>
-          <a:p>
-            <a:pPr algn="l">
-              <a:spcBef>
-                <a:spcPts val="0"/>
-              </a:spcBef>
-              <a:spcAft>
-                <a:spcPts val="300"/>
-              </a:spcAft>
-            </a:pPr>
-            <a:r>
-              <a:rPr sz="1100" b="0" i="0">
-                <a:solidFill>
-                  <a:srgbClr val="5B6570"/>
-                </a:solidFill>
-                <a:latin typeface="Calibri"/>
-              </a:rPr>
-              <a:t>Factory data access: if unavailable, fallback to calibrated queuing simulation with documented parameters; paired Ds‑vs‑defect analysis is the contribution.</a:t>
-            </a:r>
-          </a:p>
-          <a:p>
-            <a:pPr algn="l">
-              <a:spcBef>
-                <a:spcPts val="0"/>
-              </a:spcBef>
-              <a:spcAft>
-                <a:spcPts val="300"/>
-              </a:spcAft>
-            </a:pPr>
-            <a:r>
-              <a:rPr sz="1100" b="0" i="0">
-                <a:solidFill>
-                  <a:srgbClr val="5B6570"/>
-                </a:solidFill>
-                <a:latin typeface="Calibri"/>
-              </a:rPr>
-              <a:t>Quarantine ambiguity: 152‑file lines batch may hide a second quarantine; visual review still open.</a:t>
-            </a:r>
-          </a:p>
-        </p:txBody>
-      </p:sp>
-      <p:sp>
-        <p:nvSpPr>
-          <p:cNvPr id="11" name="Rounded Rectangle 10"/>
-          <p:cNvSpPr/>
-          <p:nvPr/>
-        </p:nvSpPr>
-        <p:spPr>
-          <a:xfrm>
-            <a:off x="6245352" y="1463040"/>
-            <a:ext cx="5394960" cy="3291840"/>
-          </a:xfrm>
-          <a:prstGeom prst="roundRect">
-            <a:avLst>
-              <a:gd name="adj" fmla="val 6000"/>
-            </a:avLst>
-          </a:prstGeom>
-          <a:solidFill>
-            <a:srgbClr val="FFFFFF"/>
-          </a:solidFill>
-          <a:ln w="15875">
-            <a:solidFill>
-              <a:srgbClr val="D8D2C2"/>
-            </a:solidFill>
-          </a:ln>
-        </p:spPr>
-        <p:style>
-          <a:lnRef idx="1">
-            <a:schemeClr val="accent1"/>
-          </a:lnRef>
-          <a:fillRef idx="3">
-            <a:schemeClr val="accent1"/>
-          </a:fillRef>
-          <a:effectRef idx="2">
-            <a:schemeClr val="accent1"/>
-          </a:effectRef>
-          <a:fontRef idx="minor">
-            <a:schemeClr val="lt1"/>
-          </a:fontRef>
-        </p:style>
-        <p:txBody>
-          <a:bodyPr rtlCol="0" anchor="ctr"/>
-          <a:lstStyle/>
-          <a:p>
-            <a:pPr algn="ctr"/>
-          </a:p>
-        </p:txBody>
-      </p:sp>
-      <p:sp>
-        <p:nvSpPr>
-          <p:cNvPr id="12" name="Rounded Rectangle 11"/>
-          <p:cNvSpPr/>
-          <p:nvPr/>
-        </p:nvSpPr>
-        <p:spPr>
-          <a:xfrm>
-            <a:off x="6245352" y="1463040"/>
-            <a:ext cx="5394960" cy="82296"/>
-          </a:xfrm>
-          <a:prstGeom prst="roundRect">
-            <a:avLst/>
-          </a:prstGeom>
-          <a:solidFill>
-            <a:srgbClr val="D99A06"/>
-          </a:solidFill>
-          <a:ln>
-            <a:noFill/>
-          </a:ln>
-        </p:spPr>
-        <p:style>
-          <a:lnRef idx="1">
-            <a:schemeClr val="accent1"/>
-          </a:lnRef>
-          <a:fillRef idx="3">
-            <a:schemeClr val="accent1"/>
-          </a:fillRef>
-          <a:effectRef idx="2">
-            <a:schemeClr val="accent1"/>
-          </a:effectRef>
-          <a:fontRef idx="minor">
-            <a:schemeClr val="lt1"/>
-          </a:fontRef>
-        </p:style>
-        <p:txBody>
-          <a:bodyPr rtlCol="0" anchor="ctr"/>
-          <a:lstStyle/>
-          <a:p>
-            <a:pPr algn="ctr"/>
-          </a:p>
-        </p:txBody>
-      </p:sp>
-      <p:sp>
-        <p:nvSpPr>
-          <p:cNvPr id="13" name="Oval 12"/>
-          <p:cNvSpPr/>
-          <p:nvPr/>
-        </p:nvSpPr>
-        <p:spPr>
-          <a:xfrm>
-            <a:off x="6501384" y="1755648"/>
-            <a:ext cx="475488" cy="475488"/>
-          </a:xfrm>
-          <a:prstGeom prst="ellipse">
-            <a:avLst/>
-          </a:prstGeom>
-          <a:solidFill>
-            <a:srgbClr val="D99A06"/>
-          </a:solidFill>
-          <a:ln>
-            <a:noFill/>
-          </a:ln>
-        </p:spPr>
-        <p:style>
-          <a:lnRef idx="1">
-            <a:schemeClr val="accent1"/>
-          </a:lnRef>
-          <a:fillRef idx="3">
-            <a:schemeClr val="accent1"/>
-          </a:fillRef>
-          <a:effectRef idx="2">
-            <a:schemeClr val="accent1"/>
-          </a:effectRef>
-          <a:fontRef idx="minor">
-            <a:schemeClr val="lt1"/>
-          </a:fontRef>
-        </p:style>
-        <p:txBody>
-          <a:bodyPr rtlCol="0" anchor="ctr" wrap="square"/>
-          <a:lstStyle/>
-          <a:p>
-            <a:pPr algn="ctr"/>
-            <a:r>
-              <a:rPr sz="1700" b="1" i="0">
-                <a:solidFill>
-                  <a:srgbClr val="144E4C"/>
-                </a:solidFill>
-                <a:latin typeface="Calibri"/>
-              </a:rPr>
-              <a:t>✓</a:t>
-            </a:r>
-          </a:p>
-        </p:txBody>
-      </p:sp>
-      <p:sp>
-        <p:nvSpPr>
-          <p:cNvPr id="14" name="TextBox 13"/>
-          <p:cNvSpPr txBox="1"/>
-          <p:nvPr/>
-        </p:nvSpPr>
-        <p:spPr>
-          <a:xfrm>
-            <a:off x="7114032" y="1719072"/>
-            <a:ext cx="4343400" cy="2880360"/>
-          </a:xfrm>
-          <a:prstGeom prst="rect">
-            <a:avLst/>
-          </a:prstGeom>
-          <a:noFill/>
-        </p:spPr>
-        <p:txBody>
-          <a:bodyPr wrap="square">
-            <a:normAutofit/>
-          </a:bodyPr>
-          <a:lstStyle/>
-          <a:p>
-            <a:pPr algn="l">
-              <a:spcAft>
-                <a:spcPts val="600"/>
-              </a:spcAft>
-            </a:pPr>
-            <a:r>
-              <a:rPr sz="1200" b="1" i="0">
-                <a:solidFill>
-                  <a:srgbClr val="144E4C"/>
-                </a:solidFill>
-                <a:latin typeface="Calibri"/>
-              </a:rPr>
-              <a:t>Mitigations</a:t>
-            </a:r>
-          </a:p>
-          <a:p>
-            <a:pPr algn="l">
-              <a:spcBef>
-                <a:spcPts val="0"/>
-              </a:spcBef>
-              <a:spcAft>
-                <a:spcPts val="300"/>
-              </a:spcAft>
-            </a:pPr>
-            <a:r>
-              <a:rPr sz="1100" b="0" i="0">
-                <a:solidFill>
-                  <a:srgbClr val="5B6570"/>
-                </a:solidFill>
-                <a:latin typeface="Calibri"/>
-              </a:rPr>
-              <a:t>Checkpoint sync every 10 min during training so quota loss costs minutes, not hours.</a:t>
-            </a:r>
-          </a:p>
-          <a:p>
-            <a:pPr algn="l">
-              <a:spcBef>
-                <a:spcPts val="0"/>
-              </a:spcBef>
-              <a:spcAft>
-                <a:spcPts val="300"/>
-              </a:spcAft>
-            </a:pPr>
-            <a:r>
-              <a:rPr sz="1100" b="0" i="0">
-                <a:solidFill>
-                  <a:srgbClr val="5B6570"/>
-                </a:solidFill>
-                <a:latin typeface="Calibri"/>
-              </a:rPr>
-              <a:t>Paired dataset (defect counts + our Ds) is itself a contribution if factory declines.</a:t>
-            </a:r>
-          </a:p>
-          <a:p>
-            <a:pPr algn="l">
-              <a:spcBef>
-                <a:spcPts val="0"/>
-              </a:spcBef>
-              <a:spcAft>
-                <a:spcPts val="300"/>
-              </a:spcAft>
-            </a:pPr>
-            <a:r>
-              <a:rPr sz="1100" b="0" i="0">
-                <a:solidFill>
-                  <a:srgbClr val="5B6570"/>
-                </a:solidFill>
-                <a:latin typeface="Calibri"/>
-              </a:rPr>
-              <a:t>Visual review of lines batch in progress; interim: report as ‘suspicious’ in datasheet.</a:t>
+              <a:t>27 / 31</a:t>
             </a:r>
           </a:p>
         </p:txBody>
@@ -22025,7 +21187,700 @@
                 </a:solidFill>
                 <a:latin typeface="Calibri"/>
               </a:rPr>
-              <a:t>28 / 30</a:t>
+              <a:t>28 / 31</a:t>
+            </a:r>
+          </a:p>
+        </p:txBody>
+      </p:sp>
+      <p:sp>
+        <p:nvSpPr>
+          <p:cNvPr id="4" name="Rectangle 3"/>
+          <p:cNvSpPr/>
+          <p:nvPr/>
+        </p:nvSpPr>
+        <p:spPr>
+          <a:xfrm>
+            <a:off x="0" y="0"/>
+            <a:ext cx="12188952" cy="64008"/>
+          </a:xfrm>
+          <a:prstGeom prst="rect">
+            <a:avLst/>
+          </a:prstGeom>
+          <a:solidFill>
+            <a:srgbClr val="D99A06"/>
+          </a:solidFill>
+          <a:ln>
+            <a:noFill/>
+          </a:ln>
+        </p:spPr>
+        <p:style>
+          <a:lnRef idx="1">
+            <a:schemeClr val="accent1"/>
+          </a:lnRef>
+          <a:fillRef idx="3">
+            <a:schemeClr val="accent1"/>
+          </a:fillRef>
+          <a:effectRef idx="2">
+            <a:schemeClr val="accent1"/>
+          </a:effectRef>
+          <a:fontRef idx="minor">
+            <a:schemeClr val="lt1"/>
+          </a:fontRef>
+        </p:style>
+        <p:txBody>
+          <a:bodyPr rtlCol="0" anchor="ctr"/>
+          <a:lstStyle/>
+          <a:p>
+            <a:pPr algn="ctr"/>
+          </a:p>
+        </p:txBody>
+      </p:sp>
+      <p:sp>
+        <p:nvSpPr>
+          <p:cNvPr id="5" name="TextBox 4"/>
+          <p:cNvSpPr txBox="1"/>
+          <p:nvPr/>
+        </p:nvSpPr>
+        <p:spPr>
+          <a:xfrm>
+            <a:off x="548640" y="320040"/>
+            <a:ext cx="11064240" cy="822960"/>
+          </a:xfrm>
+          <a:prstGeom prst="rect">
+            <a:avLst/>
+          </a:prstGeom>
+          <a:noFill/>
+        </p:spPr>
+        <p:txBody>
+          <a:bodyPr wrap="square">
+            <a:spAutoFit/>
+          </a:bodyPr>
+          <a:lstStyle/>
+          <a:p>
+            <a:pPr algn="l"/>
+            <a:r>
+              <a:rPr sz="3400" b="1" i="0">
+                <a:solidFill>
+                  <a:srgbClr val="144E4C"/>
+                </a:solidFill>
+                <a:latin typeface="Georgia"/>
+              </a:rPr>
+              <a:t>Risks &amp; Mitigations</a:t>
+            </a:r>
+          </a:p>
+        </p:txBody>
+      </p:sp>
+      <p:sp>
+        <p:nvSpPr>
+          <p:cNvPr id="6" name="Rectangle 5"/>
+          <p:cNvSpPr/>
+          <p:nvPr/>
+        </p:nvSpPr>
+        <p:spPr>
+          <a:xfrm>
+            <a:off x="566928" y="1078992"/>
+            <a:ext cx="1005840" cy="50292"/>
+          </a:xfrm>
+          <a:prstGeom prst="rect">
+            <a:avLst/>
+          </a:prstGeom>
+          <a:solidFill>
+            <a:srgbClr val="D99A06"/>
+          </a:solidFill>
+          <a:ln>
+            <a:noFill/>
+          </a:ln>
+        </p:spPr>
+        <p:style>
+          <a:lnRef idx="1">
+            <a:schemeClr val="accent1"/>
+          </a:lnRef>
+          <a:fillRef idx="3">
+            <a:schemeClr val="accent1"/>
+          </a:fillRef>
+          <a:effectRef idx="2">
+            <a:schemeClr val="accent1"/>
+          </a:effectRef>
+          <a:fontRef idx="minor">
+            <a:schemeClr val="lt1"/>
+          </a:fontRef>
+        </p:style>
+        <p:txBody>
+          <a:bodyPr rtlCol="0" anchor="ctr"/>
+          <a:lstStyle/>
+          <a:p>
+            <a:pPr algn="ctr"/>
+          </a:p>
+        </p:txBody>
+      </p:sp>
+      <p:sp>
+        <p:nvSpPr>
+          <p:cNvPr id="7" name="Rounded Rectangle 6"/>
+          <p:cNvSpPr/>
+          <p:nvPr/>
+        </p:nvSpPr>
+        <p:spPr>
+          <a:xfrm>
+            <a:off x="548640" y="1463040"/>
+            <a:ext cx="5394960" cy="3291840"/>
+          </a:xfrm>
+          <a:prstGeom prst="roundRect">
+            <a:avLst>
+              <a:gd name="adj" fmla="val 6000"/>
+            </a:avLst>
+          </a:prstGeom>
+          <a:solidFill>
+            <a:srgbClr val="FFFFFF"/>
+          </a:solidFill>
+          <a:ln w="15875">
+            <a:solidFill>
+              <a:srgbClr val="D8D2C2"/>
+            </a:solidFill>
+          </a:ln>
+        </p:spPr>
+        <p:style>
+          <a:lnRef idx="1">
+            <a:schemeClr val="accent1"/>
+          </a:lnRef>
+          <a:fillRef idx="3">
+            <a:schemeClr val="accent1"/>
+          </a:fillRef>
+          <a:effectRef idx="2">
+            <a:schemeClr val="accent1"/>
+          </a:effectRef>
+          <a:fontRef idx="minor">
+            <a:schemeClr val="lt1"/>
+          </a:fontRef>
+        </p:style>
+        <p:txBody>
+          <a:bodyPr rtlCol="0" anchor="ctr"/>
+          <a:lstStyle/>
+          <a:p>
+            <a:pPr algn="ctr"/>
+          </a:p>
+        </p:txBody>
+      </p:sp>
+      <p:sp>
+        <p:nvSpPr>
+          <p:cNvPr id="8" name="Rounded Rectangle 7"/>
+          <p:cNvSpPr/>
+          <p:nvPr/>
+        </p:nvSpPr>
+        <p:spPr>
+          <a:xfrm>
+            <a:off x="548640" y="1463040"/>
+            <a:ext cx="5394960" cy="82296"/>
+          </a:xfrm>
+          <a:prstGeom prst="roundRect">
+            <a:avLst/>
+          </a:prstGeom>
+          <a:solidFill>
+            <a:srgbClr val="D99A06"/>
+          </a:solidFill>
+          <a:ln>
+            <a:noFill/>
+          </a:ln>
+        </p:spPr>
+        <p:style>
+          <a:lnRef idx="1">
+            <a:schemeClr val="accent1"/>
+          </a:lnRef>
+          <a:fillRef idx="3">
+            <a:schemeClr val="accent1"/>
+          </a:fillRef>
+          <a:effectRef idx="2">
+            <a:schemeClr val="accent1"/>
+          </a:effectRef>
+          <a:fontRef idx="minor">
+            <a:schemeClr val="lt1"/>
+          </a:fontRef>
+        </p:style>
+        <p:txBody>
+          <a:bodyPr rtlCol="0" anchor="ctr"/>
+          <a:lstStyle/>
+          <a:p>
+            <a:pPr algn="ctr"/>
+          </a:p>
+        </p:txBody>
+      </p:sp>
+      <p:sp>
+        <p:nvSpPr>
+          <p:cNvPr id="9" name="Oval 8"/>
+          <p:cNvSpPr/>
+          <p:nvPr/>
+        </p:nvSpPr>
+        <p:spPr>
+          <a:xfrm>
+            <a:off x="804672" y="1755648"/>
+            <a:ext cx="475488" cy="475488"/>
+          </a:xfrm>
+          <a:prstGeom prst="ellipse">
+            <a:avLst/>
+          </a:prstGeom>
+          <a:solidFill>
+            <a:srgbClr val="D99A06"/>
+          </a:solidFill>
+          <a:ln>
+            <a:noFill/>
+          </a:ln>
+        </p:spPr>
+        <p:style>
+          <a:lnRef idx="1">
+            <a:schemeClr val="accent1"/>
+          </a:lnRef>
+          <a:fillRef idx="3">
+            <a:schemeClr val="accent1"/>
+          </a:fillRef>
+          <a:effectRef idx="2">
+            <a:schemeClr val="accent1"/>
+          </a:effectRef>
+          <a:fontRef idx="minor">
+            <a:schemeClr val="lt1"/>
+          </a:fontRef>
+        </p:style>
+        <p:txBody>
+          <a:bodyPr rtlCol="0" anchor="ctr" wrap="square"/>
+          <a:lstStyle/>
+          <a:p>
+            <a:pPr algn="ctr"/>
+            <a:r>
+              <a:rPr sz="1700" b="1" i="0">
+                <a:solidFill>
+                  <a:srgbClr val="144E4C"/>
+                </a:solidFill>
+                <a:latin typeface="Calibri"/>
+              </a:rPr>
+              <a:t>⚠</a:t>
+            </a:r>
+          </a:p>
+        </p:txBody>
+      </p:sp>
+      <p:sp>
+        <p:nvSpPr>
+          <p:cNvPr id="10" name="TextBox 9"/>
+          <p:cNvSpPr txBox="1"/>
+          <p:nvPr/>
+        </p:nvSpPr>
+        <p:spPr>
+          <a:xfrm>
+            <a:off x="1417319" y="1719072"/>
+            <a:ext cx="4343400" cy="2880360"/>
+          </a:xfrm>
+          <a:prstGeom prst="rect">
+            <a:avLst/>
+          </a:prstGeom>
+          <a:noFill/>
+        </p:spPr>
+        <p:txBody>
+          <a:bodyPr wrap="square">
+            <a:normAutofit/>
+          </a:bodyPr>
+          <a:lstStyle/>
+          <a:p>
+            <a:pPr algn="l">
+              <a:spcAft>
+                <a:spcPts val="600"/>
+              </a:spcAft>
+            </a:pPr>
+            <a:r>
+              <a:rPr sz="1200" b="1" i="0">
+                <a:solidFill>
+                  <a:srgbClr val="144E4C"/>
+                </a:solidFill>
+                <a:latin typeface="Calibri"/>
+              </a:rPr>
+              <a:t>Key Risks</a:t>
+            </a:r>
+          </a:p>
+          <a:p>
+            <a:pPr algn="l">
+              <a:spcBef>
+                <a:spcPts val="0"/>
+              </a:spcBef>
+              <a:spcAft>
+                <a:spcPts val="300"/>
+              </a:spcAft>
+            </a:pPr>
+            <a:r>
+              <a:rPr sz="1100" b="0" i="0">
+                <a:solidFill>
+                  <a:srgbClr val="5B6570"/>
+                </a:solidFill>
+                <a:latin typeface="Calibri"/>
+              </a:rPr>
+              <a:t>Free T4 GPU quota: already exhausted once; fallback to Kaggle (30h/week) or local M1 overnight run.</a:t>
+            </a:r>
+          </a:p>
+          <a:p>
+            <a:pPr algn="l">
+              <a:spcBef>
+                <a:spcPts val="0"/>
+              </a:spcBef>
+              <a:spcAft>
+                <a:spcPts val="300"/>
+              </a:spcAft>
+            </a:pPr>
+            <a:r>
+              <a:rPr sz="1100" b="0" i="0">
+                <a:solidFill>
+                  <a:srgbClr val="5B6570"/>
+                </a:solidFill>
+                <a:latin typeface="Calibri"/>
+              </a:rPr>
+              <a:t>Factory data access: if unavailable, fallback to calibrated queuing simulation with documented parameters; paired Ds‑vs‑defect analysis is the contribution.</a:t>
+            </a:r>
+          </a:p>
+          <a:p>
+            <a:pPr algn="l">
+              <a:spcBef>
+                <a:spcPts val="0"/>
+              </a:spcBef>
+              <a:spcAft>
+                <a:spcPts val="300"/>
+              </a:spcAft>
+            </a:pPr>
+            <a:r>
+              <a:rPr sz="1100" b="0" i="0">
+                <a:solidFill>
+                  <a:srgbClr val="5B6570"/>
+                </a:solidFill>
+                <a:latin typeface="Calibri"/>
+              </a:rPr>
+              <a:t>Quarantine ambiguity: 152‑file lines batch may hide a second quarantine; visual review still open.</a:t>
+            </a:r>
+          </a:p>
+        </p:txBody>
+      </p:sp>
+      <p:sp>
+        <p:nvSpPr>
+          <p:cNvPr id="11" name="Rounded Rectangle 10"/>
+          <p:cNvSpPr/>
+          <p:nvPr/>
+        </p:nvSpPr>
+        <p:spPr>
+          <a:xfrm>
+            <a:off x="6245352" y="1463040"/>
+            <a:ext cx="5394960" cy="3291840"/>
+          </a:xfrm>
+          <a:prstGeom prst="roundRect">
+            <a:avLst>
+              <a:gd name="adj" fmla="val 6000"/>
+            </a:avLst>
+          </a:prstGeom>
+          <a:solidFill>
+            <a:srgbClr val="FFFFFF"/>
+          </a:solidFill>
+          <a:ln w="15875">
+            <a:solidFill>
+              <a:srgbClr val="D8D2C2"/>
+            </a:solidFill>
+          </a:ln>
+        </p:spPr>
+        <p:style>
+          <a:lnRef idx="1">
+            <a:schemeClr val="accent1"/>
+          </a:lnRef>
+          <a:fillRef idx="3">
+            <a:schemeClr val="accent1"/>
+          </a:fillRef>
+          <a:effectRef idx="2">
+            <a:schemeClr val="accent1"/>
+          </a:effectRef>
+          <a:fontRef idx="minor">
+            <a:schemeClr val="lt1"/>
+          </a:fontRef>
+        </p:style>
+        <p:txBody>
+          <a:bodyPr rtlCol="0" anchor="ctr"/>
+          <a:lstStyle/>
+          <a:p>
+            <a:pPr algn="ctr"/>
+          </a:p>
+        </p:txBody>
+      </p:sp>
+      <p:sp>
+        <p:nvSpPr>
+          <p:cNvPr id="12" name="Rounded Rectangle 11"/>
+          <p:cNvSpPr/>
+          <p:nvPr/>
+        </p:nvSpPr>
+        <p:spPr>
+          <a:xfrm>
+            <a:off x="6245352" y="1463040"/>
+            <a:ext cx="5394960" cy="82296"/>
+          </a:xfrm>
+          <a:prstGeom prst="roundRect">
+            <a:avLst/>
+          </a:prstGeom>
+          <a:solidFill>
+            <a:srgbClr val="D99A06"/>
+          </a:solidFill>
+          <a:ln>
+            <a:noFill/>
+          </a:ln>
+        </p:spPr>
+        <p:style>
+          <a:lnRef idx="1">
+            <a:schemeClr val="accent1"/>
+          </a:lnRef>
+          <a:fillRef idx="3">
+            <a:schemeClr val="accent1"/>
+          </a:fillRef>
+          <a:effectRef idx="2">
+            <a:schemeClr val="accent1"/>
+          </a:effectRef>
+          <a:fontRef idx="minor">
+            <a:schemeClr val="lt1"/>
+          </a:fontRef>
+        </p:style>
+        <p:txBody>
+          <a:bodyPr rtlCol="0" anchor="ctr"/>
+          <a:lstStyle/>
+          <a:p>
+            <a:pPr algn="ctr"/>
+          </a:p>
+        </p:txBody>
+      </p:sp>
+      <p:sp>
+        <p:nvSpPr>
+          <p:cNvPr id="13" name="Oval 12"/>
+          <p:cNvSpPr/>
+          <p:nvPr/>
+        </p:nvSpPr>
+        <p:spPr>
+          <a:xfrm>
+            <a:off x="6501384" y="1755648"/>
+            <a:ext cx="475488" cy="475488"/>
+          </a:xfrm>
+          <a:prstGeom prst="ellipse">
+            <a:avLst/>
+          </a:prstGeom>
+          <a:solidFill>
+            <a:srgbClr val="D99A06"/>
+          </a:solidFill>
+          <a:ln>
+            <a:noFill/>
+          </a:ln>
+        </p:spPr>
+        <p:style>
+          <a:lnRef idx="1">
+            <a:schemeClr val="accent1"/>
+          </a:lnRef>
+          <a:fillRef idx="3">
+            <a:schemeClr val="accent1"/>
+          </a:fillRef>
+          <a:effectRef idx="2">
+            <a:schemeClr val="accent1"/>
+          </a:effectRef>
+          <a:fontRef idx="minor">
+            <a:schemeClr val="lt1"/>
+          </a:fontRef>
+        </p:style>
+        <p:txBody>
+          <a:bodyPr rtlCol="0" anchor="ctr" wrap="square"/>
+          <a:lstStyle/>
+          <a:p>
+            <a:pPr algn="ctr"/>
+            <a:r>
+              <a:rPr sz="1700" b="1" i="0">
+                <a:solidFill>
+                  <a:srgbClr val="144E4C"/>
+                </a:solidFill>
+                <a:latin typeface="Calibri"/>
+              </a:rPr>
+              <a:t>✓</a:t>
+            </a:r>
+          </a:p>
+        </p:txBody>
+      </p:sp>
+      <p:sp>
+        <p:nvSpPr>
+          <p:cNvPr id="14" name="TextBox 13"/>
+          <p:cNvSpPr txBox="1"/>
+          <p:nvPr/>
+        </p:nvSpPr>
+        <p:spPr>
+          <a:xfrm>
+            <a:off x="7114032" y="1719072"/>
+            <a:ext cx="4343400" cy="2880360"/>
+          </a:xfrm>
+          <a:prstGeom prst="rect">
+            <a:avLst/>
+          </a:prstGeom>
+          <a:noFill/>
+        </p:spPr>
+        <p:txBody>
+          <a:bodyPr wrap="square">
+            <a:normAutofit/>
+          </a:bodyPr>
+          <a:lstStyle/>
+          <a:p>
+            <a:pPr algn="l">
+              <a:spcAft>
+                <a:spcPts val="600"/>
+              </a:spcAft>
+            </a:pPr>
+            <a:r>
+              <a:rPr sz="1200" b="1" i="0">
+                <a:solidFill>
+                  <a:srgbClr val="144E4C"/>
+                </a:solidFill>
+                <a:latin typeface="Calibri"/>
+              </a:rPr>
+              <a:t>Mitigations</a:t>
+            </a:r>
+          </a:p>
+          <a:p>
+            <a:pPr algn="l">
+              <a:spcBef>
+                <a:spcPts val="0"/>
+              </a:spcBef>
+              <a:spcAft>
+                <a:spcPts val="300"/>
+              </a:spcAft>
+            </a:pPr>
+            <a:r>
+              <a:rPr sz="1100" b="0" i="0">
+                <a:solidFill>
+                  <a:srgbClr val="5B6570"/>
+                </a:solidFill>
+                <a:latin typeface="Calibri"/>
+              </a:rPr>
+              <a:t>Checkpoint sync every 10 min during training so quota loss costs minutes, not hours.</a:t>
+            </a:r>
+          </a:p>
+          <a:p>
+            <a:pPr algn="l">
+              <a:spcBef>
+                <a:spcPts val="0"/>
+              </a:spcBef>
+              <a:spcAft>
+                <a:spcPts val="300"/>
+              </a:spcAft>
+            </a:pPr>
+            <a:r>
+              <a:rPr sz="1100" b="0" i="0">
+                <a:solidFill>
+                  <a:srgbClr val="5B6570"/>
+                </a:solidFill>
+                <a:latin typeface="Calibri"/>
+              </a:rPr>
+              <a:t>Paired dataset (defect counts + our Ds) is itself a contribution if factory declines.</a:t>
+            </a:r>
+          </a:p>
+          <a:p>
+            <a:pPr algn="l">
+              <a:spcBef>
+                <a:spcPts val="0"/>
+              </a:spcBef>
+              <a:spcAft>
+                <a:spcPts val="300"/>
+              </a:spcAft>
+            </a:pPr>
+            <a:r>
+              <a:rPr sz="1100" b="0" i="0">
+                <a:solidFill>
+                  <a:srgbClr val="5B6570"/>
+                </a:solidFill>
+                <a:latin typeface="Calibri"/>
+              </a:rPr>
+              <a:t>Visual review of lines batch in progress; interim: report as ‘suspicious’ in datasheet.</a:t>
+            </a:r>
+          </a:p>
+        </p:txBody>
+      </p:sp>
+    </p:spTree>
+  </p:cSld>
+  <p:clrMapOvr>
+    <a:masterClrMapping/>
+  </p:clrMapOvr>
+</p:sld>
+</file>
+
+<file path=ppt/slides/slide29.xml><?xml version="1.0" encoding="utf-8"?>
+<p:sld xmlns:a="http://schemas.openxmlformats.org/drawingml/2006/main" xmlns:p="http://schemas.openxmlformats.org/presentationml/2006/main" xmlns:r="http://schemas.openxmlformats.org/officeDocument/2006/relationships">
+  <p:cSld>
+    <p:bg>
+      <p:bgPr>
+        <a:solidFill>
+          <a:srgbClr val="FAF7EF"/>
+        </a:solidFill>
+        <a:effectLst/>
+      </p:bgPr>
+    </p:bg>
+    <p:spTree>
+      <p:nvGrpSpPr>
+        <p:cNvPr id="1" name=""/>
+        <p:cNvGrpSpPr/>
+        <p:nvPr/>
+      </p:nvGrpSpPr>
+      <p:grpSpPr/>
+      <p:sp>
+        <p:nvSpPr>
+          <p:cNvPr id="2" name="TextBox 1"/>
+          <p:cNvSpPr txBox="1"/>
+          <p:nvPr/>
+        </p:nvSpPr>
+        <p:spPr>
+          <a:xfrm>
+            <a:off x="548640" y="6419088"/>
+            <a:ext cx="9144000" cy="274320"/>
+          </a:xfrm>
+          <a:prstGeom prst="rect">
+            <a:avLst/>
+          </a:prstGeom>
+          <a:noFill/>
+        </p:spPr>
+        <p:txBody>
+          <a:bodyPr wrap="square">
+            <a:spAutoFit/>
+          </a:bodyPr>
+          <a:lstStyle/>
+          <a:p>
+            <a:pPr algn="l"/>
+            <a:r>
+              <a:rPr sz="900" b="0" i="0">
+                <a:solidFill>
+                  <a:srgbClr val="8A8F98"/>
+                </a:solidFill>
+                <a:latin typeface="Calibri"/>
+              </a:rPr>
+              <a:t>Defect-to-Delivery  |  FYDP-I  •  Group: 262-034</a:t>
+            </a:r>
+          </a:p>
+        </p:txBody>
+      </p:sp>
+      <p:sp>
+        <p:nvSpPr>
+          <p:cNvPr id="3" name="TextBox 2"/>
+          <p:cNvSpPr txBox="1"/>
+          <p:nvPr/>
+        </p:nvSpPr>
+        <p:spPr>
+          <a:xfrm>
+            <a:off x="10972800" y="6419088"/>
+            <a:ext cx="640080" cy="274320"/>
+          </a:xfrm>
+          <a:prstGeom prst="rect">
+            <a:avLst/>
+          </a:prstGeom>
+          <a:noFill/>
+        </p:spPr>
+        <p:txBody>
+          <a:bodyPr wrap="none">
+            <a:spAutoFit/>
+          </a:bodyPr>
+          <a:lstStyle/>
+          <a:p>
+            <a:pPr algn="r"/>
+            <a:r>
+              <a:rPr sz="900">
+                <a:solidFill>
+                  <a:srgbClr val="8A8F98"/>
+                </a:solidFill>
+                <a:latin typeface="Calibri"/>
+              </a:rPr>
+              <a:t>29 / 31</a:t>
             </a:r>
           </a:p>
         </p:txBody>
@@ -22521,772 +22376,6 @@
 </p:sld>
 </file>
 
-<file path=ppt/slides/slide29.xml><?xml version="1.0" encoding="utf-8"?>
-<p:sld xmlns:a="http://schemas.openxmlformats.org/drawingml/2006/main" xmlns:p="http://schemas.openxmlformats.org/presentationml/2006/main" xmlns:r="http://schemas.openxmlformats.org/officeDocument/2006/relationships">
-  <p:cSld>
-    <p:bg>
-      <p:bgPr>
-        <a:solidFill>
-          <a:srgbClr val="FAF7EF"/>
-        </a:solidFill>
-        <a:effectLst/>
-      </p:bgPr>
-    </p:bg>
-    <p:spTree>
-      <p:nvGrpSpPr>
-        <p:cNvPr id="1" name=""/>
-        <p:cNvGrpSpPr/>
-        <p:nvPr/>
-      </p:nvGrpSpPr>
-      <p:grpSpPr/>
-      <p:sp>
-        <p:nvSpPr>
-          <p:cNvPr id="2" name="TextBox 1"/>
-          <p:cNvSpPr txBox="1"/>
-          <p:nvPr/>
-        </p:nvSpPr>
-        <p:spPr>
-          <a:xfrm>
-            <a:off x="548640" y="6419088"/>
-            <a:ext cx="9144000" cy="274320"/>
-          </a:xfrm>
-          <a:prstGeom prst="rect">
-            <a:avLst/>
-          </a:prstGeom>
-          <a:noFill/>
-        </p:spPr>
-        <p:txBody>
-          <a:bodyPr wrap="square">
-            <a:spAutoFit/>
-          </a:bodyPr>
-          <a:lstStyle/>
-          <a:p>
-            <a:pPr algn="l"/>
-            <a:r>
-              <a:rPr sz="900" b="0" i="0">
-                <a:solidFill>
-                  <a:srgbClr val="8A8F98"/>
-                </a:solidFill>
-                <a:latin typeface="Calibri"/>
-              </a:rPr>
-              <a:t>Defect-to-Delivery  |  FYDP-I  •  Group: 262-034</a:t>
-            </a:r>
-          </a:p>
-        </p:txBody>
-      </p:sp>
-      <p:sp>
-        <p:nvSpPr>
-          <p:cNvPr id="3" name="TextBox 2"/>
-          <p:cNvSpPr txBox="1"/>
-          <p:nvPr/>
-        </p:nvSpPr>
-        <p:spPr>
-          <a:xfrm>
-            <a:off x="10972800" y="6419088"/>
-            <a:ext cx="640080" cy="274320"/>
-          </a:xfrm>
-          <a:prstGeom prst="rect">
-            <a:avLst/>
-          </a:prstGeom>
-          <a:noFill/>
-        </p:spPr>
-        <p:txBody>
-          <a:bodyPr wrap="none">
-            <a:spAutoFit/>
-          </a:bodyPr>
-          <a:lstStyle/>
-          <a:p>
-            <a:pPr algn="r"/>
-            <a:r>
-              <a:rPr sz="900">
-                <a:solidFill>
-                  <a:srgbClr val="8A8F98"/>
-                </a:solidFill>
-                <a:latin typeface="Calibri"/>
-              </a:rPr>
-              <a:t>29 / 30</a:t>
-            </a:r>
-          </a:p>
-        </p:txBody>
-      </p:sp>
-      <p:sp>
-        <p:nvSpPr>
-          <p:cNvPr id="4" name="Rectangle 3"/>
-          <p:cNvSpPr/>
-          <p:nvPr/>
-        </p:nvSpPr>
-        <p:spPr>
-          <a:xfrm>
-            <a:off x="0" y="0"/>
-            <a:ext cx="12188952" cy="64008"/>
-          </a:xfrm>
-          <a:prstGeom prst="rect">
-            <a:avLst/>
-          </a:prstGeom>
-          <a:solidFill>
-            <a:srgbClr val="D99A06"/>
-          </a:solidFill>
-          <a:ln>
-            <a:noFill/>
-          </a:ln>
-        </p:spPr>
-        <p:style>
-          <a:lnRef idx="1">
-            <a:schemeClr val="accent1"/>
-          </a:lnRef>
-          <a:fillRef idx="3">
-            <a:schemeClr val="accent1"/>
-          </a:fillRef>
-          <a:effectRef idx="2">
-            <a:schemeClr val="accent1"/>
-          </a:effectRef>
-          <a:fontRef idx="minor">
-            <a:schemeClr val="lt1"/>
-          </a:fontRef>
-        </p:style>
-        <p:txBody>
-          <a:bodyPr rtlCol="0" anchor="ctr"/>
-          <a:lstStyle/>
-          <a:p>
-            <a:pPr algn="ctr"/>
-          </a:p>
-        </p:txBody>
-      </p:sp>
-      <p:sp>
-        <p:nvSpPr>
-          <p:cNvPr id="5" name="TextBox 4"/>
-          <p:cNvSpPr txBox="1"/>
-          <p:nvPr/>
-        </p:nvSpPr>
-        <p:spPr>
-          <a:xfrm>
-            <a:off x="548640" y="320040"/>
-            <a:ext cx="11064240" cy="822960"/>
-          </a:xfrm>
-          <a:prstGeom prst="rect">
-            <a:avLst/>
-          </a:prstGeom>
-          <a:noFill/>
-        </p:spPr>
-        <p:txBody>
-          <a:bodyPr wrap="square">
-            <a:spAutoFit/>
-          </a:bodyPr>
-          <a:lstStyle/>
-          <a:p>
-            <a:pPr algn="l"/>
-            <a:r>
-              <a:rPr sz="3400" b="1" i="0">
-                <a:solidFill>
-                  <a:srgbClr val="144E4C"/>
-                </a:solidFill>
-                <a:latin typeface="Georgia"/>
-              </a:rPr>
-              <a:t>Conclusion &amp; Future Work</a:t>
-            </a:r>
-          </a:p>
-        </p:txBody>
-      </p:sp>
-      <p:sp>
-        <p:nvSpPr>
-          <p:cNvPr id="6" name="Rectangle 5"/>
-          <p:cNvSpPr/>
-          <p:nvPr/>
-        </p:nvSpPr>
-        <p:spPr>
-          <a:xfrm>
-            <a:off x="566928" y="1078992"/>
-            <a:ext cx="1005840" cy="50292"/>
-          </a:xfrm>
-          <a:prstGeom prst="rect">
-            <a:avLst/>
-          </a:prstGeom>
-          <a:solidFill>
-            <a:srgbClr val="D99A06"/>
-          </a:solidFill>
-          <a:ln>
-            <a:noFill/>
-          </a:ln>
-        </p:spPr>
-        <p:style>
-          <a:lnRef idx="1">
-            <a:schemeClr val="accent1"/>
-          </a:lnRef>
-          <a:fillRef idx="3">
-            <a:schemeClr val="accent1"/>
-          </a:fillRef>
-          <a:effectRef idx="2">
-            <a:schemeClr val="accent1"/>
-          </a:effectRef>
-          <a:fontRef idx="minor">
-            <a:schemeClr val="lt1"/>
-          </a:fontRef>
-        </p:style>
-        <p:txBody>
-          <a:bodyPr rtlCol="0" anchor="ctr"/>
-          <a:lstStyle/>
-          <a:p>
-            <a:pPr algn="ctr"/>
-          </a:p>
-        </p:txBody>
-      </p:sp>
-      <p:sp>
-        <p:nvSpPr>
-          <p:cNvPr id="7" name="Rounded Rectangle 6"/>
-          <p:cNvSpPr/>
-          <p:nvPr/>
-        </p:nvSpPr>
-        <p:spPr>
-          <a:xfrm>
-            <a:off x="548640" y="1463040"/>
-            <a:ext cx="5394960" cy="2926080"/>
-          </a:xfrm>
-          <a:prstGeom prst="roundRect">
-            <a:avLst>
-              <a:gd name="adj" fmla="val 6000"/>
-            </a:avLst>
-          </a:prstGeom>
-          <a:solidFill>
-            <a:srgbClr val="FFFFFF"/>
-          </a:solidFill>
-          <a:ln w="15875">
-            <a:solidFill>
-              <a:srgbClr val="D8D2C2"/>
-            </a:solidFill>
-          </a:ln>
-        </p:spPr>
-        <p:style>
-          <a:lnRef idx="1">
-            <a:schemeClr val="accent1"/>
-          </a:lnRef>
-          <a:fillRef idx="3">
-            <a:schemeClr val="accent1"/>
-          </a:fillRef>
-          <a:effectRef idx="2">
-            <a:schemeClr val="accent1"/>
-          </a:effectRef>
-          <a:fontRef idx="minor">
-            <a:schemeClr val="lt1"/>
-          </a:fontRef>
-        </p:style>
-        <p:txBody>
-          <a:bodyPr rtlCol="0" anchor="ctr"/>
-          <a:lstStyle/>
-          <a:p>
-            <a:pPr algn="ctr"/>
-          </a:p>
-        </p:txBody>
-      </p:sp>
-      <p:sp>
-        <p:nvSpPr>
-          <p:cNvPr id="8" name="Rounded Rectangle 7"/>
-          <p:cNvSpPr/>
-          <p:nvPr/>
-        </p:nvSpPr>
-        <p:spPr>
-          <a:xfrm>
-            <a:off x="548640" y="1463040"/>
-            <a:ext cx="5394960" cy="82296"/>
-          </a:xfrm>
-          <a:prstGeom prst="roundRect">
-            <a:avLst/>
-          </a:prstGeom>
-          <a:solidFill>
-            <a:srgbClr val="D99A06"/>
-          </a:solidFill>
-          <a:ln>
-            <a:noFill/>
-          </a:ln>
-        </p:spPr>
-        <p:style>
-          <a:lnRef idx="1">
-            <a:schemeClr val="accent1"/>
-          </a:lnRef>
-          <a:fillRef idx="3">
-            <a:schemeClr val="accent1"/>
-          </a:fillRef>
-          <a:effectRef idx="2">
-            <a:schemeClr val="accent1"/>
-          </a:effectRef>
-          <a:fontRef idx="minor">
-            <a:schemeClr val="lt1"/>
-          </a:fontRef>
-        </p:style>
-        <p:txBody>
-          <a:bodyPr rtlCol="0" anchor="ctr"/>
-          <a:lstStyle/>
-          <a:p>
-            <a:pPr algn="ctr"/>
-          </a:p>
-        </p:txBody>
-      </p:sp>
-      <p:sp>
-        <p:nvSpPr>
-          <p:cNvPr id="9" name="Oval 8"/>
-          <p:cNvSpPr/>
-          <p:nvPr/>
-        </p:nvSpPr>
-        <p:spPr>
-          <a:xfrm>
-            <a:off x="804672" y="1755648"/>
-            <a:ext cx="475488" cy="475488"/>
-          </a:xfrm>
-          <a:prstGeom prst="ellipse">
-            <a:avLst/>
-          </a:prstGeom>
-          <a:solidFill>
-            <a:srgbClr val="D99A06"/>
-          </a:solidFill>
-          <a:ln>
-            <a:noFill/>
-          </a:ln>
-        </p:spPr>
-        <p:style>
-          <a:lnRef idx="1">
-            <a:schemeClr val="accent1"/>
-          </a:lnRef>
-          <a:fillRef idx="3">
-            <a:schemeClr val="accent1"/>
-          </a:fillRef>
-          <a:effectRef idx="2">
-            <a:schemeClr val="accent1"/>
-          </a:effectRef>
-          <a:fontRef idx="minor">
-            <a:schemeClr val="lt1"/>
-          </a:fontRef>
-        </p:style>
-        <p:txBody>
-          <a:bodyPr rtlCol="0" anchor="ctr" wrap="square"/>
-          <a:lstStyle/>
-          <a:p>
-            <a:pPr algn="ctr"/>
-            <a:r>
-              <a:rPr sz="1700" b="1" i="0">
-                <a:solidFill>
-                  <a:srgbClr val="144E4C"/>
-                </a:solidFill>
-                <a:latin typeface="Calibri"/>
-              </a:rPr>
-              <a:t>✓</a:t>
-            </a:r>
-          </a:p>
-        </p:txBody>
-      </p:sp>
-      <p:sp>
-        <p:nvSpPr>
-          <p:cNvPr id="10" name="TextBox 9"/>
-          <p:cNvSpPr txBox="1"/>
-          <p:nvPr/>
-        </p:nvSpPr>
-        <p:spPr>
-          <a:xfrm>
-            <a:off x="1417319" y="1719072"/>
-            <a:ext cx="4343400" cy="2514600"/>
-          </a:xfrm>
-          <a:prstGeom prst="rect">
-            <a:avLst/>
-          </a:prstGeom>
-          <a:noFill/>
-        </p:spPr>
-        <p:txBody>
-          <a:bodyPr wrap="square">
-            <a:normAutofit/>
-          </a:bodyPr>
-          <a:lstStyle/>
-          <a:p>
-            <a:pPr algn="l">
-              <a:spcAft>
-                <a:spcPts val="600"/>
-              </a:spcAft>
-            </a:pPr>
-            <a:r>
-              <a:rPr sz="1600" b="1" i="0">
-                <a:solidFill>
-                  <a:srgbClr val="144E4C"/>
-                </a:solidFill>
-                <a:latin typeface="Calibri"/>
-              </a:rPr>
-              <a:t>Summary</a:t>
-            </a:r>
-          </a:p>
-          <a:p>
-            <a:pPr algn="l">
-              <a:spcBef>
-                <a:spcPts val="0"/>
-              </a:spcBef>
-              <a:spcAft>
-                <a:spcPts val="300"/>
-              </a:spcAft>
-            </a:pPr>
-            <a:r>
-              <a:rPr sz="1350" b="0" i="0">
-                <a:solidFill>
-                  <a:srgbClr val="5B6570"/>
-                </a:solidFill>
-                <a:latin typeface="Calibri"/>
-              </a:rPr>
-              <a:t>Reviewed 20 Works, Fixed Requirements, Chose The Detect → Segment → Anomaly → Predict Methodology.</a:t>
-            </a:r>
-          </a:p>
-          <a:p>
-            <a:pPr algn="l">
-              <a:spcBef>
-                <a:spcPts val="0"/>
-              </a:spcBef>
-              <a:spcAft>
-                <a:spcPts val="300"/>
-              </a:spcAft>
-            </a:pPr>
-            <a:r>
-              <a:rPr sz="1350" b="0" i="0">
-                <a:solidFill>
-                  <a:srgbClr val="5B6570"/>
-                </a:solidFill>
-                <a:latin typeface="Calibri"/>
-              </a:rPr>
-              <a:t>Audited The Dataset: Hashed Every Image, Removed 17 Duplicates, Quarantined 12 Files, Confirmed 2,081 Train / 468 Test With Zero Overlap.</a:t>
-            </a:r>
-          </a:p>
-          <a:p>
-            <a:pPr algn="l">
-              <a:spcBef>
-                <a:spcPts val="0"/>
-              </a:spcBef>
-              <a:spcAft>
-                <a:spcPts val="300"/>
-              </a:spcAft>
-            </a:pPr>
-            <a:r>
-              <a:rPr sz="1350" b="0" i="0">
-                <a:solidFill>
-                  <a:srgbClr val="5B6570"/>
-                </a:solidFill>
-                <a:latin typeface="Calibri"/>
-              </a:rPr>
-              <a:t>That Audit Supports Every Number That Follows.</a:t>
-            </a:r>
-          </a:p>
-        </p:txBody>
-      </p:sp>
-      <p:sp>
-        <p:nvSpPr>
-          <p:cNvPr id="11" name="Rounded Rectangle 10"/>
-          <p:cNvSpPr/>
-          <p:nvPr/>
-        </p:nvSpPr>
-        <p:spPr>
-          <a:xfrm>
-            <a:off x="6245352" y="1463040"/>
-            <a:ext cx="5394960" cy="2926080"/>
-          </a:xfrm>
-          <a:prstGeom prst="roundRect">
-            <a:avLst>
-              <a:gd name="adj" fmla="val 6000"/>
-            </a:avLst>
-          </a:prstGeom>
-          <a:solidFill>
-            <a:srgbClr val="FFFFFF"/>
-          </a:solidFill>
-          <a:ln w="15875">
-            <a:solidFill>
-              <a:srgbClr val="D8D2C2"/>
-            </a:solidFill>
-          </a:ln>
-        </p:spPr>
-        <p:style>
-          <a:lnRef idx="1">
-            <a:schemeClr val="accent1"/>
-          </a:lnRef>
-          <a:fillRef idx="3">
-            <a:schemeClr val="accent1"/>
-          </a:fillRef>
-          <a:effectRef idx="2">
-            <a:schemeClr val="accent1"/>
-          </a:effectRef>
-          <a:fontRef idx="minor">
-            <a:schemeClr val="lt1"/>
-          </a:fontRef>
-        </p:style>
-        <p:txBody>
-          <a:bodyPr rtlCol="0" anchor="ctr"/>
-          <a:lstStyle/>
-          <a:p>
-            <a:pPr algn="ctr"/>
-          </a:p>
-        </p:txBody>
-      </p:sp>
-      <p:sp>
-        <p:nvSpPr>
-          <p:cNvPr id="12" name="Rounded Rectangle 11"/>
-          <p:cNvSpPr/>
-          <p:nvPr/>
-        </p:nvSpPr>
-        <p:spPr>
-          <a:xfrm>
-            <a:off x="6245352" y="1463040"/>
-            <a:ext cx="5394960" cy="82296"/>
-          </a:xfrm>
-          <a:prstGeom prst="roundRect">
-            <a:avLst/>
-          </a:prstGeom>
-          <a:solidFill>
-            <a:srgbClr val="D99A06"/>
-          </a:solidFill>
-          <a:ln>
-            <a:noFill/>
-          </a:ln>
-        </p:spPr>
-        <p:style>
-          <a:lnRef idx="1">
-            <a:schemeClr val="accent1"/>
-          </a:lnRef>
-          <a:fillRef idx="3">
-            <a:schemeClr val="accent1"/>
-          </a:fillRef>
-          <a:effectRef idx="2">
-            <a:schemeClr val="accent1"/>
-          </a:effectRef>
-          <a:fontRef idx="minor">
-            <a:schemeClr val="lt1"/>
-          </a:fontRef>
-        </p:style>
-        <p:txBody>
-          <a:bodyPr rtlCol="0" anchor="ctr"/>
-          <a:lstStyle/>
-          <a:p>
-            <a:pPr algn="ctr"/>
-          </a:p>
-        </p:txBody>
-      </p:sp>
-      <p:sp>
-        <p:nvSpPr>
-          <p:cNvPr id="13" name="Oval 12"/>
-          <p:cNvSpPr/>
-          <p:nvPr/>
-        </p:nvSpPr>
-        <p:spPr>
-          <a:xfrm>
-            <a:off x="6501384" y="1755648"/>
-            <a:ext cx="475488" cy="475488"/>
-          </a:xfrm>
-          <a:prstGeom prst="ellipse">
-            <a:avLst/>
-          </a:prstGeom>
-          <a:solidFill>
-            <a:srgbClr val="D99A06"/>
-          </a:solidFill>
-          <a:ln>
-            <a:noFill/>
-          </a:ln>
-        </p:spPr>
-        <p:style>
-          <a:lnRef idx="1">
-            <a:schemeClr val="accent1"/>
-          </a:lnRef>
-          <a:fillRef idx="3">
-            <a:schemeClr val="accent1"/>
-          </a:fillRef>
-          <a:effectRef idx="2">
-            <a:schemeClr val="accent1"/>
-          </a:effectRef>
-          <a:fontRef idx="minor">
-            <a:schemeClr val="lt1"/>
-          </a:fontRef>
-        </p:style>
-        <p:txBody>
-          <a:bodyPr rtlCol="0" anchor="ctr" wrap="square"/>
-          <a:lstStyle/>
-          <a:p>
-            <a:pPr algn="ctr"/>
-            <a:r>
-              <a:rPr sz="1700" b="1" i="0">
-                <a:solidFill>
-                  <a:srgbClr val="144E4C"/>
-                </a:solidFill>
-                <a:latin typeface="Calibri"/>
-              </a:rPr>
-              <a:t>→</a:t>
-            </a:r>
-          </a:p>
-        </p:txBody>
-      </p:sp>
-      <p:sp>
-        <p:nvSpPr>
-          <p:cNvPr id="14" name="TextBox 13"/>
-          <p:cNvSpPr txBox="1"/>
-          <p:nvPr/>
-        </p:nvSpPr>
-        <p:spPr>
-          <a:xfrm>
-            <a:off x="7114032" y="1719072"/>
-            <a:ext cx="4343400" cy="2514600"/>
-          </a:xfrm>
-          <a:prstGeom prst="rect">
-            <a:avLst/>
-          </a:prstGeom>
-          <a:noFill/>
-        </p:spPr>
-        <p:txBody>
-          <a:bodyPr wrap="square">
-            <a:normAutofit/>
-          </a:bodyPr>
-          <a:lstStyle/>
-          <a:p>
-            <a:pPr algn="l">
-              <a:spcAft>
-                <a:spcPts val="600"/>
-              </a:spcAft>
-            </a:pPr>
-            <a:r>
-              <a:rPr sz="1600" b="1" i="0">
-                <a:solidFill>
-                  <a:srgbClr val="144E4C"/>
-                </a:solidFill>
-                <a:latin typeface="Calibri"/>
-              </a:rPr>
-              <a:t>Future Work</a:t>
-            </a:r>
-          </a:p>
-          <a:p>
-            <a:pPr algn="l">
-              <a:spcBef>
-                <a:spcPts val="0"/>
-              </a:spcBef>
-              <a:spcAft>
-                <a:spcPts val="300"/>
-              </a:spcAft>
-            </a:pPr>
-            <a:r>
-              <a:rPr sz="1350" b="0" i="0">
-                <a:solidFill>
-                  <a:srgbClr val="5B6570"/>
-                </a:solidFill>
-                <a:latin typeface="Calibri"/>
-              </a:rPr>
-              <a:t>Relabel Quarantine Using A pHash Sweep.</a:t>
-            </a:r>
-          </a:p>
-          <a:p>
-            <a:pPr algn="l">
-              <a:spcBef>
-                <a:spcPts val="0"/>
-              </a:spcBef>
-              <a:spcAft>
-                <a:spcPts val="300"/>
-              </a:spcAft>
-            </a:pPr>
-            <a:r>
-              <a:rPr sz="1350" b="0" i="0">
-                <a:solidFill>
-                  <a:srgbClr val="5B6570"/>
-                </a:solidFill>
-                <a:latin typeface="Calibri"/>
-              </a:rPr>
-              <a:t>Gather Roll-ID-Disciplined V2 Factory Data.</a:t>
-            </a:r>
-          </a:p>
-          <a:p>
-            <a:pPr algn="l">
-              <a:spcBef>
-                <a:spcPts val="0"/>
-              </a:spcBef>
-              <a:spcAft>
-                <a:spcPts val="300"/>
-              </a:spcAft>
-            </a:pPr>
-            <a:r>
-              <a:rPr sz="1350" b="0" i="0">
-                <a:solidFill>
-                  <a:srgbClr val="5B6570"/>
-                </a:solidFill>
-                <a:latin typeface="Calibri"/>
-              </a:rPr>
-              <a:t>Build A Bangla Dashboard For Planners.</a:t>
-            </a:r>
-          </a:p>
-          <a:p>
-            <a:pPr algn="l">
-              <a:spcBef>
-                <a:spcPts val="0"/>
-              </a:spcBef>
-              <a:spcAft>
-                <a:spcPts val="300"/>
-              </a:spcAft>
-            </a:pPr>
-            <a:r>
-              <a:rPr sz="1350" b="0" i="0">
-                <a:solidFill>
-                  <a:srgbClr val="5B6570"/>
-                </a:solidFill>
-                <a:latin typeface="Calibri"/>
-              </a:rPr>
-              <a:t>Benchmark Against Isl-Knit And FabricSpotDefect.</a:t>
-            </a:r>
-          </a:p>
-          <a:p>
-            <a:pPr algn="l">
-              <a:spcBef>
-                <a:spcPts val="0"/>
-              </a:spcBef>
-              <a:spcAft>
-                <a:spcPts val="300"/>
-              </a:spcAft>
-            </a:pPr>
-            <a:r>
-              <a:rPr sz="1350" b="0" i="0">
-                <a:solidFill>
-                  <a:srgbClr val="5B6570"/>
-                </a:solidFill>
-                <a:latin typeface="Calibri"/>
-              </a:rPr>
-              <a:t>Submit Results To A Conference.</a:t>
-            </a:r>
-          </a:p>
-        </p:txBody>
-      </p:sp>
-      <p:sp>
-        <p:nvSpPr>
-          <p:cNvPr id="15" name="TextBox 14"/>
-          <p:cNvSpPr txBox="1"/>
-          <p:nvPr/>
-        </p:nvSpPr>
-        <p:spPr>
-          <a:xfrm>
-            <a:off x="548640" y="5029200"/>
-            <a:ext cx="11064240" cy="914400"/>
-          </a:xfrm>
-          <a:prstGeom prst="rect">
-            <a:avLst/>
-          </a:prstGeom>
-          <a:noFill/>
-        </p:spPr>
-        <p:txBody>
-          <a:bodyPr wrap="square" anchor="ctr">
-            <a:spAutoFit/>
-          </a:bodyPr>
-          <a:lstStyle/>
-          <a:p>
-            <a:pPr algn="ctr"/>
-            <a:r>
-              <a:rPr sz="1250" b="0" i="0">
-                <a:solidFill>
-                  <a:srgbClr val="5B6570"/>
-                </a:solidFill>
-                <a:latin typeface="Calibri"/>
-              </a:rPr>
-              <a:t>Limitations: Pilot Localization Is Estimated, Not Measured; Planning Labels Are Synthetic; 1,994 Files Lack Group IDs; Minority Classes Are Thin; Industrial Validation Is Pending.</a:t>
-            </a:r>
-          </a:p>
-        </p:txBody>
-      </p:sp>
-    </p:spTree>
-  </p:cSld>
-  <p:clrMapOvr>
-    <a:masterClrMapping/>
-  </p:clrMapOvr>
-</p:sld>
-</file>
-
 <file path=ppt/slides/slide3.xml><?xml version="1.0" encoding="utf-8"?>
 <p:sld xmlns:a="http://schemas.openxmlformats.org/drawingml/2006/main" xmlns:p="http://schemas.openxmlformats.org/presentationml/2006/main" xmlns:r="http://schemas.openxmlformats.org/officeDocument/2006/relationships">
   <p:cSld>
@@ -23370,7 +22459,7 @@
                 </a:solidFill>
                 <a:latin typeface="Calibri"/>
               </a:rPr>
-              <a:t>3 / 30</a:t>
+              <a:t>3 / 31</a:t>
             </a:r>
           </a:p>
         </p:txBody>
@@ -24028,7 +23117,7 @@
                 </a:solidFill>
                 <a:latin typeface="Calibri"/>
               </a:rPr>
-              <a:t>30 / 30</a:t>
+              <a:t>30 / 31</a:t>
             </a:r>
           </a:p>
         </p:txBody>
@@ -24084,8 +23173,600 @@
         </p:nvSpPr>
         <p:spPr>
           <a:xfrm>
-            <a:off x="548640" y="2011680"/>
-            <a:ext cx="11064240" cy="1280160"/>
+            <a:off x="548640" y="320040"/>
+            <a:ext cx="11064240" cy="822960"/>
+          </a:xfrm>
+          <a:prstGeom prst="rect">
+            <a:avLst/>
+          </a:prstGeom>
+          <a:noFill/>
+        </p:spPr>
+        <p:txBody>
+          <a:bodyPr wrap="square">
+            <a:spAutoFit/>
+          </a:bodyPr>
+          <a:lstStyle/>
+          <a:p>
+            <a:pPr algn="l"/>
+            <a:r>
+              <a:rPr sz="3400" b="1" i="0">
+                <a:solidFill>
+                  <a:srgbClr val="144E4C"/>
+                </a:solidFill>
+                <a:latin typeface="Georgia"/>
+              </a:rPr>
+              <a:t>Conclusion &amp; Future Work</a:t>
+            </a:r>
+          </a:p>
+        </p:txBody>
+      </p:sp>
+      <p:sp>
+        <p:nvSpPr>
+          <p:cNvPr id="6" name="Rectangle 5"/>
+          <p:cNvSpPr/>
+          <p:nvPr/>
+        </p:nvSpPr>
+        <p:spPr>
+          <a:xfrm>
+            <a:off x="566928" y="1078992"/>
+            <a:ext cx="1005840" cy="50292"/>
+          </a:xfrm>
+          <a:prstGeom prst="rect">
+            <a:avLst/>
+          </a:prstGeom>
+          <a:solidFill>
+            <a:srgbClr val="D99A06"/>
+          </a:solidFill>
+          <a:ln>
+            <a:noFill/>
+          </a:ln>
+        </p:spPr>
+        <p:style>
+          <a:lnRef idx="1">
+            <a:schemeClr val="accent1"/>
+          </a:lnRef>
+          <a:fillRef idx="3">
+            <a:schemeClr val="accent1"/>
+          </a:fillRef>
+          <a:effectRef idx="2">
+            <a:schemeClr val="accent1"/>
+          </a:effectRef>
+          <a:fontRef idx="minor">
+            <a:schemeClr val="lt1"/>
+          </a:fontRef>
+        </p:style>
+        <p:txBody>
+          <a:bodyPr rtlCol="0" anchor="ctr"/>
+          <a:lstStyle/>
+          <a:p>
+            <a:pPr algn="ctr"/>
+          </a:p>
+        </p:txBody>
+      </p:sp>
+      <p:sp>
+        <p:nvSpPr>
+          <p:cNvPr id="7" name="Rounded Rectangle 6"/>
+          <p:cNvSpPr/>
+          <p:nvPr/>
+        </p:nvSpPr>
+        <p:spPr>
+          <a:xfrm>
+            <a:off x="548640" y="1463040"/>
+            <a:ext cx="5394960" cy="2926080"/>
+          </a:xfrm>
+          <a:prstGeom prst="roundRect">
+            <a:avLst>
+              <a:gd name="adj" fmla="val 6000"/>
+            </a:avLst>
+          </a:prstGeom>
+          <a:solidFill>
+            <a:srgbClr val="FFFFFF"/>
+          </a:solidFill>
+          <a:ln w="15875">
+            <a:solidFill>
+              <a:srgbClr val="D8D2C2"/>
+            </a:solidFill>
+          </a:ln>
+        </p:spPr>
+        <p:style>
+          <a:lnRef idx="1">
+            <a:schemeClr val="accent1"/>
+          </a:lnRef>
+          <a:fillRef idx="3">
+            <a:schemeClr val="accent1"/>
+          </a:fillRef>
+          <a:effectRef idx="2">
+            <a:schemeClr val="accent1"/>
+          </a:effectRef>
+          <a:fontRef idx="minor">
+            <a:schemeClr val="lt1"/>
+          </a:fontRef>
+        </p:style>
+        <p:txBody>
+          <a:bodyPr rtlCol="0" anchor="ctr"/>
+          <a:lstStyle/>
+          <a:p>
+            <a:pPr algn="ctr"/>
+          </a:p>
+        </p:txBody>
+      </p:sp>
+      <p:sp>
+        <p:nvSpPr>
+          <p:cNvPr id="8" name="Rounded Rectangle 7"/>
+          <p:cNvSpPr/>
+          <p:nvPr/>
+        </p:nvSpPr>
+        <p:spPr>
+          <a:xfrm>
+            <a:off x="548640" y="1463040"/>
+            <a:ext cx="5394960" cy="82296"/>
+          </a:xfrm>
+          <a:prstGeom prst="roundRect">
+            <a:avLst/>
+          </a:prstGeom>
+          <a:solidFill>
+            <a:srgbClr val="D99A06"/>
+          </a:solidFill>
+          <a:ln>
+            <a:noFill/>
+          </a:ln>
+        </p:spPr>
+        <p:style>
+          <a:lnRef idx="1">
+            <a:schemeClr val="accent1"/>
+          </a:lnRef>
+          <a:fillRef idx="3">
+            <a:schemeClr val="accent1"/>
+          </a:fillRef>
+          <a:effectRef idx="2">
+            <a:schemeClr val="accent1"/>
+          </a:effectRef>
+          <a:fontRef idx="minor">
+            <a:schemeClr val="lt1"/>
+          </a:fontRef>
+        </p:style>
+        <p:txBody>
+          <a:bodyPr rtlCol="0" anchor="ctr"/>
+          <a:lstStyle/>
+          <a:p>
+            <a:pPr algn="ctr"/>
+          </a:p>
+        </p:txBody>
+      </p:sp>
+      <p:sp>
+        <p:nvSpPr>
+          <p:cNvPr id="9" name="Oval 8"/>
+          <p:cNvSpPr/>
+          <p:nvPr/>
+        </p:nvSpPr>
+        <p:spPr>
+          <a:xfrm>
+            <a:off x="804672" y="1755648"/>
+            <a:ext cx="475488" cy="475488"/>
+          </a:xfrm>
+          <a:prstGeom prst="ellipse">
+            <a:avLst/>
+          </a:prstGeom>
+          <a:solidFill>
+            <a:srgbClr val="D99A06"/>
+          </a:solidFill>
+          <a:ln>
+            <a:noFill/>
+          </a:ln>
+        </p:spPr>
+        <p:style>
+          <a:lnRef idx="1">
+            <a:schemeClr val="accent1"/>
+          </a:lnRef>
+          <a:fillRef idx="3">
+            <a:schemeClr val="accent1"/>
+          </a:fillRef>
+          <a:effectRef idx="2">
+            <a:schemeClr val="accent1"/>
+          </a:effectRef>
+          <a:fontRef idx="minor">
+            <a:schemeClr val="lt1"/>
+          </a:fontRef>
+        </p:style>
+        <p:txBody>
+          <a:bodyPr rtlCol="0" anchor="ctr" wrap="square"/>
+          <a:lstStyle/>
+          <a:p>
+            <a:pPr algn="ctr"/>
+            <a:r>
+              <a:rPr sz="1700" b="1" i="0">
+                <a:solidFill>
+                  <a:srgbClr val="144E4C"/>
+                </a:solidFill>
+                <a:latin typeface="Calibri"/>
+              </a:rPr>
+              <a:t>✓</a:t>
+            </a:r>
+          </a:p>
+        </p:txBody>
+      </p:sp>
+      <p:sp>
+        <p:nvSpPr>
+          <p:cNvPr id="10" name="TextBox 9"/>
+          <p:cNvSpPr txBox="1"/>
+          <p:nvPr/>
+        </p:nvSpPr>
+        <p:spPr>
+          <a:xfrm>
+            <a:off x="1417319" y="1719072"/>
+            <a:ext cx="4343400" cy="2514600"/>
+          </a:xfrm>
+          <a:prstGeom prst="rect">
+            <a:avLst/>
+          </a:prstGeom>
+          <a:noFill/>
+        </p:spPr>
+        <p:txBody>
+          <a:bodyPr wrap="square">
+            <a:normAutofit/>
+          </a:bodyPr>
+          <a:lstStyle/>
+          <a:p>
+            <a:pPr algn="l">
+              <a:spcAft>
+                <a:spcPts val="600"/>
+              </a:spcAft>
+            </a:pPr>
+            <a:r>
+              <a:rPr sz="1600" b="1" i="0">
+                <a:solidFill>
+                  <a:srgbClr val="144E4C"/>
+                </a:solidFill>
+                <a:latin typeface="Calibri"/>
+              </a:rPr>
+              <a:t>Summary</a:t>
+            </a:r>
+          </a:p>
+          <a:p>
+            <a:pPr algn="l">
+              <a:spcBef>
+                <a:spcPts val="0"/>
+              </a:spcBef>
+              <a:spcAft>
+                <a:spcPts val="300"/>
+              </a:spcAft>
+            </a:pPr>
+            <a:r>
+              <a:rPr sz="1350" b="0" i="0">
+                <a:solidFill>
+                  <a:srgbClr val="5B6570"/>
+                </a:solidFill>
+                <a:latin typeface="Calibri"/>
+              </a:rPr>
+              <a:t>Reviewed 20 Works, Fixed Requirements, Chose The Detect → Segment → Anomaly → Predict Methodology.</a:t>
+            </a:r>
+          </a:p>
+          <a:p>
+            <a:pPr algn="l">
+              <a:spcBef>
+                <a:spcPts val="0"/>
+              </a:spcBef>
+              <a:spcAft>
+                <a:spcPts val="300"/>
+              </a:spcAft>
+            </a:pPr>
+            <a:r>
+              <a:rPr sz="1350" b="0" i="0">
+                <a:solidFill>
+                  <a:srgbClr val="5B6570"/>
+                </a:solidFill>
+                <a:latin typeface="Calibri"/>
+              </a:rPr>
+              <a:t>Audited The Dataset: Hashed Every Image, Removed 17 Duplicates, Quarantined 12 Files, Confirmed 2,081 Train / 468 Test With Zero Overlap.</a:t>
+            </a:r>
+          </a:p>
+          <a:p>
+            <a:pPr algn="l">
+              <a:spcBef>
+                <a:spcPts val="0"/>
+              </a:spcBef>
+              <a:spcAft>
+                <a:spcPts val="300"/>
+              </a:spcAft>
+            </a:pPr>
+            <a:r>
+              <a:rPr sz="1350" b="0" i="0">
+                <a:solidFill>
+                  <a:srgbClr val="5B6570"/>
+                </a:solidFill>
+                <a:latin typeface="Calibri"/>
+              </a:rPr>
+              <a:t>That Audit Supports Every Number That Follows.</a:t>
+            </a:r>
+          </a:p>
+        </p:txBody>
+      </p:sp>
+      <p:sp>
+        <p:nvSpPr>
+          <p:cNvPr id="11" name="Rounded Rectangle 10"/>
+          <p:cNvSpPr/>
+          <p:nvPr/>
+        </p:nvSpPr>
+        <p:spPr>
+          <a:xfrm>
+            <a:off x="6245352" y="1463040"/>
+            <a:ext cx="5394960" cy="2926080"/>
+          </a:xfrm>
+          <a:prstGeom prst="roundRect">
+            <a:avLst>
+              <a:gd name="adj" fmla="val 6000"/>
+            </a:avLst>
+          </a:prstGeom>
+          <a:solidFill>
+            <a:srgbClr val="FFFFFF"/>
+          </a:solidFill>
+          <a:ln w="15875">
+            <a:solidFill>
+              <a:srgbClr val="D8D2C2"/>
+            </a:solidFill>
+          </a:ln>
+        </p:spPr>
+        <p:style>
+          <a:lnRef idx="1">
+            <a:schemeClr val="accent1"/>
+          </a:lnRef>
+          <a:fillRef idx="3">
+            <a:schemeClr val="accent1"/>
+          </a:fillRef>
+          <a:effectRef idx="2">
+            <a:schemeClr val="accent1"/>
+          </a:effectRef>
+          <a:fontRef idx="minor">
+            <a:schemeClr val="lt1"/>
+          </a:fontRef>
+        </p:style>
+        <p:txBody>
+          <a:bodyPr rtlCol="0" anchor="ctr"/>
+          <a:lstStyle/>
+          <a:p>
+            <a:pPr algn="ctr"/>
+          </a:p>
+        </p:txBody>
+      </p:sp>
+      <p:sp>
+        <p:nvSpPr>
+          <p:cNvPr id="12" name="Rounded Rectangle 11"/>
+          <p:cNvSpPr/>
+          <p:nvPr/>
+        </p:nvSpPr>
+        <p:spPr>
+          <a:xfrm>
+            <a:off x="6245352" y="1463040"/>
+            <a:ext cx="5394960" cy="82296"/>
+          </a:xfrm>
+          <a:prstGeom prst="roundRect">
+            <a:avLst/>
+          </a:prstGeom>
+          <a:solidFill>
+            <a:srgbClr val="D99A06"/>
+          </a:solidFill>
+          <a:ln>
+            <a:noFill/>
+          </a:ln>
+        </p:spPr>
+        <p:style>
+          <a:lnRef idx="1">
+            <a:schemeClr val="accent1"/>
+          </a:lnRef>
+          <a:fillRef idx="3">
+            <a:schemeClr val="accent1"/>
+          </a:fillRef>
+          <a:effectRef idx="2">
+            <a:schemeClr val="accent1"/>
+          </a:effectRef>
+          <a:fontRef idx="minor">
+            <a:schemeClr val="lt1"/>
+          </a:fontRef>
+        </p:style>
+        <p:txBody>
+          <a:bodyPr rtlCol="0" anchor="ctr"/>
+          <a:lstStyle/>
+          <a:p>
+            <a:pPr algn="ctr"/>
+          </a:p>
+        </p:txBody>
+      </p:sp>
+      <p:sp>
+        <p:nvSpPr>
+          <p:cNvPr id="13" name="Oval 12"/>
+          <p:cNvSpPr/>
+          <p:nvPr/>
+        </p:nvSpPr>
+        <p:spPr>
+          <a:xfrm>
+            <a:off x="6501384" y="1755648"/>
+            <a:ext cx="475488" cy="475488"/>
+          </a:xfrm>
+          <a:prstGeom prst="ellipse">
+            <a:avLst/>
+          </a:prstGeom>
+          <a:solidFill>
+            <a:srgbClr val="D99A06"/>
+          </a:solidFill>
+          <a:ln>
+            <a:noFill/>
+          </a:ln>
+        </p:spPr>
+        <p:style>
+          <a:lnRef idx="1">
+            <a:schemeClr val="accent1"/>
+          </a:lnRef>
+          <a:fillRef idx="3">
+            <a:schemeClr val="accent1"/>
+          </a:fillRef>
+          <a:effectRef idx="2">
+            <a:schemeClr val="accent1"/>
+          </a:effectRef>
+          <a:fontRef idx="minor">
+            <a:schemeClr val="lt1"/>
+          </a:fontRef>
+        </p:style>
+        <p:txBody>
+          <a:bodyPr rtlCol="0" anchor="ctr" wrap="square"/>
+          <a:lstStyle/>
+          <a:p>
+            <a:pPr algn="ctr"/>
+            <a:r>
+              <a:rPr sz="1700" b="1" i="0">
+                <a:solidFill>
+                  <a:srgbClr val="144E4C"/>
+                </a:solidFill>
+                <a:latin typeface="Calibri"/>
+              </a:rPr>
+              <a:t>→</a:t>
+            </a:r>
+          </a:p>
+        </p:txBody>
+      </p:sp>
+      <p:sp>
+        <p:nvSpPr>
+          <p:cNvPr id="14" name="TextBox 13"/>
+          <p:cNvSpPr txBox="1"/>
+          <p:nvPr/>
+        </p:nvSpPr>
+        <p:spPr>
+          <a:xfrm>
+            <a:off x="7114032" y="1719072"/>
+            <a:ext cx="4343400" cy="2514600"/>
+          </a:xfrm>
+          <a:prstGeom prst="rect">
+            <a:avLst/>
+          </a:prstGeom>
+          <a:noFill/>
+        </p:spPr>
+        <p:txBody>
+          <a:bodyPr wrap="square">
+            <a:normAutofit/>
+          </a:bodyPr>
+          <a:lstStyle/>
+          <a:p>
+            <a:pPr algn="l">
+              <a:spcAft>
+                <a:spcPts val="600"/>
+              </a:spcAft>
+            </a:pPr>
+            <a:r>
+              <a:rPr sz="1600" b="1" i="0">
+                <a:solidFill>
+                  <a:srgbClr val="144E4C"/>
+                </a:solidFill>
+                <a:latin typeface="Calibri"/>
+              </a:rPr>
+              <a:t>Future Work</a:t>
+            </a:r>
+          </a:p>
+          <a:p>
+            <a:pPr algn="l">
+              <a:spcBef>
+                <a:spcPts val="0"/>
+              </a:spcBef>
+              <a:spcAft>
+                <a:spcPts val="300"/>
+              </a:spcAft>
+            </a:pPr>
+            <a:r>
+              <a:rPr sz="1350" b="0" i="0">
+                <a:solidFill>
+                  <a:srgbClr val="5B6570"/>
+                </a:solidFill>
+                <a:latin typeface="Calibri"/>
+              </a:rPr>
+              <a:t>Relabel Quarantine Using A pHash Sweep.</a:t>
+            </a:r>
+          </a:p>
+          <a:p>
+            <a:pPr algn="l">
+              <a:spcBef>
+                <a:spcPts val="0"/>
+              </a:spcBef>
+              <a:spcAft>
+                <a:spcPts val="300"/>
+              </a:spcAft>
+            </a:pPr>
+            <a:r>
+              <a:rPr sz="1350" b="0" i="0">
+                <a:solidFill>
+                  <a:srgbClr val="5B6570"/>
+                </a:solidFill>
+                <a:latin typeface="Calibri"/>
+              </a:rPr>
+              <a:t>Gather Roll-ID-Disciplined V2 Factory Data.</a:t>
+            </a:r>
+          </a:p>
+          <a:p>
+            <a:pPr algn="l">
+              <a:spcBef>
+                <a:spcPts val="0"/>
+              </a:spcBef>
+              <a:spcAft>
+                <a:spcPts val="300"/>
+              </a:spcAft>
+            </a:pPr>
+            <a:r>
+              <a:rPr sz="1350" b="0" i="0">
+                <a:solidFill>
+                  <a:srgbClr val="5B6570"/>
+                </a:solidFill>
+                <a:latin typeface="Calibri"/>
+              </a:rPr>
+              <a:t>Build A Bangla Dashboard For Planners.</a:t>
+            </a:r>
+          </a:p>
+          <a:p>
+            <a:pPr algn="l">
+              <a:spcBef>
+                <a:spcPts val="0"/>
+              </a:spcBef>
+              <a:spcAft>
+                <a:spcPts val="300"/>
+              </a:spcAft>
+            </a:pPr>
+            <a:r>
+              <a:rPr sz="1350" b="0" i="0">
+                <a:solidFill>
+                  <a:srgbClr val="5B6570"/>
+                </a:solidFill>
+                <a:latin typeface="Calibri"/>
+              </a:rPr>
+              <a:t>Empirically Benchmark Detection Accuracy Against Isl-Knit And FabricSpotDefect.</a:t>
+            </a:r>
+          </a:p>
+          <a:p>
+            <a:pPr algn="l">
+              <a:spcBef>
+                <a:spcPts val="0"/>
+              </a:spcBef>
+              <a:spcAft>
+                <a:spcPts val="300"/>
+              </a:spcAft>
+            </a:pPr>
+            <a:r>
+              <a:rPr sz="1350" b="0" i="0">
+                <a:solidFill>
+                  <a:srgbClr val="5B6570"/>
+                </a:solidFill>
+                <a:latin typeface="Calibri"/>
+              </a:rPr>
+              <a:t>Submit Results To A Conference.</a:t>
+            </a:r>
+          </a:p>
+        </p:txBody>
+      </p:sp>
+      <p:sp>
+        <p:nvSpPr>
+          <p:cNvPr id="15" name="TextBox 14"/>
+          <p:cNvSpPr txBox="1"/>
+          <p:nvPr/>
+        </p:nvSpPr>
+        <p:spPr>
+          <a:xfrm>
+            <a:off x="548640" y="5029200"/>
+            <a:ext cx="11064240" cy="914400"/>
           </a:xfrm>
           <a:prstGeom prst="rect">
             <a:avLst/>
@@ -24100,27 +23781,166 @@
           <a:p>
             <a:pPr algn="ctr"/>
             <a:r>
-              <a:rPr sz="5400" b="1" i="0">
-                <a:solidFill>
-                  <a:srgbClr val="144E4C"/>
-                </a:solidFill>
-                <a:latin typeface="Georgia"/>
-              </a:rPr>
-              <a:t>Thank You</a:t>
-            </a:r>
-          </a:p>
-        </p:txBody>
-      </p:sp>
-      <p:sp>
-        <p:nvSpPr>
-          <p:cNvPr id="6" name="TextBox 5"/>
+              <a:rPr sz="1250" b="0" i="0">
+                <a:solidFill>
+                  <a:srgbClr val="5B6570"/>
+                </a:solidFill>
+                <a:latin typeface="Calibri"/>
+              </a:rPr>
+              <a:t>Limitations: Pilot Localization Is Estimated, Not Measured; Planning Labels Are Synthetic; 1,994 Files Lack Group IDs; Minority Classes Are Thin; Industrial Validation Is Pending.</a:t>
+            </a:r>
+          </a:p>
+        </p:txBody>
+      </p:sp>
+    </p:spTree>
+  </p:cSld>
+  <p:clrMapOvr>
+    <a:masterClrMapping/>
+  </p:clrMapOvr>
+</p:sld>
+</file>
+
+<file path=ppt/slides/slide31.xml><?xml version="1.0" encoding="utf-8"?>
+<p:sld xmlns:a="http://schemas.openxmlformats.org/drawingml/2006/main" xmlns:p="http://schemas.openxmlformats.org/presentationml/2006/main" xmlns:r="http://schemas.openxmlformats.org/officeDocument/2006/relationships">
+  <p:cSld>
+    <p:bg>
+      <p:bgPr>
+        <a:solidFill>
+          <a:srgbClr val="FAF7EF"/>
+        </a:solidFill>
+        <a:effectLst/>
+      </p:bgPr>
+    </p:bg>
+    <p:spTree>
+      <p:nvGrpSpPr>
+        <p:cNvPr id="1" name=""/>
+        <p:cNvGrpSpPr/>
+        <p:nvPr/>
+      </p:nvGrpSpPr>
+      <p:grpSpPr/>
+      <p:sp>
+        <p:nvSpPr>
+          <p:cNvPr id="2" name="TextBox 1"/>
           <p:cNvSpPr txBox="1"/>
           <p:nvPr/>
         </p:nvSpPr>
         <p:spPr>
           <a:xfrm>
-            <a:off x="548640" y="3291840"/>
-            <a:ext cx="11064240" cy="548640"/>
+            <a:off x="548640" y="6419088"/>
+            <a:ext cx="9144000" cy="274320"/>
+          </a:xfrm>
+          <a:prstGeom prst="rect">
+            <a:avLst/>
+          </a:prstGeom>
+          <a:noFill/>
+        </p:spPr>
+        <p:txBody>
+          <a:bodyPr wrap="square">
+            <a:spAutoFit/>
+          </a:bodyPr>
+          <a:lstStyle/>
+          <a:p>
+            <a:pPr algn="l"/>
+            <a:r>
+              <a:rPr sz="900" b="0" i="0">
+                <a:solidFill>
+                  <a:srgbClr val="8A8F98"/>
+                </a:solidFill>
+                <a:latin typeface="Calibri"/>
+              </a:rPr>
+              <a:t>Defect-to-Delivery  |  FYDP-I  •  Group: 262-034</a:t>
+            </a:r>
+          </a:p>
+        </p:txBody>
+      </p:sp>
+      <p:sp>
+        <p:nvSpPr>
+          <p:cNvPr id="3" name="TextBox 2"/>
+          <p:cNvSpPr txBox="1"/>
+          <p:nvPr/>
+        </p:nvSpPr>
+        <p:spPr>
+          <a:xfrm>
+            <a:off x="10972800" y="6419088"/>
+            <a:ext cx="640080" cy="274320"/>
+          </a:xfrm>
+          <a:prstGeom prst="rect">
+            <a:avLst/>
+          </a:prstGeom>
+          <a:noFill/>
+        </p:spPr>
+        <p:txBody>
+          <a:bodyPr wrap="none">
+            <a:spAutoFit/>
+          </a:bodyPr>
+          <a:lstStyle/>
+          <a:p>
+            <a:pPr algn="r"/>
+            <a:r>
+              <a:rPr sz="900">
+                <a:solidFill>
+                  <a:srgbClr val="8A8F98"/>
+                </a:solidFill>
+                <a:latin typeface="Calibri"/>
+              </a:rPr>
+              <a:t>31 / 31</a:t>
+            </a:r>
+          </a:p>
+        </p:txBody>
+      </p:sp>
+      <p:sp>
+        <p:nvSpPr>
+          <p:cNvPr id="4" name="Rectangle 3"/>
+          <p:cNvSpPr/>
+          <p:nvPr/>
+        </p:nvSpPr>
+        <p:spPr>
+          <a:xfrm>
+            <a:off x="0" y="0"/>
+            <a:ext cx="12188952" cy="64008"/>
+          </a:xfrm>
+          <a:prstGeom prst="rect">
+            <a:avLst/>
+          </a:prstGeom>
+          <a:solidFill>
+            <a:srgbClr val="D99A06"/>
+          </a:solidFill>
+          <a:ln>
+            <a:noFill/>
+          </a:ln>
+        </p:spPr>
+        <p:style>
+          <a:lnRef idx="1">
+            <a:schemeClr val="accent1"/>
+          </a:lnRef>
+          <a:fillRef idx="3">
+            <a:schemeClr val="accent1"/>
+          </a:fillRef>
+          <a:effectRef idx="2">
+            <a:schemeClr val="accent1"/>
+          </a:effectRef>
+          <a:fontRef idx="minor">
+            <a:schemeClr val="lt1"/>
+          </a:fontRef>
+        </p:style>
+        <p:txBody>
+          <a:bodyPr rtlCol="0" anchor="ctr"/>
+          <a:lstStyle/>
+          <a:p>
+            <a:pPr algn="ctr"/>
+          </a:p>
+        </p:txBody>
+      </p:sp>
+      <p:sp>
+        <p:nvSpPr>
+          <p:cNvPr id="5" name="TextBox 4"/>
+          <p:cNvSpPr txBox="1"/>
+          <p:nvPr/>
+        </p:nvSpPr>
+        <p:spPr>
+          <a:xfrm>
+            <a:off x="548640" y="2011680"/>
+            <a:ext cx="11064240" cy="1280160"/>
           </a:xfrm>
           <a:prstGeom prst="rect">
             <a:avLst/>
@@ -24135,27 +23955,27 @@
           <a:p>
             <a:pPr algn="ctr"/>
             <a:r>
-              <a:rPr sz="2000" b="0" i="0">
-                <a:solidFill>
-                  <a:srgbClr val="5B6570"/>
-                </a:solidFill>
-                <a:latin typeface="Calibri"/>
-              </a:rPr>
-              <a:t>Questions &amp; Discussion</a:t>
-            </a:r>
-          </a:p>
-        </p:txBody>
-      </p:sp>
-      <p:sp>
-        <p:nvSpPr>
-          <p:cNvPr id="7" name="TextBox 6"/>
+              <a:rPr sz="5400" b="1" i="0">
+                <a:solidFill>
+                  <a:srgbClr val="144E4C"/>
+                </a:solidFill>
+                <a:latin typeface="Georgia"/>
+              </a:rPr>
+              <a:t>Thank You</a:t>
+            </a:r>
+          </a:p>
+        </p:txBody>
+      </p:sp>
+      <p:sp>
+        <p:nvSpPr>
+          <p:cNvPr id="6" name="TextBox 5"/>
           <p:cNvSpPr txBox="1"/>
           <p:nvPr/>
         </p:nvSpPr>
         <p:spPr>
           <a:xfrm>
-            <a:off x="548640" y="6309360"/>
-            <a:ext cx="11064240" cy="365760"/>
+            <a:off x="548640" y="3291840"/>
+            <a:ext cx="11064240" cy="548640"/>
           </a:xfrm>
           <a:prstGeom prst="rect">
             <a:avLst/>
@@ -24170,13 +23990,13 @@
           <a:p>
             <a:pPr algn="ctr"/>
             <a:r>
-              <a:rPr sz="1000" b="0" i="0">
-                <a:solidFill>
-                  <a:srgbClr val="8A8F98"/>
+              <a:rPr sz="2000" b="0" i="0">
+                <a:solidFill>
+                  <a:srgbClr val="5B6570"/>
                 </a:solidFill>
                 <a:latin typeface="Calibri"/>
               </a:rPr>
-              <a:t>Defect-to-Delivery — Fabric Defect Detection &amp; Lead-Time Prediction  |  FYDP-I</a:t>
+              <a:t>Questions &amp; Discussion</a:t>
             </a:r>
           </a:p>
         </p:txBody>
@@ -24272,7 +24092,7 @@
                 </a:solidFill>
                 <a:latin typeface="Calibri"/>
               </a:rPr>
-              <a:t>4 / 30</a:t>
+              <a:t>4 / 31</a:t>
             </a:r>
           </a:p>
         </p:txBody>
@@ -24642,7 +24462,7 @@
                 </a:solidFill>
                 <a:latin typeface="Calibri"/>
               </a:rPr>
-              <a:t>5 / 30</a:t>
+              <a:t>5 / 31</a:t>
             </a:r>
           </a:p>
         </p:txBody>
@@ -24958,7 +24778,7 @@
                 </a:solidFill>
                 <a:latin typeface="Calibri"/>
               </a:rPr>
-              <a:t>6 / 30</a:t>
+              <a:t>6 / 31</a:t>
             </a:r>
           </a:p>
         </p:txBody>
@@ -25645,7 +25465,7 @@
                 </a:solidFill>
                 <a:latin typeface="Calibri"/>
               </a:rPr>
-              <a:t>7 / 30</a:t>
+              <a:t>7 / 31</a:t>
             </a:r>
           </a:p>
         </p:txBody>
@@ -27062,7 +26882,7 @@
                 </a:solidFill>
                 <a:latin typeface="Calibri"/>
               </a:rPr>
-              <a:t>8 / 30</a:t>
+              <a:t>8 / 31</a:t>
             </a:r>
           </a:p>
         </p:txBody>
@@ -27803,7 +27623,7 @@
                 </a:solidFill>
                 <a:latin typeface="Calibri"/>
               </a:rPr>
-              <a:t>9 / 30</a:t>
+              <a:t>9 / 31</a:t>
             </a:r>
           </a:p>
         </p:txBody>

--- a/slides/FYDP-I_Defect-to-Delivery.pptx
+++ b/slides/FYDP-I_Defect-to-Delivery.pptx
@@ -7955,7 +7955,7 @@
                 </a:solidFill>
                 <a:latin typeface="Calibri"/>
               </a:rPr>
-              <a:t>▪  Table 3.1 Coverage Grouped Into FR1–FR6 And NFR1–NFR6 (See Report §3.1); Grading Per §3.2.8.</a:t>
+              <a:t>▪  Table 3.1 Coverage Grouped Into FR1–FR6 And NFR1–NFR6 (See Report §3.1); Grading Per Report Fig. 3.6.</a:t>
             </a:r>
           </a:p>
         </p:txBody>
@@ -10179,7 +10179,7 @@
                 </a:solidFill>
                 <a:latin typeface="Georgia"/>
               </a:rPr>
-              <a:t>Proposed System Diagram (Fig. 3.2)</a:t>
+              <a:t>Proposed System Diagram (Fig. 3.1)</a:t>
             </a:r>
           </a:p>
         </p:txBody>
@@ -11115,7 +11115,7 @@
                 </a:solidFill>
                 <a:latin typeface="Georgia"/>
               </a:rPr>
-              <a:t>System Workflow (Fig. 3.5)</a:t>
+              <a:t>System Workflow (Fig. 3.2)</a:t>
             </a:r>
           </a:p>
         </p:txBody>
@@ -12754,7 +12754,7 @@
                 </a:solidFill>
                 <a:latin typeface="Calibri"/>
               </a:rPr>
-              <a:t>Problem, Motivation &amp; Objectives</a:t>
+              <a:t>Baseline Reproduction, YOLO Training &amp; Lead-Time Model</a:t>
             </a:r>
           </a:p>
         </p:txBody>
@@ -12973,7 +12973,7 @@
                 </a:solidFill>
                 <a:latin typeface="Calibri"/>
               </a:rPr>
-              <a:t>Literature &amp; Gap Analysis</a:t>
+              <a:t>Dataset Audit, Split &amp; Edge Deployment</a:t>
             </a:r>
           </a:p>
         </p:txBody>
@@ -13154,7 +13154,7 @@
                 </a:solidFill>
                 <a:latin typeface="Calibri"/>
               </a:rPr>
-              <a:t>MST Riya Akter Satu</a:t>
+              <a:t>Ms. Riya Akter Satu</a:t>
             </a:r>
           </a:p>
           <a:p>
@@ -13192,7 +13192,7 @@
                 </a:solidFill>
                 <a:latin typeface="Calibri"/>
               </a:rPr>
-              <a:t>Requirement Analysis &amp; Dataset Audit</a:t>
+              <a:t>Requirement Analysis, Preprocessing &amp; Report Writing</a:t>
             </a:r>
           </a:p>
         </p:txBody>
@@ -13411,7 +13411,7 @@
                 </a:solidFill>
                 <a:latin typeface="Calibri"/>
               </a:rPr>
-              <a:t>System Design &amp; Diagrams</a:t>
+              <a:t>Few-Shot Anomaly Detection (PatchCore / DINOv2)</a:t>
             </a:r>
           </a:p>
         </p:txBody>
@@ -13630,7 +13630,7 @@
                 </a:solidFill>
                 <a:latin typeface="Calibri"/>
               </a:rPr>
-              <a:t>Standards, Constraints, Budget &amp; Project Plan</a:t>
+              <a:t>Metadata Bridge, Defect Density Score &amp; Dashboard</a:t>
             </a:r>
           </a:p>
         </p:txBody>
@@ -13849,7 +13849,7 @@
                 </a:solidFill>
                 <a:latin typeface="Calibri"/>
               </a:rPr>
-              <a:t>Complex Engineering Problem, Task Allocation &amp; Conclusion</a:t>
+              <a:t>Testing &amp; Evaluation</a:t>
             </a:r>
           </a:p>
         </p:txBody>
@@ -14023,7 +14023,7 @@
                 </a:solidFill>
                 <a:latin typeface="Georgia"/>
               </a:rPr>
-              <a:t>Metadata Bridge (Fig. 3.6)</a:t>
+              <a:t>Metadata Bridge (Fig. 3.4)</a:t>
             </a:r>
           </a:p>
         </p:txBody>
@@ -15363,7 +15363,7 @@
                 </a:solidFill>
                 <a:latin typeface="Georgia"/>
               </a:rPr>
-              <a:t>Machine Learning Pipeline (Fig. 3.7)</a:t>
+              <a:t>Machine Learning Pipeline (Fig. 3.5)</a:t>
             </a:r>
           </a:p>
         </p:txBody>
@@ -16201,7 +16201,7 @@
                 </a:solidFill>
                 <a:latin typeface="Georgia"/>
               </a:rPr>
-              <a:t>Four-Point Inspection Grading (Fig. 3.8)</a:t>
+              <a:t>Four-Point Inspection Grading (Fig. 3.6)</a:t>
             </a:r>
           </a:p>
         </p:txBody>
@@ -19537,7 +19537,7 @@
                 </a:solidFill>
                 <a:latin typeface="Georgia"/>
               </a:rPr>
-              <a:t>Project Plan (Table 3.7; Gantt: Fig. 3.9)</a:t>
+              <a:t>Project Plan (Table 3.7; Gantt: Fig. 5.1)</a:t>
             </a:r>
           </a:p>
         </p:txBody>
@@ -19615,7 +19615,7 @@
                 </a:solidFill>
                 <a:latin typeface="Calibri"/>
               </a:rPr>
-              <a:t>Audit / Split (Done) → Reproduction → Segmentation → Anomaly → Planning → Edge → Write-Up, Over 32 Weeks. Full Gantt: Report Fig. 3.9.</a:t>
+              <a:t>Audit / Split (Done) → Reproduction → Segmentation → Anomaly → Planning → Edge → Write-Up, Over 32 Weeks. Full Gantt: Report Fig. 5.1.</a:t>
             </a:r>
           </a:p>
         </p:txBody>
@@ -22186,7 +22186,7 @@
                           </a:solidFill>
                           <a:latin typeface="Calibri"/>
                         </a:rPr>
-                        <a:t>MST Riya Akter Satu</a:t>
+                        <a:t>Ms. Riya Akter Satu</a:t>
                       </a:r>
                     </a:p>
                   </a:txBody>
@@ -22234,7 +22234,7 @@
                           </a:solidFill>
                           <a:latin typeface="Calibri"/>
                         </a:rPr>
-                        <a:t>Mohammed Amin</a:t>
+                        <a:t>Mohammad Amin</a:t>
                       </a:r>
                     </a:p>
                   </a:txBody>
@@ -22330,7 +22330,7 @@
                           </a:solidFill>
                           <a:latin typeface="Calibri"/>
                         </a:rPr>
-                        <a:t>Md. Mostafizur Rahman Murad</a:t>
+                        <a:t>Mustafizur Rahman Murad</a:t>
                       </a:r>
                     </a:p>
                   </a:txBody>

--- a/slides/FYDP-I_Defect-to-Delivery.pptx
+++ b/slides/FYDP-I_Defect-to-Delivery.pptx
@@ -15992,7 +15992,7 @@
                 </a:solidFill>
                 <a:latin typeface="Calibri"/>
               </a:rPr>
-              <a:t>Lead = (Qty / Speed) × 0.1 × (1 + 2 × Ds)</a:t>
+              <a:t>Lead = f(Speed, Quantity, Ds)  [Random Forest]</a:t>
             </a:r>
           </a:p>
         </p:txBody>
@@ -16027,7 +16027,7 @@
                 </a:solidFill>
                 <a:latin typeface="Calibri"/>
               </a:rPr>
-              <a:t>Example: Ds = 0.2 Inflates Predicted Time By 40%. Features: Speed 20–100 m/min, Quantity 100–10,000, Ds 0–0.5, 100-Tree Random Forest, Evaluated Vs Static-Mean And No-Ds Baselines.</a:t>
+              <a:t>Ds Raises Predicted Lead Time; Evaluated Vs Static-Mean And No-Ds Baselines. Features: Speed 20–100 m/min, Quantity 100–10,000, Ds 0–0.5, 100-Tree Random Forest.</a:t>
             </a:r>
           </a:p>
         </p:txBody>
@@ -27932,7 +27932,7 @@
                 </a:solidFill>
                 <a:latin typeface="Calibri"/>
               </a:rPr>
-              <a:t>PatchCore (99.6% MVTec AUROC), Reverse Distillation (Low Latency), AnomalyDINO / PatchEAD Reach 89–96% With A Handful Of Good Samples And No Defect Labels.</a:t>
+              <a:t>PatchCore (Patch Memory Bank, Strong MVTec Performance), Reverse Distillation (Fast Inference), AnomalyDINO / PatchEAD Detect Defects With A Handful Of Good Samples And No Defect Labels.</a:t>
             </a:r>
           </a:p>
         </p:txBody>

--- a/slides/FYDP-I_Defect-to-Delivery.pptx
+++ b/slides/FYDP-I_Defect-to-Delivery.pptx
@@ -7955,7 +7955,7 @@
                 </a:solidFill>
                 <a:latin typeface="Calibri"/>
               </a:rPr>
-              <a:t>▪  Table 3.1 Coverage Grouped Into FR1–FR6 And NFR1–NFR6 (See Report §3.1); Grading Per Report Fig. 3.6.</a:t>
+              <a:t>▪  Table 3.1 Coverage Grouped Into FR1–FR6 And NFR1–NFR6 (See Report §3.1); Grading Per §3.2.8.</a:t>
             </a:r>
           </a:p>
         </p:txBody>
@@ -10179,7 +10179,7 @@
                 </a:solidFill>
                 <a:latin typeface="Georgia"/>
               </a:rPr>
-              <a:t>Proposed System Diagram (Fig. 3.1)</a:t>
+              <a:t>Proposed System Diagram (Fig. 3.2)</a:t>
             </a:r>
           </a:p>
         </p:txBody>
@@ -11115,7 +11115,7 @@
                 </a:solidFill>
                 <a:latin typeface="Georgia"/>
               </a:rPr>
-              <a:t>System Workflow (Fig. 3.2)</a:t>
+              <a:t>System Workflow (Fig. 3.5)</a:t>
             </a:r>
           </a:p>
         </p:txBody>
@@ -14023,7 +14023,7 @@
                 </a:solidFill>
                 <a:latin typeface="Georgia"/>
               </a:rPr>
-              <a:t>Metadata Bridge (Fig. 3.4)</a:t>
+              <a:t>Metadata Bridge (Fig. 3.6)</a:t>
             </a:r>
           </a:p>
         </p:txBody>
@@ -15363,7 +15363,7 @@
                 </a:solidFill>
                 <a:latin typeface="Georgia"/>
               </a:rPr>
-              <a:t>Machine Learning Pipeline (Fig. 3.5)</a:t>
+              <a:t>Machine Learning Pipeline (Fig. 3.7)</a:t>
             </a:r>
           </a:p>
         </p:txBody>
@@ -15992,7 +15992,7 @@
                 </a:solidFill>
                 <a:latin typeface="Calibri"/>
               </a:rPr>
-              <a:t>Lead = f(Speed, Quantity, Ds)  [Random Forest]</a:t>
+              <a:t>Lead = (Qty / Speed) × 0.1 × (1 + 2 × Ds)</a:t>
             </a:r>
           </a:p>
         </p:txBody>
@@ -16027,7 +16027,7 @@
                 </a:solidFill>
                 <a:latin typeface="Calibri"/>
               </a:rPr>
-              <a:t>Ds Raises Predicted Lead Time; Evaluated Vs Static-Mean And No-Ds Baselines. Features: Speed 20–100 m/min, Quantity 100–10,000, Ds 0–0.5, 100-Tree Random Forest.</a:t>
+              <a:t>Example: Ds = 0.2 Inflates Predicted Time By 40%. Features: Speed 20–100 m/min, Quantity 100–10,000, Ds 0–0.5, 100-Tree Random Forest, Evaluated Vs Static-Mean And No-Ds Baselines.</a:t>
             </a:r>
           </a:p>
         </p:txBody>
@@ -16201,7 +16201,7 @@
                 </a:solidFill>
                 <a:latin typeface="Georgia"/>
               </a:rPr>
-              <a:t>Four-Point Inspection Grading (Fig. 3.6)</a:t>
+              <a:t>Four-Point Inspection Grading (Fig. 3.8)</a:t>
             </a:r>
           </a:p>
         </p:txBody>
@@ -19537,7 +19537,7 @@
                 </a:solidFill>
                 <a:latin typeface="Georgia"/>
               </a:rPr>
-              <a:t>Project Plan (Table 3.7; Gantt: Fig. 5.1)</a:t>
+              <a:t>Project Plan (Table 3.7; Gantt: Fig. 3.9)</a:t>
             </a:r>
           </a:p>
         </p:txBody>
@@ -19615,7 +19615,7 @@
                 </a:solidFill>
                 <a:latin typeface="Calibri"/>
               </a:rPr>
-              <a:t>Audit / Split (Done) → Reproduction → Segmentation → Anomaly → Planning → Edge → Write-Up, Over 32 Weeks. Full Gantt: Report Fig. 5.1.</a:t>
+              <a:t>Audit / Split (Done) → Reproduction → Segmentation → Anomaly → Planning → Edge → Write-Up, Over 32 Weeks. Full Gantt: Report Fig. 3.9.</a:t>
             </a:r>
           </a:p>
         </p:txBody>
